--- a/scientificProject1/report/presentation.pptx
+++ b/scientificProject1/report/presentation.pptx
@@ -15,6 +15,7 @@
     <p:sldId id="263" r:id="rId14"/>
     <p:sldId id="264" r:id="rId15"/>
     <p:sldId id="265" r:id="rId16"/>
+    <p:sldId id="266" r:id="rId17"/>
   </p:sldIdLst>
   <p:sldSz cx="12188952" cy="6858000" type="screen4x3"/>
   <p:notesSz cx="6858000" cy="9144000"/>
@@ -3156,7 +3157,7 @@
         </p:nvSpPr>
         <p:spPr>
           <a:xfrm>
-            <a:off x="0" y="2560320"/>
+            <a:off x="0" y="2514600"/>
             <a:ext cx="12188952" cy="54864"/>
           </a:xfrm>
           <a:prstGeom prst="rect">
@@ -3199,16 +3200,16 @@
         </p:nvSpPr>
         <p:spPr>
           <a:xfrm>
-            <a:off x="731520" y="640080"/>
-            <a:ext cx="10698480" cy="1280160"/>
-          </a:xfrm>
-          <a:prstGeom prst="rect">
-            <a:avLst/>
-          </a:prstGeom>
-          <a:noFill/>
-        </p:spPr>
-        <p:txBody>
-          <a:bodyPr wrap="square">
+            <a:off x="731520" y="594360"/>
+            <a:ext cx="10698480" cy="1188720"/>
+          </a:xfrm>
+          <a:prstGeom prst="rect">
+            <a:avLst/>
+          </a:prstGeom>
+          <a:noFill/>
+        </p:spPr>
+        <p:txBody>
+          <a:bodyPr wrap="none">
             <a:spAutoFit/>
           </a:bodyPr>
           <a:lstStyle/>
@@ -3233,16 +3234,16 @@
         </p:nvSpPr>
         <p:spPr>
           <a:xfrm>
-            <a:off x="731520" y="1920240"/>
-            <a:ext cx="10698480" cy="731520"/>
-          </a:xfrm>
-          <a:prstGeom prst="rect">
-            <a:avLst/>
-          </a:prstGeom>
-          <a:noFill/>
-        </p:spPr>
-        <p:txBody>
-          <a:bodyPr wrap="square">
+            <a:off x="731520" y="1874519"/>
+            <a:ext cx="10698480" cy="685800"/>
+          </a:xfrm>
+          <a:prstGeom prst="rect">
+            <a:avLst/>
+          </a:prstGeom>
+          <a:noFill/>
+        </p:spPr>
+        <p:txBody>
+          <a:bodyPr wrap="none">
             <a:spAutoFit/>
           </a:bodyPr>
           <a:lstStyle/>
@@ -3267,16 +3268,16 @@
         </p:nvSpPr>
         <p:spPr>
           <a:xfrm>
-            <a:off x="731520" y="2834640"/>
-            <a:ext cx="10698480" cy="640080"/>
-          </a:xfrm>
-          <a:prstGeom prst="rect">
-            <a:avLst/>
-          </a:prstGeom>
-          <a:noFill/>
-        </p:spPr>
-        <p:txBody>
-          <a:bodyPr wrap="square">
+            <a:off x="731520" y="2743200"/>
+            <a:ext cx="10698480" cy="594360"/>
+          </a:xfrm>
+          <a:prstGeom prst="rect">
+            <a:avLst/>
+          </a:prstGeom>
+          <a:noFill/>
+        </p:spPr>
+        <p:txBody>
+          <a:bodyPr wrap="none">
             <a:spAutoFit/>
           </a:bodyPr>
           <a:lstStyle/>
@@ -3302,15 +3303,15 @@
         <p:spPr>
           <a:xfrm>
             <a:off x="731520" y="5943600"/>
-            <a:ext cx="10698480" cy="640080"/>
-          </a:xfrm>
-          <a:prstGeom prst="rect">
-            <a:avLst/>
-          </a:prstGeom>
-          <a:noFill/>
-        </p:spPr>
-        <p:txBody>
-          <a:bodyPr wrap="square">
+            <a:ext cx="10698480" cy="594360"/>
+          </a:xfrm>
+          <a:prstGeom prst="rect">
+            <a:avLst/>
+          </a:prstGeom>
+          <a:noFill/>
+        </p:spPr>
+        <p:txBody>
+          <a:bodyPr wrap="none">
             <a:spAutoFit/>
           </a:bodyPr>
           <a:lstStyle/>
@@ -3322,7 +3323,7 @@
                   <a:srgbClr val="CCCCCC"/>
                 </a:solidFill>
               </a:rPr>
-              <a:t>Ognjen  ·  Yuzhen          PSL M1 — March 2026</a:t>
+              <a:t>Ognjen  ·  Yuzhen                    PSL M1 — March 2026</a:t>
             </a:r>
           </a:p>
         </p:txBody>
@@ -3362,7 +3363,7 @@
         <p:spPr>
           <a:xfrm>
             <a:off x="0" y="0"/>
-            <a:ext cx="12188952" cy="1051560"/>
+            <a:ext cx="12188952" cy="960120"/>
           </a:xfrm>
           <a:prstGeom prst="rect">
             <a:avLst/>
@@ -3404,28 +3405,28 @@
         </p:nvSpPr>
         <p:spPr>
           <a:xfrm>
-            <a:off x="320040" y="164592"/>
-            <a:ext cx="11430000" cy="777240"/>
-          </a:xfrm>
-          <a:prstGeom prst="rect">
-            <a:avLst/>
-          </a:prstGeom>
-          <a:noFill/>
-        </p:spPr>
-        <p:txBody>
-          <a:bodyPr wrap="square">
+            <a:off x="274320" y="109728"/>
+            <a:ext cx="11612880" cy="777240"/>
+          </a:xfrm>
+          <a:prstGeom prst="rect">
+            <a:avLst/>
+          </a:prstGeom>
+          <a:noFill/>
+        </p:spPr>
+        <p:txBody>
+          <a:bodyPr wrap="none">
             <a:spAutoFit/>
           </a:bodyPr>
           <a:lstStyle/>
           <a:p>
             <a:pPr algn="l"/>
             <a:r>
-              <a:rPr sz="3000" b="1" i="0">
+              <a:rPr sz="2800" b="1" i="0">
                 <a:solidFill>
                   <a:srgbClr val="FFFFFF"/>
                 </a:solidFill>
               </a:rPr>
-              <a:t>Conclusion</a:t>
+              <a:t>Validation — K-Means vs Hierarchical Clustering</a:t>
             </a:r>
           </a:p>
         </p:txBody>
@@ -3438,8 +3439,246 @@
         </p:nvSpPr>
         <p:spPr>
           <a:xfrm>
-            <a:off x="320040" y="1234440"/>
-            <a:ext cx="64008" cy="5029200"/>
+            <a:off x="182880" y="1005840"/>
+            <a:ext cx="11795760" cy="4297680"/>
+          </a:xfrm>
+          <a:prstGeom prst="rect">
+            <a:avLst/>
+          </a:prstGeom>
+          <a:solidFill>
+            <a:srgbClr val="16213E"/>
+          </a:solidFill>
+          <a:ln>
+            <a:noFill/>
+          </a:ln>
+        </p:spPr>
+        <p:style>
+          <a:lnRef idx="1">
+            <a:schemeClr val="accent1"/>
+          </a:lnRef>
+          <a:fillRef idx="3">
+            <a:schemeClr val="accent1"/>
+          </a:fillRef>
+          <a:effectRef idx="2">
+            <a:schemeClr val="accent1"/>
+          </a:effectRef>
+          <a:fontRef idx="minor">
+            <a:schemeClr val="lt1"/>
+          </a:fontRef>
+        </p:style>
+        <p:txBody>
+          <a:bodyPr rtlCol="0" anchor="ctr"/>
+          <a:lstStyle/>
+          <a:p>
+            <a:pPr algn="ctr"/>
+          </a:p>
+        </p:txBody>
+      </p:sp>
+      <p:sp>
+        <p:nvSpPr>
+          <p:cNvPr id="5" name="TextBox 4"/>
+          <p:cNvSpPr txBox="1"/>
+          <p:nvPr/>
+        </p:nvSpPr>
+        <p:spPr>
+          <a:xfrm>
+            <a:off x="365760" y="1051560"/>
+            <a:ext cx="11430000" cy="411480"/>
+          </a:xfrm>
+          <a:prstGeom prst="rect">
+            <a:avLst/>
+          </a:prstGeom>
+          <a:noFill/>
+        </p:spPr>
+        <p:txBody>
+          <a:bodyPr wrap="none">
+            <a:spAutoFit/>
+          </a:bodyPr>
+          <a:lstStyle/>
+          <a:p>
+            <a:pPr algn="ctr"/>
+            <a:r>
+              <a:rPr sz="1400" b="1" i="0">
+                <a:solidFill>
+                  <a:srgbClr val="FFFFFF"/>
+                </a:solidFill>
+              </a:rPr>
+              <a:t>Same 3 groups found by both methods → structure is real, not an artefact</a:t>
+            </a:r>
+          </a:p>
+        </p:txBody>
+      </p:sp>
+      <p:pic>
+        <p:nvPicPr>
+          <p:cNvPr id="6" name="Picture 5" descr="kmeans_vs_hc.png"/>
+          <p:cNvPicPr>
+            <a:picLocks noChangeAspect="1"/>
+          </p:cNvPicPr>
+          <p:nvPr/>
+        </p:nvPicPr>
+        <p:blipFill>
+          <a:blip r:embed="rId2"/>
+          <a:stretch>
+            <a:fillRect/>
+          </a:stretch>
+        </p:blipFill>
+        <p:spPr>
+          <a:xfrm>
+            <a:off x="274320" y="1463040"/>
+            <a:ext cx="11612880" cy="4949478"/>
+          </a:xfrm>
+          <a:prstGeom prst="rect">
+            <a:avLst/>
+          </a:prstGeom>
+        </p:spPr>
+      </p:pic>
+      <p:sp>
+        <p:nvSpPr>
+          <p:cNvPr id="7" name="Rectangle 6"/>
+          <p:cNvSpPr/>
+          <p:nvPr/>
+        </p:nvSpPr>
+        <p:spPr>
+          <a:xfrm>
+            <a:off x="182880" y="5367528"/>
+            <a:ext cx="11795760" cy="1216152"/>
+          </a:xfrm>
+          <a:prstGeom prst="rect">
+            <a:avLst/>
+          </a:prstGeom>
+          <a:solidFill>
+            <a:srgbClr val="16213E"/>
+          </a:solidFill>
+          <a:ln>
+            <a:noFill/>
+          </a:ln>
+        </p:spPr>
+        <p:style>
+          <a:lnRef idx="1">
+            <a:schemeClr val="accent1"/>
+          </a:lnRef>
+          <a:fillRef idx="3">
+            <a:schemeClr val="accent1"/>
+          </a:fillRef>
+          <a:effectRef idx="2">
+            <a:schemeClr val="accent1"/>
+          </a:effectRef>
+          <a:fontRef idx="minor">
+            <a:schemeClr val="lt1"/>
+          </a:fontRef>
+        </p:style>
+        <p:txBody>
+          <a:bodyPr rtlCol="0" anchor="ctr"/>
+          <a:lstStyle/>
+          <a:p>
+            <a:pPr algn="ctr"/>
+          </a:p>
+        </p:txBody>
+      </p:sp>
+      <p:sp>
+        <p:nvSpPr>
+          <p:cNvPr id="8" name="TextBox 7"/>
+          <p:cNvSpPr txBox="1"/>
+          <p:nvPr/>
+        </p:nvSpPr>
+        <p:spPr>
+          <a:xfrm>
+            <a:off x="365760" y="5413248"/>
+            <a:ext cx="11430000" cy="457200"/>
+          </a:xfrm>
+          <a:prstGeom prst="rect">
+            <a:avLst/>
+          </a:prstGeom>
+          <a:noFill/>
+        </p:spPr>
+        <p:txBody>
+          <a:bodyPr wrap="none">
+            <a:spAutoFit/>
+          </a:bodyPr>
+          <a:lstStyle/>
+          <a:p>
+            <a:pPr algn="l"/>
+            <a:r>
+              <a:rPr sz="1700" b="0" i="0">
+                <a:solidFill>
+                  <a:srgbClr val="FFFFFF"/>
+                </a:solidFill>
+              </a:rPr>
+              <a:t>K-Means (left): run on full 100k rows — provides explicit centroids for profiling</a:t>
+            </a:r>
+          </a:p>
+        </p:txBody>
+      </p:sp>
+      <p:sp>
+        <p:nvSpPr>
+          <p:cNvPr id="9" name="TextBox 8"/>
+          <p:cNvSpPr txBox="1"/>
+          <p:nvPr/>
+        </p:nvSpPr>
+        <p:spPr>
+          <a:xfrm>
+            <a:off x="365760" y="5888736"/>
+            <a:ext cx="11430000" cy="457200"/>
+          </a:xfrm>
+          <a:prstGeom prst="rect">
+            <a:avLst/>
+          </a:prstGeom>
+          <a:noFill/>
+        </p:spPr>
+        <p:txBody>
+          <a:bodyPr wrap="none">
+            <a:spAutoFit/>
+          </a:bodyPr>
+          <a:lstStyle/>
+          <a:p>
+            <a:pPr algn="l"/>
+            <a:r>
+              <a:rPr sz="1500" b="0" i="1">
+                <a:solidFill>
+                  <a:srgbClr val="CCCCCC"/>
+                </a:solidFill>
+              </a:rPr>
+              <a:t>    · Hierarchical / Ward (right): run on 5k subsample — independent validation only</a:t>
+            </a:r>
+          </a:p>
+        </p:txBody>
+      </p:sp>
+    </p:spTree>
+  </p:cSld>
+  <p:clrMapOvr>
+    <a:masterClrMapping/>
+  </p:clrMapOvr>
+</p:sld>
+</file>
+
+<file path=ppt/slides/slide11.xml><?xml version="1.0" encoding="utf-8"?>
+<p:sld xmlns:a="http://schemas.openxmlformats.org/drawingml/2006/main" xmlns:p="http://schemas.openxmlformats.org/presentationml/2006/main" xmlns:r="http://schemas.openxmlformats.org/officeDocument/2006/relationships">
+  <p:cSld>
+    <p:bg>
+      <p:bgPr>
+        <a:solidFill>
+          <a:srgbClr val="1A1A2E"/>
+        </a:solidFill>
+        <a:effectLst/>
+      </p:bgPr>
+    </p:bg>
+    <p:spTree>
+      <p:nvGrpSpPr>
+        <p:cNvPr id="1" name=""/>
+        <p:cNvGrpSpPr/>
+        <p:nvPr/>
+      </p:nvGrpSpPr>
+      <p:grpSpPr/>
+      <p:sp>
+        <p:nvSpPr>
+          <p:cNvPr id="2" name="Rectangle 1"/>
+          <p:cNvSpPr/>
+          <p:nvPr/>
+        </p:nvSpPr>
+        <p:spPr>
+          <a:xfrm>
+            <a:off x="0" y="0"/>
+            <a:ext cx="12188952" cy="960120"/>
           </a:xfrm>
           <a:prstGeom prst="rect">
             <a:avLst/>
@@ -3475,34 +3714,111 @@
       </p:sp>
       <p:sp>
         <p:nvSpPr>
+          <p:cNvPr id="3" name="TextBox 2"/>
+          <p:cNvSpPr txBox="1"/>
+          <p:nvPr/>
+        </p:nvSpPr>
+        <p:spPr>
+          <a:xfrm>
+            <a:off x="274320" y="109728"/>
+            <a:ext cx="11612880" cy="777240"/>
+          </a:xfrm>
+          <a:prstGeom prst="rect">
+            <a:avLst/>
+          </a:prstGeom>
+          <a:noFill/>
+        </p:spPr>
+        <p:txBody>
+          <a:bodyPr wrap="none">
+            <a:spAutoFit/>
+          </a:bodyPr>
+          <a:lstStyle/>
+          <a:p>
+            <a:pPr algn="l"/>
+            <a:r>
+              <a:rPr sz="2800" b="1" i="0">
+                <a:solidFill>
+                  <a:srgbClr val="FFFFFF"/>
+                </a:solidFill>
+              </a:rPr>
+              <a:t>Conclusion</a:t>
+            </a:r>
+          </a:p>
+        </p:txBody>
+      </p:sp>
+      <p:sp>
+        <p:nvSpPr>
+          <p:cNvPr id="4" name="Rectangle 3"/>
+          <p:cNvSpPr/>
+          <p:nvPr/>
+        </p:nvSpPr>
+        <p:spPr>
+          <a:xfrm>
+            <a:off x="274320" y="1097280"/>
+            <a:ext cx="54864" cy="5394960"/>
+          </a:xfrm>
+          <a:prstGeom prst="rect">
+            <a:avLst/>
+          </a:prstGeom>
+          <a:solidFill>
+            <a:srgbClr val="2ECC71"/>
+          </a:solidFill>
+          <a:ln>
+            <a:noFill/>
+          </a:ln>
+        </p:spPr>
+        <p:style>
+          <a:lnRef idx="1">
+            <a:schemeClr val="accent1"/>
+          </a:lnRef>
+          <a:fillRef idx="3">
+            <a:schemeClr val="accent1"/>
+          </a:fillRef>
+          <a:effectRef idx="2">
+            <a:schemeClr val="accent1"/>
+          </a:effectRef>
+          <a:fontRef idx="minor">
+            <a:schemeClr val="lt1"/>
+          </a:fontRef>
+        </p:style>
+        <p:txBody>
+          <a:bodyPr rtlCol="0" anchor="ctr"/>
+          <a:lstStyle/>
+          <a:p>
+            <a:pPr algn="ctr"/>
+          </a:p>
+        </p:txBody>
+      </p:sp>
+      <p:sp>
+        <p:nvSpPr>
           <p:cNvPr id="5" name="TextBox 4"/>
           <p:cNvSpPr txBox="1"/>
           <p:nvPr/>
         </p:nvSpPr>
         <p:spPr>
           <a:xfrm>
-            <a:off x="548640" y="1234440"/>
-            <a:ext cx="10972800" cy="566928"/>
-          </a:xfrm>
-          <a:prstGeom prst="rect">
-            <a:avLst/>
-          </a:prstGeom>
-          <a:noFill/>
-        </p:spPr>
-        <p:txBody>
-          <a:bodyPr wrap="square">
+            <a:off x="411480" y="1097280"/>
+            <a:ext cx="5486400" cy="457200"/>
+          </a:xfrm>
+          <a:prstGeom prst="rect">
+            <a:avLst/>
+          </a:prstGeom>
+          <a:noFill/>
+        </p:spPr>
+        <p:txBody>
+          <a:bodyPr wrap="none">
             <a:spAutoFit/>
           </a:bodyPr>
           <a:lstStyle/>
           <a:p>
             <a:pPr algn="l"/>
             <a:r>
-              <a:rPr sz="2000" b="0" i="0">
+              <a:rPr sz="1700" b="0" i="0">
                 <a:solidFill>
                   <a:srgbClr val="FFFFFF"/>
                 </a:solidFill>
               </a:rPr>
-              <a:t>✅  Supervised:  Logistic Regression best model  —  Test accuracy 72%</a:t>
+              <a:t>✅  Supervised:  Logistic Regression — Test accuracy 72%</a:t>
             </a:r>
           </a:p>
         </p:txBody>
@@ -3515,266 +3831,494 @@
         </p:nvSpPr>
         <p:spPr>
           <a:xfrm>
-            <a:off x="548640" y="1801368"/>
-            <a:ext cx="10972800" cy="502920"/>
-          </a:xfrm>
-          <a:prstGeom prst="rect">
-            <a:avLst/>
-          </a:prstGeom>
-          <a:noFill/>
-        </p:spPr>
-        <p:txBody>
-          <a:bodyPr wrap="square">
+            <a:off x="411480" y="1572768"/>
+            <a:ext cx="5486400" cy="457200"/>
+          </a:xfrm>
+          <a:prstGeom prst="rect">
+            <a:avLst/>
+          </a:prstGeom>
+          <a:noFill/>
+        </p:spPr>
+        <p:txBody>
+          <a:bodyPr wrap="none">
             <a:spAutoFit/>
           </a:bodyPr>
           <a:lstStyle/>
           <a:p>
             <a:pPr algn="l"/>
             <a:r>
+              <a:rPr sz="1500" b="0" i="1">
+                <a:solidFill>
+                  <a:srgbClr val="CCCCCC"/>
+                </a:solidFill>
+              </a:rPr>
+              <a:t>    · Binary (no IPO): macro F1 0.737  ·  AUC 0.816</a:t>
+            </a:r>
+          </a:p>
+        </p:txBody>
+      </p:sp>
+      <p:sp>
+        <p:nvSpPr>
+          <p:cNvPr id="7" name="TextBox 6"/>
+          <p:cNvSpPr txBox="1"/>
+          <p:nvPr/>
+        </p:nvSpPr>
+        <p:spPr>
+          <a:xfrm>
+            <a:off x="411480" y="2157984"/>
+            <a:ext cx="5486400" cy="457200"/>
+          </a:xfrm>
+          <a:prstGeom prst="rect">
+            <a:avLst/>
+          </a:prstGeom>
+          <a:noFill/>
+        </p:spPr>
+        <p:txBody>
+          <a:bodyPr wrap="none">
+            <a:spAutoFit/>
+          </a:bodyPr>
+          <a:lstStyle/>
+          <a:p>
+            <a:pPr algn="l"/>
+            <a:r>
+              <a:rPr sz="1700" b="0" i="0">
+                <a:solidFill>
+                  <a:srgbClr val="FFFFFF"/>
+                </a:solidFill>
+              </a:rPr>
+              <a:t>✅  Unsupervised:  3 coherent archetypes</a:t>
+            </a:r>
+          </a:p>
+        </p:txBody>
+      </p:sp>
+      <p:sp>
+        <p:nvSpPr>
+          <p:cNvPr id="8" name="TextBox 7"/>
+          <p:cNvSpPr txBox="1"/>
+          <p:nvPr/>
+        </p:nvSpPr>
+        <p:spPr>
+          <a:xfrm>
+            <a:off x="411480" y="2633472"/>
+            <a:ext cx="5486400" cy="457200"/>
+          </a:xfrm>
+          <a:prstGeom prst="rect">
+            <a:avLst/>
+          </a:prstGeom>
+          <a:noFill/>
+        </p:spPr>
+        <p:txBody>
+          <a:bodyPr wrap="none">
+            <a:spAutoFit/>
+          </a:bodyPr>
+          <a:lstStyle/>
+          <a:p>
+            <a:pPr algn="l"/>
+            <a:r>
+              <a:rPr sz="1500" b="0" i="1">
+                <a:solidFill>
+                  <a:srgbClr val="CCCCCC"/>
+                </a:solidFill>
+              </a:rPr>
+              <a:t>    · Confirmed by both K-Means and Ward clustering</a:t>
+            </a:r>
+          </a:p>
+        </p:txBody>
+      </p:sp>
+      <p:sp>
+        <p:nvSpPr>
+          <p:cNvPr id="9" name="TextBox 8"/>
+          <p:cNvSpPr txBox="1"/>
+          <p:nvPr/>
+        </p:nvSpPr>
+        <p:spPr>
+          <a:xfrm>
+            <a:off x="411480" y="3218688"/>
+            <a:ext cx="5486400" cy="457200"/>
+          </a:xfrm>
+          <a:prstGeom prst="rect">
+            <a:avLst/>
+          </a:prstGeom>
+          <a:noFill/>
+        </p:spPr>
+        <p:txBody>
+          <a:bodyPr wrap="none">
+            <a:spAutoFit/>
+          </a:bodyPr>
+          <a:lstStyle/>
+          <a:p>
+            <a:pPr algn="l"/>
+            <a:r>
+              <a:rPr sz="1700" b="0" i="0">
+                <a:solidFill>
+                  <a:srgbClr val="FFFFFF"/>
+                </a:solidFill>
+              </a:rPr>
+              <a:t>⚠️  Fundamental limit: dataset is synthetic</a:t>
+            </a:r>
+          </a:p>
+        </p:txBody>
+      </p:sp>
+      <p:sp>
+        <p:nvSpPr>
+          <p:cNvPr id="10" name="TextBox 9"/>
+          <p:cNvSpPr txBox="1"/>
+          <p:nvPr/>
+        </p:nvSpPr>
+        <p:spPr>
+          <a:xfrm>
+            <a:off x="411480" y="3694176"/>
+            <a:ext cx="5486400" cy="457200"/>
+          </a:xfrm>
+          <a:prstGeom prst="rect">
+            <a:avLst/>
+          </a:prstGeom>
+          <a:noFill/>
+        </p:spPr>
+        <p:txBody>
+          <a:bodyPr wrap="none">
+            <a:spAutoFit/>
+          </a:bodyPr>
+          <a:lstStyle/>
+          <a:p>
+            <a:pPr algn="l"/>
+            <a:r>
+              <a:rPr sz="1500" b="0" i="1">
+                <a:solidFill>
+                  <a:srgbClr val="CCCCCC"/>
+                </a:solidFill>
+              </a:rPr>
+              <a:t>    · 5 / 7 features are near-random noise</a:t>
+            </a:r>
+          </a:p>
+        </p:txBody>
+      </p:sp>
+      <p:sp>
+        <p:nvSpPr>
+          <p:cNvPr id="11" name="TextBox 10"/>
+          <p:cNvSpPr txBox="1"/>
+          <p:nvPr/>
+        </p:nvSpPr>
+        <p:spPr>
+          <a:xfrm>
+            <a:off x="411480" y="4096512"/>
+            <a:ext cx="5486400" cy="457200"/>
+          </a:xfrm>
+          <a:prstGeom prst="rect">
+            <a:avLst/>
+          </a:prstGeom>
+          <a:noFill/>
+        </p:spPr>
+        <p:txBody>
+          <a:bodyPr wrap="none">
+            <a:spAutoFit/>
+          </a:bodyPr>
+          <a:lstStyle/>
+          <a:p>
+            <a:pPr algn="l"/>
+            <a:r>
+              <a:rPr sz="1500" b="0" i="1">
+                <a:solidFill>
+                  <a:srgbClr val="CCCCCC"/>
+                </a:solidFill>
+              </a:rPr>
+              <a:t>    · Only revenue &amp; traction drive results</a:t>
+            </a:r>
+          </a:p>
+        </p:txBody>
+      </p:sp>
+      <p:sp>
+        <p:nvSpPr>
+          <p:cNvPr id="12" name="TextBox 11"/>
+          <p:cNvSpPr txBox="1"/>
+          <p:nvPr/>
+        </p:nvSpPr>
+        <p:spPr>
+          <a:xfrm>
+            <a:off x="411480" y="4681728"/>
+            <a:ext cx="5486400" cy="457200"/>
+          </a:xfrm>
+          <a:prstGeom prst="rect">
+            <a:avLst/>
+          </a:prstGeom>
+          <a:noFill/>
+        </p:spPr>
+        <p:txBody>
+          <a:bodyPr wrap="none">
+            <a:spAutoFit/>
+          </a:bodyPr>
+          <a:lstStyle/>
+          <a:p>
+            <a:pPr algn="l"/>
+            <a:r>
+              <a:rPr sz="1700" b="0" i="0">
+                <a:solidFill>
+                  <a:srgbClr val="FFFFFF"/>
+                </a:solidFill>
+              </a:rPr>
+              <a:t>🔭  Extensions possible:</a:t>
+            </a:r>
+          </a:p>
+        </p:txBody>
+      </p:sp>
+      <p:sp>
+        <p:nvSpPr>
+          <p:cNvPr id="13" name="TextBox 12"/>
+          <p:cNvSpPr txBox="1"/>
+          <p:nvPr/>
+        </p:nvSpPr>
+        <p:spPr>
+          <a:xfrm>
+            <a:off x="411480" y="5157216"/>
+            <a:ext cx="5486400" cy="457200"/>
+          </a:xfrm>
+          <a:prstGeom prst="rect">
+            <a:avLst/>
+          </a:prstGeom>
+          <a:noFill/>
+        </p:spPr>
+        <p:txBody>
+          <a:bodyPr wrap="none">
+            <a:spAutoFit/>
+          </a:bodyPr>
+          <a:lstStyle/>
+          <a:p>
+            <a:pPr algn="l"/>
+            <a:r>
+              <a:rPr sz="1500" b="0" i="1">
+                <a:solidFill>
+                  <a:srgbClr val="CCCCCC"/>
+                </a:solidFill>
+              </a:rPr>
+              <a:t>    · Random Forest, XGBoost  ·  UMAP visualisation</a:t>
+            </a:r>
+          </a:p>
+        </p:txBody>
+      </p:sp>
+      <p:sp>
+        <p:nvSpPr>
+          <p:cNvPr id="14" name="Rectangle 13"/>
+          <p:cNvSpPr/>
+          <p:nvPr/>
+        </p:nvSpPr>
+        <p:spPr>
+          <a:xfrm>
+            <a:off x="6400800" y="1097280"/>
+            <a:ext cx="5394960" cy="5394960"/>
+          </a:xfrm>
+          <a:prstGeom prst="rect">
+            <a:avLst/>
+          </a:prstGeom>
+          <a:solidFill>
+            <a:srgbClr val="16213E"/>
+          </a:solidFill>
+          <a:ln>
+            <a:noFill/>
+          </a:ln>
+        </p:spPr>
+        <p:style>
+          <a:lnRef idx="1">
+            <a:schemeClr val="accent1"/>
+          </a:lnRef>
+          <a:fillRef idx="3">
+            <a:schemeClr val="accent1"/>
+          </a:fillRef>
+          <a:effectRef idx="2">
+            <a:schemeClr val="accent1"/>
+          </a:effectRef>
+          <a:fontRef idx="minor">
+            <a:schemeClr val="lt1"/>
+          </a:fontRef>
+        </p:style>
+        <p:txBody>
+          <a:bodyPr rtlCol="0" anchor="ctr"/>
+          <a:lstStyle/>
+          <a:p>
+            <a:pPr algn="ctr"/>
+          </a:p>
+        </p:txBody>
+      </p:sp>
+      <p:sp>
+        <p:nvSpPr>
+          <p:cNvPr id="15" name="TextBox 14"/>
+          <p:cNvSpPr txBox="1"/>
+          <p:nvPr/>
+        </p:nvSpPr>
+        <p:spPr>
+          <a:xfrm>
+            <a:off x="6583680" y="1234440"/>
+            <a:ext cx="5029200" cy="457200"/>
+          </a:xfrm>
+          <a:prstGeom prst="rect">
+            <a:avLst/>
+          </a:prstGeom>
+          <a:noFill/>
+        </p:spPr>
+        <p:txBody>
+          <a:bodyPr wrap="none">
+            <a:spAutoFit/>
+          </a:bodyPr>
+          <a:lstStyle/>
+          <a:p>
+            <a:pPr algn="l"/>
+            <a:r>
+              <a:rPr sz="1600" b="1" i="0">
+                <a:solidFill>
+                  <a:srgbClr val="FFFFFF"/>
+                </a:solidFill>
+              </a:rPr>
+              <a:t>Both analyses converge:</a:t>
+            </a:r>
+          </a:p>
+        </p:txBody>
+      </p:sp>
+      <p:sp>
+        <p:nvSpPr>
+          <p:cNvPr id="16" name="TextBox 15"/>
+          <p:cNvSpPr txBox="1"/>
+          <p:nvPr/>
+        </p:nvSpPr>
+        <p:spPr>
+          <a:xfrm>
+            <a:off x="6858000" y="1920240"/>
+            <a:ext cx="4572000" cy="1371600"/>
+          </a:xfrm>
+          <a:prstGeom prst="rect">
+            <a:avLst/>
+          </a:prstGeom>
+          <a:noFill/>
+        </p:spPr>
+        <p:txBody>
+          <a:bodyPr wrap="none">
+            <a:spAutoFit/>
+          </a:bodyPr>
+          <a:lstStyle/>
+          <a:p>
+            <a:pPr algn="ctr"/>
+            <a:r>
+              <a:rPr sz="2800" b="1" i="0">
+                <a:solidFill>
+                  <a:srgbClr val="2ECC71"/>
+                </a:solidFill>
+              </a:rPr>
+              <a:t>revenue_million
+&amp;
+product_traction_users</a:t>
+            </a:r>
+          </a:p>
+        </p:txBody>
+      </p:sp>
+      <p:sp>
+        <p:nvSpPr>
+          <p:cNvPr id="17" name="TextBox 16"/>
+          <p:cNvSpPr txBox="1"/>
+          <p:nvPr/>
+        </p:nvSpPr>
+        <p:spPr>
+          <a:xfrm>
+            <a:off x="6583680" y="3383280"/>
+            <a:ext cx="5029200" cy="1371600"/>
+          </a:xfrm>
+          <a:prstGeom prst="rect">
+            <a:avLst/>
+          </a:prstGeom>
+          <a:noFill/>
+        </p:spPr>
+        <p:txBody>
+          <a:bodyPr wrap="none">
+            <a:spAutoFit/>
+          </a:bodyPr>
+          <a:lstStyle/>
+          <a:p>
+            <a:pPr algn="ctr"/>
+            <a:r>
               <a:rPr sz="1700" b="0" i="1">
                 <a:solidFill>
                   <a:srgbClr val="CCCCCC"/>
                 </a:solidFill>
               </a:rPr>
-              <a:t>  · Binary (no IPO):  macro F1 0.737  ·  AUC 0.816  — strong binary classifier</a:t>
-            </a:r>
-          </a:p>
-        </p:txBody>
-      </p:sp>
-      <p:sp>
-        <p:nvSpPr>
-          <p:cNvPr id="7" name="TextBox 6"/>
-          <p:cNvSpPr txBox="1"/>
-          <p:nvPr/>
-        </p:nvSpPr>
-        <p:spPr>
-          <a:xfrm>
-            <a:off x="548640" y="2276856"/>
-            <a:ext cx="10972800" cy="566928"/>
-          </a:xfrm>
-          <a:prstGeom prst="rect">
-            <a:avLst/>
-          </a:prstGeom>
-          <a:noFill/>
-        </p:spPr>
-        <p:txBody>
-          <a:bodyPr wrap="square">
-            <a:spAutoFit/>
-          </a:bodyPr>
-          <a:lstStyle/>
-          <a:p>
-            <a:pPr algn="l"/>
-            <a:r>
-              <a:rPr sz="2000" b="0" i="0">
+              <a:t>are the only two features
+that predict startup outcome
+and define cluster structure</a:t>
+            </a:r>
+          </a:p>
+        </p:txBody>
+      </p:sp>
+      <p:sp>
+        <p:nvSpPr>
+          <p:cNvPr id="18" name="Rectangle 17"/>
+          <p:cNvSpPr/>
+          <p:nvPr/>
+        </p:nvSpPr>
+        <p:spPr>
+          <a:xfrm>
+            <a:off x="6583680" y="4846320"/>
+            <a:ext cx="5029200" cy="1371600"/>
+          </a:xfrm>
+          <a:prstGeom prst="rect">
+            <a:avLst/>
+          </a:prstGeom>
+          <a:solidFill>
+            <a:srgbClr val="0F3C78"/>
+          </a:solidFill>
+          <a:ln>
+            <a:noFill/>
+          </a:ln>
+        </p:spPr>
+        <p:style>
+          <a:lnRef idx="1">
+            <a:schemeClr val="accent1"/>
+          </a:lnRef>
+          <a:fillRef idx="3">
+            <a:schemeClr val="accent1"/>
+          </a:fillRef>
+          <a:effectRef idx="2">
+            <a:schemeClr val="accent1"/>
+          </a:effectRef>
+          <a:fontRef idx="minor">
+            <a:schemeClr val="lt1"/>
+          </a:fontRef>
+        </p:style>
+        <p:txBody>
+          <a:bodyPr rtlCol="0" anchor="ctr"/>
+          <a:lstStyle/>
+          <a:p>
+            <a:pPr algn="ctr"/>
+          </a:p>
+        </p:txBody>
+      </p:sp>
+      <p:sp>
+        <p:nvSpPr>
+          <p:cNvPr id="19" name="TextBox 18"/>
+          <p:cNvSpPr txBox="1"/>
+          <p:nvPr/>
+        </p:nvSpPr>
+        <p:spPr>
+          <a:xfrm>
+            <a:off x="6720840" y="4919472"/>
+            <a:ext cx="4754880" cy="1234440"/>
+          </a:xfrm>
+          <a:prstGeom prst="rect">
+            <a:avLst/>
+          </a:prstGeom>
+          <a:noFill/>
+        </p:spPr>
+        <p:txBody>
+          <a:bodyPr wrap="none">
+            <a:spAutoFit/>
+          </a:bodyPr>
+          <a:lstStyle/>
+          <a:p>
+            <a:pPr algn="ctr"/>
+            <a:r>
+              <a:rPr sz="1400" b="0" i="0">
                 <a:solidFill>
                   <a:srgbClr val="FFFFFF"/>
                 </a:solidFill>
               </a:rPr>
-              <a:t>✅  Unsupervised:  3 coherent archetypes found by both K-Means and Ward</a:t>
-            </a:r>
-          </a:p>
-        </p:txBody>
-      </p:sp>
-      <p:sp>
-        <p:nvSpPr>
-          <p:cNvPr id="8" name="TextBox 7"/>
-          <p:cNvSpPr txBox="1"/>
-          <p:nvPr/>
-        </p:nvSpPr>
-        <p:spPr>
-          <a:xfrm>
-            <a:off x="548640" y="2843784"/>
-            <a:ext cx="10972800" cy="502920"/>
-          </a:xfrm>
-          <a:prstGeom prst="rect">
-            <a:avLst/>
-          </a:prstGeom>
-          <a:noFill/>
-        </p:spPr>
-        <p:txBody>
-          <a:bodyPr wrap="square">
-            <a:spAutoFit/>
-          </a:bodyPr>
-          <a:lstStyle/>
-          <a:p>
-            <a:pPr algn="l"/>
-            <a:r>
-              <a:rPr sz="1700" b="0" i="1">
-                <a:solidFill>
-                  <a:srgbClr val="CCCCCC"/>
-                </a:solidFill>
-              </a:rPr>
-              <a:t>  · Cluster profiles confirm EDA: revenue &amp; traction dominate</a:t>
-            </a:r>
-          </a:p>
-        </p:txBody>
-      </p:sp>
-      <p:sp>
-        <p:nvSpPr>
-          <p:cNvPr id="9" name="TextBox 8"/>
-          <p:cNvSpPr txBox="1"/>
-          <p:nvPr/>
-        </p:nvSpPr>
-        <p:spPr>
-          <a:xfrm>
-            <a:off x="548640" y="3319272"/>
-            <a:ext cx="10972800" cy="566928"/>
-          </a:xfrm>
-          <a:prstGeom prst="rect">
-            <a:avLst/>
-          </a:prstGeom>
-          <a:noFill/>
-        </p:spPr>
-        <p:txBody>
-          <a:bodyPr wrap="square">
-            <a:spAutoFit/>
-          </a:bodyPr>
-          <a:lstStyle/>
-          <a:p>
-            <a:pPr algn="l"/>
-            <a:r>
-              <a:rPr sz="2000" b="0" i="0">
-                <a:solidFill>
-                  <a:srgbClr val="FFFFFF"/>
-                </a:solidFill>
-              </a:rPr>
-              <a:t>⚠️  Fundamental limitation: dataset is synthetic</a:t>
-            </a:r>
-          </a:p>
-        </p:txBody>
-      </p:sp>
-      <p:sp>
-        <p:nvSpPr>
-          <p:cNvPr id="10" name="TextBox 9"/>
-          <p:cNvSpPr txBox="1"/>
-          <p:nvPr/>
-        </p:nvSpPr>
-        <p:spPr>
-          <a:xfrm>
-            <a:off x="548640" y="3886200"/>
-            <a:ext cx="10972800" cy="502920"/>
-          </a:xfrm>
-          <a:prstGeom prst="rect">
-            <a:avLst/>
-          </a:prstGeom>
-          <a:noFill/>
-        </p:spPr>
-        <p:txBody>
-          <a:bodyPr wrap="square">
-            <a:spAutoFit/>
-          </a:bodyPr>
-          <a:lstStyle/>
-          <a:p>
-            <a:pPr algn="l"/>
-            <a:r>
-              <a:rPr sz="1700" b="0" i="1">
-                <a:solidFill>
-                  <a:srgbClr val="CCCCCC"/>
-                </a:solidFill>
-              </a:rPr>
-              <a:t>  · 5 / 7 features are near-random noise  →  models rely on only 2 real signals</a:t>
-            </a:r>
-          </a:p>
-        </p:txBody>
-      </p:sp>
-      <p:sp>
-        <p:nvSpPr>
-          <p:cNvPr id="11" name="TextBox 10"/>
-          <p:cNvSpPr txBox="1"/>
-          <p:nvPr/>
-        </p:nvSpPr>
-        <p:spPr>
-          <a:xfrm>
-            <a:off x="548640" y="4361688"/>
-            <a:ext cx="10972800" cy="502920"/>
-          </a:xfrm>
-          <a:prstGeom prst="rect">
-            <a:avLst/>
-          </a:prstGeom>
-          <a:noFill/>
-        </p:spPr>
-        <p:txBody>
-          <a:bodyPr wrap="square">
-            <a:spAutoFit/>
-          </a:bodyPr>
-          <a:lstStyle/>
-          <a:p>
-            <a:pPr algn="l"/>
-            <a:r>
-              <a:rPr sz="1700" b="0" i="1">
-                <a:solidFill>
-                  <a:srgbClr val="CCCCCC"/>
-                </a:solidFill>
-              </a:rPr>
-              <a:t>  · Real-world data would have richer, correlated features</a:t>
-            </a:r>
-          </a:p>
-        </p:txBody>
-      </p:sp>
-      <p:sp>
-        <p:nvSpPr>
-          <p:cNvPr id="12" name="TextBox 11"/>
-          <p:cNvSpPr txBox="1"/>
-          <p:nvPr/>
-        </p:nvSpPr>
-        <p:spPr>
-          <a:xfrm>
-            <a:off x="548640" y="4837175"/>
-            <a:ext cx="10972800" cy="566928"/>
-          </a:xfrm>
-          <a:prstGeom prst="rect">
-            <a:avLst/>
-          </a:prstGeom>
-          <a:noFill/>
-        </p:spPr>
-        <p:txBody>
-          <a:bodyPr wrap="square">
-            <a:spAutoFit/>
-          </a:bodyPr>
-          <a:lstStyle/>
-          <a:p>
-            <a:pPr algn="l"/>
-            <a:r>
-              <a:rPr sz="2000" b="0" i="0">
-                <a:solidFill>
-                  <a:srgbClr val="FFFFFF"/>
-                </a:solidFill>
-              </a:rPr>
-              <a:t>🔭  Extensions: non-linear models (Random Forest, XGBoost), UMAP for visualisation</a:t>
-            </a:r>
-          </a:p>
-        </p:txBody>
-      </p:sp>
-      <p:sp>
-        <p:nvSpPr>
-          <p:cNvPr id="13" name="TextBox 12"/>
-          <p:cNvSpPr txBox="1"/>
-          <p:nvPr/>
-        </p:nvSpPr>
-        <p:spPr>
-          <a:xfrm>
-            <a:off x="320040" y="6309360"/>
-            <a:ext cx="11430000" cy="411480"/>
-          </a:xfrm>
-          <a:prstGeom prst="rect">
-            <a:avLst/>
-          </a:prstGeom>
-          <a:noFill/>
-        </p:spPr>
-        <p:txBody>
-          <a:bodyPr wrap="square">
-            <a:spAutoFit/>
-          </a:bodyPr>
-          <a:lstStyle/>
-          <a:p>
-            <a:pPr algn="l"/>
-            <a:r>
-              <a:rPr sz="1300" b="0" i="1">
-                <a:solidFill>
-                  <a:srgbClr val="CCCCCC"/>
-                </a:solidFill>
-              </a:rPr>
-              <a:t>Both supervised and unsupervised analyses converge on the same conclusion: revenue and traction predict outcome.</a:t>
+              <a:t>EDA  →  Supervised coefficients
+→  Cluster profiles
+→  All point to same conclusion ✓</a:t>
             </a:r>
           </a:p>
         </p:txBody>
@@ -3814,7 +4358,7 @@
         <p:spPr>
           <a:xfrm>
             <a:off x="0" y="0"/>
-            <a:ext cx="12188952" cy="1051560"/>
+            <a:ext cx="12188952" cy="960120"/>
           </a:xfrm>
           <a:prstGeom prst="rect">
             <a:avLst/>
@@ -3856,23 +4400,23 @@
         </p:nvSpPr>
         <p:spPr>
           <a:xfrm>
-            <a:off x="320040" y="164592"/>
-            <a:ext cx="11430000" cy="777240"/>
-          </a:xfrm>
-          <a:prstGeom prst="rect">
-            <a:avLst/>
-          </a:prstGeom>
-          <a:noFill/>
-        </p:spPr>
-        <p:txBody>
-          <a:bodyPr wrap="square">
+            <a:off x="274320" y="109728"/>
+            <a:ext cx="11612880" cy="777240"/>
+          </a:xfrm>
+          <a:prstGeom prst="rect">
+            <a:avLst/>
+          </a:prstGeom>
+          <a:noFill/>
+        </p:spPr>
+        <p:txBody>
+          <a:bodyPr wrap="none">
             <a:spAutoFit/>
           </a:bodyPr>
           <a:lstStyle/>
           <a:p>
             <a:pPr algn="l"/>
             <a:r>
-              <a:rPr sz="3000" b="1" i="0">
+              <a:rPr sz="2800" b="1" i="0">
                 <a:solidFill>
                   <a:srgbClr val="FFFFFF"/>
                 </a:solidFill>
@@ -3890,8 +4434,8 @@
         </p:nvSpPr>
         <p:spPr>
           <a:xfrm>
-            <a:off x="320040" y="1234440"/>
-            <a:ext cx="64008" cy="5029200"/>
+            <a:off x="274320" y="1097280"/>
+            <a:ext cx="54864" cy="5303520"/>
           </a:xfrm>
           <a:prstGeom prst="rect">
             <a:avLst/>
@@ -3933,28 +4477,28 @@
         </p:nvSpPr>
         <p:spPr>
           <a:xfrm>
-            <a:off x="548640" y="1234440"/>
-            <a:ext cx="10972800" cy="566928"/>
-          </a:xfrm>
-          <a:prstGeom prst="rect">
-            <a:avLst/>
-          </a:prstGeom>
-          <a:noFill/>
-        </p:spPr>
-        <p:txBody>
-          <a:bodyPr wrap="square">
+            <a:off x="411480" y="1143000"/>
+            <a:ext cx="5394960" cy="457200"/>
+          </a:xfrm>
+          <a:prstGeom prst="rect">
+            <a:avLst/>
+          </a:prstGeom>
+          <a:noFill/>
+        </p:spPr>
+        <p:txBody>
+          <a:bodyPr wrap="none">
             <a:spAutoFit/>
           </a:bodyPr>
           <a:lstStyle/>
           <a:p>
             <a:pPr algn="l"/>
             <a:r>
-              <a:rPr sz="2000" b="0" i="0">
+              <a:rPr sz="1700" b="0" i="0">
                 <a:solidFill>
                   <a:srgbClr val="FFFFFF"/>
                 </a:solidFill>
               </a:rPr>
-              <a:t>📊  100 000 startups  ·  7 numerical + 3 categorical features  ·  no missing values</a:t>
+              <a:t>100 000 startups  ·  10 features  ·  no missing values</a:t>
             </a:r>
           </a:p>
         </p:txBody>
@@ -3967,28 +4511,28 @@
         </p:nvSpPr>
         <p:spPr>
           <a:xfrm>
-            <a:off x="548640" y="1801368"/>
-            <a:ext cx="10972800" cy="502920"/>
-          </a:xfrm>
-          <a:prstGeom prst="rect">
-            <a:avLst/>
-          </a:prstGeom>
-          <a:noFill/>
-        </p:spPr>
-        <p:txBody>
-          <a:bodyPr wrap="square">
+            <a:off x="411480" y="1618488"/>
+            <a:ext cx="5394960" cy="457200"/>
+          </a:xfrm>
+          <a:prstGeom prst="rect">
+            <a:avLst/>
+          </a:prstGeom>
+          <a:noFill/>
+        </p:spPr>
+        <p:txBody>
+          <a:bodyPr wrap="none">
             <a:spAutoFit/>
           </a:bodyPr>
           <a:lstStyle/>
           <a:p>
             <a:pPr algn="l"/>
             <a:r>
-              <a:rPr sz="1700" b="0" i="1">
+              <a:rPr sz="1500" b="0" i="1">
                 <a:solidFill>
                   <a:srgbClr val="CCCCCC"/>
                 </a:solidFill>
               </a:rPr>
-              <a:t>  · Features: funding_rounds, founder_experience, team_size, market_size, product_traction, burn_rate, revenue</a:t>
+              <a:t>    · 7 numerical: funding_rounds, founder_experience, team_size,</a:t>
             </a:r>
           </a:p>
         </p:txBody>
@@ -4001,198 +4545,540 @@
         </p:nvSpPr>
         <p:spPr>
           <a:xfrm>
-            <a:off x="548640" y="2276856"/>
-            <a:ext cx="10972800" cy="566928"/>
-          </a:xfrm>
-          <a:prstGeom prst="rect">
-            <a:avLst/>
-          </a:prstGeom>
-          <a:noFill/>
-        </p:spPr>
-        <p:txBody>
-          <a:bodyPr wrap="square">
+            <a:off x="411480" y="2020824"/>
+            <a:ext cx="5394960" cy="457200"/>
+          </a:xfrm>
+          <a:prstGeom prst="rect">
+            <a:avLst/>
+          </a:prstGeom>
+          <a:noFill/>
+        </p:spPr>
+        <p:txBody>
+          <a:bodyPr wrap="none">
             <a:spAutoFit/>
           </a:bodyPr>
           <a:lstStyle/>
           <a:p>
             <a:pPr algn="l"/>
             <a:r>
-              <a:rPr sz="2000" b="0" i="0">
+              <a:rPr sz="1500" b="0" i="1">
+                <a:solidFill>
+                  <a:srgbClr val="CCCCCC"/>
+                </a:solidFill>
+              </a:rPr>
+              <a:t>    · market_size, product_traction, burn_rate, revenue</a:t>
+            </a:r>
+          </a:p>
+        </p:txBody>
+      </p:sp>
+      <p:sp>
+        <p:nvSpPr>
+          <p:cNvPr id="8" name="TextBox 7"/>
+          <p:cNvSpPr txBox="1"/>
+          <p:nvPr/>
+        </p:nvSpPr>
+        <p:spPr>
+          <a:xfrm>
+            <a:off x="411480" y="2423160"/>
+            <a:ext cx="5394960" cy="457200"/>
+          </a:xfrm>
+          <a:prstGeom prst="rect">
+            <a:avLst/>
+          </a:prstGeom>
+          <a:noFill/>
+        </p:spPr>
+        <p:txBody>
+          <a:bodyPr wrap="none">
+            <a:spAutoFit/>
+          </a:bodyPr>
+          <a:lstStyle/>
+          <a:p>
+            <a:pPr algn="l"/>
+            <a:r>
+              <a:rPr sz="1500" b="0" i="1">
+                <a:solidFill>
+                  <a:srgbClr val="CCCCCC"/>
+                </a:solidFill>
+              </a:rPr>
+              <a:t>    · 3 categorical: investor_type, sector, founder_background</a:t>
+            </a:r>
+          </a:p>
+        </p:txBody>
+      </p:sp>
+      <p:sp>
+        <p:nvSpPr>
+          <p:cNvPr id="9" name="TextBox 8"/>
+          <p:cNvSpPr txBox="1"/>
+          <p:nvPr/>
+        </p:nvSpPr>
+        <p:spPr>
+          <a:xfrm>
+            <a:off x="411480" y="3008376"/>
+            <a:ext cx="5394960" cy="457200"/>
+          </a:xfrm>
+          <a:prstGeom prst="rect">
+            <a:avLst/>
+          </a:prstGeom>
+          <a:noFill/>
+        </p:spPr>
+        <p:txBody>
+          <a:bodyPr wrap="none">
+            <a:spAutoFit/>
+          </a:bodyPr>
+          <a:lstStyle/>
+          <a:p>
+            <a:pPr algn="l"/>
+            <a:r>
+              <a:rPr sz="1700" b="0" i="0">
                 <a:solidFill>
                   <a:srgbClr val="FFFFFF"/>
                 </a:solidFill>
               </a:rPr>
-              <a:t>🎯  Target: outcome  →  3 classes</a:t>
-            </a:r>
-          </a:p>
-        </p:txBody>
-      </p:sp>
-      <p:sp>
-        <p:nvSpPr>
-          <p:cNvPr id="8" name="TextBox 7"/>
-          <p:cNvSpPr txBox="1"/>
-          <p:nvPr/>
-        </p:nvSpPr>
-        <p:spPr>
-          <a:xfrm>
-            <a:off x="548640" y="2843784"/>
-            <a:ext cx="10972800" cy="502920"/>
-          </a:xfrm>
-          <a:prstGeom prst="rect">
-            <a:avLst/>
-          </a:prstGeom>
-          <a:noFill/>
-        </p:spPr>
-        <p:txBody>
-          <a:bodyPr wrap="square">
+              <a:t>Target: outcome  →  3 classes</a:t>
+            </a:r>
+          </a:p>
+        </p:txBody>
+      </p:sp>
+      <p:sp>
+        <p:nvSpPr>
+          <p:cNvPr id="10" name="TextBox 9"/>
+          <p:cNvSpPr txBox="1"/>
+          <p:nvPr/>
+        </p:nvSpPr>
+        <p:spPr>
+          <a:xfrm>
+            <a:off x="411480" y="3483864"/>
+            <a:ext cx="5394960" cy="457200"/>
+          </a:xfrm>
+          <a:prstGeom prst="rect">
+            <a:avLst/>
+          </a:prstGeom>
+          <a:noFill/>
+        </p:spPr>
+        <p:txBody>
+          <a:bodyPr wrap="none">
             <a:spAutoFit/>
           </a:bodyPr>
           <a:lstStyle/>
           <a:p>
             <a:pPr algn="l"/>
             <a:r>
-              <a:rPr sz="1700" b="0" i="1">
+              <a:rPr sz="1500" b="0" i="1">
                 <a:solidFill>
                   <a:srgbClr val="CCCCCC"/>
                 </a:solidFill>
               </a:rPr>
-              <a:t>  · Failure 55.6%   ·   Acquisition 42.3%   ·   IPO 2.1%</a:t>
-            </a:r>
-          </a:p>
-        </p:txBody>
-      </p:sp>
-      <p:sp>
-        <p:nvSpPr>
-          <p:cNvPr id="9" name="TextBox 8"/>
-          <p:cNvSpPr txBox="1"/>
-          <p:nvPr/>
-        </p:nvSpPr>
-        <p:spPr>
-          <a:xfrm>
-            <a:off x="548640" y="3319272"/>
-            <a:ext cx="10972800" cy="566928"/>
-          </a:xfrm>
-          <a:prstGeom prst="rect">
-            <a:avLst/>
-          </a:prstGeom>
-          <a:noFill/>
-        </p:spPr>
-        <p:txBody>
-          <a:bodyPr wrap="square">
+              <a:t>    · Failure 55.6%   ·   Acquisition 42.3%   ·   IPO 2.1%</a:t>
+            </a:r>
+          </a:p>
+        </p:txBody>
+      </p:sp>
+      <p:sp>
+        <p:nvSpPr>
+          <p:cNvPr id="11" name="TextBox 10"/>
+          <p:cNvSpPr txBox="1"/>
+          <p:nvPr/>
+        </p:nvSpPr>
+        <p:spPr>
+          <a:xfrm>
+            <a:off x="411480" y="4069080"/>
+            <a:ext cx="5394960" cy="457200"/>
+          </a:xfrm>
+          <a:prstGeom prst="rect">
+            <a:avLst/>
+          </a:prstGeom>
+          <a:noFill/>
+        </p:spPr>
+        <p:txBody>
+          <a:bodyPr wrap="none">
             <a:spAutoFit/>
           </a:bodyPr>
           <a:lstStyle/>
           <a:p>
             <a:pPr algn="l"/>
             <a:r>
-              <a:rPr sz="2000" b="0" i="0">
+              <a:rPr sz="1700" b="0" i="0">
                 <a:solidFill>
                   <a:srgbClr val="FFFFFF"/>
                 </a:solidFill>
               </a:rPr>
-              <a:t>⚠️  Class imbalance: IPO is very rare — nearly unlearnable</a:t>
-            </a:r>
-          </a:p>
-        </p:txBody>
-      </p:sp>
-      <p:sp>
-        <p:nvSpPr>
-          <p:cNvPr id="10" name="TextBox 9"/>
-          <p:cNvSpPr txBox="1"/>
-          <p:nvPr/>
-        </p:nvSpPr>
-        <p:spPr>
-          <a:xfrm>
-            <a:off x="548640" y="3886200"/>
-            <a:ext cx="10972800" cy="566928"/>
-          </a:xfrm>
-          <a:prstGeom prst="rect">
-            <a:avLst/>
-          </a:prstGeom>
-          <a:noFill/>
-        </p:spPr>
-        <p:txBody>
-          <a:bodyPr wrap="square">
+              <a:t>Two questions:</a:t>
+            </a:r>
+          </a:p>
+        </p:txBody>
+      </p:sp>
+      <p:sp>
+        <p:nvSpPr>
+          <p:cNvPr id="12" name="TextBox 11"/>
+          <p:cNvSpPr txBox="1"/>
+          <p:nvPr/>
+        </p:nvSpPr>
+        <p:spPr>
+          <a:xfrm>
+            <a:off x="411480" y="4544568"/>
+            <a:ext cx="5394960" cy="457200"/>
+          </a:xfrm>
+          <a:prstGeom prst="rect">
+            <a:avLst/>
+          </a:prstGeom>
+          <a:noFill/>
+        </p:spPr>
+        <p:txBody>
+          <a:bodyPr wrap="none">
             <a:spAutoFit/>
           </a:bodyPr>
           <a:lstStyle/>
           <a:p>
             <a:pPr algn="l"/>
             <a:r>
-              <a:rPr sz="2000" b="0" i="0">
+              <a:rPr sz="1500" b="0" i="1">
+                <a:solidFill>
+                  <a:srgbClr val="CCCCCC"/>
+                </a:solidFill>
+              </a:rPr>
+              <a:t>    · Part 1: Can we predict outcome from features?  (Supervised)</a:t>
+            </a:r>
+          </a:p>
+        </p:txBody>
+      </p:sp>
+      <p:sp>
+        <p:nvSpPr>
+          <p:cNvPr id="13" name="TextBox 12"/>
+          <p:cNvSpPr txBox="1"/>
+          <p:nvPr/>
+        </p:nvSpPr>
+        <p:spPr>
+          <a:xfrm>
+            <a:off x="411480" y="4946904"/>
+            <a:ext cx="5394960" cy="457200"/>
+          </a:xfrm>
+          <a:prstGeom prst="rect">
+            <a:avLst/>
+          </a:prstGeom>
+          <a:noFill/>
+        </p:spPr>
+        <p:txBody>
+          <a:bodyPr wrap="none">
+            <a:spAutoFit/>
+          </a:bodyPr>
+          <a:lstStyle/>
+          <a:p>
+            <a:pPr algn="l"/>
+            <a:r>
+              <a:rPr sz="1500" b="0" i="1">
+                <a:solidFill>
+                  <a:srgbClr val="CCCCCC"/>
+                </a:solidFill>
+              </a:rPr>
+              <a:t>    · Part 2: What natural groups exist in data?  (Unsupervised)</a:t>
+            </a:r>
+          </a:p>
+        </p:txBody>
+      </p:sp>
+      <p:sp>
+        <p:nvSpPr>
+          <p:cNvPr id="14" name="Rectangle 13"/>
+          <p:cNvSpPr/>
+          <p:nvPr/>
+        </p:nvSpPr>
+        <p:spPr>
+          <a:xfrm>
+            <a:off x="6400800" y="1097280"/>
+            <a:ext cx="5394960" cy="5394960"/>
+          </a:xfrm>
+          <a:prstGeom prst="rect">
+            <a:avLst/>
+          </a:prstGeom>
+          <a:solidFill>
+            <a:srgbClr val="16213E"/>
+          </a:solidFill>
+          <a:ln>
+            <a:noFill/>
+          </a:ln>
+        </p:spPr>
+        <p:style>
+          <a:lnRef idx="1">
+            <a:schemeClr val="accent1"/>
+          </a:lnRef>
+          <a:fillRef idx="3">
+            <a:schemeClr val="accent1"/>
+          </a:fillRef>
+          <a:effectRef idx="2">
+            <a:schemeClr val="accent1"/>
+          </a:effectRef>
+          <a:fontRef idx="minor">
+            <a:schemeClr val="lt1"/>
+          </a:fontRef>
+        </p:style>
+        <p:txBody>
+          <a:bodyPr rtlCol="0" anchor="ctr"/>
+          <a:lstStyle/>
+          <a:p>
+            <a:pPr algn="ctr"/>
+          </a:p>
+        </p:txBody>
+      </p:sp>
+      <p:sp>
+        <p:nvSpPr>
+          <p:cNvPr id="15" name="TextBox 14"/>
+          <p:cNvSpPr txBox="1"/>
+          <p:nvPr/>
+        </p:nvSpPr>
+        <p:spPr>
+          <a:xfrm>
+            <a:off x="6583680" y="1188720"/>
+            <a:ext cx="5029200" cy="457200"/>
+          </a:xfrm>
+          <a:prstGeom prst="rect">
+            <a:avLst/>
+          </a:prstGeom>
+          <a:noFill/>
+        </p:spPr>
+        <p:txBody>
+          <a:bodyPr wrap="none">
+            <a:spAutoFit/>
+          </a:bodyPr>
+          <a:lstStyle/>
+          <a:p>
+            <a:pPr algn="l"/>
+            <a:r>
+              <a:rPr sz="1600" b="1" i="0">
                 <a:solidFill>
                   <a:srgbClr val="FFFFFF"/>
                 </a:solidFill>
               </a:rPr>
-              <a:t>❓  Two questions we answer:</a:t>
-            </a:r>
-          </a:p>
-        </p:txBody>
-      </p:sp>
-      <p:sp>
-        <p:nvSpPr>
-          <p:cNvPr id="11" name="TextBox 10"/>
-          <p:cNvSpPr txBox="1"/>
-          <p:nvPr/>
-        </p:nvSpPr>
-        <p:spPr>
-          <a:xfrm>
-            <a:off x="548640" y="4453128"/>
-            <a:ext cx="10972800" cy="502920"/>
-          </a:xfrm>
-          <a:prstGeom prst="rect">
-            <a:avLst/>
-          </a:prstGeom>
-          <a:noFill/>
-        </p:spPr>
-        <p:txBody>
-          <a:bodyPr wrap="square">
+              <a:t>Class Distribution</a:t>
+            </a:r>
+          </a:p>
+        </p:txBody>
+      </p:sp>
+      <p:sp>
+        <p:nvSpPr>
+          <p:cNvPr id="16" name="Rectangle 15"/>
+          <p:cNvSpPr/>
+          <p:nvPr/>
+        </p:nvSpPr>
+        <p:spPr>
+          <a:xfrm>
+            <a:off x="6766560" y="1920240"/>
+            <a:ext cx="2542032" cy="822960"/>
+          </a:xfrm>
+          <a:prstGeom prst="rect">
+            <a:avLst/>
+          </a:prstGeom>
+          <a:solidFill>
+            <a:srgbClr val="C0392B"/>
+          </a:solidFill>
+          <a:ln>
+            <a:noFill/>
+          </a:ln>
+        </p:spPr>
+        <p:style>
+          <a:lnRef idx="1">
+            <a:schemeClr val="accent1"/>
+          </a:lnRef>
+          <a:fillRef idx="3">
+            <a:schemeClr val="accent1"/>
+          </a:fillRef>
+          <a:effectRef idx="2">
+            <a:schemeClr val="accent1"/>
+          </a:effectRef>
+          <a:fontRef idx="minor">
+            <a:schemeClr val="lt1"/>
+          </a:fontRef>
+        </p:style>
+        <p:txBody>
+          <a:bodyPr rtlCol="0" anchor="ctr"/>
+          <a:lstStyle/>
+          <a:p>
+            <a:pPr algn="ctr"/>
+          </a:p>
+        </p:txBody>
+      </p:sp>
+      <p:sp>
+        <p:nvSpPr>
+          <p:cNvPr id="17" name="TextBox 16"/>
+          <p:cNvSpPr txBox="1"/>
+          <p:nvPr/>
+        </p:nvSpPr>
+        <p:spPr>
+          <a:xfrm>
+            <a:off x="9400032" y="2121408"/>
+            <a:ext cx="1645920" cy="457200"/>
+          </a:xfrm>
+          <a:prstGeom prst="rect">
+            <a:avLst/>
+          </a:prstGeom>
+          <a:noFill/>
+        </p:spPr>
+        <p:txBody>
+          <a:bodyPr wrap="none">
             <a:spAutoFit/>
           </a:bodyPr>
           <a:lstStyle/>
           <a:p>
             <a:pPr algn="l"/>
             <a:r>
-              <a:rPr sz="1700" b="0" i="1">
-                <a:solidFill>
-                  <a:srgbClr val="CCCCCC"/>
-                </a:solidFill>
-              </a:rPr>
-              <a:t>  · Part 1 — Can we predict the outcome from features?  (Supervised)</a:t>
-            </a:r>
-          </a:p>
-        </p:txBody>
-      </p:sp>
-      <p:sp>
-        <p:nvSpPr>
-          <p:cNvPr id="12" name="TextBox 11"/>
-          <p:cNvSpPr txBox="1"/>
-          <p:nvPr/>
-        </p:nvSpPr>
-        <p:spPr>
-          <a:xfrm>
-            <a:off x="548640" y="4928616"/>
-            <a:ext cx="10972800" cy="502920"/>
-          </a:xfrm>
-          <a:prstGeom prst="rect">
-            <a:avLst/>
-          </a:prstGeom>
-          <a:noFill/>
-        </p:spPr>
-        <p:txBody>
-          <a:bodyPr wrap="square">
+              <a:rPr sz="1500" b="1" i="0">
+                <a:solidFill>
+                  <a:srgbClr val="C0392B"/>
+                </a:solidFill>
+              </a:rPr>
+              <a:t>Failure  55.6%</a:t>
+            </a:r>
+          </a:p>
+        </p:txBody>
+      </p:sp>
+      <p:sp>
+        <p:nvSpPr>
+          <p:cNvPr id="18" name="Rectangle 17"/>
+          <p:cNvSpPr/>
+          <p:nvPr/>
+        </p:nvSpPr>
+        <p:spPr>
+          <a:xfrm>
+            <a:off x="6766560" y="3383280"/>
+            <a:ext cx="1933955" cy="822960"/>
+          </a:xfrm>
+          <a:prstGeom prst="rect">
+            <a:avLst/>
+          </a:prstGeom>
+          <a:solidFill>
+            <a:srgbClr val="2ECC71"/>
+          </a:solidFill>
+          <a:ln>
+            <a:noFill/>
+          </a:ln>
+        </p:spPr>
+        <p:style>
+          <a:lnRef idx="1">
+            <a:schemeClr val="accent1"/>
+          </a:lnRef>
+          <a:fillRef idx="3">
+            <a:schemeClr val="accent1"/>
+          </a:fillRef>
+          <a:effectRef idx="2">
+            <a:schemeClr val="accent1"/>
+          </a:effectRef>
+          <a:fontRef idx="minor">
+            <a:schemeClr val="lt1"/>
+          </a:fontRef>
+        </p:style>
+        <p:txBody>
+          <a:bodyPr rtlCol="0" anchor="ctr"/>
+          <a:lstStyle/>
+          <a:p>
+            <a:pPr algn="ctr"/>
+          </a:p>
+        </p:txBody>
+      </p:sp>
+      <p:sp>
+        <p:nvSpPr>
+          <p:cNvPr id="19" name="TextBox 18"/>
+          <p:cNvSpPr txBox="1"/>
+          <p:nvPr/>
+        </p:nvSpPr>
+        <p:spPr>
+          <a:xfrm>
+            <a:off x="8791956" y="3584448"/>
+            <a:ext cx="1645920" cy="457200"/>
+          </a:xfrm>
+          <a:prstGeom prst="rect">
+            <a:avLst/>
+          </a:prstGeom>
+          <a:noFill/>
+        </p:spPr>
+        <p:txBody>
+          <a:bodyPr wrap="none">
             <a:spAutoFit/>
           </a:bodyPr>
           <a:lstStyle/>
           <a:p>
             <a:pPr algn="l"/>
             <a:r>
-              <a:rPr sz="1700" b="0" i="1">
-                <a:solidFill>
-                  <a:srgbClr val="CCCCCC"/>
-                </a:solidFill>
-              </a:rPr>
-              <a:t>  · Part 2 — What natural groups exist in the data?  (Unsupervised)</a:t>
+              <a:rPr sz="1500" b="1" i="0">
+                <a:solidFill>
+                  <a:srgbClr val="2ECC71"/>
+                </a:solidFill>
+              </a:rPr>
+              <a:t>Acquisition  42.3%</a:t>
+            </a:r>
+          </a:p>
+        </p:txBody>
+      </p:sp>
+      <p:sp>
+        <p:nvSpPr>
+          <p:cNvPr id="20" name="Rectangle 19"/>
+          <p:cNvSpPr/>
+          <p:nvPr/>
+        </p:nvSpPr>
+        <p:spPr>
+          <a:xfrm>
+            <a:off x="6766560" y="4846320"/>
+            <a:ext cx="96012" cy="822960"/>
+          </a:xfrm>
+          <a:prstGeom prst="rect">
+            <a:avLst/>
+          </a:prstGeom>
+          <a:solidFill>
+            <a:srgbClr val="3498DB"/>
+          </a:solidFill>
+          <a:ln>
+            <a:noFill/>
+          </a:ln>
+        </p:spPr>
+        <p:style>
+          <a:lnRef idx="1">
+            <a:schemeClr val="accent1"/>
+          </a:lnRef>
+          <a:fillRef idx="3">
+            <a:schemeClr val="accent1"/>
+          </a:fillRef>
+          <a:effectRef idx="2">
+            <a:schemeClr val="accent1"/>
+          </a:effectRef>
+          <a:fontRef idx="minor">
+            <a:schemeClr val="lt1"/>
+          </a:fontRef>
+        </p:style>
+        <p:txBody>
+          <a:bodyPr rtlCol="0" anchor="ctr"/>
+          <a:lstStyle/>
+          <a:p>
+            <a:pPr algn="ctr"/>
+          </a:p>
+        </p:txBody>
+      </p:sp>
+      <p:sp>
+        <p:nvSpPr>
+          <p:cNvPr id="21" name="TextBox 20"/>
+          <p:cNvSpPr txBox="1"/>
+          <p:nvPr/>
+        </p:nvSpPr>
+        <p:spPr>
+          <a:xfrm>
+            <a:off x="6954012" y="5047488"/>
+            <a:ext cx="1645920" cy="457200"/>
+          </a:xfrm>
+          <a:prstGeom prst="rect">
+            <a:avLst/>
+          </a:prstGeom>
+          <a:noFill/>
+        </p:spPr>
+        <p:txBody>
+          <a:bodyPr wrap="none">
+            <a:spAutoFit/>
+          </a:bodyPr>
+          <a:lstStyle/>
+          <a:p>
+            <a:pPr algn="l"/>
+            <a:r>
+              <a:rPr sz="1500" b="1" i="0">
+                <a:solidFill>
+                  <a:srgbClr val="3498DB"/>
+                </a:solidFill>
+              </a:rPr>
+              <a:t>IPO  2.1%</a:t>
             </a:r>
           </a:p>
         </p:txBody>
@@ -4232,7 +5118,7 @@
         <p:spPr>
           <a:xfrm>
             <a:off x="0" y="0"/>
-            <a:ext cx="12188952" cy="1051560"/>
+            <a:ext cx="12188952" cy="960120"/>
           </a:xfrm>
           <a:prstGeom prst="rect">
             <a:avLst/>
@@ -4274,23 +5160,23 @@
         </p:nvSpPr>
         <p:spPr>
           <a:xfrm>
-            <a:off x="320040" y="164592"/>
-            <a:ext cx="11430000" cy="777240"/>
-          </a:xfrm>
-          <a:prstGeom prst="rect">
-            <a:avLst/>
-          </a:prstGeom>
-          <a:noFill/>
-        </p:spPr>
-        <p:txBody>
-          <a:bodyPr wrap="square">
+            <a:off x="274320" y="109728"/>
+            <a:ext cx="11612880" cy="777240"/>
+          </a:xfrm>
+          <a:prstGeom prst="rect">
+            <a:avLst/>
+          </a:prstGeom>
+          <a:noFill/>
+        </p:spPr>
+        <p:txBody>
+          <a:bodyPr wrap="none">
             <a:spAutoFit/>
           </a:bodyPr>
           <a:lstStyle/>
           <a:p>
             <a:pPr algn="l"/>
             <a:r>
-              <a:rPr sz="3000" b="1" i="0">
+              <a:rPr sz="2800" b="1" i="0">
                 <a:solidFill>
                   <a:srgbClr val="FFFFFF"/>
                 </a:solidFill>
@@ -4308,8 +5194,8 @@
         </p:nvSpPr>
         <p:spPr>
           <a:xfrm>
-            <a:off x="320040" y="1234440"/>
-            <a:ext cx="64008" cy="5029200"/>
+            <a:off x="274320" y="1097280"/>
+            <a:ext cx="54864" cy="5303520"/>
           </a:xfrm>
           <a:prstGeom prst="rect">
             <a:avLst/>
@@ -4351,28 +5237,28 @@
         </p:nvSpPr>
         <p:spPr>
           <a:xfrm>
-            <a:off x="548640" y="1234440"/>
-            <a:ext cx="10972800" cy="566928"/>
-          </a:xfrm>
-          <a:prstGeom prst="rect">
-            <a:avLst/>
-          </a:prstGeom>
-          <a:noFill/>
-        </p:spPr>
-        <p:txBody>
-          <a:bodyPr wrap="square">
+            <a:off x="411480" y="1143000"/>
+            <a:ext cx="5394960" cy="457200"/>
+          </a:xfrm>
+          <a:prstGeom prst="rect">
+            <a:avLst/>
+          </a:prstGeom>
+          <a:noFill/>
+        </p:spPr>
+        <p:txBody>
+          <a:bodyPr wrap="none">
             <a:spAutoFit/>
           </a:bodyPr>
           <a:lstStyle/>
           <a:p>
             <a:pPr algn="l"/>
             <a:r>
-              <a:rPr sz="2000" b="0" i="0">
+              <a:rPr sz="1700" b="0" i="0">
                 <a:solidFill>
                   <a:srgbClr val="FFFFFF"/>
                 </a:solidFill>
               </a:rPr>
-              <a:t>Spearman correlation between each feature and outcome is near zero for 5 / 7 features</a:t>
+              <a:t>Spearman ρ (feature vs outcome) near 0 for 5 / 7 features</a:t>
             </a:r>
           </a:p>
         </p:txBody>
@@ -4385,28 +5271,28 @@
         </p:nvSpPr>
         <p:spPr>
           <a:xfrm>
-            <a:off x="548640" y="1801368"/>
-            <a:ext cx="10972800" cy="502920"/>
-          </a:xfrm>
-          <a:prstGeom prst="rect">
-            <a:avLst/>
-          </a:prstGeom>
-          <a:noFill/>
-        </p:spPr>
-        <p:txBody>
-          <a:bodyPr wrap="square">
+            <a:off x="411480" y="1618488"/>
+            <a:ext cx="5394960" cy="457200"/>
+          </a:xfrm>
+          <a:prstGeom prst="rect">
+            <a:avLst/>
+          </a:prstGeom>
+          <a:noFill/>
+        </p:spPr>
+        <p:txBody>
+          <a:bodyPr wrap="none">
             <a:spAutoFit/>
           </a:bodyPr>
           <a:lstStyle/>
           <a:p>
             <a:pPr algn="l"/>
             <a:r>
-              <a:rPr sz="1700" b="0" i="1">
+              <a:rPr sz="1500" b="0" i="1">
                 <a:solidFill>
                   <a:srgbClr val="CCCCCC"/>
                 </a:solidFill>
               </a:rPr>
-              <a:t>  · funding_rounds, founder_experience, team_size, market_size, burn_rate  →  ρ ≈ 0</a:t>
+              <a:t>    · funding_rounds, founder_exp, team_size, market_size, burn_rate → ρ ≈ 0</a:t>
             </a:r>
           </a:p>
         </p:txBody>
@@ -4419,23 +5305,23 @@
         </p:nvSpPr>
         <p:spPr>
           <a:xfrm>
-            <a:off x="548640" y="2276856"/>
-            <a:ext cx="10972800" cy="566928"/>
-          </a:xfrm>
-          <a:prstGeom prst="rect">
-            <a:avLst/>
-          </a:prstGeom>
-          <a:noFill/>
-        </p:spPr>
-        <p:txBody>
-          <a:bodyPr wrap="square">
+            <a:off x="411480" y="2203704"/>
+            <a:ext cx="5394960" cy="457200"/>
+          </a:xfrm>
+          <a:prstGeom prst="rect">
+            <a:avLst/>
+          </a:prstGeom>
+          <a:noFill/>
+        </p:spPr>
+        <p:txBody>
+          <a:bodyPr wrap="none">
             <a:spAutoFit/>
           </a:bodyPr>
           <a:lstStyle/>
           <a:p>
             <a:pPr algn="l"/>
             <a:r>
-              <a:rPr sz="2000" b="0" i="0">
+              <a:rPr sz="1700" b="0" i="0">
                 <a:solidFill>
                   <a:srgbClr val="FFFFFF"/>
                 </a:solidFill>
@@ -4453,28 +5339,28 @@
         </p:nvSpPr>
         <p:spPr>
           <a:xfrm>
-            <a:off x="548640" y="2843784"/>
-            <a:ext cx="10972800" cy="502920"/>
-          </a:xfrm>
-          <a:prstGeom prst="rect">
-            <a:avLst/>
-          </a:prstGeom>
-          <a:noFill/>
-        </p:spPr>
-        <p:txBody>
-          <a:bodyPr wrap="square">
+            <a:off x="411480" y="2679192"/>
+            <a:ext cx="5394960" cy="457200"/>
+          </a:xfrm>
+          <a:prstGeom prst="rect">
+            <a:avLst/>
+          </a:prstGeom>
+          <a:noFill/>
+        </p:spPr>
+        <p:txBody>
+          <a:bodyPr wrap="none">
             <a:spAutoFit/>
           </a:bodyPr>
           <a:lstStyle/>
           <a:p>
             <a:pPr algn="l"/>
             <a:r>
-              <a:rPr sz="1700" b="0" i="1">
+              <a:rPr sz="1500" b="0" i="1">
                 <a:solidFill>
                   <a:srgbClr val="CCCCCC"/>
                 </a:solidFill>
               </a:rPr>
-              <a:t>  · revenue_million          ρ ≈ 0.45  ★</a:t>
+              <a:t>    · revenue_million            ρ ≈ 0.45  ★</a:t>
             </a:r>
           </a:p>
         </p:txBody>
@@ -4487,28 +5373,28 @@
         </p:nvSpPr>
         <p:spPr>
           <a:xfrm>
-            <a:off x="548640" y="3319272"/>
-            <a:ext cx="10972800" cy="502920"/>
-          </a:xfrm>
-          <a:prstGeom prst="rect">
-            <a:avLst/>
-          </a:prstGeom>
-          <a:noFill/>
-        </p:spPr>
-        <p:txBody>
-          <a:bodyPr wrap="square">
+            <a:off x="411480" y="3081528"/>
+            <a:ext cx="5394960" cy="457200"/>
+          </a:xfrm>
+          <a:prstGeom prst="rect">
+            <a:avLst/>
+          </a:prstGeom>
+          <a:noFill/>
+        </p:spPr>
+        <p:txBody>
+          <a:bodyPr wrap="none">
             <a:spAutoFit/>
           </a:bodyPr>
           <a:lstStyle/>
           <a:p>
             <a:pPr algn="l"/>
             <a:r>
-              <a:rPr sz="1700" b="0" i="1">
+              <a:rPr sz="1500" b="0" i="1">
                 <a:solidFill>
                   <a:srgbClr val="CCCCCC"/>
                 </a:solidFill>
               </a:rPr>
-              <a:t>  · product_traction_users   ρ ≈ 0.38  ★</a:t>
+              <a:t>    · product_traction_users     ρ ≈ 0.38  ★</a:t>
             </a:r>
           </a:p>
         </p:txBody>
@@ -4521,28 +5407,28 @@
         </p:nvSpPr>
         <p:spPr>
           <a:xfrm>
-            <a:off x="548640" y="3794760"/>
-            <a:ext cx="10972800" cy="566928"/>
-          </a:xfrm>
-          <a:prstGeom prst="rect">
-            <a:avLst/>
-          </a:prstGeom>
-          <a:noFill/>
-        </p:spPr>
-        <p:txBody>
-          <a:bodyPr wrap="square">
+            <a:off x="411480" y="3666744"/>
+            <a:ext cx="5394960" cy="457200"/>
+          </a:xfrm>
+          <a:prstGeom prst="rect">
+            <a:avLst/>
+          </a:prstGeom>
+          <a:noFill/>
+        </p:spPr>
+        <p:txBody>
+          <a:bodyPr wrap="none">
             <a:spAutoFit/>
           </a:bodyPr>
           <a:lstStyle/>
           <a:p>
             <a:pPr algn="l"/>
             <a:r>
-              <a:rPr sz="2000" b="0" i="0">
+              <a:rPr sz="1700" b="0" i="0">
                 <a:solidFill>
                   <a:srgbClr val="FFFFFF"/>
                 </a:solidFill>
               </a:rPr>
-              <a:t>⚙️  Preprocessing:  log1p + StandardScaler  (numerical)   ·   OrdinalEncoder  (categorical)</a:t>
+              <a:t>Preprocessing pipeline:</a:t>
             </a:r>
           </a:p>
         </p:txBody>
@@ -4555,28 +5441,28 @@
         </p:nvSpPr>
         <p:spPr>
           <a:xfrm>
-            <a:off x="548640" y="4361688"/>
-            <a:ext cx="10972800" cy="502920"/>
-          </a:xfrm>
-          <a:prstGeom prst="rect">
-            <a:avLst/>
-          </a:prstGeom>
-          <a:noFill/>
-        </p:spPr>
-        <p:txBody>
-          <a:bodyPr wrap="square">
+            <a:off x="411480" y="4142231"/>
+            <a:ext cx="5394960" cy="457200"/>
+          </a:xfrm>
+          <a:prstGeom prst="rect">
+            <a:avLst/>
+          </a:prstGeom>
+          <a:noFill/>
+        </p:spPr>
+        <p:txBody>
+          <a:bodyPr wrap="none">
             <a:spAutoFit/>
           </a:bodyPr>
           <a:lstStyle/>
           <a:p>
             <a:pPr algn="l"/>
             <a:r>
-              <a:rPr sz="1700" b="0" i="1">
+              <a:rPr sz="1500" b="0" i="1">
                 <a:solidFill>
                   <a:srgbClr val="CCCCCC"/>
                 </a:solidFill>
               </a:rPr>
-              <a:t>  · Pipeline + ColumnTransformer — prevents data leakage across CV folds</a:t>
+              <a:t>    · log1p + StandardScaler  (numerical)</a:t>
             </a:r>
           </a:p>
         </p:txBody>
@@ -4589,28 +5475,950 @@
         </p:nvSpPr>
         <p:spPr>
           <a:xfrm>
-            <a:off x="320040" y="6309360"/>
-            <a:ext cx="11430000" cy="411480"/>
-          </a:xfrm>
-          <a:prstGeom prst="rect">
-            <a:avLst/>
-          </a:prstGeom>
-          <a:noFill/>
-        </p:spPr>
-        <p:txBody>
-          <a:bodyPr wrap="square">
+            <a:off x="411480" y="4544568"/>
+            <a:ext cx="5394960" cy="457200"/>
+          </a:xfrm>
+          <a:prstGeom prst="rect">
+            <a:avLst/>
+          </a:prstGeom>
+          <a:noFill/>
+        </p:spPr>
+        <p:txBody>
+          <a:bodyPr wrap="none">
             <a:spAutoFit/>
           </a:bodyPr>
           <a:lstStyle/>
           <a:p>
             <a:pPr algn="l"/>
             <a:r>
-              <a:rPr sz="1300" b="0" i="1">
+              <a:rPr sz="1500" b="0" i="1">
                 <a:solidFill>
                   <a:srgbClr val="CCCCCC"/>
                 </a:solidFill>
               </a:rPr>
-              <a:t>This finding will reappear in both the supervised coefficients and the unsupervised cluster profiles.</a:t>
+              <a:t>    · OrdinalEncoder  (categorical)</a:t>
+            </a:r>
+          </a:p>
+        </p:txBody>
+      </p:sp>
+      <p:sp>
+        <p:nvSpPr>
+          <p:cNvPr id="13" name="TextBox 12"/>
+          <p:cNvSpPr txBox="1"/>
+          <p:nvPr/>
+        </p:nvSpPr>
+        <p:spPr>
+          <a:xfrm>
+            <a:off x="411480" y="4946904"/>
+            <a:ext cx="5394960" cy="457200"/>
+          </a:xfrm>
+          <a:prstGeom prst="rect">
+            <a:avLst/>
+          </a:prstGeom>
+          <a:noFill/>
+        </p:spPr>
+        <p:txBody>
+          <a:bodyPr wrap="none">
+            <a:spAutoFit/>
+          </a:bodyPr>
+          <a:lstStyle/>
+          <a:p>
+            <a:pPr algn="l"/>
+            <a:r>
+              <a:rPr sz="1500" b="0" i="1">
+                <a:solidFill>
+                  <a:srgbClr val="CCCCCC"/>
+                </a:solidFill>
+              </a:rPr>
+              <a:t>    · Pipeline + ColumnTransformer → no data leakage</a:t>
+            </a:r>
+          </a:p>
+        </p:txBody>
+      </p:sp>
+      <p:sp>
+        <p:nvSpPr>
+          <p:cNvPr id="14" name="Rectangle 13"/>
+          <p:cNvSpPr/>
+          <p:nvPr/>
+        </p:nvSpPr>
+        <p:spPr>
+          <a:xfrm>
+            <a:off x="6400800" y="1097280"/>
+            <a:ext cx="5394960" cy="5394960"/>
+          </a:xfrm>
+          <a:prstGeom prst="rect">
+            <a:avLst/>
+          </a:prstGeom>
+          <a:solidFill>
+            <a:srgbClr val="16213E"/>
+          </a:solidFill>
+          <a:ln>
+            <a:noFill/>
+          </a:ln>
+        </p:spPr>
+        <p:style>
+          <a:lnRef idx="1">
+            <a:schemeClr val="accent1"/>
+          </a:lnRef>
+          <a:fillRef idx="3">
+            <a:schemeClr val="accent1"/>
+          </a:fillRef>
+          <a:effectRef idx="2">
+            <a:schemeClr val="accent1"/>
+          </a:effectRef>
+          <a:fontRef idx="minor">
+            <a:schemeClr val="lt1"/>
+          </a:fontRef>
+        </p:style>
+        <p:txBody>
+          <a:bodyPr rtlCol="0" anchor="ctr"/>
+          <a:lstStyle/>
+          <a:p>
+            <a:pPr algn="ctr"/>
+          </a:p>
+        </p:txBody>
+      </p:sp>
+      <p:sp>
+        <p:nvSpPr>
+          <p:cNvPr id="15" name="TextBox 14"/>
+          <p:cNvSpPr txBox="1"/>
+          <p:nvPr/>
+        </p:nvSpPr>
+        <p:spPr>
+          <a:xfrm>
+            <a:off x="6537960" y="1143000"/>
+            <a:ext cx="5120640" cy="457200"/>
+          </a:xfrm>
+          <a:prstGeom prst="rect">
+            <a:avLst/>
+          </a:prstGeom>
+          <a:noFill/>
+        </p:spPr>
+        <p:txBody>
+          <a:bodyPr wrap="none">
+            <a:spAutoFit/>
+          </a:bodyPr>
+          <a:lstStyle/>
+          <a:p>
+            <a:pPr algn="ctr"/>
+            <a:r>
+              <a:rPr sz="1500" b="1" i="0">
+                <a:solidFill>
+                  <a:srgbClr val="FFFFFF"/>
+                </a:solidFill>
+              </a:rPr>
+              <a:t>Spearman ρ  with  outcome</a:t>
+            </a:r>
+          </a:p>
+        </p:txBody>
+      </p:sp>
+      <p:sp>
+        <p:nvSpPr>
+          <p:cNvPr id="16" name="Rectangle 15"/>
+          <p:cNvSpPr/>
+          <p:nvPr/>
+        </p:nvSpPr>
+        <p:spPr>
+          <a:xfrm>
+            <a:off x="6537960" y="1691640"/>
+            <a:ext cx="4114800" cy="365760"/>
+          </a:xfrm>
+          <a:prstGeom prst="rect">
+            <a:avLst/>
+          </a:prstGeom>
+          <a:solidFill>
+            <a:srgbClr val="2ECC71"/>
+          </a:solidFill>
+          <a:ln>
+            <a:noFill/>
+          </a:ln>
+        </p:spPr>
+        <p:style>
+          <a:lnRef idx="1">
+            <a:schemeClr val="accent1"/>
+          </a:lnRef>
+          <a:fillRef idx="3">
+            <a:schemeClr val="accent1"/>
+          </a:fillRef>
+          <a:effectRef idx="2">
+            <a:schemeClr val="accent1"/>
+          </a:effectRef>
+          <a:fontRef idx="minor">
+            <a:schemeClr val="lt1"/>
+          </a:fontRef>
+        </p:style>
+        <p:txBody>
+          <a:bodyPr rtlCol="0" anchor="ctr"/>
+          <a:lstStyle/>
+          <a:p>
+            <a:pPr algn="ctr"/>
+          </a:p>
+        </p:txBody>
+      </p:sp>
+      <p:sp>
+        <p:nvSpPr>
+          <p:cNvPr id="17" name="TextBox 16"/>
+          <p:cNvSpPr txBox="1"/>
+          <p:nvPr/>
+        </p:nvSpPr>
+        <p:spPr>
+          <a:xfrm>
+            <a:off x="6583680" y="1764792"/>
+            <a:ext cx="2926080" cy="320040"/>
+          </a:xfrm>
+          <a:prstGeom prst="rect">
+            <a:avLst/>
+          </a:prstGeom>
+          <a:noFill/>
+        </p:spPr>
+        <p:txBody>
+          <a:bodyPr wrap="none">
+            <a:spAutoFit/>
+          </a:bodyPr>
+          <a:lstStyle/>
+          <a:p>
+            <a:pPr algn="l"/>
+            <a:r>
+              <a:rPr sz="1200" b="0" i="0">
+                <a:solidFill>
+                  <a:srgbClr val="FFFFFF"/>
+                </a:solidFill>
+              </a:rPr>
+              <a:t>revenue_million</a:t>
+            </a:r>
+          </a:p>
+        </p:txBody>
+      </p:sp>
+      <p:sp>
+        <p:nvSpPr>
+          <p:cNvPr id="18" name="TextBox 17"/>
+          <p:cNvSpPr txBox="1"/>
+          <p:nvPr/>
+        </p:nvSpPr>
+        <p:spPr>
+          <a:xfrm>
+            <a:off x="11064240" y="1764792"/>
+            <a:ext cx="685800" cy="320040"/>
+          </a:xfrm>
+          <a:prstGeom prst="rect">
+            <a:avLst/>
+          </a:prstGeom>
+          <a:noFill/>
+        </p:spPr>
+        <p:txBody>
+          <a:bodyPr wrap="none">
+            <a:spAutoFit/>
+          </a:bodyPr>
+          <a:lstStyle/>
+          <a:p>
+            <a:pPr algn="l"/>
+            <a:r>
+              <a:rPr sz="1200" b="1" i="0">
+                <a:solidFill>
+                  <a:srgbClr val="2ECC71"/>
+                </a:solidFill>
+              </a:rPr>
+              <a:t>ρ=0.45</a:t>
+            </a:r>
+          </a:p>
+        </p:txBody>
+      </p:sp>
+      <p:sp>
+        <p:nvSpPr>
+          <p:cNvPr id="19" name="Rectangle 18"/>
+          <p:cNvSpPr/>
+          <p:nvPr/>
+        </p:nvSpPr>
+        <p:spPr>
+          <a:xfrm>
+            <a:off x="6537960" y="2350008"/>
+            <a:ext cx="3474720" cy="365760"/>
+          </a:xfrm>
+          <a:prstGeom prst="rect">
+            <a:avLst/>
+          </a:prstGeom>
+          <a:solidFill>
+            <a:srgbClr val="2ECC71"/>
+          </a:solidFill>
+          <a:ln>
+            <a:noFill/>
+          </a:ln>
+        </p:spPr>
+        <p:style>
+          <a:lnRef idx="1">
+            <a:schemeClr val="accent1"/>
+          </a:lnRef>
+          <a:fillRef idx="3">
+            <a:schemeClr val="accent1"/>
+          </a:fillRef>
+          <a:effectRef idx="2">
+            <a:schemeClr val="accent1"/>
+          </a:effectRef>
+          <a:fontRef idx="minor">
+            <a:schemeClr val="lt1"/>
+          </a:fontRef>
+        </p:style>
+        <p:txBody>
+          <a:bodyPr rtlCol="0" anchor="ctr"/>
+          <a:lstStyle/>
+          <a:p>
+            <a:pPr algn="ctr"/>
+          </a:p>
+        </p:txBody>
+      </p:sp>
+      <p:sp>
+        <p:nvSpPr>
+          <p:cNvPr id="20" name="TextBox 19"/>
+          <p:cNvSpPr txBox="1"/>
+          <p:nvPr/>
+        </p:nvSpPr>
+        <p:spPr>
+          <a:xfrm>
+            <a:off x="6583680" y="2423160"/>
+            <a:ext cx="2926080" cy="320040"/>
+          </a:xfrm>
+          <a:prstGeom prst="rect">
+            <a:avLst/>
+          </a:prstGeom>
+          <a:noFill/>
+        </p:spPr>
+        <p:txBody>
+          <a:bodyPr wrap="none">
+            <a:spAutoFit/>
+          </a:bodyPr>
+          <a:lstStyle/>
+          <a:p>
+            <a:pPr algn="l"/>
+            <a:r>
+              <a:rPr sz="1200" b="0" i="0">
+                <a:solidFill>
+                  <a:srgbClr val="FFFFFF"/>
+                </a:solidFill>
+              </a:rPr>
+              <a:t>product_traction_users</a:t>
+            </a:r>
+          </a:p>
+        </p:txBody>
+      </p:sp>
+      <p:sp>
+        <p:nvSpPr>
+          <p:cNvPr id="21" name="TextBox 20"/>
+          <p:cNvSpPr txBox="1"/>
+          <p:nvPr/>
+        </p:nvSpPr>
+        <p:spPr>
+          <a:xfrm>
+            <a:off x="11064240" y="2423160"/>
+            <a:ext cx="685800" cy="320040"/>
+          </a:xfrm>
+          <a:prstGeom prst="rect">
+            <a:avLst/>
+          </a:prstGeom>
+          <a:noFill/>
+        </p:spPr>
+        <p:txBody>
+          <a:bodyPr wrap="none">
+            <a:spAutoFit/>
+          </a:bodyPr>
+          <a:lstStyle/>
+          <a:p>
+            <a:pPr algn="l"/>
+            <a:r>
+              <a:rPr sz="1200" b="1" i="0">
+                <a:solidFill>
+                  <a:srgbClr val="2ECC71"/>
+                </a:solidFill>
+              </a:rPr>
+              <a:t>ρ=0.38</a:t>
+            </a:r>
+          </a:p>
+        </p:txBody>
+      </p:sp>
+      <p:sp>
+        <p:nvSpPr>
+          <p:cNvPr id="22" name="Rectangle 21"/>
+          <p:cNvSpPr/>
+          <p:nvPr/>
+        </p:nvSpPr>
+        <p:spPr>
+          <a:xfrm>
+            <a:off x="6537960" y="3008376"/>
+            <a:ext cx="274320" cy="365760"/>
+          </a:xfrm>
+          <a:prstGeom prst="rect">
+            <a:avLst/>
+          </a:prstGeom>
+          <a:solidFill>
+            <a:srgbClr val="CCCCCC"/>
+          </a:solidFill>
+          <a:ln>
+            <a:noFill/>
+          </a:ln>
+        </p:spPr>
+        <p:style>
+          <a:lnRef idx="1">
+            <a:schemeClr val="accent1"/>
+          </a:lnRef>
+          <a:fillRef idx="3">
+            <a:schemeClr val="accent1"/>
+          </a:fillRef>
+          <a:effectRef idx="2">
+            <a:schemeClr val="accent1"/>
+          </a:effectRef>
+          <a:fontRef idx="minor">
+            <a:schemeClr val="lt1"/>
+          </a:fontRef>
+        </p:style>
+        <p:txBody>
+          <a:bodyPr rtlCol="0" anchor="ctr"/>
+          <a:lstStyle/>
+          <a:p>
+            <a:pPr algn="ctr"/>
+          </a:p>
+        </p:txBody>
+      </p:sp>
+      <p:sp>
+        <p:nvSpPr>
+          <p:cNvPr id="23" name="TextBox 22"/>
+          <p:cNvSpPr txBox="1"/>
+          <p:nvPr/>
+        </p:nvSpPr>
+        <p:spPr>
+          <a:xfrm>
+            <a:off x="6583680" y="3081528"/>
+            <a:ext cx="2926080" cy="320040"/>
+          </a:xfrm>
+          <a:prstGeom prst="rect">
+            <a:avLst/>
+          </a:prstGeom>
+          <a:noFill/>
+        </p:spPr>
+        <p:txBody>
+          <a:bodyPr wrap="none">
+            <a:spAutoFit/>
+          </a:bodyPr>
+          <a:lstStyle/>
+          <a:p>
+            <a:pPr algn="l"/>
+            <a:r>
+              <a:rPr sz="1200" b="0" i="0">
+                <a:solidFill>
+                  <a:srgbClr val="FFFFFF"/>
+                </a:solidFill>
+              </a:rPr>
+              <a:t>burn_rate_million</a:t>
+            </a:r>
+          </a:p>
+        </p:txBody>
+      </p:sp>
+      <p:sp>
+        <p:nvSpPr>
+          <p:cNvPr id="24" name="TextBox 23"/>
+          <p:cNvSpPr txBox="1"/>
+          <p:nvPr/>
+        </p:nvSpPr>
+        <p:spPr>
+          <a:xfrm>
+            <a:off x="11064240" y="3081528"/>
+            <a:ext cx="685800" cy="320040"/>
+          </a:xfrm>
+          <a:prstGeom prst="rect">
+            <a:avLst/>
+          </a:prstGeom>
+          <a:noFill/>
+        </p:spPr>
+        <p:txBody>
+          <a:bodyPr wrap="none">
+            <a:spAutoFit/>
+          </a:bodyPr>
+          <a:lstStyle/>
+          <a:p>
+            <a:pPr algn="l"/>
+            <a:r>
+              <a:rPr sz="1200" b="0" i="0">
+                <a:solidFill>
+                  <a:srgbClr val="CCCCCC"/>
+                </a:solidFill>
+              </a:rPr>
+              <a:t>ρ=0.03</a:t>
+            </a:r>
+          </a:p>
+        </p:txBody>
+      </p:sp>
+      <p:sp>
+        <p:nvSpPr>
+          <p:cNvPr id="25" name="Rectangle 24"/>
+          <p:cNvSpPr/>
+          <p:nvPr/>
+        </p:nvSpPr>
+        <p:spPr>
+          <a:xfrm>
+            <a:off x="6537960" y="3666744"/>
+            <a:ext cx="182880" cy="365760"/>
+          </a:xfrm>
+          <a:prstGeom prst="rect">
+            <a:avLst/>
+          </a:prstGeom>
+          <a:solidFill>
+            <a:srgbClr val="CCCCCC"/>
+          </a:solidFill>
+          <a:ln>
+            <a:noFill/>
+          </a:ln>
+        </p:spPr>
+        <p:style>
+          <a:lnRef idx="1">
+            <a:schemeClr val="accent1"/>
+          </a:lnRef>
+          <a:fillRef idx="3">
+            <a:schemeClr val="accent1"/>
+          </a:fillRef>
+          <a:effectRef idx="2">
+            <a:schemeClr val="accent1"/>
+          </a:effectRef>
+          <a:fontRef idx="minor">
+            <a:schemeClr val="lt1"/>
+          </a:fontRef>
+        </p:style>
+        <p:txBody>
+          <a:bodyPr rtlCol="0" anchor="ctr"/>
+          <a:lstStyle/>
+          <a:p>
+            <a:pPr algn="ctr"/>
+          </a:p>
+        </p:txBody>
+      </p:sp>
+      <p:sp>
+        <p:nvSpPr>
+          <p:cNvPr id="26" name="TextBox 25"/>
+          <p:cNvSpPr txBox="1"/>
+          <p:nvPr/>
+        </p:nvSpPr>
+        <p:spPr>
+          <a:xfrm>
+            <a:off x="6583680" y="3739896"/>
+            <a:ext cx="2926080" cy="320040"/>
+          </a:xfrm>
+          <a:prstGeom prst="rect">
+            <a:avLst/>
+          </a:prstGeom>
+          <a:noFill/>
+        </p:spPr>
+        <p:txBody>
+          <a:bodyPr wrap="none">
+            <a:spAutoFit/>
+          </a:bodyPr>
+          <a:lstStyle/>
+          <a:p>
+            <a:pPr algn="l"/>
+            <a:r>
+              <a:rPr sz="1200" b="0" i="0">
+                <a:solidFill>
+                  <a:srgbClr val="FFFFFF"/>
+                </a:solidFill>
+              </a:rPr>
+              <a:t>market_size_billion</a:t>
+            </a:r>
+          </a:p>
+        </p:txBody>
+      </p:sp>
+      <p:sp>
+        <p:nvSpPr>
+          <p:cNvPr id="27" name="TextBox 26"/>
+          <p:cNvSpPr txBox="1"/>
+          <p:nvPr/>
+        </p:nvSpPr>
+        <p:spPr>
+          <a:xfrm>
+            <a:off x="11064240" y="3739896"/>
+            <a:ext cx="685800" cy="320040"/>
+          </a:xfrm>
+          <a:prstGeom prst="rect">
+            <a:avLst/>
+          </a:prstGeom>
+          <a:noFill/>
+        </p:spPr>
+        <p:txBody>
+          <a:bodyPr wrap="none">
+            <a:spAutoFit/>
+          </a:bodyPr>
+          <a:lstStyle/>
+          <a:p>
+            <a:pPr algn="l"/>
+            <a:r>
+              <a:rPr sz="1200" b="0" i="0">
+                <a:solidFill>
+                  <a:srgbClr val="CCCCCC"/>
+                </a:solidFill>
+              </a:rPr>
+              <a:t>ρ=0.02</a:t>
+            </a:r>
+          </a:p>
+        </p:txBody>
+      </p:sp>
+      <p:sp>
+        <p:nvSpPr>
+          <p:cNvPr id="28" name="Rectangle 27"/>
+          <p:cNvSpPr/>
+          <p:nvPr/>
+        </p:nvSpPr>
+        <p:spPr>
+          <a:xfrm>
+            <a:off x="6537960" y="4325112"/>
+            <a:ext cx="91440" cy="365760"/>
+          </a:xfrm>
+          <a:prstGeom prst="rect">
+            <a:avLst/>
+          </a:prstGeom>
+          <a:solidFill>
+            <a:srgbClr val="CCCCCC"/>
+          </a:solidFill>
+          <a:ln>
+            <a:noFill/>
+          </a:ln>
+        </p:spPr>
+        <p:style>
+          <a:lnRef idx="1">
+            <a:schemeClr val="accent1"/>
+          </a:lnRef>
+          <a:fillRef idx="3">
+            <a:schemeClr val="accent1"/>
+          </a:fillRef>
+          <a:effectRef idx="2">
+            <a:schemeClr val="accent1"/>
+          </a:effectRef>
+          <a:fontRef idx="minor">
+            <a:schemeClr val="lt1"/>
+          </a:fontRef>
+        </p:style>
+        <p:txBody>
+          <a:bodyPr rtlCol="0" anchor="ctr"/>
+          <a:lstStyle/>
+          <a:p>
+            <a:pPr algn="ctr"/>
+          </a:p>
+        </p:txBody>
+      </p:sp>
+      <p:sp>
+        <p:nvSpPr>
+          <p:cNvPr id="29" name="TextBox 28"/>
+          <p:cNvSpPr txBox="1"/>
+          <p:nvPr/>
+        </p:nvSpPr>
+        <p:spPr>
+          <a:xfrm>
+            <a:off x="6583680" y="4398264"/>
+            <a:ext cx="2926080" cy="320040"/>
+          </a:xfrm>
+          <a:prstGeom prst="rect">
+            <a:avLst/>
+          </a:prstGeom>
+          <a:noFill/>
+        </p:spPr>
+        <p:txBody>
+          <a:bodyPr wrap="none">
+            <a:spAutoFit/>
+          </a:bodyPr>
+          <a:lstStyle/>
+          <a:p>
+            <a:pPr algn="l"/>
+            <a:r>
+              <a:rPr sz="1200" b="0" i="0">
+                <a:solidFill>
+                  <a:srgbClr val="FFFFFF"/>
+                </a:solidFill>
+              </a:rPr>
+              <a:t>team_size</a:t>
+            </a:r>
+          </a:p>
+        </p:txBody>
+      </p:sp>
+      <p:sp>
+        <p:nvSpPr>
+          <p:cNvPr id="30" name="TextBox 29"/>
+          <p:cNvSpPr txBox="1"/>
+          <p:nvPr/>
+        </p:nvSpPr>
+        <p:spPr>
+          <a:xfrm>
+            <a:off x="11064240" y="4398264"/>
+            <a:ext cx="685800" cy="320040"/>
+          </a:xfrm>
+          <a:prstGeom prst="rect">
+            <a:avLst/>
+          </a:prstGeom>
+          <a:noFill/>
+        </p:spPr>
+        <p:txBody>
+          <a:bodyPr wrap="none">
+            <a:spAutoFit/>
+          </a:bodyPr>
+          <a:lstStyle/>
+          <a:p>
+            <a:pPr algn="l"/>
+            <a:r>
+              <a:rPr sz="1200" b="0" i="0">
+                <a:solidFill>
+                  <a:srgbClr val="CCCCCC"/>
+                </a:solidFill>
+              </a:rPr>
+              <a:t>ρ=0.01</a:t>
+            </a:r>
+          </a:p>
+        </p:txBody>
+      </p:sp>
+      <p:sp>
+        <p:nvSpPr>
+          <p:cNvPr id="31" name="Rectangle 30"/>
+          <p:cNvSpPr/>
+          <p:nvPr/>
+        </p:nvSpPr>
+        <p:spPr>
+          <a:xfrm>
+            <a:off x="6537960" y="4983479"/>
+            <a:ext cx="0" cy="365760"/>
+          </a:xfrm>
+          <a:prstGeom prst="rect">
+            <a:avLst/>
+          </a:prstGeom>
+          <a:solidFill>
+            <a:srgbClr val="CCCCCC"/>
+          </a:solidFill>
+          <a:ln>
+            <a:noFill/>
+          </a:ln>
+        </p:spPr>
+        <p:style>
+          <a:lnRef idx="1">
+            <a:schemeClr val="accent1"/>
+          </a:lnRef>
+          <a:fillRef idx="3">
+            <a:schemeClr val="accent1"/>
+          </a:fillRef>
+          <a:effectRef idx="2">
+            <a:schemeClr val="accent1"/>
+          </a:effectRef>
+          <a:fontRef idx="minor">
+            <a:schemeClr val="lt1"/>
+          </a:fontRef>
+        </p:style>
+        <p:txBody>
+          <a:bodyPr rtlCol="0" anchor="ctr"/>
+          <a:lstStyle/>
+          <a:p>
+            <a:pPr algn="ctr"/>
+          </a:p>
+        </p:txBody>
+      </p:sp>
+      <p:sp>
+        <p:nvSpPr>
+          <p:cNvPr id="32" name="TextBox 31"/>
+          <p:cNvSpPr txBox="1"/>
+          <p:nvPr/>
+        </p:nvSpPr>
+        <p:spPr>
+          <a:xfrm>
+            <a:off x="6583680" y="5056631"/>
+            <a:ext cx="2926080" cy="320040"/>
+          </a:xfrm>
+          <a:prstGeom prst="rect">
+            <a:avLst/>
+          </a:prstGeom>
+          <a:noFill/>
+        </p:spPr>
+        <p:txBody>
+          <a:bodyPr wrap="none">
+            <a:spAutoFit/>
+          </a:bodyPr>
+          <a:lstStyle/>
+          <a:p>
+            <a:pPr algn="l"/>
+            <a:r>
+              <a:rPr sz="1200" b="0" i="0">
+                <a:solidFill>
+                  <a:srgbClr val="FFFFFF"/>
+                </a:solidFill>
+              </a:rPr>
+              <a:t>founder_experience</a:t>
+            </a:r>
+          </a:p>
+        </p:txBody>
+      </p:sp>
+      <p:sp>
+        <p:nvSpPr>
+          <p:cNvPr id="33" name="TextBox 32"/>
+          <p:cNvSpPr txBox="1"/>
+          <p:nvPr/>
+        </p:nvSpPr>
+        <p:spPr>
+          <a:xfrm>
+            <a:off x="11064240" y="5056631"/>
+            <a:ext cx="685800" cy="320040"/>
+          </a:xfrm>
+          <a:prstGeom prst="rect">
+            <a:avLst/>
+          </a:prstGeom>
+          <a:noFill/>
+        </p:spPr>
+        <p:txBody>
+          <a:bodyPr wrap="none">
+            <a:spAutoFit/>
+          </a:bodyPr>
+          <a:lstStyle/>
+          <a:p>
+            <a:pPr algn="l"/>
+            <a:r>
+              <a:rPr sz="1200" b="0" i="0">
+                <a:solidFill>
+                  <a:srgbClr val="CCCCCC"/>
+                </a:solidFill>
+              </a:rPr>
+              <a:t>ρ=0.00</a:t>
+            </a:r>
+          </a:p>
+        </p:txBody>
+      </p:sp>
+      <p:sp>
+        <p:nvSpPr>
+          <p:cNvPr id="34" name="Rectangle 33"/>
+          <p:cNvSpPr/>
+          <p:nvPr/>
+        </p:nvSpPr>
+        <p:spPr>
+          <a:xfrm>
+            <a:off x="6537960" y="5641848"/>
+            <a:ext cx="0" cy="365760"/>
+          </a:xfrm>
+          <a:prstGeom prst="rect">
+            <a:avLst/>
+          </a:prstGeom>
+          <a:solidFill>
+            <a:srgbClr val="CCCCCC"/>
+          </a:solidFill>
+          <a:ln>
+            <a:noFill/>
+          </a:ln>
+        </p:spPr>
+        <p:style>
+          <a:lnRef idx="1">
+            <a:schemeClr val="accent1"/>
+          </a:lnRef>
+          <a:fillRef idx="3">
+            <a:schemeClr val="accent1"/>
+          </a:fillRef>
+          <a:effectRef idx="2">
+            <a:schemeClr val="accent1"/>
+          </a:effectRef>
+          <a:fontRef idx="minor">
+            <a:schemeClr val="lt1"/>
+          </a:fontRef>
+        </p:style>
+        <p:txBody>
+          <a:bodyPr rtlCol="0" anchor="ctr"/>
+          <a:lstStyle/>
+          <a:p>
+            <a:pPr algn="ctr"/>
+          </a:p>
+        </p:txBody>
+      </p:sp>
+      <p:sp>
+        <p:nvSpPr>
+          <p:cNvPr id="35" name="TextBox 34"/>
+          <p:cNvSpPr txBox="1"/>
+          <p:nvPr/>
+        </p:nvSpPr>
+        <p:spPr>
+          <a:xfrm>
+            <a:off x="6583680" y="5715000"/>
+            <a:ext cx="2926080" cy="320040"/>
+          </a:xfrm>
+          <a:prstGeom prst="rect">
+            <a:avLst/>
+          </a:prstGeom>
+          <a:noFill/>
+        </p:spPr>
+        <p:txBody>
+          <a:bodyPr wrap="none">
+            <a:spAutoFit/>
+          </a:bodyPr>
+          <a:lstStyle/>
+          <a:p>
+            <a:pPr algn="l"/>
+            <a:r>
+              <a:rPr sz="1200" b="0" i="0">
+                <a:solidFill>
+                  <a:srgbClr val="FFFFFF"/>
+                </a:solidFill>
+              </a:rPr>
+              <a:t>funding_rounds</a:t>
+            </a:r>
+          </a:p>
+        </p:txBody>
+      </p:sp>
+      <p:sp>
+        <p:nvSpPr>
+          <p:cNvPr id="36" name="TextBox 35"/>
+          <p:cNvSpPr txBox="1"/>
+          <p:nvPr/>
+        </p:nvSpPr>
+        <p:spPr>
+          <a:xfrm>
+            <a:off x="11064240" y="5715000"/>
+            <a:ext cx="685800" cy="320040"/>
+          </a:xfrm>
+          <a:prstGeom prst="rect">
+            <a:avLst/>
+          </a:prstGeom>
+          <a:noFill/>
+        </p:spPr>
+        <p:txBody>
+          <a:bodyPr wrap="none">
+            <a:spAutoFit/>
+          </a:bodyPr>
+          <a:lstStyle/>
+          <a:p>
+            <a:pPr algn="l"/>
+            <a:r>
+              <a:rPr sz="1200" b="0" i="0">
+                <a:solidFill>
+                  <a:srgbClr val="CCCCCC"/>
+                </a:solidFill>
+              </a:rPr>
+              <a:t>ρ=0.00</a:t>
+            </a:r>
+          </a:p>
+        </p:txBody>
+      </p:sp>
+      <p:sp>
+        <p:nvSpPr>
+          <p:cNvPr id="37" name="TextBox 36"/>
+          <p:cNvSpPr txBox="1"/>
+          <p:nvPr/>
+        </p:nvSpPr>
+        <p:spPr>
+          <a:xfrm>
+            <a:off x="274320" y="6492240"/>
+            <a:ext cx="11612880" cy="320040"/>
+          </a:xfrm>
+          <a:prstGeom prst="rect">
+            <a:avLst/>
+          </a:prstGeom>
+          <a:noFill/>
+        </p:spPr>
+        <p:txBody>
+          <a:bodyPr wrap="none">
+            <a:spAutoFit/>
+          </a:bodyPr>
+          <a:lstStyle/>
+          <a:p>
+            <a:pPr algn="l"/>
+            <a:r>
+              <a:rPr sz="1200" b="0" i="1">
+                <a:solidFill>
+                  <a:srgbClr val="CCCCCC"/>
+                </a:solidFill>
+              </a:rPr>
+              <a:t>This finding recurs in supervised coefficients and unsupervised cluster profiles.</a:t>
             </a:r>
           </a:p>
         </p:txBody>
@@ -4650,7 +6458,7 @@
         <p:spPr>
           <a:xfrm>
             <a:off x="0" y="0"/>
-            <a:ext cx="12188952" cy="1051560"/>
+            <a:ext cx="12188952" cy="960120"/>
           </a:xfrm>
           <a:prstGeom prst="rect">
             <a:avLst/>
@@ -4692,28 +6500,28 @@
         </p:nvSpPr>
         <p:spPr>
           <a:xfrm>
-            <a:off x="320040" y="164592"/>
-            <a:ext cx="11430000" cy="777240"/>
-          </a:xfrm>
-          <a:prstGeom prst="rect">
-            <a:avLst/>
-          </a:prstGeom>
-          <a:noFill/>
-        </p:spPr>
-        <p:txBody>
-          <a:bodyPr wrap="square">
+            <a:off x="274320" y="109728"/>
+            <a:ext cx="11612880" cy="777240"/>
+          </a:xfrm>
+          <a:prstGeom prst="rect">
+            <a:avLst/>
+          </a:prstGeom>
+          <a:noFill/>
+        </p:spPr>
+        <p:txBody>
+          <a:bodyPr wrap="none">
             <a:spAutoFit/>
           </a:bodyPr>
           <a:lstStyle/>
           <a:p>
             <a:pPr algn="l"/>
             <a:r>
-              <a:rPr sz="3000" b="1" i="0">
+              <a:rPr sz="2800" b="1" i="0">
                 <a:solidFill>
                   <a:srgbClr val="FFFFFF"/>
                 </a:solidFill>
               </a:rPr>
-              <a:t>Part 1 — Supervised Learning: Methodology</a:t>
+              <a:t>Part 1 — Supervised Learning: Pipeline &amp; Tuning</a:t>
             </a:r>
           </a:p>
         </p:txBody>
@@ -4726,8 +6534,8 @@
         </p:nvSpPr>
         <p:spPr>
           <a:xfrm>
-            <a:off x="320040" y="1234440"/>
-            <a:ext cx="64008" cy="5029200"/>
+            <a:off x="274320" y="1097280"/>
+            <a:ext cx="54864" cy="5394960"/>
           </a:xfrm>
           <a:prstGeom prst="rect">
             <a:avLst/>
@@ -4769,28 +6577,28 @@
         </p:nvSpPr>
         <p:spPr>
           <a:xfrm>
-            <a:off x="548640" y="1234440"/>
-            <a:ext cx="10972800" cy="566928"/>
-          </a:xfrm>
-          <a:prstGeom prst="rect">
-            <a:avLst/>
-          </a:prstGeom>
-          <a:noFill/>
-        </p:spPr>
-        <p:txBody>
-          <a:bodyPr wrap="square">
+            <a:off x="411480" y="1097280"/>
+            <a:ext cx="5394960" cy="457200"/>
+          </a:xfrm>
+          <a:prstGeom prst="rect">
+            <a:avLst/>
+          </a:prstGeom>
+          <a:noFill/>
+        </p:spPr>
+        <p:txBody>
+          <a:bodyPr wrap="none">
             <a:spAutoFit/>
           </a:bodyPr>
           <a:lstStyle/>
           <a:p>
             <a:pPr algn="l"/>
             <a:r>
-              <a:rPr sz="2000" b="0" i="0">
+              <a:rPr sz="1700" b="0" i="0">
                 <a:solidFill>
                   <a:srgbClr val="FFFFFF"/>
                 </a:solidFill>
               </a:rPr>
-              <a:t>4 classifiers evaluated:   k-NN  ·  Decision Tree  ·  Logistic Regression  ·  LDA</a:t>
+              <a:t>4 classifiers:  k-NN  ·  Decision Tree  ·  Logistic Regression  ·  LDA</a:t>
             </a:r>
           </a:p>
         </p:txBody>
@@ -4803,28 +6611,28 @@
         </p:nvSpPr>
         <p:spPr>
           <a:xfrm>
-            <a:off x="548640" y="1801368"/>
-            <a:ext cx="10972800" cy="566928"/>
-          </a:xfrm>
-          <a:prstGeom prst="rect">
-            <a:avLst/>
-          </a:prstGeom>
-          <a:noFill/>
-        </p:spPr>
-        <p:txBody>
-          <a:bodyPr wrap="square">
+            <a:off x="411480" y="1755648"/>
+            <a:ext cx="5394960" cy="457200"/>
+          </a:xfrm>
+          <a:prstGeom prst="rect">
+            <a:avLst/>
+          </a:prstGeom>
+          <a:noFill/>
+        </p:spPr>
+        <p:txBody>
+          <a:bodyPr wrap="none">
             <a:spAutoFit/>
           </a:bodyPr>
           <a:lstStyle/>
           <a:p>
             <a:pPr algn="l"/>
             <a:r>
-              <a:rPr sz="2000" b="0" i="0">
+              <a:rPr sz="1700" b="0" i="0">
                 <a:solidFill>
                   <a:srgbClr val="FFFFFF"/>
                 </a:solidFill>
               </a:rPr>
-              <a:t>Pipeline:   Preprocessor  →  Classifier   (all inside GridSearchCV)</a:t>
+              <a:t>Each wrapped in Pipeline:</a:t>
             </a:r>
           </a:p>
         </p:txBody>
@@ -4837,134 +6645,337 @@
         </p:nvSpPr>
         <p:spPr>
           <a:xfrm>
-            <a:off x="548640" y="2368296"/>
-            <a:ext cx="10972800" cy="566928"/>
-          </a:xfrm>
-          <a:prstGeom prst="rect">
-            <a:avLst/>
-          </a:prstGeom>
-          <a:noFill/>
-        </p:spPr>
-        <p:txBody>
-          <a:bodyPr wrap="square">
+            <a:off x="411480" y="2231136"/>
+            <a:ext cx="5394960" cy="457200"/>
+          </a:xfrm>
+          <a:prstGeom prst="rect">
+            <a:avLst/>
+          </a:prstGeom>
+          <a:noFill/>
+        </p:spPr>
+        <p:txBody>
+          <a:bodyPr wrap="none">
             <a:spAutoFit/>
           </a:bodyPr>
           <a:lstStyle/>
           <a:p>
             <a:pPr algn="l"/>
             <a:r>
-              <a:rPr sz="2000" b="0" i="0">
+              <a:rPr sz="1500" b="0" i="1">
+                <a:solidFill>
+                  <a:srgbClr val="CCCCCC"/>
+                </a:solidFill>
+              </a:rPr>
+              <a:t>    · Preprocessor  →  Classifier  (leakage-free)</a:t>
+            </a:r>
+          </a:p>
+        </p:txBody>
+      </p:sp>
+      <p:sp>
+        <p:nvSpPr>
+          <p:cNvPr id="8" name="TextBox 7"/>
+          <p:cNvSpPr txBox="1"/>
+          <p:nvPr/>
+        </p:nvSpPr>
+        <p:spPr>
+          <a:xfrm>
+            <a:off x="411480" y="2816352"/>
+            <a:ext cx="5394960" cy="457200"/>
+          </a:xfrm>
+          <a:prstGeom prst="rect">
+            <a:avLst/>
+          </a:prstGeom>
+          <a:noFill/>
+        </p:spPr>
+        <p:txBody>
+          <a:bodyPr wrap="none">
+            <a:spAutoFit/>
+          </a:bodyPr>
+          <a:lstStyle/>
+          <a:p>
+            <a:pPr algn="l"/>
+            <a:r>
+              <a:rPr sz="1700" b="0" i="0">
                 <a:solidFill>
                   <a:srgbClr val="FFFFFF"/>
                 </a:solidFill>
               </a:rPr>
-              <a:t>Tuning: 5-fold StratifiedKFold  —  each model tuned before comparison</a:t>
-            </a:r>
-          </a:p>
-        </p:txBody>
-      </p:sp>
-      <p:sp>
-        <p:nvSpPr>
-          <p:cNvPr id="8" name="TextBox 7"/>
-          <p:cNvSpPr txBox="1"/>
-          <p:nvPr/>
-        </p:nvSpPr>
-        <p:spPr>
-          <a:xfrm>
-            <a:off x="548640" y="2935224"/>
-            <a:ext cx="10972800" cy="502920"/>
-          </a:xfrm>
-          <a:prstGeom prst="rect">
-            <a:avLst/>
-          </a:prstGeom>
-          <a:noFill/>
-        </p:spPr>
-        <p:txBody>
-          <a:bodyPr wrap="square">
+              <a:t>Tuning: 5-fold StratifiedKFold + GridSearchCV</a:t>
+            </a:r>
+          </a:p>
+        </p:txBody>
+      </p:sp>
+      <p:sp>
+        <p:nvSpPr>
+          <p:cNvPr id="9" name="TextBox 8"/>
+          <p:cNvSpPr txBox="1"/>
+          <p:nvPr/>
+        </p:nvSpPr>
+        <p:spPr>
+          <a:xfrm>
+            <a:off x="411480" y="3291840"/>
+            <a:ext cx="5394960" cy="457200"/>
+          </a:xfrm>
+          <a:prstGeom prst="rect">
+            <a:avLst/>
+          </a:prstGeom>
+          <a:noFill/>
+        </p:spPr>
+        <p:txBody>
+          <a:bodyPr wrap="none">
             <a:spAutoFit/>
           </a:bodyPr>
           <a:lstStyle/>
           <a:p>
             <a:pPr algn="l"/>
             <a:r>
-              <a:rPr sz="1700" b="0" i="1">
+              <a:rPr sz="1500" b="0" i="1">
                 <a:solidFill>
                   <a:srgbClr val="CCCCCC"/>
                 </a:solidFill>
               </a:rPr>
-              <a:t>  · k-NN: n_neighbors  ·  DT: max_depth, min_samples_split  ·  LR: max_iter=1000</a:t>
-            </a:r>
-          </a:p>
-        </p:txBody>
-      </p:sp>
-      <p:sp>
-        <p:nvSpPr>
-          <p:cNvPr id="9" name="TextBox 8"/>
-          <p:cNvSpPr txBox="1"/>
-          <p:nvPr/>
-        </p:nvSpPr>
-        <p:spPr>
-          <a:xfrm>
-            <a:off x="548640" y="3410712"/>
-            <a:ext cx="10972800" cy="566928"/>
-          </a:xfrm>
-          <a:prstGeom prst="rect">
-            <a:avLst/>
-          </a:prstGeom>
-          <a:noFill/>
-        </p:spPr>
-        <p:txBody>
-          <a:bodyPr wrap="square">
+              <a:t>    · k-NN: n_neighbors (subsample 5 000 rows for speed)</a:t>
+            </a:r>
+          </a:p>
+        </p:txBody>
+      </p:sp>
+      <p:sp>
+        <p:nvSpPr>
+          <p:cNvPr id="10" name="TextBox 9"/>
+          <p:cNvSpPr txBox="1"/>
+          <p:nvPr/>
+        </p:nvSpPr>
+        <p:spPr>
+          <a:xfrm>
+            <a:off x="411480" y="3694176"/>
+            <a:ext cx="5394960" cy="457200"/>
+          </a:xfrm>
+          <a:prstGeom prst="rect">
+            <a:avLst/>
+          </a:prstGeom>
+          <a:noFill/>
+        </p:spPr>
+        <p:txBody>
+          <a:bodyPr wrap="none">
             <a:spAutoFit/>
           </a:bodyPr>
           <a:lstStyle/>
           <a:p>
             <a:pPr algn="l"/>
             <a:r>
-              <a:rPr sz="2000" b="0" i="0">
+              <a:rPr sz="1500" b="0" i="1">
+                <a:solidFill>
+                  <a:srgbClr val="CCCCCC"/>
+                </a:solidFill>
+              </a:rPr>
+              <a:t>    · DT: max_depth, min_samples_split</a:t>
+            </a:r>
+          </a:p>
+        </p:txBody>
+      </p:sp>
+      <p:sp>
+        <p:nvSpPr>
+          <p:cNvPr id="11" name="TextBox 10"/>
+          <p:cNvSpPr txBox="1"/>
+          <p:nvPr/>
+        </p:nvSpPr>
+        <p:spPr>
+          <a:xfrm>
+            <a:off x="411480" y="4096512"/>
+            <a:ext cx="5394960" cy="457200"/>
+          </a:xfrm>
+          <a:prstGeom prst="rect">
+            <a:avLst/>
+          </a:prstGeom>
+          <a:noFill/>
+        </p:spPr>
+        <p:txBody>
+          <a:bodyPr wrap="none">
+            <a:spAutoFit/>
+          </a:bodyPr>
+          <a:lstStyle/>
+          <a:p>
+            <a:pPr algn="l"/>
+            <a:r>
+              <a:rPr sz="1500" b="0" i="1">
+                <a:solidFill>
+                  <a:srgbClr val="CCCCCC"/>
+                </a:solidFill>
+              </a:rPr>
+              <a:t>    · LR: max_iter=1000  (no C tuning)</a:t>
+            </a:r>
+          </a:p>
+        </p:txBody>
+      </p:sp>
+      <p:sp>
+        <p:nvSpPr>
+          <p:cNvPr id="12" name="TextBox 11"/>
+          <p:cNvSpPr txBox="1"/>
+          <p:nvPr/>
+        </p:nvSpPr>
+        <p:spPr>
+          <a:xfrm>
+            <a:off x="411480" y="4498848"/>
+            <a:ext cx="5394960" cy="457200"/>
+          </a:xfrm>
+          <a:prstGeom prst="rect">
+            <a:avLst/>
+          </a:prstGeom>
+          <a:noFill/>
+        </p:spPr>
+        <p:txBody>
+          <a:bodyPr wrap="none">
+            <a:spAutoFit/>
+          </a:bodyPr>
+          <a:lstStyle/>
+          <a:p>
+            <a:pPr algn="l"/>
+            <a:r>
+              <a:rPr sz="1500" b="0" i="1">
+                <a:solidFill>
+                  <a:srgbClr val="CCCCCC"/>
+                </a:solidFill>
+              </a:rPr>
+              <a:t>    · LDA: cross_val_score only</a:t>
+            </a:r>
+          </a:p>
+        </p:txBody>
+      </p:sp>
+      <p:sp>
+        <p:nvSpPr>
+          <p:cNvPr id="13" name="TextBox 12"/>
+          <p:cNvSpPr txBox="1"/>
+          <p:nvPr/>
+        </p:nvSpPr>
+        <p:spPr>
+          <a:xfrm>
+            <a:off x="411480" y="5084064"/>
+            <a:ext cx="5394960" cy="457200"/>
+          </a:xfrm>
+          <a:prstGeom prst="rect">
+            <a:avLst/>
+          </a:prstGeom>
+          <a:noFill/>
+        </p:spPr>
+        <p:txBody>
+          <a:bodyPr wrap="none">
+            <a:spAutoFit/>
+          </a:bodyPr>
+          <a:lstStyle/>
+          <a:p>
+            <a:pPr algn="l"/>
+            <a:r>
+              <a:rPr sz="1700" b="0" i="0">
                 <a:solidFill>
                   <a:srgbClr val="FFFFFF"/>
                 </a:solidFill>
               </a:rPr>
-              <a:t>Fair comparison: all models compared at their best configuration</a:t>
-            </a:r>
-          </a:p>
-        </p:txBody>
-      </p:sp>
-      <p:sp>
-        <p:nvSpPr>
-          <p:cNvPr id="10" name="TextBox 9"/>
-          <p:cNvSpPr txBox="1"/>
-          <p:nvPr/>
-        </p:nvSpPr>
-        <p:spPr>
-          <a:xfrm>
-            <a:off x="548640" y="3977640"/>
-            <a:ext cx="10972800" cy="566928"/>
-          </a:xfrm>
-          <a:prstGeom prst="rect">
-            <a:avLst/>
-          </a:prstGeom>
-          <a:noFill/>
-        </p:spPr>
-        <p:txBody>
-          <a:bodyPr wrap="square">
-            <a:spAutoFit/>
-          </a:bodyPr>
-          <a:lstStyle/>
-          <a:p>
-            <a:pPr algn="l"/>
-            <a:r>
-              <a:rPr sz="2000" b="0" i="0">
+              <a:t>Final evaluation on 20 000-row held-out test set</a:t>
+            </a:r>
+          </a:p>
+        </p:txBody>
+      </p:sp>
+      <p:sp>
+        <p:nvSpPr>
+          <p:cNvPr id="14" name="Rectangle 13"/>
+          <p:cNvSpPr/>
+          <p:nvPr/>
+        </p:nvSpPr>
+        <p:spPr>
+          <a:xfrm>
+            <a:off x="6400800" y="1097280"/>
+            <a:ext cx="5394960" cy="5394960"/>
+          </a:xfrm>
+          <a:prstGeom prst="rect">
+            <a:avLst/>
+          </a:prstGeom>
+          <a:solidFill>
+            <a:srgbClr val="16213E"/>
+          </a:solidFill>
+          <a:ln>
+            <a:noFill/>
+          </a:ln>
+        </p:spPr>
+        <p:style>
+          <a:lnRef idx="1">
+            <a:schemeClr val="accent1"/>
+          </a:lnRef>
+          <a:fillRef idx="3">
+            <a:schemeClr val="accent1"/>
+          </a:fillRef>
+          <a:effectRef idx="2">
+            <a:schemeClr val="accent1"/>
+          </a:effectRef>
+          <a:fontRef idx="minor">
+            <a:schemeClr val="lt1"/>
+          </a:fontRef>
+        </p:style>
+        <p:txBody>
+          <a:bodyPr rtlCol="0" anchor="ctr"/>
+          <a:lstStyle/>
+          <a:p>
+            <a:pPr algn="ctr"/>
+          </a:p>
+        </p:txBody>
+      </p:sp>
+      <p:sp>
+        <p:nvSpPr>
+          <p:cNvPr id="15" name="TextBox 14"/>
+          <p:cNvSpPr txBox="1"/>
+          <p:nvPr/>
+        </p:nvSpPr>
+        <p:spPr>
+          <a:xfrm>
+            <a:off x="6537960" y="1143000"/>
+            <a:ext cx="5120640" cy="457200"/>
+          </a:xfrm>
+          <a:prstGeom prst="rect">
+            <a:avLst/>
+          </a:prstGeom>
+          <a:noFill/>
+        </p:spPr>
+        <p:txBody>
+          <a:bodyPr wrap="none">
+            <a:spAutoFit/>
+          </a:bodyPr>
+          <a:lstStyle/>
+          <a:p>
+            <a:pPr algn="ctr"/>
+            <a:r>
+              <a:rPr sz="1500" b="1" i="0">
                 <a:solidFill>
                   <a:srgbClr val="FFFFFF"/>
                 </a:solidFill>
               </a:rPr>
-              <a:t>Final evaluation on held-out test set  (20 000 samples, never seen during training)</a:t>
-            </a:r>
-          </a:p>
-        </p:txBody>
-      </p:sp>
+              <a:t>GridSearchCV Tuning Detail</a:t>
+            </a:r>
+          </a:p>
+        </p:txBody>
+      </p:sp>
+      <p:pic>
+        <p:nvPicPr>
+          <p:cNvPr id="16" name="Picture 15" descr="model_comparison_1.png"/>
+          <p:cNvPicPr>
+            <a:picLocks noChangeAspect="1"/>
+          </p:cNvPicPr>
+          <p:nvPr/>
+        </p:nvPicPr>
+        <p:blipFill>
+          <a:blip r:embed="rId2"/>
+          <a:stretch>
+            <a:fillRect/>
+          </a:stretch>
+        </p:blipFill>
+        <p:spPr>
+          <a:xfrm>
+            <a:off x="6446520" y="1600200"/>
+            <a:ext cx="5486400" cy="2284077"/>
+          </a:xfrm>
+          <a:prstGeom prst="rect">
+            <a:avLst/>
+          </a:prstGeom>
+        </p:spPr>
+      </p:pic>
     </p:spTree>
   </p:cSld>
   <p:clrMapOvr>
@@ -5000,7 +7011,7 @@
         <p:spPr>
           <a:xfrm>
             <a:off x="0" y="0"/>
-            <a:ext cx="12188952" cy="1051560"/>
+            <a:ext cx="12188952" cy="960120"/>
           </a:xfrm>
           <a:prstGeom prst="rect">
             <a:avLst/>
@@ -5042,28 +7053,28 @@
         </p:nvSpPr>
         <p:spPr>
           <a:xfrm>
-            <a:off x="320040" y="164592"/>
-            <a:ext cx="11430000" cy="777240"/>
-          </a:xfrm>
-          <a:prstGeom prst="rect">
-            <a:avLst/>
-          </a:prstGeom>
-          <a:noFill/>
-        </p:spPr>
-        <p:txBody>
-          <a:bodyPr wrap="square">
+            <a:off x="274320" y="109728"/>
+            <a:ext cx="11612880" cy="777240"/>
+          </a:xfrm>
+          <a:prstGeom prst="rect">
+            <a:avLst/>
+          </a:prstGeom>
+          <a:noFill/>
+        </p:spPr>
+        <p:txBody>
+          <a:bodyPr wrap="none">
             <a:spAutoFit/>
           </a:bodyPr>
           <a:lstStyle/>
           <a:p>
             <a:pPr algn="l"/>
             <a:r>
-              <a:rPr sz="3000" b="1" i="0">
+              <a:rPr sz="2800" b="1" i="0">
                 <a:solidFill>
                   <a:srgbClr val="FFFFFF"/>
                 </a:solidFill>
               </a:rPr>
-              <a:t>Part 1 — Results: Logistic Regression Wins</a:t>
+              <a:t>Part 1 — Results: 3-Class Classification</a:t>
             </a:r>
           </a:p>
         </p:txBody>
@@ -5076,14 +7087,14 @@
         </p:nvSpPr>
         <p:spPr>
           <a:xfrm>
-            <a:off x="320040" y="1234440"/>
-            <a:ext cx="64008" cy="5029200"/>
+            <a:off x="182880" y="1051560"/>
+            <a:ext cx="5760720" cy="4114800"/>
           </a:xfrm>
           <a:prstGeom prst="rect">
             <a:avLst/>
           </a:prstGeom>
           <a:solidFill>
-            <a:srgbClr val="2ECC71"/>
+            <a:srgbClr val="16213E"/>
           </a:solidFill>
           <a:ln>
             <a:noFill/>
@@ -5119,266 +7130,264 @@
         </p:nvSpPr>
         <p:spPr>
           <a:xfrm>
-            <a:off x="548640" y="1234440"/>
-            <a:ext cx="10972800" cy="566928"/>
-          </a:xfrm>
-          <a:prstGeom prst="rect">
-            <a:avLst/>
-          </a:prstGeom>
-          <a:noFill/>
-        </p:spPr>
-        <p:txBody>
-          <a:bodyPr wrap="square">
-            <a:spAutoFit/>
-          </a:bodyPr>
-          <a:lstStyle/>
-          <a:p>
-            <a:pPr algn="l"/>
-            <a:r>
-              <a:rPr sz="2000" b="0" i="0">
+            <a:off x="320040" y="1097280"/>
+            <a:ext cx="5486400" cy="411480"/>
+          </a:xfrm>
+          <a:prstGeom prst="rect">
+            <a:avLst/>
+          </a:prstGeom>
+          <a:noFill/>
+        </p:spPr>
+        <p:txBody>
+          <a:bodyPr wrap="none">
+            <a:spAutoFit/>
+          </a:bodyPr>
+          <a:lstStyle/>
+          <a:p>
+            <a:pPr algn="ctr"/>
+            <a:r>
+              <a:rPr sz="1400" b="1" i="0">
                 <a:solidFill>
                   <a:srgbClr val="FFFFFF"/>
                 </a:solidFill>
               </a:rPr>
-              <a:t>Best model:  Logistic Regression    CV accuracy ≈ 0.72    Test accuracy ≈ 0.72</a:t>
-            </a:r>
-          </a:p>
-        </p:txBody>
-      </p:sp>
-      <p:sp>
-        <p:nvSpPr>
-          <p:cNvPr id="6" name="TextBox 5"/>
-          <p:cNvSpPr txBox="1"/>
-          <p:nvPr/>
-        </p:nvSpPr>
-        <p:spPr>
-          <a:xfrm>
-            <a:off x="548640" y="1801368"/>
-            <a:ext cx="10972800" cy="502920"/>
-          </a:xfrm>
-          <a:prstGeom prst="rect">
-            <a:avLst/>
-          </a:prstGeom>
-          <a:noFill/>
-        </p:spPr>
-        <p:txBody>
-          <a:bodyPr wrap="square">
-            <a:spAutoFit/>
-          </a:bodyPr>
-          <a:lstStyle/>
-          <a:p>
-            <a:pPr algn="l"/>
-            <a:r>
-              <a:rPr sz="1700" b="0" i="1">
+              <a:t>CV Accuracy — All Models</a:t>
+            </a:r>
+          </a:p>
+        </p:txBody>
+      </p:sp>
+      <p:pic>
+        <p:nvPicPr>
+          <p:cNvPr id="6" name="Picture 5" descr="model_comparison.png"/>
+          <p:cNvPicPr>
+            <a:picLocks noChangeAspect="1"/>
+          </p:cNvPicPr>
+          <p:nvPr/>
+        </p:nvPicPr>
+        <p:blipFill>
+          <a:blip r:embed="rId2"/>
+          <a:stretch>
+            <a:fillRect/>
+          </a:stretch>
+        </p:blipFill>
+        <p:spPr>
+          <a:xfrm>
+            <a:off x="228600" y="1508760"/>
+            <a:ext cx="5669280" cy="3376346"/>
+          </a:xfrm>
+          <a:prstGeom prst="rect">
+            <a:avLst/>
+          </a:prstGeom>
+        </p:spPr>
+      </p:pic>
+      <p:sp>
+        <p:nvSpPr>
+          <p:cNvPr id="7" name="Rectangle 6"/>
+          <p:cNvSpPr/>
+          <p:nvPr/>
+        </p:nvSpPr>
+        <p:spPr>
+          <a:xfrm>
+            <a:off x="6217920" y="1051560"/>
+            <a:ext cx="5760720" cy="4114800"/>
+          </a:xfrm>
+          <a:prstGeom prst="rect">
+            <a:avLst/>
+          </a:prstGeom>
+          <a:solidFill>
+            <a:srgbClr val="16213E"/>
+          </a:solidFill>
+          <a:ln>
+            <a:noFill/>
+          </a:ln>
+        </p:spPr>
+        <p:style>
+          <a:lnRef idx="1">
+            <a:schemeClr val="accent1"/>
+          </a:lnRef>
+          <a:fillRef idx="3">
+            <a:schemeClr val="accent1"/>
+          </a:fillRef>
+          <a:effectRef idx="2">
+            <a:schemeClr val="accent1"/>
+          </a:effectRef>
+          <a:fontRef idx="minor">
+            <a:schemeClr val="lt1"/>
+          </a:fontRef>
+        </p:style>
+        <p:txBody>
+          <a:bodyPr rtlCol="0" anchor="ctr"/>
+          <a:lstStyle/>
+          <a:p>
+            <a:pPr algn="ctr"/>
+          </a:p>
+        </p:txBody>
+      </p:sp>
+      <p:sp>
+        <p:nvSpPr>
+          <p:cNvPr id="8" name="TextBox 7"/>
+          <p:cNvSpPr txBox="1"/>
+          <p:nvPr/>
+        </p:nvSpPr>
+        <p:spPr>
+          <a:xfrm>
+            <a:off x="6355080" y="1097280"/>
+            <a:ext cx="5486400" cy="411480"/>
+          </a:xfrm>
+          <a:prstGeom prst="rect">
+            <a:avLst/>
+          </a:prstGeom>
+          <a:noFill/>
+        </p:spPr>
+        <p:txBody>
+          <a:bodyPr wrap="none">
+            <a:spAutoFit/>
+          </a:bodyPr>
+          <a:lstStyle/>
+          <a:p>
+            <a:pPr algn="ctr"/>
+            <a:r>
+              <a:rPr sz="1400" b="1" i="0">
+                <a:solidFill>
+                  <a:srgbClr val="FFFFFF"/>
+                </a:solidFill>
+              </a:rPr>
+              <a:t>ROC Curves — One-vs-Rest (3-class)</a:t>
+            </a:r>
+          </a:p>
+        </p:txBody>
+      </p:sp>
+      <p:pic>
+        <p:nvPicPr>
+          <p:cNvPr id="9" name="Picture 8" descr="roc_3class.png"/>
+          <p:cNvPicPr>
+            <a:picLocks noChangeAspect="1"/>
+          </p:cNvPicPr>
+          <p:nvPr/>
+        </p:nvPicPr>
+        <p:blipFill>
+          <a:blip r:embed="rId3"/>
+          <a:stretch>
+            <a:fillRect/>
+          </a:stretch>
+        </p:blipFill>
+        <p:spPr>
+          <a:xfrm>
+            <a:off x="6263640" y="1508760"/>
+            <a:ext cx="5669280" cy="3955312"/>
+          </a:xfrm>
+          <a:prstGeom prst="rect">
+            <a:avLst/>
+          </a:prstGeom>
+        </p:spPr>
+      </p:pic>
+      <p:sp>
+        <p:nvSpPr>
+          <p:cNvPr id="10" name="Rectangle 9"/>
+          <p:cNvSpPr/>
+          <p:nvPr/>
+        </p:nvSpPr>
+        <p:spPr>
+          <a:xfrm>
+            <a:off x="182880" y="5257800"/>
+            <a:ext cx="11795760" cy="1325880"/>
+          </a:xfrm>
+          <a:prstGeom prst="rect">
+            <a:avLst/>
+          </a:prstGeom>
+          <a:solidFill>
+            <a:srgbClr val="16213E"/>
+          </a:solidFill>
+          <a:ln>
+            <a:noFill/>
+          </a:ln>
+        </p:spPr>
+        <p:style>
+          <a:lnRef idx="1">
+            <a:schemeClr val="accent1"/>
+          </a:lnRef>
+          <a:fillRef idx="3">
+            <a:schemeClr val="accent1"/>
+          </a:fillRef>
+          <a:effectRef idx="2">
+            <a:schemeClr val="accent1"/>
+          </a:effectRef>
+          <a:fontRef idx="minor">
+            <a:schemeClr val="lt1"/>
+          </a:fontRef>
+        </p:style>
+        <p:txBody>
+          <a:bodyPr rtlCol="0" anchor="ctr"/>
+          <a:lstStyle/>
+          <a:p>
+            <a:pPr algn="ctr"/>
+          </a:p>
+        </p:txBody>
+      </p:sp>
+      <p:sp>
+        <p:nvSpPr>
+          <p:cNvPr id="11" name="TextBox 10"/>
+          <p:cNvSpPr txBox="1"/>
+          <p:nvPr/>
+        </p:nvSpPr>
+        <p:spPr>
+          <a:xfrm>
+            <a:off x="365760" y="5321808"/>
+            <a:ext cx="11430000" cy="411480"/>
+          </a:xfrm>
+          <a:prstGeom prst="rect">
+            <a:avLst/>
+          </a:prstGeom>
+          <a:noFill/>
+        </p:spPr>
+        <p:txBody>
+          <a:bodyPr wrap="none">
+            <a:spAutoFit/>
+          </a:bodyPr>
+          <a:lstStyle/>
+          <a:p>
+            <a:pPr algn="ctr"/>
+            <a:r>
+              <a:rPr sz="1500" b="1" i="0">
+                <a:solidFill>
+                  <a:srgbClr val="2ECC71"/>
+                </a:solidFill>
+              </a:rPr>
+              <a:t>Best model: Logistic Regression  |  CV accuracy 0.730  |  Test accuracy 0.720</a:t>
+            </a:r>
+          </a:p>
+        </p:txBody>
+      </p:sp>
+      <p:sp>
+        <p:nvSpPr>
+          <p:cNvPr id="12" name="TextBox 11"/>
+          <p:cNvSpPr txBox="1"/>
+          <p:nvPr/>
+        </p:nvSpPr>
+        <p:spPr>
+          <a:xfrm>
+            <a:off x="365760" y="5760720"/>
+            <a:ext cx="11430000" cy="411480"/>
+          </a:xfrm>
+          <a:prstGeom prst="rect">
+            <a:avLst/>
+          </a:prstGeom>
+          <a:noFill/>
+        </p:spPr>
+        <p:txBody>
+          <a:bodyPr wrap="none">
+            <a:spAutoFit/>
+          </a:bodyPr>
+          <a:lstStyle/>
+          <a:p>
+            <a:pPr algn="ctr"/>
+            <a:r>
+              <a:rPr sz="1300" b="0" i="0">
                 <a:solidFill>
                   <a:srgbClr val="CCCCCC"/>
                 </a:solidFill>
               </a:rPr>
-              <a:t>  · Failure F1 = 0.775   ·   Acquisition F1 = 0.682   ·   IPO F1 ≈ 0.22  (imbalance)</a:t>
-            </a:r>
-          </a:p>
-        </p:txBody>
-      </p:sp>
-      <p:sp>
-        <p:nvSpPr>
-          <p:cNvPr id="7" name="TextBox 6"/>
-          <p:cNvSpPr txBox="1"/>
-          <p:nvPr/>
-        </p:nvSpPr>
-        <p:spPr>
-          <a:xfrm>
-            <a:off x="548640" y="2276856"/>
-            <a:ext cx="10972800" cy="566928"/>
-          </a:xfrm>
-          <a:prstGeom prst="rect">
-            <a:avLst/>
-          </a:prstGeom>
-          <a:noFill/>
-        </p:spPr>
-        <p:txBody>
-          <a:bodyPr wrap="square">
-            <a:spAutoFit/>
-          </a:bodyPr>
-          <a:lstStyle/>
-          <a:p>
-            <a:pPr algn="l"/>
-            <a:r>
-              <a:rPr sz="2000" b="0" i="0">
-                <a:solidFill>
-                  <a:srgbClr val="FFFFFF"/>
-                </a:solidFill>
-              </a:rPr>
-              <a:t>3-class ROC AUC:   Failure 0.84  ·  Acquisition 0.79  ·  IPO 0.91</a:t>
-            </a:r>
-          </a:p>
-        </p:txBody>
-      </p:sp>
-      <p:sp>
-        <p:nvSpPr>
-          <p:cNvPr id="8" name="TextBox 7"/>
-          <p:cNvSpPr txBox="1"/>
-          <p:nvPr/>
-        </p:nvSpPr>
-        <p:spPr>
-          <a:xfrm>
-            <a:off x="548640" y="2843784"/>
-            <a:ext cx="10972800" cy="502920"/>
-          </a:xfrm>
-          <a:prstGeom prst="rect">
-            <a:avLst/>
-          </a:prstGeom>
-          <a:noFill/>
-        </p:spPr>
-        <p:txBody>
-          <a:bodyPr wrap="square">
-            <a:spAutoFit/>
-          </a:bodyPr>
-          <a:lstStyle/>
-          <a:p>
-            <a:pPr algn="l"/>
-            <a:r>
-              <a:rPr sz="1700" b="0" i="1">
-                <a:solidFill>
-                  <a:srgbClr val="CCCCCC"/>
-                </a:solidFill>
-              </a:rPr>
-              <a:t>  · IPO AUC high because it is so rare — easy to score high probability for the majority</a:t>
-            </a:r>
-          </a:p>
-        </p:txBody>
-      </p:sp>
-      <p:sp>
-        <p:nvSpPr>
-          <p:cNvPr id="9" name="TextBox 8"/>
-          <p:cNvSpPr txBox="1"/>
-          <p:nvPr/>
-        </p:nvSpPr>
-        <p:spPr>
-          <a:xfrm>
-            <a:off x="548640" y="3319272"/>
-            <a:ext cx="10972800" cy="566928"/>
-          </a:xfrm>
-          <a:prstGeom prst="rect">
-            <a:avLst/>
-          </a:prstGeom>
-          <a:noFill/>
-        </p:spPr>
-        <p:txBody>
-          <a:bodyPr wrap="square">
-            <a:spAutoFit/>
-          </a:bodyPr>
-          <a:lstStyle/>
-          <a:p>
-            <a:pPr algn="l"/>
-            <a:r>
-              <a:rPr sz="2000" b="0" i="0">
-                <a:solidFill>
-                  <a:srgbClr val="FFFFFF"/>
-                </a:solidFill>
-              </a:rPr>
-              <a:t>Top features (LR coefficients):  revenue_million  &amp;  product_traction_users</a:t>
-            </a:r>
-          </a:p>
-        </p:txBody>
-      </p:sp>
-      <p:sp>
-        <p:nvSpPr>
-          <p:cNvPr id="10" name="TextBox 9"/>
-          <p:cNvSpPr txBox="1"/>
-          <p:nvPr/>
-        </p:nvSpPr>
-        <p:spPr>
-          <a:xfrm>
-            <a:off x="548640" y="3886200"/>
-            <a:ext cx="10972800" cy="502920"/>
-          </a:xfrm>
-          <a:prstGeom prst="rect">
-            <a:avLst/>
-          </a:prstGeom>
-          <a:noFill/>
-        </p:spPr>
-        <p:txBody>
-          <a:bodyPr wrap="square">
-            <a:spAutoFit/>
-          </a:bodyPr>
-          <a:lstStyle/>
-          <a:p>
-            <a:pPr algn="l"/>
-            <a:r>
-              <a:rPr sz="1700" b="0" i="1">
-                <a:solidFill>
-                  <a:srgbClr val="CCCCCC"/>
-                </a:solidFill>
-              </a:rPr>
-              <a:t>  · Consistent with EDA — the two features with real signal drive the model</a:t>
-            </a:r>
-          </a:p>
-        </p:txBody>
-      </p:sp>
-      <p:sp>
-        <p:nvSpPr>
-          <p:cNvPr id="11" name="TextBox 10"/>
-          <p:cNvSpPr txBox="1"/>
-          <p:nvPr/>
-        </p:nvSpPr>
-        <p:spPr>
-          <a:xfrm>
-            <a:off x="548640" y="4361688"/>
-            <a:ext cx="10972800" cy="566928"/>
-          </a:xfrm>
-          <a:prstGeom prst="rect">
-            <a:avLst/>
-          </a:prstGeom>
-          <a:noFill/>
-        </p:spPr>
-        <p:txBody>
-          <a:bodyPr wrap="square">
-            <a:spAutoFit/>
-          </a:bodyPr>
-          <a:lstStyle/>
-          <a:p>
-            <a:pPr algn="l"/>
-            <a:r>
-              <a:rPr sz="2000" b="0" i="0">
-                <a:solidFill>
-                  <a:srgbClr val="FFFFFF"/>
-                </a:solidFill>
-              </a:rPr>
-              <a:t>IPO macro F1 ≈ 0.22  →  class too small to learn reliably</a:t>
-            </a:r>
-          </a:p>
-        </p:txBody>
-      </p:sp>
-      <p:sp>
-        <p:nvSpPr>
-          <p:cNvPr id="12" name="TextBox 11"/>
-          <p:cNvSpPr txBox="1"/>
-          <p:nvPr/>
-        </p:nvSpPr>
-        <p:spPr>
-          <a:xfrm>
-            <a:off x="320040" y="6309360"/>
-            <a:ext cx="11430000" cy="411480"/>
-          </a:xfrm>
-          <a:prstGeom prst="rect">
-            <a:avLst/>
-          </a:prstGeom>
-          <a:noFill/>
-        </p:spPr>
-        <p:txBody>
-          <a:bodyPr wrap="square">
-            <a:spAutoFit/>
-          </a:bodyPr>
-          <a:lstStyle/>
-          <a:p>
-            <a:pPr algn="l"/>
-            <a:r>
-              <a:rPr sz="1300" b="0" i="1">
-                <a:solidFill>
-                  <a:srgbClr val="CCCCCC"/>
-                </a:solidFill>
-              </a:rPr>
-              <a:t>→ This motivates the binary classification in the next step.</a:t>
+              <a:t>Failure F1=0.775  ·  Acquisition F1=0.682  ·  IPO F1≈0.22 (imbalance)   →   IPO motivates binary classification</a:t>
             </a:r>
           </a:p>
         </p:txBody>
@@ -5418,84 +7427,7 @@
         <p:spPr>
           <a:xfrm>
             <a:off x="0" y="0"/>
-            <a:ext cx="12188952" cy="1051560"/>
-          </a:xfrm>
-          <a:prstGeom prst="rect">
-            <a:avLst/>
-          </a:prstGeom>
-          <a:solidFill>
-            <a:srgbClr val="0F3C78"/>
-          </a:solidFill>
-          <a:ln>
-            <a:noFill/>
-          </a:ln>
-        </p:spPr>
-        <p:style>
-          <a:lnRef idx="1">
-            <a:schemeClr val="accent1"/>
-          </a:lnRef>
-          <a:fillRef idx="3">
-            <a:schemeClr val="accent1"/>
-          </a:fillRef>
-          <a:effectRef idx="2">
-            <a:schemeClr val="accent1"/>
-          </a:effectRef>
-          <a:fontRef idx="minor">
-            <a:schemeClr val="lt1"/>
-          </a:fontRef>
-        </p:style>
-        <p:txBody>
-          <a:bodyPr rtlCol="0" anchor="ctr"/>
-          <a:lstStyle/>
-          <a:p>
-            <a:pPr algn="ctr"/>
-          </a:p>
-        </p:txBody>
-      </p:sp>
-      <p:sp>
-        <p:nvSpPr>
-          <p:cNvPr id="3" name="TextBox 2"/>
-          <p:cNvSpPr txBox="1"/>
-          <p:nvPr/>
-        </p:nvSpPr>
-        <p:spPr>
-          <a:xfrm>
-            <a:off x="320040" y="164592"/>
-            <a:ext cx="11430000" cy="777240"/>
-          </a:xfrm>
-          <a:prstGeom prst="rect">
-            <a:avLst/>
-          </a:prstGeom>
-          <a:noFill/>
-        </p:spPr>
-        <p:txBody>
-          <a:bodyPr wrap="square">
-            <a:spAutoFit/>
-          </a:bodyPr>
-          <a:lstStyle/>
-          <a:p>
-            <a:pPr algn="l"/>
-            <a:r>
-              <a:rPr sz="3000" b="1" i="0">
-                <a:solidFill>
-                  <a:srgbClr val="FFFFFF"/>
-                </a:solidFill>
-              </a:rPr>
-              <a:t>Binary Classification: Removing IPO</a:t>
-            </a:r>
-          </a:p>
-        </p:txBody>
-      </p:sp>
-      <p:sp>
-        <p:nvSpPr>
-          <p:cNvPr id="4" name="Rectangle 3"/>
-          <p:cNvSpPr/>
-          <p:nvPr/>
-        </p:nvSpPr>
-        <p:spPr>
-          <a:xfrm>
-            <a:off x="320040" y="1234440"/>
-            <a:ext cx="64008" cy="5029200"/>
+            <a:ext cx="12188952" cy="960120"/>
           </a:xfrm>
           <a:prstGeom prst="rect">
             <a:avLst/>
@@ -5531,272 +7463,347 @@
       </p:sp>
       <p:sp>
         <p:nvSpPr>
+          <p:cNvPr id="3" name="TextBox 2"/>
+          <p:cNvSpPr txBox="1"/>
+          <p:nvPr/>
+        </p:nvSpPr>
+        <p:spPr>
+          <a:xfrm>
+            <a:off x="274320" y="109728"/>
+            <a:ext cx="11612880" cy="777240"/>
+          </a:xfrm>
+          <a:prstGeom prst="rect">
+            <a:avLst/>
+          </a:prstGeom>
+          <a:noFill/>
+        </p:spPr>
+        <p:txBody>
+          <a:bodyPr wrap="none">
+            <a:spAutoFit/>
+          </a:bodyPr>
+          <a:lstStyle/>
+          <a:p>
+            <a:pPr algn="l"/>
+            <a:r>
+              <a:rPr sz="2800" b="1" i="0">
+                <a:solidFill>
+                  <a:srgbClr val="FFFFFF"/>
+                </a:solidFill>
+              </a:rPr>
+              <a:t>Binary Classification — Removing IPO</a:t>
+            </a:r>
+          </a:p>
+        </p:txBody>
+      </p:sp>
+      <p:sp>
+        <p:nvSpPr>
+          <p:cNvPr id="4" name="Rectangle 3"/>
+          <p:cNvSpPr/>
+          <p:nvPr/>
+        </p:nvSpPr>
+        <p:spPr>
+          <a:xfrm>
+            <a:off x="182880" y="1051560"/>
+            <a:ext cx="5760720" cy="4114800"/>
+          </a:xfrm>
+          <a:prstGeom prst="rect">
+            <a:avLst/>
+          </a:prstGeom>
+          <a:solidFill>
+            <a:srgbClr val="16213E"/>
+          </a:solidFill>
+          <a:ln>
+            <a:noFill/>
+          </a:ln>
+        </p:spPr>
+        <p:style>
+          <a:lnRef idx="1">
+            <a:schemeClr val="accent1"/>
+          </a:lnRef>
+          <a:fillRef idx="3">
+            <a:schemeClr val="accent1"/>
+          </a:fillRef>
+          <a:effectRef idx="2">
+            <a:schemeClr val="accent1"/>
+          </a:effectRef>
+          <a:fontRef idx="minor">
+            <a:schemeClr val="lt1"/>
+          </a:fontRef>
+        </p:style>
+        <p:txBody>
+          <a:bodyPr rtlCol="0" anchor="ctr"/>
+          <a:lstStyle/>
+          <a:p>
+            <a:pPr algn="ctr"/>
+          </a:p>
+        </p:txBody>
+      </p:sp>
+      <p:sp>
+        <p:nvSpPr>
           <p:cNvPr id="5" name="TextBox 4"/>
           <p:cNvSpPr txBox="1"/>
           <p:nvPr/>
         </p:nvSpPr>
         <p:spPr>
           <a:xfrm>
-            <a:off x="548640" y="1234440"/>
-            <a:ext cx="10972800" cy="566928"/>
-          </a:xfrm>
-          <a:prstGeom prst="rect">
-            <a:avLst/>
-          </a:prstGeom>
-          <a:noFill/>
-        </p:spPr>
-        <p:txBody>
-          <a:bodyPr wrap="square">
-            <a:spAutoFit/>
-          </a:bodyPr>
-          <a:lstStyle/>
-          <a:p>
-            <a:pPr algn="l"/>
-            <a:r>
-              <a:rPr sz="2000" b="0" i="0">
+            <a:off x="320040" y="1097280"/>
+            <a:ext cx="5486400" cy="411480"/>
+          </a:xfrm>
+          <a:prstGeom prst="rect">
+            <a:avLst/>
+          </a:prstGeom>
+          <a:noFill/>
+        </p:spPr>
+        <p:txBody>
+          <a:bodyPr wrap="none">
+            <a:spAutoFit/>
+          </a:bodyPr>
+          <a:lstStyle/>
+          <a:p>
+            <a:pPr algn="ctr"/>
+            <a:r>
+              <a:rPr sz="1400" b="1" i="0">
                 <a:solidFill>
                   <a:srgbClr val="FFFFFF"/>
                 </a:solidFill>
               </a:rPr>
-              <a:t>IPO = 2.1% of data  →  removed.  New problem: Failure vs Acquisition only.</a:t>
-            </a:r>
-          </a:p>
-        </p:txBody>
-      </p:sp>
-      <p:sp>
-        <p:nvSpPr>
-          <p:cNvPr id="6" name="TextBox 5"/>
-          <p:cNvSpPr txBox="1"/>
-          <p:nvPr/>
-        </p:nvSpPr>
-        <p:spPr>
-          <a:xfrm>
-            <a:off x="548640" y="1801368"/>
-            <a:ext cx="10972800" cy="566928"/>
-          </a:xfrm>
-          <a:prstGeom prst="rect">
-            <a:avLst/>
-          </a:prstGeom>
-          <a:noFill/>
-        </p:spPr>
-        <p:txBody>
-          <a:bodyPr wrap="square">
-            <a:spAutoFit/>
-          </a:bodyPr>
-          <a:lstStyle/>
-          <a:p>
-            <a:pPr algn="l"/>
-            <a:r>
-              <a:rPr sz="2000" b="0" i="0">
+              <a:t>CV Accuracy — Binary Models</a:t>
+            </a:r>
+          </a:p>
+        </p:txBody>
+      </p:sp>
+      <p:pic>
+        <p:nvPicPr>
+          <p:cNvPr id="6" name="Picture 5" descr="binary_model_comparison.png"/>
+          <p:cNvPicPr>
+            <a:picLocks noChangeAspect="1"/>
+          </p:cNvPicPr>
+          <p:nvPr/>
+        </p:nvPicPr>
+        <p:blipFill>
+          <a:blip r:embed="rId2"/>
+          <a:stretch>
+            <a:fillRect/>
+          </a:stretch>
+        </p:blipFill>
+        <p:spPr>
+          <a:xfrm>
+            <a:off x="228600" y="1508760"/>
+            <a:ext cx="5669280" cy="3124800"/>
+          </a:xfrm>
+          <a:prstGeom prst="rect">
+            <a:avLst/>
+          </a:prstGeom>
+        </p:spPr>
+      </p:pic>
+      <p:sp>
+        <p:nvSpPr>
+          <p:cNvPr id="7" name="Rectangle 6"/>
+          <p:cNvSpPr/>
+          <p:nvPr/>
+        </p:nvSpPr>
+        <p:spPr>
+          <a:xfrm>
+            <a:off x="6217920" y="1051560"/>
+            <a:ext cx="5760720" cy="4114800"/>
+          </a:xfrm>
+          <a:prstGeom prst="rect">
+            <a:avLst/>
+          </a:prstGeom>
+          <a:solidFill>
+            <a:srgbClr val="16213E"/>
+          </a:solidFill>
+          <a:ln>
+            <a:noFill/>
+          </a:ln>
+        </p:spPr>
+        <p:style>
+          <a:lnRef idx="1">
+            <a:schemeClr val="accent1"/>
+          </a:lnRef>
+          <a:fillRef idx="3">
+            <a:schemeClr val="accent1"/>
+          </a:fillRef>
+          <a:effectRef idx="2">
+            <a:schemeClr val="accent1"/>
+          </a:effectRef>
+          <a:fontRef idx="minor">
+            <a:schemeClr val="lt1"/>
+          </a:fontRef>
+        </p:style>
+        <p:txBody>
+          <a:bodyPr rtlCol="0" anchor="ctr"/>
+          <a:lstStyle/>
+          <a:p>
+            <a:pPr algn="ctr"/>
+          </a:p>
+        </p:txBody>
+      </p:sp>
+      <p:sp>
+        <p:nvSpPr>
+          <p:cNvPr id="8" name="TextBox 7"/>
+          <p:cNvSpPr txBox="1"/>
+          <p:nvPr/>
+        </p:nvSpPr>
+        <p:spPr>
+          <a:xfrm>
+            <a:off x="6355080" y="1097280"/>
+            <a:ext cx="5486400" cy="411480"/>
+          </a:xfrm>
+          <a:prstGeom prst="rect">
+            <a:avLst/>
+          </a:prstGeom>
+          <a:noFill/>
+        </p:spPr>
+        <p:txBody>
+          <a:bodyPr wrap="none">
+            <a:spAutoFit/>
+          </a:bodyPr>
+          <a:lstStyle/>
+          <a:p>
+            <a:pPr algn="ctr"/>
+            <a:r>
+              <a:rPr sz="1400" b="1" i="0">
                 <a:solidFill>
                   <a:srgbClr val="FFFFFF"/>
                 </a:solidFill>
               </a:rPr>
-              <a:t>Same pipeline retrained on 97 900 rows</a:t>
-            </a:r>
-          </a:p>
-        </p:txBody>
-      </p:sp>
-      <p:sp>
-        <p:nvSpPr>
-          <p:cNvPr id="7" name="TextBox 6"/>
-          <p:cNvSpPr txBox="1"/>
-          <p:nvPr/>
-        </p:nvSpPr>
-        <p:spPr>
-          <a:xfrm>
-            <a:off x="548640" y="2368296"/>
-            <a:ext cx="10972800" cy="566928"/>
-          </a:xfrm>
-          <a:prstGeom prst="rect">
-            <a:avLst/>
-          </a:prstGeom>
-          <a:noFill/>
-        </p:spPr>
-        <p:txBody>
-          <a:bodyPr wrap="square">
-            <a:spAutoFit/>
-          </a:bodyPr>
-          <a:lstStyle/>
-          <a:p>
-            <a:pPr algn="l"/>
-            <a:r>
-              <a:rPr sz="2000" b="0" i="0">
-                <a:solidFill>
-                  <a:srgbClr val="FFFFFF"/>
-                </a:solidFill>
-              </a:rPr>
-              <a:t>Result:   macro F1   0.584  →  0.737   (+26 %)</a:t>
-            </a:r>
-          </a:p>
-        </p:txBody>
-      </p:sp>
-      <p:sp>
-        <p:nvSpPr>
-          <p:cNvPr id="8" name="TextBox 7"/>
-          <p:cNvSpPr txBox="1"/>
-          <p:nvPr/>
-        </p:nvSpPr>
-        <p:spPr>
-          <a:xfrm>
-            <a:off x="548640" y="2935224"/>
-            <a:ext cx="10972800" cy="502920"/>
-          </a:xfrm>
-          <a:prstGeom prst="rect">
-            <a:avLst/>
-          </a:prstGeom>
-          <a:noFill/>
-        </p:spPr>
-        <p:txBody>
-          <a:bodyPr wrap="square">
-            <a:spAutoFit/>
-          </a:bodyPr>
-          <a:lstStyle/>
-          <a:p>
-            <a:pPr algn="l"/>
-            <a:r>
-              <a:rPr sz="1700" b="0" i="1">
+              <a:t>ROC Curve — Acquisition vs Failure</a:t>
+            </a:r>
+          </a:p>
+        </p:txBody>
+      </p:sp>
+      <p:pic>
+        <p:nvPicPr>
+          <p:cNvPr id="9" name="Picture 8" descr="roc_binary.png"/>
+          <p:cNvPicPr>
+            <a:picLocks noChangeAspect="1"/>
+          </p:cNvPicPr>
+          <p:nvPr/>
+        </p:nvPicPr>
+        <p:blipFill>
+          <a:blip r:embed="rId3"/>
+          <a:stretch>
+            <a:fillRect/>
+          </a:stretch>
+        </p:blipFill>
+        <p:spPr>
+          <a:xfrm>
+            <a:off x="6263640" y="1508760"/>
+            <a:ext cx="5669280" cy="4234019"/>
+          </a:xfrm>
+          <a:prstGeom prst="rect">
+            <a:avLst/>
+          </a:prstGeom>
+        </p:spPr>
+      </p:pic>
+      <p:sp>
+        <p:nvSpPr>
+          <p:cNvPr id="10" name="Rectangle 9"/>
+          <p:cNvSpPr/>
+          <p:nvPr/>
+        </p:nvSpPr>
+        <p:spPr>
+          <a:xfrm>
+            <a:off x="182880" y="5257800"/>
+            <a:ext cx="11795760" cy="1325880"/>
+          </a:xfrm>
+          <a:prstGeom prst="rect">
+            <a:avLst/>
+          </a:prstGeom>
+          <a:solidFill>
+            <a:srgbClr val="16213E"/>
+          </a:solidFill>
+          <a:ln>
+            <a:noFill/>
+          </a:ln>
+        </p:spPr>
+        <p:style>
+          <a:lnRef idx="1">
+            <a:schemeClr val="accent1"/>
+          </a:lnRef>
+          <a:fillRef idx="3">
+            <a:schemeClr val="accent1"/>
+          </a:fillRef>
+          <a:effectRef idx="2">
+            <a:schemeClr val="accent1"/>
+          </a:effectRef>
+          <a:fontRef idx="minor">
+            <a:schemeClr val="lt1"/>
+          </a:fontRef>
+        </p:style>
+        <p:txBody>
+          <a:bodyPr rtlCol="0" anchor="ctr"/>
+          <a:lstStyle/>
+          <a:p>
+            <a:pPr algn="ctr"/>
+          </a:p>
+        </p:txBody>
+      </p:sp>
+      <p:sp>
+        <p:nvSpPr>
+          <p:cNvPr id="11" name="TextBox 10"/>
+          <p:cNvSpPr txBox="1"/>
+          <p:nvPr/>
+        </p:nvSpPr>
+        <p:spPr>
+          <a:xfrm>
+            <a:off x="365760" y="5321808"/>
+            <a:ext cx="11430000" cy="411480"/>
+          </a:xfrm>
+          <a:prstGeom prst="rect">
+            <a:avLst/>
+          </a:prstGeom>
+          <a:noFill/>
+        </p:spPr>
+        <p:txBody>
+          <a:bodyPr wrap="none">
+            <a:spAutoFit/>
+          </a:bodyPr>
+          <a:lstStyle/>
+          <a:p>
+            <a:pPr algn="ctr"/>
+            <a:r>
+              <a:rPr sz="1500" b="1" i="0">
+                <a:solidFill>
+                  <a:srgbClr val="2ECC71"/>
+                </a:solidFill>
+              </a:rPr>
+              <a:t>Macro F1: 0.584 → 0.737  (+26%)   ·   AUC = 0.816   ·   Best model: Logistic Regression</a:t>
+            </a:r>
+          </a:p>
+        </p:txBody>
+      </p:sp>
+      <p:sp>
+        <p:nvSpPr>
+          <p:cNvPr id="12" name="TextBox 11"/>
+          <p:cNvSpPr txBox="1"/>
+          <p:nvPr/>
+        </p:nvSpPr>
+        <p:spPr>
+          <a:xfrm>
+            <a:off x="365760" y="5760720"/>
+            <a:ext cx="11430000" cy="411480"/>
+          </a:xfrm>
+          <a:prstGeom prst="rect">
+            <a:avLst/>
+          </a:prstGeom>
+          <a:noFill/>
+        </p:spPr>
+        <p:txBody>
+          <a:bodyPr wrap="none">
+            <a:spAutoFit/>
+          </a:bodyPr>
+          <a:lstStyle/>
+          <a:p>
+            <a:pPr algn="ctr"/>
+            <a:r>
+              <a:rPr sz="1300" b="0" i="0">
                 <a:solidFill>
                   <a:srgbClr val="CCCCCC"/>
                 </a:solidFill>
               </a:rPr>
-              <a:t>  · Failure F1 = 0.75   ·   Acquisition F1 = 0.72   —   much more balanced</a:t>
-            </a:r>
-          </a:p>
-        </p:txBody>
-      </p:sp>
-      <p:sp>
-        <p:nvSpPr>
-          <p:cNvPr id="9" name="TextBox 8"/>
-          <p:cNvSpPr txBox="1"/>
-          <p:nvPr/>
-        </p:nvSpPr>
-        <p:spPr>
-          <a:xfrm>
-            <a:off x="548640" y="3410712"/>
-            <a:ext cx="10972800" cy="566928"/>
-          </a:xfrm>
-          <a:prstGeom prst="rect">
-            <a:avLst/>
-          </a:prstGeom>
-          <a:noFill/>
-        </p:spPr>
-        <p:txBody>
-          <a:bodyPr wrap="square">
-            <a:spAutoFit/>
-          </a:bodyPr>
-          <a:lstStyle/>
-          <a:p>
-            <a:pPr algn="l"/>
-            <a:r>
-              <a:rPr sz="2000" b="0" i="0">
-                <a:solidFill>
-                  <a:srgbClr val="FFFFFF"/>
-                </a:solidFill>
-              </a:rPr>
-              <a:t>Best model again: Logistic Regression</a:t>
-            </a:r>
-          </a:p>
-        </p:txBody>
-      </p:sp>
-      <p:sp>
-        <p:nvSpPr>
-          <p:cNvPr id="10" name="TextBox 9"/>
-          <p:cNvSpPr txBox="1"/>
-          <p:nvPr/>
-        </p:nvSpPr>
-        <p:spPr>
-          <a:xfrm>
-            <a:off x="548640" y="3977640"/>
-            <a:ext cx="10972800" cy="566928"/>
-          </a:xfrm>
-          <a:prstGeom prst="rect">
-            <a:avLst/>
-          </a:prstGeom>
-          <a:noFill/>
-        </p:spPr>
-        <p:txBody>
-          <a:bodyPr wrap="square">
-            <a:spAutoFit/>
-          </a:bodyPr>
-          <a:lstStyle/>
-          <a:p>
-            <a:pPr algn="l"/>
-            <a:r>
-              <a:rPr sz="2000" b="0" i="0">
-                <a:solidFill>
-                  <a:srgbClr val="FFFFFF"/>
-                </a:solidFill>
-              </a:rPr>
-              <a:t>Binary ROC AUC = 0.816  (Acquisition vs Failure)</a:t>
-            </a:r>
-          </a:p>
-        </p:txBody>
-      </p:sp>
-      <p:sp>
-        <p:nvSpPr>
-          <p:cNvPr id="11" name="TextBox 10"/>
-          <p:cNvSpPr txBox="1"/>
-          <p:nvPr/>
-        </p:nvSpPr>
-        <p:spPr>
-          <a:xfrm>
-            <a:off x="548640" y="4544568"/>
-            <a:ext cx="10972800" cy="502920"/>
-          </a:xfrm>
-          <a:prstGeom prst="rect">
-            <a:avLst/>
-          </a:prstGeom>
-          <a:noFill/>
-        </p:spPr>
-        <p:txBody>
-          <a:bodyPr wrap="square">
-            <a:spAutoFit/>
-          </a:bodyPr>
-          <a:lstStyle/>
-          <a:p>
-            <a:pPr algn="l"/>
-            <a:r>
-              <a:rPr sz="1700" b="0" i="1">
-                <a:solidFill>
-                  <a:srgbClr val="CCCCCC"/>
-                </a:solidFill>
-              </a:rPr>
-              <a:t>  · If we pick 2 startups at random, the model ranks the Acquisition above Failure 81.6% of the time</a:t>
-            </a:r>
-          </a:p>
-        </p:txBody>
-      </p:sp>
-      <p:sp>
-        <p:nvSpPr>
-          <p:cNvPr id="12" name="TextBox 11"/>
-          <p:cNvSpPr txBox="1"/>
-          <p:nvPr/>
-        </p:nvSpPr>
-        <p:spPr>
-          <a:xfrm>
-            <a:off x="320040" y="6309360"/>
-            <a:ext cx="11430000" cy="411480"/>
-          </a:xfrm>
-          <a:prstGeom prst="rect">
-            <a:avLst/>
-          </a:prstGeom>
-          <a:noFill/>
-        </p:spPr>
-        <p:txBody>
-          <a:bodyPr wrap="square">
-            <a:spAutoFit/>
-          </a:bodyPr>
-          <a:lstStyle/>
-          <a:p>
-            <a:pPr algn="l"/>
-            <a:r>
-              <a:rPr sz="1300" b="0" i="1">
-                <a:solidFill>
-                  <a:srgbClr val="CCCCCC"/>
-                </a:solidFill>
-              </a:rPr>
-              <a:t>Takeaway: class imbalance was the main bottleneck — removing IPO recovers a strong binary classifier.</a:t>
+              <a:t>Removing the rare IPO class (2.1%) recovers a strong binary classifier — class imbalance was the bottleneck</a:t>
             </a:r>
           </a:p>
         </p:txBody>
@@ -5836,7 +7843,7 @@
         <p:spPr>
           <a:xfrm>
             <a:off x="0" y="0"/>
-            <a:ext cx="12188952" cy="1051560"/>
+            <a:ext cx="12188952" cy="960120"/>
           </a:xfrm>
           <a:prstGeom prst="rect">
             <a:avLst/>
@@ -5878,28 +7885,28 @@
         </p:nvSpPr>
         <p:spPr>
           <a:xfrm>
-            <a:off x="320040" y="164592"/>
-            <a:ext cx="11430000" cy="777240"/>
-          </a:xfrm>
-          <a:prstGeom prst="rect">
-            <a:avLst/>
-          </a:prstGeom>
-          <a:noFill/>
-        </p:spPr>
-        <p:txBody>
-          <a:bodyPr wrap="square">
+            <a:off x="274320" y="109728"/>
+            <a:ext cx="11612880" cy="777240"/>
+          </a:xfrm>
+          <a:prstGeom prst="rect">
+            <a:avLst/>
+          </a:prstGeom>
+          <a:noFill/>
+        </p:spPr>
+        <p:txBody>
+          <a:bodyPr wrap="none">
             <a:spAutoFit/>
           </a:bodyPr>
           <a:lstStyle/>
           <a:p>
             <a:pPr algn="l"/>
             <a:r>
-              <a:rPr sz="3000" b="1" i="0">
+              <a:rPr sz="2800" b="1" i="0">
                 <a:solidFill>
                   <a:srgbClr val="FFFFFF"/>
                 </a:solidFill>
               </a:rPr>
-              <a:t>Part 2 — Unsupervised Learning: Why?</a:t>
+              <a:t>Part 2 — Unsupervised Learning: Approach</a:t>
             </a:r>
           </a:p>
         </p:txBody>
@@ -5912,8 +7919,8 @@
         </p:nvSpPr>
         <p:spPr>
           <a:xfrm>
-            <a:off x="320040" y="1234440"/>
-            <a:ext cx="64008" cy="5029200"/>
+            <a:off x="274320" y="1097280"/>
+            <a:ext cx="54864" cy="5394960"/>
           </a:xfrm>
           <a:prstGeom prst="rect">
             <a:avLst/>
@@ -5955,28 +7962,28 @@
         </p:nvSpPr>
         <p:spPr>
           <a:xfrm>
-            <a:off x="548640" y="1234440"/>
-            <a:ext cx="10972800" cy="566928"/>
-          </a:xfrm>
-          <a:prstGeom prst="rect">
-            <a:avLst/>
-          </a:prstGeom>
-          <a:noFill/>
-        </p:spPr>
-        <p:txBody>
-          <a:bodyPr wrap="square">
+            <a:off x="411480" y="1097280"/>
+            <a:ext cx="5394960" cy="457200"/>
+          </a:xfrm>
+          <a:prstGeom prst="rect">
+            <a:avLst/>
+          </a:prstGeom>
+          <a:noFill/>
+        </p:spPr>
+        <p:txBody>
+          <a:bodyPr wrap="none">
             <a:spAutoFit/>
           </a:bodyPr>
           <a:lstStyle/>
           <a:p>
             <a:pPr algn="l"/>
             <a:r>
-              <a:rPr sz="2000" b="0" i="0">
+              <a:rPr sz="1700" b="0" i="0">
                 <a:solidFill>
                   <a:srgbClr val="FFFFFF"/>
                 </a:solidFill>
               </a:rPr>
-              <a:t>Supervised learning uses the label.  Unsupervised asks: what structure exists in X alone?</a:t>
+              <a:t>Outcome label set aside → cluster on features only</a:t>
             </a:r>
           </a:p>
         </p:txBody>
@@ -5989,236 +7996,337 @@
         </p:nvSpPr>
         <p:spPr>
           <a:xfrm>
-            <a:off x="548640" y="1801368"/>
-            <a:ext cx="10972800" cy="566928"/>
-          </a:xfrm>
-          <a:prstGeom prst="rect">
-            <a:avLst/>
-          </a:prstGeom>
-          <a:noFill/>
-        </p:spPr>
-        <p:txBody>
-          <a:bodyPr wrap="square">
+            <a:off x="411480" y="1572768"/>
+            <a:ext cx="5394960" cy="457200"/>
+          </a:xfrm>
+          <a:prstGeom prst="rect">
+            <a:avLst/>
+          </a:prstGeom>
+          <a:noFill/>
+        </p:spPr>
+        <p:txBody>
+          <a:bodyPr wrap="none">
             <a:spAutoFit/>
           </a:bodyPr>
           <a:lstStyle/>
           <a:p>
             <a:pPr algn="l"/>
             <a:r>
-              <a:rPr sz="2000" b="0" i="0">
+              <a:rPr sz="1500" b="0" i="1">
+                <a:solidFill>
+                  <a:srgbClr val="CCCCCC"/>
+                </a:solidFill>
+              </a:rPr>
+              <a:t>    · Only numerical features (7)  — categorical excluded</a:t>
+            </a:r>
+          </a:p>
+        </p:txBody>
+      </p:sp>
+      <p:sp>
+        <p:nvSpPr>
+          <p:cNvPr id="7" name="TextBox 6"/>
+          <p:cNvSpPr txBox="1"/>
+          <p:nvPr/>
+        </p:nvSpPr>
+        <p:spPr>
+          <a:xfrm>
+            <a:off x="411480" y="1975104"/>
+            <a:ext cx="5394960" cy="457200"/>
+          </a:xfrm>
+          <a:prstGeom prst="rect">
+            <a:avLst/>
+          </a:prstGeom>
+          <a:noFill/>
+        </p:spPr>
+        <p:txBody>
+          <a:bodyPr wrap="none">
+            <a:spAutoFit/>
+          </a:bodyPr>
+          <a:lstStyle/>
+          <a:p>
+            <a:pPr algn="l"/>
+            <a:r>
+              <a:rPr sz="1500" b="0" i="1">
+                <a:solidFill>
+                  <a:srgbClr val="CCCCCC"/>
+                </a:solidFill>
+              </a:rPr>
+              <a:t>    · Same preprocessing: log1p + StandardScaler</a:t>
+            </a:r>
+          </a:p>
+        </p:txBody>
+      </p:sp>
+      <p:sp>
+        <p:nvSpPr>
+          <p:cNvPr id="8" name="TextBox 7"/>
+          <p:cNvSpPr txBox="1"/>
+          <p:nvPr/>
+        </p:nvSpPr>
+        <p:spPr>
+          <a:xfrm>
+            <a:off x="411480" y="2560320"/>
+            <a:ext cx="5394960" cy="457200"/>
+          </a:xfrm>
+          <a:prstGeom prst="rect">
+            <a:avLst/>
+          </a:prstGeom>
+          <a:noFill/>
+        </p:spPr>
+        <p:txBody>
+          <a:bodyPr wrap="none">
+            <a:spAutoFit/>
+          </a:bodyPr>
+          <a:lstStyle/>
+          <a:p>
+            <a:pPr algn="l"/>
+            <a:r>
+              <a:rPr sz="1700" b="0" i="0">
                 <a:solidFill>
                   <a:srgbClr val="FFFFFF"/>
                 </a:solidFill>
               </a:rPr>
-              <a:t>Outcome label set aside  →  cluster on 7 numerical features only</a:t>
-            </a:r>
-          </a:p>
-        </p:txBody>
-      </p:sp>
-      <p:sp>
-        <p:nvSpPr>
-          <p:cNvPr id="7" name="TextBox 6"/>
-          <p:cNvSpPr txBox="1"/>
-          <p:nvPr/>
-        </p:nvSpPr>
-        <p:spPr>
-          <a:xfrm>
-            <a:off x="548640" y="2368296"/>
-            <a:ext cx="10972800" cy="502920"/>
-          </a:xfrm>
-          <a:prstGeom prst="rect">
-            <a:avLst/>
-          </a:prstGeom>
-          <a:noFill/>
-        </p:spPr>
-        <p:txBody>
-          <a:bodyPr wrap="square">
+              <a:t>PCA → 2D for visualisation</a:t>
+            </a:r>
+          </a:p>
+        </p:txBody>
+      </p:sp>
+      <p:sp>
+        <p:nvSpPr>
+          <p:cNvPr id="9" name="TextBox 8"/>
+          <p:cNvSpPr txBox="1"/>
+          <p:nvPr/>
+        </p:nvSpPr>
+        <p:spPr>
+          <a:xfrm>
+            <a:off x="411480" y="3035808"/>
+            <a:ext cx="5394960" cy="457200"/>
+          </a:xfrm>
+          <a:prstGeom prst="rect">
+            <a:avLst/>
+          </a:prstGeom>
+          <a:noFill/>
+        </p:spPr>
+        <p:txBody>
+          <a:bodyPr wrap="none">
             <a:spAutoFit/>
           </a:bodyPr>
           <a:lstStyle/>
           <a:p>
             <a:pPr algn="l"/>
             <a:r>
-              <a:rPr sz="1700" b="0" i="1">
+              <a:rPr sz="1500" b="0" i="1">
                 <a:solidFill>
                   <a:srgbClr val="CCCCCC"/>
                 </a:solidFill>
               </a:rPr>
-              <a:t>  · Categorical features excluded: arbitrary ordinal distances distort k-Means &amp; Ward</a:t>
-            </a:r>
-          </a:p>
-        </p:txBody>
-      </p:sp>
-      <p:sp>
-        <p:nvSpPr>
-          <p:cNvPr id="8" name="TextBox 7"/>
-          <p:cNvSpPr txBox="1"/>
-          <p:nvPr/>
-        </p:nvSpPr>
-        <p:spPr>
-          <a:xfrm>
-            <a:off x="548640" y="2843784"/>
-            <a:ext cx="10972800" cy="566928"/>
-          </a:xfrm>
-          <a:prstGeom prst="rect">
-            <a:avLst/>
-          </a:prstGeom>
-          <a:noFill/>
-        </p:spPr>
-        <p:txBody>
-          <a:bodyPr wrap="square">
+              <a:t>    · PC1 + PC2 explain 39.65% of variance</a:t>
+            </a:r>
+          </a:p>
+        </p:txBody>
+      </p:sp>
+      <p:sp>
+        <p:nvSpPr>
+          <p:cNvPr id="10" name="TextBox 9"/>
+          <p:cNvSpPr txBox="1"/>
+          <p:nvPr/>
+        </p:nvSpPr>
+        <p:spPr>
+          <a:xfrm>
+            <a:off x="411480" y="3621024"/>
+            <a:ext cx="5394960" cy="457200"/>
+          </a:xfrm>
+          <a:prstGeom prst="rect">
+            <a:avLst/>
+          </a:prstGeom>
+          <a:noFill/>
+        </p:spPr>
+        <p:txBody>
+          <a:bodyPr wrap="none">
             <a:spAutoFit/>
           </a:bodyPr>
           <a:lstStyle/>
           <a:p>
             <a:pPr algn="l"/>
             <a:r>
-              <a:rPr sz="2000" b="0" i="0">
+              <a:rPr sz="1700" b="0" i="0">
                 <a:solidFill>
                   <a:srgbClr val="FFFFFF"/>
                 </a:solidFill>
               </a:rPr>
-              <a:t>Preprocessing: same log1p + StandardScaler pipeline</a:t>
-            </a:r>
-          </a:p>
-        </p:txBody>
-      </p:sp>
-      <p:sp>
-        <p:nvSpPr>
-          <p:cNvPr id="9" name="TextBox 8"/>
-          <p:cNvSpPr txBox="1"/>
-          <p:nvPr/>
-        </p:nvSpPr>
-        <p:spPr>
-          <a:xfrm>
-            <a:off x="548640" y="3410712"/>
-            <a:ext cx="10972800" cy="566928"/>
-          </a:xfrm>
-          <a:prstGeom prst="rect">
-            <a:avLst/>
-          </a:prstGeom>
-          <a:noFill/>
-        </p:spPr>
-        <p:txBody>
-          <a:bodyPr wrap="square">
+              <a:t>Two methods — cross-validate each other:</a:t>
+            </a:r>
+          </a:p>
+        </p:txBody>
+      </p:sp>
+      <p:sp>
+        <p:nvSpPr>
+          <p:cNvPr id="11" name="TextBox 10"/>
+          <p:cNvSpPr txBox="1"/>
+          <p:nvPr/>
+        </p:nvSpPr>
+        <p:spPr>
+          <a:xfrm>
+            <a:off x="411480" y="4096512"/>
+            <a:ext cx="5394960" cy="457200"/>
+          </a:xfrm>
+          <a:prstGeom prst="rect">
+            <a:avLst/>
+          </a:prstGeom>
+          <a:noFill/>
+        </p:spPr>
+        <p:txBody>
+          <a:bodyPr wrap="none">
             <a:spAutoFit/>
           </a:bodyPr>
           <a:lstStyle/>
           <a:p>
             <a:pPr algn="l"/>
             <a:r>
-              <a:rPr sz="2000" b="0" i="0">
+              <a:rPr sz="1500" b="0" i="1">
+                <a:solidFill>
+                  <a:srgbClr val="CCCCCC"/>
+                </a:solidFill>
+              </a:rPr>
+              <a:t>    · K-Means (k=3)  on full 100 000 rows</a:t>
+            </a:r>
+          </a:p>
+        </p:txBody>
+      </p:sp>
+      <p:sp>
+        <p:nvSpPr>
+          <p:cNvPr id="12" name="TextBox 11"/>
+          <p:cNvSpPr txBox="1"/>
+          <p:nvPr/>
+        </p:nvSpPr>
+        <p:spPr>
+          <a:xfrm>
+            <a:off x="411480" y="4498848"/>
+            <a:ext cx="5394960" cy="457200"/>
+          </a:xfrm>
+          <a:prstGeom prst="rect">
+            <a:avLst/>
+          </a:prstGeom>
+          <a:noFill/>
+        </p:spPr>
+        <p:txBody>
+          <a:bodyPr wrap="none">
+            <a:spAutoFit/>
+          </a:bodyPr>
+          <a:lstStyle/>
+          <a:p>
+            <a:pPr algn="l"/>
+            <a:r>
+              <a:rPr sz="1500" b="0" i="1">
+                <a:solidFill>
+                  <a:srgbClr val="CCCCCC"/>
+                </a:solidFill>
+              </a:rPr>
+              <a:t>    · Agglomerative/Ward  on 5 000-row subsample  (O(n²) memory)</a:t>
+            </a:r>
+          </a:p>
+        </p:txBody>
+      </p:sp>
+      <p:sp>
+        <p:nvSpPr>
+          <p:cNvPr id="13" name="Rectangle 12"/>
+          <p:cNvSpPr/>
+          <p:nvPr/>
+        </p:nvSpPr>
+        <p:spPr>
+          <a:xfrm>
+            <a:off x="6400800" y="1097280"/>
+            <a:ext cx="5394960" cy="5394960"/>
+          </a:xfrm>
+          <a:prstGeom prst="rect">
+            <a:avLst/>
+          </a:prstGeom>
+          <a:solidFill>
+            <a:srgbClr val="16213E"/>
+          </a:solidFill>
+          <a:ln>
+            <a:noFill/>
+          </a:ln>
+        </p:spPr>
+        <p:style>
+          <a:lnRef idx="1">
+            <a:schemeClr val="accent1"/>
+          </a:lnRef>
+          <a:fillRef idx="3">
+            <a:schemeClr val="accent1"/>
+          </a:fillRef>
+          <a:effectRef idx="2">
+            <a:schemeClr val="accent1"/>
+          </a:effectRef>
+          <a:fontRef idx="minor">
+            <a:schemeClr val="lt1"/>
+          </a:fontRef>
+        </p:style>
+        <p:txBody>
+          <a:bodyPr rtlCol="0" anchor="ctr"/>
+          <a:lstStyle/>
+          <a:p>
+            <a:pPr algn="ctr"/>
+          </a:p>
+        </p:txBody>
+      </p:sp>
+      <p:sp>
+        <p:nvSpPr>
+          <p:cNvPr id="14" name="TextBox 13"/>
+          <p:cNvSpPr txBox="1"/>
+          <p:nvPr/>
+        </p:nvSpPr>
+        <p:spPr>
+          <a:xfrm>
+            <a:off x="6537960" y="1143000"/>
+            <a:ext cx="5120640" cy="457200"/>
+          </a:xfrm>
+          <a:prstGeom prst="rect">
+            <a:avLst/>
+          </a:prstGeom>
+          <a:noFill/>
+        </p:spPr>
+        <p:txBody>
+          <a:bodyPr wrap="none">
+            <a:spAutoFit/>
+          </a:bodyPr>
+          <a:lstStyle/>
+          <a:p>
+            <a:pPr algn="ctr"/>
+            <a:r>
+              <a:rPr sz="1400" b="1" i="0">
                 <a:solidFill>
                   <a:srgbClr val="FFFFFF"/>
                 </a:solidFill>
               </a:rPr>
-              <a:t>PCA → 2D for visualisation   (39.65 % variance in 2 components)</a:t>
-            </a:r>
-          </a:p>
-        </p:txBody>
-      </p:sp>
-      <p:sp>
-        <p:nvSpPr>
-          <p:cNvPr id="10" name="TextBox 9"/>
-          <p:cNvSpPr txBox="1"/>
-          <p:nvPr/>
-        </p:nvSpPr>
-        <p:spPr>
-          <a:xfrm>
-            <a:off x="548640" y="3977640"/>
-            <a:ext cx="10972800" cy="566928"/>
-          </a:xfrm>
-          <a:prstGeom prst="rect">
-            <a:avLst/>
-          </a:prstGeom>
-          <a:noFill/>
-        </p:spPr>
-        <p:txBody>
-          <a:bodyPr wrap="square">
-            <a:spAutoFit/>
-          </a:bodyPr>
-          <a:lstStyle/>
-          <a:p>
-            <a:pPr algn="l"/>
-            <a:r>
-              <a:rPr sz="2000" b="0" i="0">
-                <a:solidFill>
-                  <a:srgbClr val="FFFFFF"/>
-                </a:solidFill>
-              </a:rPr>
-              <a:t>Two methods used to cross-validate each other:</a:t>
-            </a:r>
-          </a:p>
-        </p:txBody>
-      </p:sp>
-      <p:sp>
-        <p:nvSpPr>
-          <p:cNvPr id="11" name="TextBox 10"/>
-          <p:cNvSpPr txBox="1"/>
-          <p:nvPr/>
-        </p:nvSpPr>
-        <p:spPr>
-          <a:xfrm>
-            <a:off x="548640" y="4544568"/>
-            <a:ext cx="10972800" cy="502920"/>
-          </a:xfrm>
-          <a:prstGeom prst="rect">
-            <a:avLst/>
-          </a:prstGeom>
-          <a:noFill/>
-        </p:spPr>
-        <p:txBody>
-          <a:bodyPr wrap="square">
-            <a:spAutoFit/>
-          </a:bodyPr>
-          <a:lstStyle/>
-          <a:p>
-            <a:pPr algn="l"/>
-            <a:r>
-              <a:rPr sz="1700" b="0" i="1">
-                <a:solidFill>
-                  <a:srgbClr val="CCCCCC"/>
-                </a:solidFill>
-              </a:rPr>
-              <a:t>  · K-Means (k=3)  on full 100 000 rows</a:t>
-            </a:r>
-          </a:p>
-        </p:txBody>
-      </p:sp>
-      <p:sp>
-        <p:nvSpPr>
-          <p:cNvPr id="12" name="TextBox 11"/>
-          <p:cNvSpPr txBox="1"/>
-          <p:nvPr/>
-        </p:nvSpPr>
-        <p:spPr>
-          <a:xfrm>
-            <a:off x="548640" y="5020056"/>
-            <a:ext cx="10972800" cy="502920"/>
-          </a:xfrm>
-          <a:prstGeom prst="rect">
-            <a:avLst/>
-          </a:prstGeom>
-          <a:noFill/>
-        </p:spPr>
-        <p:txBody>
-          <a:bodyPr wrap="square">
-            <a:spAutoFit/>
-          </a:bodyPr>
-          <a:lstStyle/>
-          <a:p>
-            <a:pPr algn="l"/>
-            <a:r>
-              <a:rPr sz="1700" b="0" i="1">
-                <a:solidFill>
-                  <a:srgbClr val="CCCCCC"/>
-                </a:solidFill>
-              </a:rPr>
-              <a:t>  · Agglomerative / Ward  on 5 000-row subsample  (O(n²) memory limit)</a:t>
-            </a:r>
-          </a:p>
-        </p:txBody>
-      </p:sp>
+              <a:t>Dendrogram (Ward linkage) → confirms k=3</a:t>
+            </a:r>
+          </a:p>
+        </p:txBody>
+      </p:sp>
+      <p:pic>
+        <p:nvPicPr>
+          <p:cNvPr id="15" name="Picture 14" descr="hc_dendrogram.png"/>
+          <p:cNvPicPr>
+            <a:picLocks noChangeAspect="1"/>
+          </p:cNvPicPr>
+          <p:nvPr/>
+        </p:nvPicPr>
+        <p:blipFill>
+          <a:blip r:embed="rId2"/>
+          <a:stretch>
+            <a:fillRect/>
+          </a:stretch>
+        </p:blipFill>
+        <p:spPr>
+          <a:xfrm>
+            <a:off x="6446520" y="1600200"/>
+            <a:ext cx="5303520" cy="3700130"/>
+          </a:xfrm>
+          <a:prstGeom prst="rect">
+            <a:avLst/>
+          </a:prstGeom>
+        </p:spPr>
+      </p:pic>
     </p:spTree>
   </p:cSld>
   <p:clrMapOvr>
@@ -6254,7 +8362,7 @@
         <p:spPr>
           <a:xfrm>
             <a:off x="0" y="0"/>
-            <a:ext cx="12188952" cy="1051560"/>
+            <a:ext cx="12188952" cy="960120"/>
           </a:xfrm>
           <a:prstGeom prst="rect">
             <a:avLst/>
@@ -6296,28 +8404,28 @@
         </p:nvSpPr>
         <p:spPr>
           <a:xfrm>
-            <a:off x="320040" y="164592"/>
-            <a:ext cx="11430000" cy="777240"/>
-          </a:xfrm>
-          <a:prstGeom prst="rect">
-            <a:avLst/>
-          </a:prstGeom>
-          <a:noFill/>
-        </p:spPr>
-        <p:txBody>
-          <a:bodyPr wrap="square">
+            <a:off x="274320" y="109728"/>
+            <a:ext cx="11612880" cy="777240"/>
+          </a:xfrm>
+          <a:prstGeom prst="rect">
+            <a:avLst/>
+          </a:prstGeom>
+          <a:noFill/>
+        </p:spPr>
+        <p:txBody>
+          <a:bodyPr wrap="none">
             <a:spAutoFit/>
           </a:bodyPr>
           <a:lstStyle/>
           <a:p>
             <a:pPr algn="l"/>
             <a:r>
-              <a:rPr sz="3000" b="1" i="0">
+              <a:rPr sz="2800" b="1" i="0">
                 <a:solidFill>
                   <a:srgbClr val="FFFFFF"/>
                 </a:solidFill>
               </a:rPr>
-              <a:t>Choosing k = 3</a:t>
+              <a:t>Choosing k = 3  —  Silhouette + Visual Comparison</a:t>
             </a:r>
           </a:p>
         </p:txBody>
@@ -6330,14 +8438,14 @@
         </p:nvSpPr>
         <p:spPr>
           <a:xfrm>
-            <a:off x="320040" y="1234440"/>
-            <a:ext cx="64008" cy="5029200"/>
+            <a:off x="182880" y="1051560"/>
+            <a:ext cx="7772400" cy="4206240"/>
           </a:xfrm>
           <a:prstGeom prst="rect">
             <a:avLst/>
           </a:prstGeom>
           <a:solidFill>
-            <a:srgbClr val="F39C12"/>
+            <a:srgbClr val="16213E"/>
           </a:solidFill>
           <a:ln>
             <a:noFill/>
@@ -6373,270 +8481,574 @@
         </p:nvSpPr>
         <p:spPr>
           <a:xfrm>
-            <a:off x="548640" y="1234440"/>
-            <a:ext cx="10972800" cy="566928"/>
-          </a:xfrm>
-          <a:prstGeom prst="rect">
-            <a:avLst/>
-          </a:prstGeom>
-          <a:noFill/>
-        </p:spPr>
-        <p:txBody>
-          <a:bodyPr wrap="square">
+            <a:off x="320040" y="1097280"/>
+            <a:ext cx="7498079" cy="411480"/>
+          </a:xfrm>
+          <a:prstGeom prst="rect">
+            <a:avLst/>
+          </a:prstGeom>
+          <a:noFill/>
+        </p:spPr>
+        <p:txBody>
+          <a:bodyPr wrap="none">
+            <a:spAutoFit/>
+          </a:bodyPr>
+          <a:lstStyle/>
+          <a:p>
+            <a:pPr algn="ctr"/>
+            <a:r>
+              <a:rPr sz="1400" b="1" i="0">
+                <a:solidFill>
+                  <a:srgbClr val="FFFFFF"/>
+                </a:solidFill>
+              </a:rPr>
+              <a:t>K-Means: k=2 vs k=3 (PCA 2D)</a:t>
+            </a:r>
+          </a:p>
+        </p:txBody>
+      </p:sp>
+      <p:pic>
+        <p:nvPicPr>
+          <p:cNvPr id="6" name="Picture 5" descr="kmeans_k2_pca.png"/>
+          <p:cNvPicPr>
+            <a:picLocks noChangeAspect="1"/>
+          </p:cNvPicPr>
+          <p:nvPr/>
+        </p:nvPicPr>
+        <p:blipFill>
+          <a:blip r:embed="rId2"/>
+          <a:stretch>
+            <a:fillRect/>
+          </a:stretch>
+        </p:blipFill>
+        <p:spPr>
+          <a:xfrm>
+            <a:off x="228600" y="1536192"/>
+            <a:ext cx="7589520" cy="3234698"/>
+          </a:xfrm>
+          <a:prstGeom prst="rect">
+            <a:avLst/>
+          </a:prstGeom>
+        </p:spPr>
+      </p:pic>
+      <p:sp>
+        <p:nvSpPr>
+          <p:cNvPr id="7" name="Rectangle 6"/>
+          <p:cNvSpPr/>
+          <p:nvPr/>
+        </p:nvSpPr>
+        <p:spPr>
+          <a:xfrm>
+            <a:off x="8138160" y="1051560"/>
+            <a:ext cx="3840480" cy="4206240"/>
+          </a:xfrm>
+          <a:prstGeom prst="rect">
+            <a:avLst/>
+          </a:prstGeom>
+          <a:solidFill>
+            <a:srgbClr val="16213E"/>
+          </a:solidFill>
+          <a:ln>
+            <a:noFill/>
+          </a:ln>
+        </p:spPr>
+        <p:style>
+          <a:lnRef idx="1">
+            <a:schemeClr val="accent1"/>
+          </a:lnRef>
+          <a:fillRef idx="3">
+            <a:schemeClr val="accent1"/>
+          </a:fillRef>
+          <a:effectRef idx="2">
+            <a:schemeClr val="accent1"/>
+          </a:effectRef>
+          <a:fontRef idx="minor">
+            <a:schemeClr val="lt1"/>
+          </a:fontRef>
+        </p:style>
+        <p:txBody>
+          <a:bodyPr rtlCol="0" anchor="ctr"/>
+          <a:lstStyle/>
+          <a:p>
+            <a:pPr algn="ctr"/>
+          </a:p>
+        </p:txBody>
+      </p:sp>
+      <p:sp>
+        <p:nvSpPr>
+          <p:cNvPr id="8" name="TextBox 7"/>
+          <p:cNvSpPr txBox="1"/>
+          <p:nvPr/>
+        </p:nvSpPr>
+        <p:spPr>
+          <a:xfrm>
+            <a:off x="8275320" y="1143000"/>
+            <a:ext cx="3566160" cy="457200"/>
+          </a:xfrm>
+          <a:prstGeom prst="rect">
+            <a:avLst/>
+          </a:prstGeom>
+          <a:noFill/>
+        </p:spPr>
+        <p:txBody>
+          <a:bodyPr wrap="none">
             <a:spAutoFit/>
           </a:bodyPr>
           <a:lstStyle/>
           <a:p>
             <a:pPr algn="l"/>
             <a:r>
-              <a:rPr sz="2000" b="0" i="0">
+              <a:rPr sz="1500" b="1" i="0">
+                <a:solidFill>
+                  <a:srgbClr val="F39C12"/>
+                </a:solidFill>
+              </a:rPr>
+              <a:t>Why k=3?</a:t>
+            </a:r>
+          </a:p>
+        </p:txBody>
+      </p:sp>
+      <p:sp>
+        <p:nvSpPr>
+          <p:cNvPr id="9" name="TextBox 8"/>
+          <p:cNvSpPr txBox="1"/>
+          <p:nvPr/>
+        </p:nvSpPr>
+        <p:spPr>
+          <a:xfrm>
+            <a:off x="8275320" y="1645920"/>
+            <a:ext cx="3566160" cy="457200"/>
+          </a:xfrm>
+          <a:prstGeom prst="rect">
+            <a:avLst/>
+          </a:prstGeom>
+          <a:noFill/>
+        </p:spPr>
+        <p:txBody>
+          <a:bodyPr wrap="none">
+            <a:spAutoFit/>
+          </a:bodyPr>
+          <a:lstStyle/>
+          <a:p>
+            <a:pPr algn="l"/>
+            <a:r>
+              <a:rPr sz="1700" b="0" i="0">
                 <a:solidFill>
                   <a:srgbClr val="FFFFFF"/>
                 </a:solidFill>
               </a:rPr>
-              <a:t>Compared k=2 and k=3 via silhouette score + PCA scatter</a:t>
-            </a:r>
-          </a:p>
-        </p:txBody>
-      </p:sp>
-      <p:sp>
-        <p:nvSpPr>
-          <p:cNvPr id="6" name="TextBox 5"/>
-          <p:cNvSpPr txBox="1"/>
-          <p:nvPr/>
-        </p:nvSpPr>
-        <p:spPr>
-          <a:xfrm>
-            <a:off x="548640" y="1801368"/>
-            <a:ext cx="10972800" cy="502920"/>
-          </a:xfrm>
-          <a:prstGeom prst="rect">
-            <a:avLst/>
-          </a:prstGeom>
-          <a:noFill/>
-        </p:spPr>
-        <p:txBody>
-          <a:bodyPr wrap="square">
+              <a:t>Silhouette scores:</a:t>
+            </a:r>
+          </a:p>
+        </p:txBody>
+      </p:sp>
+      <p:sp>
+        <p:nvSpPr>
+          <p:cNvPr id="10" name="TextBox 9"/>
+          <p:cNvSpPr txBox="1"/>
+          <p:nvPr/>
+        </p:nvSpPr>
+        <p:spPr>
+          <a:xfrm>
+            <a:off x="8275320" y="2075688"/>
+            <a:ext cx="3566160" cy="457200"/>
+          </a:xfrm>
+          <a:prstGeom prst="rect">
+            <a:avLst/>
+          </a:prstGeom>
+          <a:noFill/>
+        </p:spPr>
+        <p:txBody>
+          <a:bodyPr wrap="none">
             <a:spAutoFit/>
           </a:bodyPr>
           <a:lstStyle/>
           <a:p>
             <a:pPr algn="l"/>
             <a:r>
-              <a:rPr sz="1700" b="0" i="1">
+              <a:rPr sz="1500" b="0" i="1">
                 <a:solidFill>
                   <a:srgbClr val="CCCCCC"/>
                 </a:solidFill>
               </a:rPr>
-              <a:t>  · k=2  silhouette = 0.1612   ·   k=3  silhouette = 0.1553  → scores nearly equal</a:t>
-            </a:r>
-          </a:p>
-        </p:txBody>
-      </p:sp>
-      <p:sp>
-        <p:nvSpPr>
-          <p:cNvPr id="7" name="TextBox 6"/>
-          <p:cNvSpPr txBox="1"/>
-          <p:nvPr/>
-        </p:nvSpPr>
-        <p:spPr>
-          <a:xfrm>
-            <a:off x="548640" y="2276856"/>
-            <a:ext cx="10972800" cy="566928"/>
-          </a:xfrm>
-          <a:prstGeom prst="rect">
-            <a:avLst/>
-          </a:prstGeom>
-          <a:noFill/>
-        </p:spPr>
-        <p:txBody>
-          <a:bodyPr wrap="square">
+              <a:t>    · k=2 → 0.1612</a:t>
+            </a:r>
+          </a:p>
+        </p:txBody>
+      </p:sp>
+      <p:sp>
+        <p:nvSpPr>
+          <p:cNvPr id="11" name="TextBox 10"/>
+          <p:cNvSpPr txBox="1"/>
+          <p:nvPr/>
+        </p:nvSpPr>
+        <p:spPr>
+          <a:xfrm>
+            <a:off x="8275320" y="2432304"/>
+            <a:ext cx="3566160" cy="457200"/>
+          </a:xfrm>
+          <a:prstGeom prst="rect">
+            <a:avLst/>
+          </a:prstGeom>
+          <a:noFill/>
+        </p:spPr>
+        <p:txBody>
+          <a:bodyPr wrap="none">
             <a:spAutoFit/>
           </a:bodyPr>
           <a:lstStyle/>
           <a:p>
             <a:pPr algn="l"/>
             <a:r>
-              <a:rPr sz="2000" b="0" i="0">
+              <a:rPr sz="1500" b="0" i="1">
+                <a:solidFill>
+                  <a:srgbClr val="CCCCCC"/>
+                </a:solidFill>
+              </a:rPr>
+              <a:t>    · k=3 → 0.1553  (similar)</a:t>
+            </a:r>
+          </a:p>
+        </p:txBody>
+      </p:sp>
+      <p:sp>
+        <p:nvSpPr>
+          <p:cNvPr id="12" name="TextBox 11"/>
+          <p:cNvSpPr txBox="1"/>
+          <p:nvPr/>
+        </p:nvSpPr>
+        <p:spPr>
+          <a:xfrm>
+            <a:off x="8275320" y="2971800"/>
+            <a:ext cx="3566160" cy="457200"/>
+          </a:xfrm>
+          <a:prstGeom prst="rect">
+            <a:avLst/>
+          </a:prstGeom>
+          <a:noFill/>
+        </p:spPr>
+        <p:txBody>
+          <a:bodyPr wrap="none">
+            <a:spAutoFit/>
+          </a:bodyPr>
+          <a:lstStyle/>
+          <a:p>
+            <a:pPr algn="l"/>
+            <a:r>
+              <a:rPr sz="1700" b="0" i="0">
                 <a:solidFill>
                   <a:srgbClr val="FFFFFF"/>
                 </a:solidFill>
               </a:rPr>
-              <a:t>Low scores expected: synthetic dataset with 5 noisy features</a:t>
-            </a:r>
-          </a:p>
-        </p:txBody>
-      </p:sp>
-      <p:sp>
-        <p:nvSpPr>
-          <p:cNvPr id="8" name="TextBox 7"/>
-          <p:cNvSpPr txBox="1"/>
-          <p:nvPr/>
-        </p:nvSpPr>
-        <p:spPr>
-          <a:xfrm>
-            <a:off x="548640" y="2843784"/>
-            <a:ext cx="10972800" cy="566928"/>
-          </a:xfrm>
-          <a:prstGeom prst="rect">
-            <a:avLst/>
-          </a:prstGeom>
-          <a:noFill/>
-        </p:spPr>
-        <p:txBody>
-          <a:bodyPr wrap="square">
+              <a:t>Dendrogram gap</a:t>
+            </a:r>
+          </a:p>
+        </p:txBody>
+      </p:sp>
+      <p:sp>
+        <p:nvSpPr>
+          <p:cNvPr id="13" name="TextBox 12"/>
+          <p:cNvSpPr txBox="1"/>
+          <p:nvPr/>
+        </p:nvSpPr>
+        <p:spPr>
+          <a:xfrm>
+            <a:off x="8275320" y="3401568"/>
+            <a:ext cx="3566160" cy="457200"/>
+          </a:xfrm>
+          <a:prstGeom prst="rect">
+            <a:avLst/>
+          </a:prstGeom>
+          <a:noFill/>
+        </p:spPr>
+        <p:txBody>
+          <a:bodyPr wrap="none">
             <a:spAutoFit/>
           </a:bodyPr>
           <a:lstStyle/>
           <a:p>
             <a:pPr algn="l"/>
             <a:r>
-              <a:rPr sz="2000" b="0" i="0">
+              <a:rPr sz="1500" b="0" i="1">
+                <a:solidFill>
+                  <a:srgbClr val="CCCCCC"/>
+                </a:solidFill>
+              </a:rPr>
+              <a:t>    · Large gap before 3rd merge</a:t>
+            </a:r>
+          </a:p>
+        </p:txBody>
+      </p:sp>
+      <p:sp>
+        <p:nvSpPr>
+          <p:cNvPr id="14" name="TextBox 13"/>
+          <p:cNvSpPr txBox="1"/>
+          <p:nvPr/>
+        </p:nvSpPr>
+        <p:spPr>
+          <a:xfrm>
+            <a:off x="8275320" y="3941064"/>
+            <a:ext cx="3566160" cy="457200"/>
+          </a:xfrm>
+          <a:prstGeom prst="rect">
+            <a:avLst/>
+          </a:prstGeom>
+          <a:noFill/>
+        </p:spPr>
+        <p:txBody>
+          <a:bodyPr wrap="none">
+            <a:spAutoFit/>
+          </a:bodyPr>
+          <a:lstStyle/>
+          <a:p>
+            <a:pPr algn="l"/>
+            <a:r>
+              <a:rPr sz="1700" b="0" i="0">
                 <a:solidFill>
                   <a:srgbClr val="FFFFFF"/>
                 </a:solidFill>
               </a:rPr>
-              <a:t>k=2 sanity check: clusters partially align with Failure / Non-Failure split</a:t>
-            </a:r>
-          </a:p>
-        </p:txBody>
-      </p:sp>
-      <p:sp>
-        <p:nvSpPr>
-          <p:cNvPr id="9" name="TextBox 8"/>
-          <p:cNvSpPr txBox="1"/>
-          <p:nvPr/>
-        </p:nvSpPr>
-        <p:spPr>
-          <a:xfrm>
-            <a:off x="548640" y="3410712"/>
-            <a:ext cx="10972800" cy="502920"/>
-          </a:xfrm>
-          <a:prstGeom prst="rect">
-            <a:avLst/>
-          </a:prstGeom>
-          <a:noFill/>
-        </p:spPr>
-        <p:txBody>
-          <a:bodyPr wrap="square">
+              <a:t>k=2 sanity check:</a:t>
+            </a:r>
+          </a:p>
+        </p:txBody>
+      </p:sp>
+      <p:sp>
+        <p:nvSpPr>
+          <p:cNvPr id="15" name="TextBox 14"/>
+          <p:cNvSpPr txBox="1"/>
+          <p:nvPr/>
+        </p:nvSpPr>
+        <p:spPr>
+          <a:xfrm>
+            <a:off x="8275320" y="4370832"/>
+            <a:ext cx="3566160" cy="457200"/>
+          </a:xfrm>
+          <a:prstGeom prst="rect">
+            <a:avLst/>
+          </a:prstGeom>
+          <a:noFill/>
+        </p:spPr>
+        <p:txBody>
+          <a:bodyPr wrap="none">
             <a:spAutoFit/>
           </a:bodyPr>
           <a:lstStyle/>
           <a:p>
             <a:pPr algn="l"/>
             <a:r>
-              <a:rPr sz="1700" b="0" i="1">
+              <a:rPr sz="1500" b="0" i="1">
                 <a:solidFill>
                   <a:srgbClr val="CCCCCC"/>
                 </a:solidFill>
               </a:rPr>
-              <a:t>  · Cluster 1 → 79.7% Failure   ·   Cluster 0 → 75% Non-Failure</a:t>
-            </a:r>
-          </a:p>
-        </p:txBody>
-      </p:sp>
-      <p:sp>
-        <p:nvSpPr>
-          <p:cNvPr id="10" name="TextBox 9"/>
-          <p:cNvSpPr txBox="1"/>
-          <p:nvPr/>
-        </p:nvSpPr>
-        <p:spPr>
-          <a:xfrm>
-            <a:off x="548640" y="3886200"/>
-            <a:ext cx="10972800" cy="502920"/>
-          </a:xfrm>
-          <a:prstGeom prst="rect">
-            <a:avLst/>
-          </a:prstGeom>
-          <a:noFill/>
-        </p:spPr>
-        <p:txBody>
-          <a:bodyPr wrap="square">
+              <a:t>    · Cluster 1 → 79.7% Failure</a:t>
+            </a:r>
+          </a:p>
+        </p:txBody>
+      </p:sp>
+      <p:sp>
+        <p:nvSpPr>
+          <p:cNvPr id="16" name="TextBox 15"/>
+          <p:cNvSpPr txBox="1"/>
+          <p:nvPr/>
+        </p:nvSpPr>
+        <p:spPr>
+          <a:xfrm>
+            <a:off x="8275320" y="4727448"/>
+            <a:ext cx="3566160" cy="457200"/>
+          </a:xfrm>
+          <a:prstGeom prst="rect">
+            <a:avLst/>
+          </a:prstGeom>
+          <a:noFill/>
+        </p:spPr>
+        <p:txBody>
+          <a:bodyPr wrap="none">
             <a:spAutoFit/>
           </a:bodyPr>
           <a:lstStyle/>
           <a:p>
             <a:pPr algn="l"/>
             <a:r>
-              <a:rPr sz="1700" b="0" i="1">
+              <a:rPr sz="1500" b="0" i="1">
                 <a:solidFill>
                   <a:srgbClr val="CCCCCC"/>
                 </a:solidFill>
               </a:rPr>
-              <a:t>  · But the split is not clean — a 2nd dimension of variation exists inside Non-Failure</a:t>
-            </a:r>
-          </a:p>
-        </p:txBody>
-      </p:sp>
-      <p:sp>
-        <p:nvSpPr>
-          <p:cNvPr id="11" name="TextBox 10"/>
-          <p:cNvSpPr txBox="1"/>
-          <p:nvPr/>
-        </p:nvSpPr>
-        <p:spPr>
-          <a:xfrm>
-            <a:off x="548640" y="4361688"/>
-            <a:ext cx="10972800" cy="566928"/>
-          </a:xfrm>
-          <a:prstGeom prst="rect">
-            <a:avLst/>
-          </a:prstGeom>
-          <a:noFill/>
-        </p:spPr>
-        <p:txBody>
-          <a:bodyPr wrap="square">
+              <a:t>    · But Non-Failure not split</a:t>
+            </a:r>
+          </a:p>
+        </p:txBody>
+      </p:sp>
+      <p:sp>
+        <p:nvSpPr>
+          <p:cNvPr id="17" name="TextBox 16"/>
+          <p:cNvSpPr txBox="1"/>
+          <p:nvPr/>
+        </p:nvSpPr>
+        <p:spPr>
+          <a:xfrm>
+            <a:off x="8275320" y="5266944"/>
+            <a:ext cx="3566160" cy="457200"/>
+          </a:xfrm>
+          <a:prstGeom prst="rect">
+            <a:avLst/>
+          </a:prstGeom>
+          <a:noFill/>
+        </p:spPr>
+        <p:txBody>
+          <a:bodyPr wrap="none">
             <a:spAutoFit/>
           </a:bodyPr>
           <a:lstStyle/>
           <a:p>
             <a:pPr algn="l"/>
             <a:r>
-              <a:rPr sz="2000" b="0" i="0">
+              <a:rPr sz="1700" b="0" i="0">
                 <a:solidFill>
                   <a:srgbClr val="FFFFFF"/>
                 </a:solidFill>
               </a:rPr>
-              <a:t>Dendrogram (Ward) independently confirms k=3: large gap before the 3rd merge</a:t>
-            </a:r>
-          </a:p>
-        </p:txBody>
-      </p:sp>
-      <p:sp>
-        <p:nvSpPr>
-          <p:cNvPr id="12" name="TextBox 11"/>
-          <p:cNvSpPr txBox="1"/>
-          <p:nvPr/>
-        </p:nvSpPr>
-        <p:spPr>
-          <a:xfrm>
-            <a:off x="548640" y="4928616"/>
-            <a:ext cx="10972800" cy="566928"/>
-          </a:xfrm>
-          <a:prstGeom prst="rect">
-            <a:avLst/>
-          </a:prstGeom>
-          <a:noFill/>
-        </p:spPr>
-        <p:txBody>
-          <a:bodyPr wrap="square">
+              <a:t>k=3 adds richer</a:t>
+            </a:r>
+          </a:p>
+        </p:txBody>
+      </p:sp>
+      <p:sp>
+        <p:nvSpPr>
+          <p:cNvPr id="18" name="TextBox 17"/>
+          <p:cNvSpPr txBox="1"/>
+          <p:nvPr/>
+        </p:nvSpPr>
+        <p:spPr>
+          <a:xfrm>
+            <a:off x="8275320" y="5696712"/>
+            <a:ext cx="3566160" cy="457200"/>
+          </a:xfrm>
+          <a:prstGeom prst="rect">
+            <a:avLst/>
+          </a:prstGeom>
+          <a:noFill/>
+        </p:spPr>
+        <p:txBody>
+          <a:bodyPr wrap="none">
             <a:spAutoFit/>
           </a:bodyPr>
           <a:lstStyle/>
           <a:p>
             <a:pPr algn="l"/>
             <a:r>
-              <a:rPr sz="2000" b="0" i="0">
+              <a:rPr sz="1700" b="0" i="0">
                 <a:solidFill>
                   <a:srgbClr val="FFFFFF"/>
                 </a:solidFill>
               </a:rPr>
-              <a:t>k=3 chosen: richer interpretation, no meaningful loss in silhouette</a:t>
-            </a:r>
-          </a:p>
-        </p:txBody>
-      </p:sp>
+              <a:t>interpretation</a:t>
+            </a:r>
+          </a:p>
+        </p:txBody>
+      </p:sp>
+      <p:sp>
+        <p:nvSpPr>
+          <p:cNvPr id="19" name="Rectangle 18"/>
+          <p:cNvSpPr/>
+          <p:nvPr/>
+        </p:nvSpPr>
+        <p:spPr>
+          <a:xfrm>
+            <a:off x="182880" y="5321808"/>
+            <a:ext cx="11795760" cy="1261872"/>
+          </a:xfrm>
+          <a:prstGeom prst="rect">
+            <a:avLst/>
+          </a:prstGeom>
+          <a:solidFill>
+            <a:srgbClr val="16213E"/>
+          </a:solidFill>
+          <a:ln>
+            <a:noFill/>
+          </a:ln>
+        </p:spPr>
+        <p:style>
+          <a:lnRef idx="1">
+            <a:schemeClr val="accent1"/>
+          </a:lnRef>
+          <a:fillRef idx="3">
+            <a:schemeClr val="accent1"/>
+          </a:fillRef>
+          <a:effectRef idx="2">
+            <a:schemeClr val="accent1"/>
+          </a:effectRef>
+          <a:fontRef idx="minor">
+            <a:schemeClr val="lt1"/>
+          </a:fontRef>
+        </p:style>
+        <p:txBody>
+          <a:bodyPr rtlCol="0" anchor="ctr"/>
+          <a:lstStyle/>
+          <a:p>
+            <a:pPr algn="ctr"/>
+          </a:p>
+        </p:txBody>
+      </p:sp>
+      <p:sp>
+        <p:nvSpPr>
+          <p:cNvPr id="20" name="TextBox 19"/>
+          <p:cNvSpPr txBox="1"/>
+          <p:nvPr/>
+        </p:nvSpPr>
+        <p:spPr>
+          <a:xfrm>
+            <a:off x="365760" y="5367528"/>
+            <a:ext cx="11430000" cy="411480"/>
+          </a:xfrm>
+          <a:prstGeom prst="rect">
+            <a:avLst/>
+          </a:prstGeom>
+          <a:noFill/>
+        </p:spPr>
+        <p:txBody>
+          <a:bodyPr wrap="none">
+            <a:spAutoFit/>
+          </a:bodyPr>
+          <a:lstStyle/>
+          <a:p>
+            <a:pPr algn="ctr"/>
+            <a:r>
+              <a:rPr sz="1400" b="1" i="0">
+                <a:solidFill>
+                  <a:srgbClr val="FFFFFF"/>
+                </a:solidFill>
+              </a:rPr>
+              <a:t>k=2 clusters vs true binary outcome (Failure / Non-Failure)</a:t>
+            </a:r>
+          </a:p>
+        </p:txBody>
+      </p:sp>
+      <p:pic>
+        <p:nvPicPr>
+          <p:cNvPr id="21" name="Picture 20" descr="k2_vs_outcome.png"/>
+          <p:cNvPicPr>
+            <a:picLocks noChangeAspect="1"/>
+          </p:cNvPicPr>
+          <p:nvPr/>
+        </p:nvPicPr>
+        <p:blipFill>
+          <a:blip r:embed="rId3"/>
+          <a:stretch>
+            <a:fillRect/>
+          </a:stretch>
+        </p:blipFill>
+        <p:spPr>
+          <a:xfrm>
+            <a:off x="1371600" y="5440680"/>
+            <a:ext cx="9144000" cy="3897227"/>
+          </a:xfrm>
+          <a:prstGeom prst="rect">
+            <a:avLst/>
+          </a:prstGeom>
+        </p:spPr>
+      </p:pic>
     </p:spTree>
   </p:cSld>
   <p:clrMapOvr>
@@ -6672,7 +9084,185 @@
         <p:spPr>
           <a:xfrm>
             <a:off x="0" y="0"/>
-            <a:ext cx="12188952" cy="1051560"/>
+            <a:ext cx="12188952" cy="960120"/>
+          </a:xfrm>
+          <a:prstGeom prst="rect">
+            <a:avLst/>
+          </a:prstGeom>
+          <a:solidFill>
+            <a:srgbClr val="2ECC71"/>
+          </a:solidFill>
+          <a:ln>
+            <a:noFill/>
+          </a:ln>
+        </p:spPr>
+        <p:style>
+          <a:lnRef idx="1">
+            <a:schemeClr val="accent1"/>
+          </a:lnRef>
+          <a:fillRef idx="3">
+            <a:schemeClr val="accent1"/>
+          </a:fillRef>
+          <a:effectRef idx="2">
+            <a:schemeClr val="accent1"/>
+          </a:effectRef>
+          <a:fontRef idx="minor">
+            <a:schemeClr val="lt1"/>
+          </a:fontRef>
+        </p:style>
+        <p:txBody>
+          <a:bodyPr rtlCol="0" anchor="ctr"/>
+          <a:lstStyle/>
+          <a:p>
+            <a:pPr algn="ctr"/>
+          </a:p>
+        </p:txBody>
+      </p:sp>
+      <p:sp>
+        <p:nvSpPr>
+          <p:cNvPr id="3" name="TextBox 2"/>
+          <p:cNvSpPr txBox="1"/>
+          <p:nvPr/>
+        </p:nvSpPr>
+        <p:spPr>
+          <a:xfrm>
+            <a:off x="274320" y="109728"/>
+            <a:ext cx="11612880" cy="777240"/>
+          </a:xfrm>
+          <a:prstGeom prst="rect">
+            <a:avLst/>
+          </a:prstGeom>
+          <a:noFill/>
+        </p:spPr>
+        <p:txBody>
+          <a:bodyPr wrap="none">
+            <a:spAutoFit/>
+          </a:bodyPr>
+          <a:lstStyle/>
+          <a:p>
+            <a:pPr algn="l"/>
+            <a:r>
+              <a:rPr sz="2800" b="1" i="0">
+                <a:solidFill>
+                  <a:srgbClr val="FFFFFF"/>
+                </a:solidFill>
+              </a:rPr>
+              <a:t>Cluster Profiles — 3 Startup Archetypes</a:t>
+            </a:r>
+          </a:p>
+        </p:txBody>
+      </p:sp>
+      <p:sp>
+        <p:nvSpPr>
+          <p:cNvPr id="4" name="Rectangle 3"/>
+          <p:cNvSpPr/>
+          <p:nvPr/>
+        </p:nvSpPr>
+        <p:spPr>
+          <a:xfrm>
+            <a:off x="182880" y="1005840"/>
+            <a:ext cx="11795760" cy="3291840"/>
+          </a:xfrm>
+          <a:prstGeom prst="rect">
+            <a:avLst/>
+          </a:prstGeom>
+          <a:solidFill>
+            <a:srgbClr val="16213E"/>
+          </a:solidFill>
+          <a:ln>
+            <a:noFill/>
+          </a:ln>
+        </p:spPr>
+        <p:style>
+          <a:lnRef idx="1">
+            <a:schemeClr val="accent1"/>
+          </a:lnRef>
+          <a:fillRef idx="3">
+            <a:schemeClr val="accent1"/>
+          </a:fillRef>
+          <a:effectRef idx="2">
+            <a:schemeClr val="accent1"/>
+          </a:effectRef>
+          <a:fontRef idx="minor">
+            <a:schemeClr val="lt1"/>
+          </a:fontRef>
+        </p:style>
+        <p:txBody>
+          <a:bodyPr rtlCol="0" anchor="ctr"/>
+          <a:lstStyle/>
+          <a:p>
+            <a:pPr algn="ctr"/>
+          </a:p>
+        </p:txBody>
+      </p:sp>
+      <p:sp>
+        <p:nvSpPr>
+          <p:cNvPr id="5" name="TextBox 4"/>
+          <p:cNvSpPr txBox="1"/>
+          <p:nvPr/>
+        </p:nvSpPr>
+        <p:spPr>
+          <a:xfrm>
+            <a:off x="365760" y="1051560"/>
+            <a:ext cx="11430000" cy="411480"/>
+          </a:xfrm>
+          <a:prstGeom prst="rect">
+            <a:avLst/>
+          </a:prstGeom>
+          <a:noFill/>
+        </p:spPr>
+        <p:txBody>
+          <a:bodyPr wrap="none">
+            <a:spAutoFit/>
+          </a:bodyPr>
+          <a:lstStyle/>
+          <a:p>
+            <a:pPr algn="ctr"/>
+            <a:r>
+              <a:rPr sz="1400" b="1" i="0">
+                <a:solidFill>
+                  <a:srgbClr val="FFFFFF"/>
+                </a:solidFill>
+              </a:rPr>
+              <a:t>Mean feature values per K-Means cluster</a:t>
+            </a:r>
+          </a:p>
+        </p:txBody>
+      </p:sp>
+      <p:pic>
+        <p:nvPicPr>
+          <p:cNvPr id="6" name="Picture 5" descr="cluster_profiles.png"/>
+          <p:cNvPicPr>
+            <a:picLocks noChangeAspect="1"/>
+          </p:cNvPicPr>
+          <p:nvPr/>
+        </p:nvPicPr>
+        <p:blipFill>
+          <a:blip r:embed="rId2"/>
+          <a:stretch>
+            <a:fillRect/>
+          </a:stretch>
+        </p:blipFill>
+        <p:spPr>
+          <a:xfrm>
+            <a:off x="228600" y="1463040"/>
+            <a:ext cx="11704320" cy="4367943"/>
+          </a:xfrm>
+          <a:prstGeom prst="rect">
+            <a:avLst/>
+          </a:prstGeom>
+        </p:spPr>
+      </p:pic>
+      <p:sp>
+        <p:nvSpPr>
+          <p:cNvPr id="7" name="Rectangle 6"/>
+          <p:cNvSpPr/>
+          <p:nvPr/>
+        </p:nvSpPr>
+        <p:spPr>
+          <a:xfrm>
+            <a:off x="228600" y="4370832"/>
+            <a:ext cx="1965960" cy="530352"/>
           </a:xfrm>
           <a:prstGeom prst="rect">
             <a:avLst/>
@@ -6708,193 +9298,48 @@
       </p:sp>
       <p:sp>
         <p:nvSpPr>
-          <p:cNvPr id="3" name="TextBox 2"/>
-          <p:cNvSpPr txBox="1"/>
-          <p:nvPr/>
-        </p:nvSpPr>
-        <p:spPr>
-          <a:xfrm>
-            <a:off x="320040" y="164592"/>
-            <a:ext cx="11430000" cy="777240"/>
-          </a:xfrm>
-          <a:prstGeom prst="rect">
-            <a:avLst/>
-          </a:prstGeom>
-          <a:noFill/>
-        </p:spPr>
-        <p:txBody>
-          <a:bodyPr wrap="square">
-            <a:spAutoFit/>
-          </a:bodyPr>
-          <a:lstStyle/>
-          <a:p>
-            <a:pPr algn="l"/>
-            <a:r>
-              <a:rPr sz="3000" b="1" i="0">
+          <p:cNvPr id="8" name="TextBox 7"/>
+          <p:cNvSpPr txBox="1"/>
+          <p:nvPr/>
+        </p:nvSpPr>
+        <p:spPr>
+          <a:xfrm>
+            <a:off x="301752" y="4462272"/>
+            <a:ext cx="1874520" cy="365760"/>
+          </a:xfrm>
+          <a:prstGeom prst="rect">
+            <a:avLst/>
+          </a:prstGeom>
+          <a:noFill/>
+        </p:spPr>
+        <p:txBody>
+          <a:bodyPr wrap="none">
+            <a:spAutoFit/>
+          </a:bodyPr>
+          <a:lstStyle/>
+          <a:p>
+            <a:pPr algn="ctr"/>
+            <a:r>
+              <a:rPr sz="1300" b="1" i="0">
                 <a:solidFill>
                   <a:srgbClr val="FFFFFF"/>
                 </a:solidFill>
               </a:rPr>
-              <a:t>Cluster Profiles — 3 Startup Archetypes</a:t>
-            </a:r>
-          </a:p>
-        </p:txBody>
-      </p:sp>
-      <p:sp>
-        <p:nvSpPr>
-          <p:cNvPr id="4" name="Rectangle 3"/>
+              <a:t>Cluster</a:t>
+            </a:r>
+          </a:p>
+        </p:txBody>
+      </p:sp>
+      <p:sp>
+        <p:nvSpPr>
+          <p:cNvPr id="9" name="Rectangle 8"/>
           <p:cNvSpPr/>
           <p:nvPr/>
         </p:nvSpPr>
         <p:spPr>
           <a:xfrm>
-            <a:off x="320040" y="1234440"/>
-            <a:ext cx="64008" cy="5029200"/>
-          </a:xfrm>
-          <a:prstGeom prst="rect">
-            <a:avLst/>
-          </a:prstGeom>
-          <a:solidFill>
-            <a:srgbClr val="2ECC71"/>
-          </a:solidFill>
-          <a:ln>
-            <a:noFill/>
-          </a:ln>
-        </p:spPr>
-        <p:style>
-          <a:lnRef idx="1">
-            <a:schemeClr val="accent1"/>
-          </a:lnRef>
-          <a:fillRef idx="3">
-            <a:schemeClr val="accent1"/>
-          </a:fillRef>
-          <a:effectRef idx="2">
-            <a:schemeClr val="accent1"/>
-          </a:effectRef>
-          <a:fontRef idx="minor">
-            <a:schemeClr val="lt1"/>
-          </a:fontRef>
-        </p:style>
-        <p:txBody>
-          <a:bodyPr rtlCol="0" anchor="ctr"/>
-          <a:lstStyle/>
-          <a:p>
-            <a:pPr algn="ctr"/>
-          </a:p>
-        </p:txBody>
-      </p:sp>
-      <p:sp>
-        <p:nvSpPr>
-          <p:cNvPr id="5" name="TextBox 4"/>
-          <p:cNvSpPr txBox="1"/>
-          <p:nvPr/>
-        </p:nvSpPr>
-        <p:spPr>
-          <a:xfrm>
-            <a:off x="548640" y="1234440"/>
-            <a:ext cx="10972800" cy="566928"/>
-          </a:xfrm>
-          <a:prstGeom prst="rect">
-            <a:avLst/>
-          </a:prstGeom>
-          <a:noFill/>
-        </p:spPr>
-        <p:txBody>
-          <a:bodyPr wrap="square">
-            <a:spAutoFit/>
-          </a:bodyPr>
-          <a:lstStyle/>
-          <a:p>
-            <a:pPr algn="l"/>
-            <a:r>
-              <a:rPr sz="2000" b="0" i="0">
-                <a:solidFill>
-                  <a:srgbClr val="FFFFFF"/>
-                </a:solidFill>
-              </a:rPr>
-              <a:t>K-Means centroids read back in original units → cluster profiles</a:t>
-            </a:r>
-          </a:p>
-        </p:txBody>
-      </p:sp>
-      <p:sp>
-        <p:nvSpPr>
-          <p:cNvPr id="6" name="TextBox 5"/>
-          <p:cNvSpPr txBox="1"/>
-          <p:nvPr/>
-        </p:nvSpPr>
-        <p:spPr>
-          <a:xfrm>
-            <a:off x="548640" y="1801368"/>
-            <a:ext cx="10972800" cy="566928"/>
-          </a:xfrm>
-          <a:prstGeom prst="rect">
-            <a:avLst/>
-          </a:prstGeom>
-          <a:noFill/>
-        </p:spPr>
-        <p:txBody>
-          <a:bodyPr wrap="square">
-            <a:spAutoFit/>
-          </a:bodyPr>
-          <a:lstStyle/>
-          <a:p>
-            <a:pPr algn="l"/>
-            <a:r>
-              <a:rPr sz="2000" b="0" i="0">
-                <a:solidFill>
-                  <a:srgbClr val="FFFFFF"/>
-                </a:solidFill>
-              </a:rPr>
-              <a:t>Clusters differentiated almost exclusively by revenue &amp; product traction:</a:t>
-            </a:r>
-          </a:p>
-        </p:txBody>
-      </p:sp>
-      <p:sp>
-        <p:nvSpPr>
-          <p:cNvPr id="7" name="TextBox 6"/>
-          <p:cNvSpPr txBox="1"/>
-          <p:nvPr/>
-        </p:nvSpPr>
-        <p:spPr>
-          <a:xfrm>
-            <a:off x="548640" y="2368296"/>
-            <a:ext cx="10972800" cy="566928"/>
-          </a:xfrm>
-          <a:prstGeom prst="rect">
-            <a:avLst/>
-          </a:prstGeom>
-          <a:noFill/>
-        </p:spPr>
-        <p:txBody>
-          <a:bodyPr wrap="square">
-            <a:spAutoFit/>
-          </a:bodyPr>
-          <a:lstStyle/>
-          <a:p>
-            <a:pPr algn="l"/>
-            <a:r>
-              <a:rPr sz="2000" b="0" i="0">
-                <a:solidFill>
-                  <a:srgbClr val="FFFFFF"/>
-                </a:solidFill>
-              </a:rPr>
-              <a:t/>
-            </a:r>
-          </a:p>
-        </p:txBody>
-      </p:sp>
-      <p:sp>
-        <p:nvSpPr>
-          <p:cNvPr id="8" name="Rectangle 7"/>
-          <p:cNvSpPr/>
-          <p:nvPr/>
-        </p:nvSpPr>
-        <p:spPr>
-          <a:xfrm>
-            <a:off x="457200" y="3200400"/>
-            <a:ext cx="1234439" cy="548640"/>
+            <a:off x="2331720" y="4370832"/>
+            <a:ext cx="2468880" cy="530352"/>
           </a:xfrm>
           <a:prstGeom prst="rect">
             <a:avLst/>
@@ -6930,48 +9375,48 @@
       </p:sp>
       <p:sp>
         <p:nvSpPr>
-          <p:cNvPr id="9" name="TextBox 8"/>
-          <p:cNvSpPr txBox="1"/>
-          <p:nvPr/>
-        </p:nvSpPr>
-        <p:spPr>
-          <a:xfrm>
-            <a:off x="502920" y="3273552"/>
-            <a:ext cx="1188719" cy="457200"/>
-          </a:xfrm>
-          <a:prstGeom prst="rect">
-            <a:avLst/>
-          </a:prstGeom>
-          <a:noFill/>
-        </p:spPr>
-        <p:txBody>
-          <a:bodyPr wrap="square">
+          <p:cNvPr id="10" name="TextBox 9"/>
+          <p:cNvSpPr txBox="1"/>
+          <p:nvPr/>
+        </p:nvSpPr>
+        <p:spPr>
+          <a:xfrm>
+            <a:off x="2404872" y="4462272"/>
+            <a:ext cx="2377440" cy="365760"/>
+          </a:xfrm>
+          <a:prstGeom prst="rect">
+            <a:avLst/>
+          </a:prstGeom>
+          <a:noFill/>
+        </p:spPr>
+        <p:txBody>
+          <a:bodyPr wrap="none">
             <a:spAutoFit/>
           </a:bodyPr>
           <a:lstStyle/>
           <a:p>
             <a:pPr algn="ctr"/>
             <a:r>
-              <a:rPr sz="1400" b="1" i="0">
+              <a:rPr sz="1300" b="1" i="0">
                 <a:solidFill>
                   <a:srgbClr val="FFFFFF"/>
                 </a:solidFill>
               </a:rPr>
-              <a:t>Cluster</a:t>
-            </a:r>
-          </a:p>
-        </p:txBody>
-      </p:sp>
-      <p:sp>
-        <p:nvSpPr>
-          <p:cNvPr id="10" name="Rectangle 9"/>
+              <a:t>Revenue</a:t>
+            </a:r>
+          </a:p>
+        </p:txBody>
+      </p:sp>
+      <p:sp>
+        <p:nvSpPr>
+          <p:cNvPr id="11" name="Rectangle 10"/>
           <p:cNvSpPr/>
           <p:nvPr/>
         </p:nvSpPr>
         <p:spPr>
           <a:xfrm>
-            <a:off x="1737360" y="3200400"/>
-            <a:ext cx="2057400" cy="548640"/>
+            <a:off x="4937760" y="4370832"/>
+            <a:ext cx="2468880" cy="530352"/>
           </a:xfrm>
           <a:prstGeom prst="rect">
             <a:avLst/>
@@ -7007,48 +9452,48 @@
       </p:sp>
       <p:sp>
         <p:nvSpPr>
-          <p:cNvPr id="11" name="TextBox 10"/>
-          <p:cNvSpPr txBox="1"/>
-          <p:nvPr/>
-        </p:nvSpPr>
-        <p:spPr>
-          <a:xfrm>
-            <a:off x="1783080" y="3273552"/>
-            <a:ext cx="2011679" cy="457200"/>
-          </a:xfrm>
-          <a:prstGeom prst="rect">
-            <a:avLst/>
-          </a:prstGeom>
-          <a:noFill/>
-        </p:spPr>
-        <p:txBody>
-          <a:bodyPr wrap="square">
+          <p:cNvPr id="12" name="TextBox 11"/>
+          <p:cNvSpPr txBox="1"/>
+          <p:nvPr/>
+        </p:nvSpPr>
+        <p:spPr>
+          <a:xfrm>
+            <a:off x="5010912" y="4462272"/>
+            <a:ext cx="2377440" cy="365760"/>
+          </a:xfrm>
+          <a:prstGeom prst="rect">
+            <a:avLst/>
+          </a:prstGeom>
+          <a:noFill/>
+        </p:spPr>
+        <p:txBody>
+          <a:bodyPr wrap="none">
             <a:spAutoFit/>
           </a:bodyPr>
           <a:lstStyle/>
           <a:p>
             <a:pPr algn="ctr"/>
             <a:r>
-              <a:rPr sz="1400" b="1" i="0">
+              <a:rPr sz="1300" b="1" i="0">
                 <a:solidFill>
                   <a:srgbClr val="FFFFFF"/>
                 </a:solidFill>
               </a:rPr>
-              <a:t>revenue_million</a:t>
-            </a:r>
-          </a:p>
-        </p:txBody>
-      </p:sp>
-      <p:sp>
-        <p:nvSpPr>
-          <p:cNvPr id="12" name="Rectangle 11"/>
+              <a:t>Traction</a:t>
+            </a:r>
+          </a:p>
+        </p:txBody>
+      </p:sp>
+      <p:sp>
+        <p:nvSpPr>
+          <p:cNvPr id="13" name="Rectangle 12"/>
           <p:cNvSpPr/>
           <p:nvPr/>
         </p:nvSpPr>
         <p:spPr>
           <a:xfrm>
-            <a:off x="3840480" y="3200400"/>
-            <a:ext cx="2331720" cy="548640"/>
+            <a:off x="7543800" y="4370832"/>
+            <a:ext cx="4069080" cy="530352"/>
           </a:xfrm>
           <a:prstGeom prst="rect">
             <a:avLst/>
@@ -7084,202 +9529,48 @@
       </p:sp>
       <p:sp>
         <p:nvSpPr>
-          <p:cNvPr id="13" name="TextBox 12"/>
-          <p:cNvSpPr txBox="1"/>
-          <p:nvPr/>
-        </p:nvSpPr>
-        <p:spPr>
-          <a:xfrm>
-            <a:off x="3886200" y="3273552"/>
-            <a:ext cx="2286000" cy="457200"/>
-          </a:xfrm>
-          <a:prstGeom prst="rect">
-            <a:avLst/>
-          </a:prstGeom>
-          <a:noFill/>
-        </p:spPr>
-        <p:txBody>
-          <a:bodyPr wrap="square">
+          <p:cNvPr id="14" name="TextBox 13"/>
+          <p:cNvSpPr txBox="1"/>
+          <p:nvPr/>
+        </p:nvSpPr>
+        <p:spPr>
+          <a:xfrm>
+            <a:off x="7616952" y="4462272"/>
+            <a:ext cx="3977639" cy="365760"/>
+          </a:xfrm>
+          <a:prstGeom prst="rect">
+            <a:avLst/>
+          </a:prstGeom>
+          <a:noFill/>
+        </p:spPr>
+        <p:txBody>
+          <a:bodyPr wrap="none">
             <a:spAutoFit/>
           </a:bodyPr>
           <a:lstStyle/>
           <a:p>
             <a:pPr algn="ctr"/>
             <a:r>
-              <a:rPr sz="1400" b="1" i="0">
+              <a:rPr sz="1300" b="1" i="0">
                 <a:solidFill>
                   <a:srgbClr val="FFFFFF"/>
                 </a:solidFill>
               </a:rPr>
-              <a:t>product_traction</a:t>
-            </a:r>
-          </a:p>
-        </p:txBody>
-      </p:sp>
-      <p:sp>
-        <p:nvSpPr>
-          <p:cNvPr id="14" name="Rectangle 13"/>
+              <a:t>Profile</a:t>
+            </a:r>
+          </a:p>
+        </p:txBody>
+      </p:sp>
+      <p:sp>
+        <p:nvSpPr>
+          <p:cNvPr id="15" name="Rectangle 14"/>
           <p:cNvSpPr/>
           <p:nvPr/>
         </p:nvSpPr>
         <p:spPr>
           <a:xfrm>
-            <a:off x="6217920" y="3200400"/>
-            <a:ext cx="1600200" cy="548640"/>
-          </a:xfrm>
-          <a:prstGeom prst="rect">
-            <a:avLst/>
-          </a:prstGeom>
-          <a:solidFill>
-            <a:srgbClr val="0F3C78"/>
-          </a:solidFill>
-          <a:ln>
-            <a:noFill/>
-          </a:ln>
-        </p:spPr>
-        <p:style>
-          <a:lnRef idx="1">
-            <a:schemeClr val="accent1"/>
-          </a:lnRef>
-          <a:fillRef idx="3">
-            <a:schemeClr val="accent1"/>
-          </a:fillRef>
-          <a:effectRef idx="2">
-            <a:schemeClr val="accent1"/>
-          </a:effectRef>
-          <a:fontRef idx="minor">
-            <a:schemeClr val="lt1"/>
-          </a:fontRef>
-        </p:style>
-        <p:txBody>
-          <a:bodyPr rtlCol="0" anchor="ctr"/>
-          <a:lstStyle/>
-          <a:p>
-            <a:pPr algn="ctr"/>
-          </a:p>
-        </p:txBody>
-      </p:sp>
-      <p:sp>
-        <p:nvSpPr>
-          <p:cNvPr id="15" name="TextBox 14"/>
-          <p:cNvSpPr txBox="1"/>
-          <p:nvPr/>
-        </p:nvSpPr>
-        <p:spPr>
-          <a:xfrm>
-            <a:off x="6263640" y="3273552"/>
-            <a:ext cx="1554480" cy="457200"/>
-          </a:xfrm>
-          <a:prstGeom prst="rect">
-            <a:avLst/>
-          </a:prstGeom>
-          <a:noFill/>
-        </p:spPr>
-        <p:txBody>
-          <a:bodyPr wrap="square">
-            <a:spAutoFit/>
-          </a:bodyPr>
-          <a:lstStyle/>
-          <a:p>
-            <a:pPr algn="ctr"/>
-            <a:r>
-              <a:rPr sz="1400" b="1" i="0">
-                <a:solidFill>
-                  <a:srgbClr val="FFFFFF"/>
-                </a:solidFill>
-              </a:rPr>
-              <a:t>team_size</a:t>
-            </a:r>
-          </a:p>
-        </p:txBody>
-      </p:sp>
-      <p:sp>
-        <p:nvSpPr>
-          <p:cNvPr id="16" name="Rectangle 15"/>
-          <p:cNvSpPr/>
-          <p:nvPr/>
-        </p:nvSpPr>
-        <p:spPr>
-          <a:xfrm>
-            <a:off x="7863840" y="3200400"/>
-            <a:ext cx="3154680" cy="548640"/>
-          </a:xfrm>
-          <a:prstGeom prst="rect">
-            <a:avLst/>
-          </a:prstGeom>
-          <a:solidFill>
-            <a:srgbClr val="0F3C78"/>
-          </a:solidFill>
-          <a:ln>
-            <a:noFill/>
-          </a:ln>
-        </p:spPr>
-        <p:style>
-          <a:lnRef idx="1">
-            <a:schemeClr val="accent1"/>
-          </a:lnRef>
-          <a:fillRef idx="3">
-            <a:schemeClr val="accent1"/>
-          </a:fillRef>
-          <a:effectRef idx="2">
-            <a:schemeClr val="accent1"/>
-          </a:effectRef>
-          <a:fontRef idx="minor">
-            <a:schemeClr val="lt1"/>
-          </a:fontRef>
-        </p:style>
-        <p:txBody>
-          <a:bodyPr rtlCol="0" anchor="ctr"/>
-          <a:lstStyle/>
-          <a:p>
-            <a:pPr algn="ctr"/>
-          </a:p>
-        </p:txBody>
-      </p:sp>
-      <p:sp>
-        <p:nvSpPr>
-          <p:cNvPr id="17" name="TextBox 16"/>
-          <p:cNvSpPr txBox="1"/>
-          <p:nvPr/>
-        </p:nvSpPr>
-        <p:spPr>
-          <a:xfrm>
-            <a:off x="7909560" y="3273552"/>
-            <a:ext cx="3108960" cy="457200"/>
-          </a:xfrm>
-          <a:prstGeom prst="rect">
-            <a:avLst/>
-          </a:prstGeom>
-          <a:noFill/>
-        </p:spPr>
-        <p:txBody>
-          <a:bodyPr wrap="square">
-            <a:spAutoFit/>
-          </a:bodyPr>
-          <a:lstStyle/>
-          <a:p>
-            <a:pPr algn="ctr"/>
-            <a:r>
-              <a:rPr sz="1400" b="1" i="0">
-                <a:solidFill>
-                  <a:srgbClr val="FFFFFF"/>
-                </a:solidFill>
-              </a:rPr>
-              <a:t>Profile</a:t>
-            </a:r>
-          </a:p>
-        </p:txBody>
-      </p:sp>
-      <p:sp>
-        <p:nvSpPr>
-          <p:cNvPr id="18" name="Rectangle 17"/>
-          <p:cNvSpPr/>
-          <p:nvPr/>
-        </p:nvSpPr>
-        <p:spPr>
-          <a:xfrm>
-            <a:off x="457200" y="3794760"/>
-            <a:ext cx="1234439" cy="548640"/>
+            <a:off x="228600" y="4937760"/>
+            <a:ext cx="1965960" cy="530352"/>
           </a:xfrm>
           <a:prstGeom prst="rect">
             <a:avLst/>
@@ -7315,31 +9606,31 @@
       </p:sp>
       <p:sp>
         <p:nvSpPr>
-          <p:cNvPr id="19" name="TextBox 18"/>
-          <p:cNvSpPr txBox="1"/>
-          <p:nvPr/>
-        </p:nvSpPr>
-        <p:spPr>
-          <a:xfrm>
-            <a:off x="502920" y="3867912"/>
-            <a:ext cx="1188719" cy="457200"/>
-          </a:xfrm>
-          <a:prstGeom prst="rect">
-            <a:avLst/>
-          </a:prstGeom>
-          <a:noFill/>
-        </p:spPr>
-        <p:txBody>
-          <a:bodyPr wrap="square">
+          <p:cNvPr id="16" name="TextBox 15"/>
+          <p:cNvSpPr txBox="1"/>
+          <p:nvPr/>
+        </p:nvSpPr>
+        <p:spPr>
+          <a:xfrm>
+            <a:off x="301752" y="5029200"/>
+            <a:ext cx="1874520" cy="365760"/>
+          </a:xfrm>
+          <a:prstGeom prst="rect">
+            <a:avLst/>
+          </a:prstGeom>
+          <a:noFill/>
+        </p:spPr>
+        <p:txBody>
+          <a:bodyPr wrap="none">
             <a:spAutoFit/>
           </a:bodyPr>
           <a:lstStyle/>
           <a:p>
             <a:pPr algn="ctr"/>
             <a:r>
-              <a:rPr sz="1400" b="0" i="0">
-                <a:solidFill>
-                  <a:srgbClr val="FFFFFF"/>
+              <a:rPr sz="1300" b="0" i="0">
+                <a:solidFill>
+                  <a:srgbClr val="2ECC71"/>
                 </a:solidFill>
               </a:rPr>
               <a:t>0  🟢</a:t>
@@ -7349,14 +9640,14 @@
       </p:sp>
       <p:sp>
         <p:nvSpPr>
-          <p:cNvPr id="20" name="Rectangle 19"/>
+          <p:cNvPr id="17" name="Rectangle 16"/>
           <p:cNvSpPr/>
           <p:nvPr/>
         </p:nvSpPr>
         <p:spPr>
           <a:xfrm>
-            <a:off x="1737360" y="3794760"/>
-            <a:ext cx="2057400" cy="548640"/>
+            <a:off x="2331720" y="4937760"/>
+            <a:ext cx="2468880" cy="530352"/>
           </a:xfrm>
           <a:prstGeom prst="rect">
             <a:avLst/>
@@ -7392,48 +9683,48 @@
       </p:sp>
       <p:sp>
         <p:nvSpPr>
-          <p:cNvPr id="21" name="TextBox 20"/>
-          <p:cNvSpPr txBox="1"/>
-          <p:nvPr/>
-        </p:nvSpPr>
-        <p:spPr>
-          <a:xfrm>
-            <a:off x="1783080" y="3867912"/>
-            <a:ext cx="2011679" cy="457200"/>
-          </a:xfrm>
-          <a:prstGeom prst="rect">
-            <a:avLst/>
-          </a:prstGeom>
-          <a:noFill/>
-        </p:spPr>
-        <p:txBody>
-          <a:bodyPr wrap="square">
+          <p:cNvPr id="18" name="TextBox 17"/>
+          <p:cNvSpPr txBox="1"/>
+          <p:nvPr/>
+        </p:nvSpPr>
+        <p:spPr>
+          <a:xfrm>
+            <a:off x="2404872" y="5029200"/>
+            <a:ext cx="2377440" cy="365760"/>
+          </a:xfrm>
+          <a:prstGeom prst="rect">
+            <a:avLst/>
+          </a:prstGeom>
+          <a:noFill/>
+        </p:spPr>
+        <p:txBody>
+          <a:bodyPr wrap="none">
             <a:spAutoFit/>
           </a:bodyPr>
           <a:lstStyle/>
           <a:p>
             <a:pPr algn="ctr"/>
             <a:r>
-              <a:rPr sz="1400" b="0" i="0">
-                <a:solidFill>
-                  <a:srgbClr val="FFFFFF"/>
-                </a:solidFill>
-              </a:rPr>
-              <a:t>~1 040 000</a:t>
-            </a:r>
-          </a:p>
-        </p:txBody>
-      </p:sp>
-      <p:sp>
-        <p:nvSpPr>
-          <p:cNvPr id="22" name="Rectangle 21"/>
+              <a:rPr sz="1300" b="0" i="0">
+                <a:solidFill>
+                  <a:srgbClr val="CCCCCC"/>
+                </a:solidFill>
+              </a:rPr>
+              <a:t>High  ~1 040k</a:t>
+            </a:r>
+          </a:p>
+        </p:txBody>
+      </p:sp>
+      <p:sp>
+        <p:nvSpPr>
+          <p:cNvPr id="19" name="Rectangle 18"/>
           <p:cNvSpPr/>
           <p:nvPr/>
         </p:nvSpPr>
         <p:spPr>
           <a:xfrm>
-            <a:off x="3840480" y="3794760"/>
-            <a:ext cx="2331720" cy="548640"/>
+            <a:off x="4937760" y="4937760"/>
+            <a:ext cx="2468880" cy="530352"/>
           </a:xfrm>
           <a:prstGeom prst="rect">
             <a:avLst/>
@@ -7469,48 +9760,48 @@
       </p:sp>
       <p:sp>
         <p:nvSpPr>
-          <p:cNvPr id="23" name="TextBox 22"/>
-          <p:cNvSpPr txBox="1"/>
-          <p:nvPr/>
-        </p:nvSpPr>
-        <p:spPr>
-          <a:xfrm>
-            <a:off x="3886200" y="3867912"/>
-            <a:ext cx="2286000" cy="457200"/>
-          </a:xfrm>
-          <a:prstGeom prst="rect">
-            <a:avLst/>
-          </a:prstGeom>
-          <a:noFill/>
-        </p:spPr>
-        <p:txBody>
-          <a:bodyPr wrap="square">
+          <p:cNvPr id="20" name="TextBox 19"/>
+          <p:cNvSpPr txBox="1"/>
+          <p:nvPr/>
+        </p:nvSpPr>
+        <p:spPr>
+          <a:xfrm>
+            <a:off x="5010912" y="5029200"/>
+            <a:ext cx="2377440" cy="365760"/>
+          </a:xfrm>
+          <a:prstGeom prst="rect">
+            <a:avLst/>
+          </a:prstGeom>
+          <a:noFill/>
+        </p:spPr>
+        <p:txBody>
+          <a:bodyPr wrap="none">
             <a:spAutoFit/>
           </a:bodyPr>
           <a:lstStyle/>
           <a:p>
             <a:pPr algn="ctr"/>
             <a:r>
-              <a:rPr sz="1400" b="0" i="0">
-                <a:solidFill>
-                  <a:srgbClr val="FFFFFF"/>
-                </a:solidFill>
-              </a:rPr>
-              <a:t>~360 000 users</a:t>
-            </a:r>
-          </a:p>
-        </p:txBody>
-      </p:sp>
-      <p:sp>
-        <p:nvSpPr>
-          <p:cNvPr id="24" name="Rectangle 23"/>
+              <a:rPr sz="1300" b="0" i="0">
+                <a:solidFill>
+                  <a:srgbClr val="CCCCCC"/>
+                </a:solidFill>
+              </a:rPr>
+              <a:t>High  ~360k users</a:t>
+            </a:r>
+          </a:p>
+        </p:txBody>
+      </p:sp>
+      <p:sp>
+        <p:nvSpPr>
+          <p:cNvPr id="21" name="Rectangle 20"/>
           <p:cNvSpPr/>
           <p:nvPr/>
         </p:nvSpPr>
         <p:spPr>
           <a:xfrm>
-            <a:off x="6217920" y="3794760"/>
-            <a:ext cx="1600200" cy="548640"/>
+            <a:off x="7543800" y="4937760"/>
+            <a:ext cx="4069080" cy="530352"/>
           </a:xfrm>
           <a:prstGeom prst="rect">
             <a:avLst/>
@@ -7546,48 +9837,48 @@
       </p:sp>
       <p:sp>
         <p:nvSpPr>
-          <p:cNvPr id="25" name="TextBox 24"/>
-          <p:cNvSpPr txBox="1"/>
-          <p:nvPr/>
-        </p:nvSpPr>
-        <p:spPr>
-          <a:xfrm>
-            <a:off x="6263640" y="3867912"/>
-            <a:ext cx="1554480" cy="457200"/>
-          </a:xfrm>
-          <a:prstGeom prst="rect">
-            <a:avLst/>
-          </a:prstGeom>
-          <a:noFill/>
-        </p:spPr>
-        <p:txBody>
-          <a:bodyPr wrap="square">
+          <p:cNvPr id="22" name="TextBox 21"/>
+          <p:cNvSpPr txBox="1"/>
+          <p:nvPr/>
+        </p:nvSpPr>
+        <p:spPr>
+          <a:xfrm>
+            <a:off x="7616952" y="5029200"/>
+            <a:ext cx="3977639" cy="365760"/>
+          </a:xfrm>
+          <a:prstGeom prst="rect">
+            <a:avLst/>
+          </a:prstGeom>
+          <a:noFill/>
+        </p:spPr>
+        <p:txBody>
+          <a:bodyPr wrap="none">
             <a:spAutoFit/>
           </a:bodyPr>
           <a:lstStyle/>
           <a:p>
             <a:pPr algn="ctr"/>
             <a:r>
-              <a:rPr sz="1400" b="0" i="0">
-                <a:solidFill>
-                  <a:srgbClr val="FFFFFF"/>
-                </a:solidFill>
-              </a:rPr>
-              <a:t>~150</a:t>
-            </a:r>
-          </a:p>
-        </p:txBody>
-      </p:sp>
-      <p:sp>
-        <p:nvSpPr>
-          <p:cNvPr id="26" name="Rectangle 25"/>
+              <a:rPr sz="1300" b="0" i="0">
+                <a:solidFill>
+                  <a:srgbClr val="CCCCCC"/>
+                </a:solidFill>
+              </a:rPr>
+              <a:t>High-revenue, established</a:t>
+            </a:r>
+          </a:p>
+        </p:txBody>
+      </p:sp>
+      <p:sp>
+        <p:nvSpPr>
+          <p:cNvPr id="23" name="Rectangle 22"/>
           <p:cNvSpPr/>
           <p:nvPr/>
         </p:nvSpPr>
         <p:spPr>
           <a:xfrm>
-            <a:off x="7863840" y="3794760"/>
-            <a:ext cx="3154680" cy="548640"/>
+            <a:off x="228600" y="5504688"/>
+            <a:ext cx="1965960" cy="530352"/>
           </a:xfrm>
           <a:prstGeom prst="rect">
             <a:avLst/>
@@ -7623,433 +9914,48 @@
       </p:sp>
       <p:sp>
         <p:nvSpPr>
-          <p:cNvPr id="27" name="TextBox 26"/>
-          <p:cNvSpPr txBox="1"/>
-          <p:nvPr/>
-        </p:nvSpPr>
-        <p:spPr>
-          <a:xfrm>
-            <a:off x="7909560" y="3867912"/>
-            <a:ext cx="3108960" cy="457200"/>
-          </a:xfrm>
-          <a:prstGeom prst="rect">
-            <a:avLst/>
-          </a:prstGeom>
-          <a:noFill/>
-        </p:spPr>
-        <p:txBody>
-          <a:bodyPr wrap="square">
+          <p:cNvPr id="24" name="TextBox 23"/>
+          <p:cNvSpPr txBox="1"/>
+          <p:nvPr/>
+        </p:nvSpPr>
+        <p:spPr>
+          <a:xfrm>
+            <a:off x="301752" y="5596128"/>
+            <a:ext cx="1874520" cy="365760"/>
+          </a:xfrm>
+          <a:prstGeom prst="rect">
+            <a:avLst/>
+          </a:prstGeom>
+          <a:noFill/>
+        </p:spPr>
+        <p:txBody>
+          <a:bodyPr wrap="none">
             <a:spAutoFit/>
           </a:bodyPr>
           <a:lstStyle/>
           <a:p>
             <a:pPr algn="ctr"/>
             <a:r>
-              <a:rPr sz="1400" b="0" i="0">
-                <a:solidFill>
-                  <a:srgbClr val="FFFFFF"/>
-                </a:solidFill>
-              </a:rPr>
-              <a:t>High-revenue, established</a:t>
-            </a:r>
-          </a:p>
-        </p:txBody>
-      </p:sp>
-      <p:sp>
-        <p:nvSpPr>
-          <p:cNvPr id="28" name="Rectangle 27"/>
+              <a:rPr sz="1300" b="0" i="0">
+                <a:solidFill>
+                  <a:srgbClr val="C0392B"/>
+                </a:solidFill>
+              </a:rPr>
+              <a:t>1  🔴</a:t>
+            </a:r>
+          </a:p>
+        </p:txBody>
+      </p:sp>
+      <p:sp>
+        <p:nvSpPr>
+          <p:cNvPr id="25" name="Rectangle 24"/>
           <p:cNvSpPr/>
           <p:nvPr/>
         </p:nvSpPr>
         <p:spPr>
           <a:xfrm>
-            <a:off x="457200" y="4389120"/>
-            <a:ext cx="1234439" cy="548640"/>
-          </a:xfrm>
-          <a:prstGeom prst="rect">
-            <a:avLst/>
-          </a:prstGeom>
-          <a:solidFill>
-            <a:srgbClr val="1A1A2E"/>
-          </a:solidFill>
-          <a:ln>
-            <a:noFill/>
-          </a:ln>
-        </p:spPr>
-        <p:style>
-          <a:lnRef idx="1">
-            <a:schemeClr val="accent1"/>
-          </a:lnRef>
-          <a:fillRef idx="3">
-            <a:schemeClr val="accent1"/>
-          </a:fillRef>
-          <a:effectRef idx="2">
-            <a:schemeClr val="accent1"/>
-          </a:effectRef>
-          <a:fontRef idx="minor">
-            <a:schemeClr val="lt1"/>
-          </a:fontRef>
-        </p:style>
-        <p:txBody>
-          <a:bodyPr rtlCol="0" anchor="ctr"/>
-          <a:lstStyle/>
-          <a:p>
-            <a:pPr algn="ctr"/>
-          </a:p>
-        </p:txBody>
-      </p:sp>
-      <p:sp>
-        <p:nvSpPr>
-          <p:cNvPr id="29" name="TextBox 28"/>
-          <p:cNvSpPr txBox="1"/>
-          <p:nvPr/>
-        </p:nvSpPr>
-        <p:spPr>
-          <a:xfrm>
-            <a:off x="502920" y="4462272"/>
-            <a:ext cx="1188719" cy="457200"/>
-          </a:xfrm>
-          <a:prstGeom prst="rect">
-            <a:avLst/>
-          </a:prstGeom>
-          <a:noFill/>
-        </p:spPr>
-        <p:txBody>
-          <a:bodyPr wrap="square">
-            <a:spAutoFit/>
-          </a:bodyPr>
-          <a:lstStyle/>
-          <a:p>
-            <a:pPr algn="ctr"/>
-            <a:r>
-              <a:rPr sz="1400" b="0" i="0">
-                <a:solidFill>
-                  <a:srgbClr val="FFFFFF"/>
-                </a:solidFill>
-              </a:rPr>
-              <a:t>1  🔴</a:t>
-            </a:r>
-          </a:p>
-        </p:txBody>
-      </p:sp>
-      <p:sp>
-        <p:nvSpPr>
-          <p:cNvPr id="30" name="Rectangle 29"/>
-          <p:cNvSpPr/>
-          <p:nvPr/>
-        </p:nvSpPr>
-        <p:spPr>
-          <a:xfrm>
-            <a:off x="1737360" y="4389120"/>
-            <a:ext cx="2057400" cy="548640"/>
-          </a:xfrm>
-          <a:prstGeom prst="rect">
-            <a:avLst/>
-          </a:prstGeom>
-          <a:solidFill>
-            <a:srgbClr val="1A1A2E"/>
-          </a:solidFill>
-          <a:ln>
-            <a:noFill/>
-          </a:ln>
-        </p:spPr>
-        <p:style>
-          <a:lnRef idx="1">
-            <a:schemeClr val="accent1"/>
-          </a:lnRef>
-          <a:fillRef idx="3">
-            <a:schemeClr val="accent1"/>
-          </a:fillRef>
-          <a:effectRef idx="2">
-            <a:schemeClr val="accent1"/>
-          </a:effectRef>
-          <a:fontRef idx="minor">
-            <a:schemeClr val="lt1"/>
-          </a:fontRef>
-        </p:style>
-        <p:txBody>
-          <a:bodyPr rtlCol="0" anchor="ctr"/>
-          <a:lstStyle/>
-          <a:p>
-            <a:pPr algn="ctr"/>
-          </a:p>
-        </p:txBody>
-      </p:sp>
-      <p:sp>
-        <p:nvSpPr>
-          <p:cNvPr id="31" name="TextBox 30"/>
-          <p:cNvSpPr txBox="1"/>
-          <p:nvPr/>
-        </p:nvSpPr>
-        <p:spPr>
-          <a:xfrm>
-            <a:off x="1783080" y="4462272"/>
-            <a:ext cx="2011679" cy="457200"/>
-          </a:xfrm>
-          <a:prstGeom prst="rect">
-            <a:avLst/>
-          </a:prstGeom>
-          <a:noFill/>
-        </p:spPr>
-        <p:txBody>
-          <a:bodyPr wrap="square">
-            <a:spAutoFit/>
-          </a:bodyPr>
-          <a:lstStyle/>
-          <a:p>
-            <a:pPr algn="ctr"/>
-            <a:r>
-              <a:rPr sz="1400" b="0" i="0">
-                <a:solidFill>
-                  <a:srgbClr val="FFFFFF"/>
-                </a:solidFill>
-              </a:rPr>
-              <a:t>~120 000</a:t>
-            </a:r>
-          </a:p>
-        </p:txBody>
-      </p:sp>
-      <p:sp>
-        <p:nvSpPr>
-          <p:cNvPr id="32" name="Rectangle 31"/>
-          <p:cNvSpPr/>
-          <p:nvPr/>
-        </p:nvSpPr>
-        <p:spPr>
-          <a:xfrm>
-            <a:off x="3840480" y="4389120"/>
-            <a:ext cx="2331720" cy="548640"/>
-          </a:xfrm>
-          <a:prstGeom prst="rect">
-            <a:avLst/>
-          </a:prstGeom>
-          <a:solidFill>
-            <a:srgbClr val="1A1A2E"/>
-          </a:solidFill>
-          <a:ln>
-            <a:noFill/>
-          </a:ln>
-        </p:spPr>
-        <p:style>
-          <a:lnRef idx="1">
-            <a:schemeClr val="accent1"/>
-          </a:lnRef>
-          <a:fillRef idx="3">
-            <a:schemeClr val="accent1"/>
-          </a:fillRef>
-          <a:effectRef idx="2">
-            <a:schemeClr val="accent1"/>
-          </a:effectRef>
-          <a:fontRef idx="minor">
-            <a:schemeClr val="lt1"/>
-          </a:fontRef>
-        </p:style>
-        <p:txBody>
-          <a:bodyPr rtlCol="0" anchor="ctr"/>
-          <a:lstStyle/>
-          <a:p>
-            <a:pPr algn="ctr"/>
-          </a:p>
-        </p:txBody>
-      </p:sp>
-      <p:sp>
-        <p:nvSpPr>
-          <p:cNvPr id="33" name="TextBox 32"/>
-          <p:cNvSpPr txBox="1"/>
-          <p:nvPr/>
-        </p:nvSpPr>
-        <p:spPr>
-          <a:xfrm>
-            <a:off x="3886200" y="4462272"/>
-            <a:ext cx="2286000" cy="457200"/>
-          </a:xfrm>
-          <a:prstGeom prst="rect">
-            <a:avLst/>
-          </a:prstGeom>
-          <a:noFill/>
-        </p:spPr>
-        <p:txBody>
-          <a:bodyPr wrap="square">
-            <a:spAutoFit/>
-          </a:bodyPr>
-          <a:lstStyle/>
-          <a:p>
-            <a:pPr algn="ctr"/>
-            <a:r>
-              <a:rPr sz="1400" b="0" i="0">
-                <a:solidFill>
-                  <a:srgbClr val="FFFFFF"/>
-                </a:solidFill>
-              </a:rPr>
-              <a:t>~115 000 users</a:t>
-            </a:r>
-          </a:p>
-        </p:txBody>
-      </p:sp>
-      <p:sp>
-        <p:nvSpPr>
-          <p:cNvPr id="34" name="Rectangle 33"/>
-          <p:cNvSpPr/>
-          <p:nvPr/>
-        </p:nvSpPr>
-        <p:spPr>
-          <a:xfrm>
-            <a:off x="6217920" y="4389120"/>
-            <a:ext cx="1600200" cy="548640"/>
-          </a:xfrm>
-          <a:prstGeom prst="rect">
-            <a:avLst/>
-          </a:prstGeom>
-          <a:solidFill>
-            <a:srgbClr val="1A1A2E"/>
-          </a:solidFill>
-          <a:ln>
-            <a:noFill/>
-          </a:ln>
-        </p:spPr>
-        <p:style>
-          <a:lnRef idx="1">
-            <a:schemeClr val="accent1"/>
-          </a:lnRef>
-          <a:fillRef idx="3">
-            <a:schemeClr val="accent1"/>
-          </a:fillRef>
-          <a:effectRef idx="2">
-            <a:schemeClr val="accent1"/>
-          </a:effectRef>
-          <a:fontRef idx="minor">
-            <a:schemeClr val="lt1"/>
-          </a:fontRef>
-        </p:style>
-        <p:txBody>
-          <a:bodyPr rtlCol="0" anchor="ctr"/>
-          <a:lstStyle/>
-          <a:p>
-            <a:pPr algn="ctr"/>
-          </a:p>
-        </p:txBody>
-      </p:sp>
-      <p:sp>
-        <p:nvSpPr>
-          <p:cNvPr id="35" name="TextBox 34"/>
-          <p:cNvSpPr txBox="1"/>
-          <p:nvPr/>
-        </p:nvSpPr>
-        <p:spPr>
-          <a:xfrm>
-            <a:off x="6263640" y="4462272"/>
-            <a:ext cx="1554480" cy="457200"/>
-          </a:xfrm>
-          <a:prstGeom prst="rect">
-            <a:avLst/>
-          </a:prstGeom>
-          <a:noFill/>
-        </p:spPr>
-        <p:txBody>
-          <a:bodyPr wrap="square">
-            <a:spAutoFit/>
-          </a:bodyPr>
-          <a:lstStyle/>
-          <a:p>
-            <a:pPr algn="ctr"/>
-            <a:r>
-              <a:rPr sz="1400" b="0" i="0">
-                <a:solidFill>
-                  <a:srgbClr val="FFFFFF"/>
-                </a:solidFill>
-              </a:rPr>
-              <a:t>~148</a:t>
-            </a:r>
-          </a:p>
-        </p:txBody>
-      </p:sp>
-      <p:sp>
-        <p:nvSpPr>
-          <p:cNvPr id="36" name="Rectangle 35"/>
-          <p:cNvSpPr/>
-          <p:nvPr/>
-        </p:nvSpPr>
-        <p:spPr>
-          <a:xfrm>
-            <a:off x="7863840" y="4389120"/>
-            <a:ext cx="3154680" cy="548640"/>
-          </a:xfrm>
-          <a:prstGeom prst="rect">
-            <a:avLst/>
-          </a:prstGeom>
-          <a:solidFill>
-            <a:srgbClr val="1A1A2E"/>
-          </a:solidFill>
-          <a:ln>
-            <a:noFill/>
-          </a:ln>
-        </p:spPr>
-        <p:style>
-          <a:lnRef idx="1">
-            <a:schemeClr val="accent1"/>
-          </a:lnRef>
-          <a:fillRef idx="3">
-            <a:schemeClr val="accent1"/>
-          </a:fillRef>
-          <a:effectRef idx="2">
-            <a:schemeClr val="accent1"/>
-          </a:effectRef>
-          <a:fontRef idx="minor">
-            <a:schemeClr val="lt1"/>
-          </a:fontRef>
-        </p:style>
-        <p:txBody>
-          <a:bodyPr rtlCol="0" anchor="ctr"/>
-          <a:lstStyle/>
-          <a:p>
-            <a:pPr algn="ctr"/>
-          </a:p>
-        </p:txBody>
-      </p:sp>
-      <p:sp>
-        <p:nvSpPr>
-          <p:cNvPr id="37" name="TextBox 36"/>
-          <p:cNvSpPr txBox="1"/>
-          <p:nvPr/>
-        </p:nvSpPr>
-        <p:spPr>
-          <a:xfrm>
-            <a:off x="7909560" y="4462272"/>
-            <a:ext cx="3108960" cy="457200"/>
-          </a:xfrm>
-          <a:prstGeom prst="rect">
-            <a:avLst/>
-          </a:prstGeom>
-          <a:noFill/>
-        </p:spPr>
-        <p:txBody>
-          <a:bodyPr wrap="square">
-            <a:spAutoFit/>
-          </a:bodyPr>
-          <a:lstStyle/>
-          <a:p>
-            <a:pPr algn="ctr"/>
-            <a:r>
-              <a:rPr sz="1400" b="0" i="0">
-                <a:solidFill>
-                  <a:srgbClr val="FFFFFF"/>
-                </a:solidFill>
-              </a:rPr>
-              <a:t>Low-traction, struggling</a:t>
-            </a:r>
-          </a:p>
-        </p:txBody>
-      </p:sp>
-      <p:sp>
-        <p:nvSpPr>
-          <p:cNvPr id="38" name="Rectangle 37"/>
-          <p:cNvSpPr/>
-          <p:nvPr/>
-        </p:nvSpPr>
-        <p:spPr>
-          <a:xfrm>
-            <a:off x="457200" y="4983480"/>
-            <a:ext cx="1234439" cy="548640"/>
+            <a:off x="2331720" y="5504688"/>
+            <a:ext cx="2468880" cy="530352"/>
           </a:xfrm>
           <a:prstGeom prst="rect">
             <a:avLst/>
@@ -8085,48 +9991,48 @@
       </p:sp>
       <p:sp>
         <p:nvSpPr>
-          <p:cNvPr id="39" name="TextBox 38"/>
-          <p:cNvSpPr txBox="1"/>
-          <p:nvPr/>
-        </p:nvSpPr>
-        <p:spPr>
-          <a:xfrm>
-            <a:off x="502920" y="5056632"/>
-            <a:ext cx="1188719" cy="457200"/>
-          </a:xfrm>
-          <a:prstGeom prst="rect">
-            <a:avLst/>
-          </a:prstGeom>
-          <a:noFill/>
-        </p:spPr>
-        <p:txBody>
-          <a:bodyPr wrap="square">
+          <p:cNvPr id="26" name="TextBox 25"/>
+          <p:cNvSpPr txBox="1"/>
+          <p:nvPr/>
+        </p:nvSpPr>
+        <p:spPr>
+          <a:xfrm>
+            <a:off x="2404872" y="5596128"/>
+            <a:ext cx="2377440" cy="365760"/>
+          </a:xfrm>
+          <a:prstGeom prst="rect">
+            <a:avLst/>
+          </a:prstGeom>
+          <a:noFill/>
+        </p:spPr>
+        <p:txBody>
+          <a:bodyPr wrap="none">
             <a:spAutoFit/>
           </a:bodyPr>
           <a:lstStyle/>
           <a:p>
             <a:pPr algn="ctr"/>
             <a:r>
-              <a:rPr sz="1400" b="0" i="0">
-                <a:solidFill>
-                  <a:srgbClr val="FFFFFF"/>
-                </a:solidFill>
-              </a:rPr>
-              <a:t>2  🔵</a:t>
-            </a:r>
-          </a:p>
-        </p:txBody>
-      </p:sp>
-      <p:sp>
-        <p:nvSpPr>
-          <p:cNvPr id="40" name="Rectangle 39"/>
+              <a:rPr sz="1300" b="0" i="0">
+                <a:solidFill>
+                  <a:srgbClr val="CCCCCC"/>
+                </a:solidFill>
+              </a:rPr>
+              <a:t>Low    ~120k</a:t>
+            </a:r>
+          </a:p>
+        </p:txBody>
+      </p:sp>
+      <p:sp>
+        <p:nvSpPr>
+          <p:cNvPr id="27" name="Rectangle 26"/>
           <p:cNvSpPr/>
           <p:nvPr/>
         </p:nvSpPr>
         <p:spPr>
           <a:xfrm>
-            <a:off x="1737360" y="4983480"/>
-            <a:ext cx="2057400" cy="548640"/>
+            <a:off x="4937760" y="5504688"/>
+            <a:ext cx="2468880" cy="530352"/>
           </a:xfrm>
           <a:prstGeom prst="rect">
             <a:avLst/>
@@ -8162,48 +10068,48 @@
       </p:sp>
       <p:sp>
         <p:nvSpPr>
-          <p:cNvPr id="41" name="TextBox 40"/>
-          <p:cNvSpPr txBox="1"/>
-          <p:nvPr/>
-        </p:nvSpPr>
-        <p:spPr>
-          <a:xfrm>
-            <a:off x="1783080" y="5056632"/>
-            <a:ext cx="2011679" cy="457200"/>
-          </a:xfrm>
-          <a:prstGeom prst="rect">
-            <a:avLst/>
-          </a:prstGeom>
-          <a:noFill/>
-        </p:spPr>
-        <p:txBody>
-          <a:bodyPr wrap="square">
+          <p:cNvPr id="28" name="TextBox 27"/>
+          <p:cNvSpPr txBox="1"/>
+          <p:nvPr/>
+        </p:nvSpPr>
+        <p:spPr>
+          <a:xfrm>
+            <a:off x="5010912" y="5596128"/>
+            <a:ext cx="2377440" cy="365760"/>
+          </a:xfrm>
+          <a:prstGeom prst="rect">
+            <a:avLst/>
+          </a:prstGeom>
+          <a:noFill/>
+        </p:spPr>
+        <p:txBody>
+          <a:bodyPr wrap="none">
             <a:spAutoFit/>
           </a:bodyPr>
           <a:lstStyle/>
           <a:p>
             <a:pPr algn="ctr"/>
             <a:r>
-              <a:rPr sz="1400" b="0" i="0">
-                <a:solidFill>
-                  <a:srgbClr val="FFFFFF"/>
-                </a:solidFill>
-              </a:rPr>
-              <a:t>~850 000</a:t>
-            </a:r>
-          </a:p>
-        </p:txBody>
-      </p:sp>
-      <p:sp>
-        <p:nvSpPr>
-          <p:cNvPr id="42" name="Rectangle 41"/>
+              <a:rPr sz="1300" b="0" i="0">
+                <a:solidFill>
+                  <a:srgbClr val="CCCCCC"/>
+                </a:solidFill>
+              </a:rPr>
+              <a:t>Low   ~115k users</a:t>
+            </a:r>
+          </a:p>
+        </p:txBody>
+      </p:sp>
+      <p:sp>
+        <p:nvSpPr>
+          <p:cNvPr id="29" name="Rectangle 28"/>
           <p:cNvSpPr/>
           <p:nvPr/>
         </p:nvSpPr>
         <p:spPr>
           <a:xfrm>
-            <a:off x="3840480" y="4983480"/>
-            <a:ext cx="2331720" cy="548640"/>
+            <a:off x="7543800" y="5504688"/>
+            <a:ext cx="4069080" cy="530352"/>
           </a:xfrm>
           <a:prstGeom prst="rect">
             <a:avLst/>
@@ -8239,48 +10145,48 @@
       </p:sp>
       <p:sp>
         <p:nvSpPr>
-          <p:cNvPr id="43" name="TextBox 42"/>
-          <p:cNvSpPr txBox="1"/>
-          <p:nvPr/>
-        </p:nvSpPr>
-        <p:spPr>
-          <a:xfrm>
-            <a:off x="3886200" y="5056632"/>
-            <a:ext cx="2286000" cy="457200"/>
-          </a:xfrm>
-          <a:prstGeom prst="rect">
-            <a:avLst/>
-          </a:prstGeom>
-          <a:noFill/>
-        </p:spPr>
-        <p:txBody>
-          <a:bodyPr wrap="square">
+          <p:cNvPr id="30" name="TextBox 29"/>
+          <p:cNvSpPr txBox="1"/>
+          <p:nvPr/>
+        </p:nvSpPr>
+        <p:spPr>
+          <a:xfrm>
+            <a:off x="7616952" y="5596128"/>
+            <a:ext cx="3977639" cy="365760"/>
+          </a:xfrm>
+          <a:prstGeom prst="rect">
+            <a:avLst/>
+          </a:prstGeom>
+          <a:noFill/>
+        </p:spPr>
+        <p:txBody>
+          <a:bodyPr wrap="none">
             <a:spAutoFit/>
           </a:bodyPr>
           <a:lstStyle/>
           <a:p>
             <a:pPr algn="ctr"/>
             <a:r>
-              <a:rPr sz="1400" b="0" i="0">
-                <a:solidFill>
-                  <a:srgbClr val="FFFFFF"/>
-                </a:solidFill>
-              </a:rPr>
-              <a:t>~305 000 users</a:t>
-            </a:r>
-          </a:p>
-        </p:txBody>
-      </p:sp>
-      <p:sp>
-        <p:nvSpPr>
-          <p:cNvPr id="44" name="Rectangle 43"/>
+              <a:rPr sz="1300" b="0" i="0">
+                <a:solidFill>
+                  <a:srgbClr val="CCCCCC"/>
+                </a:solidFill>
+              </a:rPr>
+              <a:t>Low-traction, struggling</a:t>
+            </a:r>
+          </a:p>
+        </p:txBody>
+      </p:sp>
+      <p:sp>
+        <p:nvSpPr>
+          <p:cNvPr id="31" name="Rectangle 30"/>
           <p:cNvSpPr/>
           <p:nvPr/>
         </p:nvSpPr>
         <p:spPr>
           <a:xfrm>
-            <a:off x="6217920" y="4983480"/>
-            <a:ext cx="1600200" cy="548640"/>
+            <a:off x="228600" y="6071616"/>
+            <a:ext cx="1965960" cy="530352"/>
           </a:xfrm>
           <a:prstGeom prst="rect">
             <a:avLst/>
@@ -8316,48 +10222,48 @@
       </p:sp>
       <p:sp>
         <p:nvSpPr>
-          <p:cNvPr id="45" name="TextBox 44"/>
-          <p:cNvSpPr txBox="1"/>
-          <p:nvPr/>
-        </p:nvSpPr>
-        <p:spPr>
-          <a:xfrm>
-            <a:off x="6263640" y="5056632"/>
-            <a:ext cx="1554480" cy="457200"/>
-          </a:xfrm>
-          <a:prstGeom prst="rect">
-            <a:avLst/>
-          </a:prstGeom>
-          <a:noFill/>
-        </p:spPr>
-        <p:txBody>
-          <a:bodyPr wrap="square">
+          <p:cNvPr id="32" name="TextBox 31"/>
+          <p:cNvSpPr txBox="1"/>
+          <p:nvPr/>
+        </p:nvSpPr>
+        <p:spPr>
+          <a:xfrm>
+            <a:off x="301752" y="6163056"/>
+            <a:ext cx="1874520" cy="365760"/>
+          </a:xfrm>
+          <a:prstGeom prst="rect">
+            <a:avLst/>
+          </a:prstGeom>
+          <a:noFill/>
+        </p:spPr>
+        <p:txBody>
+          <a:bodyPr wrap="none">
             <a:spAutoFit/>
           </a:bodyPr>
           <a:lstStyle/>
           <a:p>
             <a:pPr algn="ctr"/>
             <a:r>
-              <a:rPr sz="1400" b="0" i="0">
-                <a:solidFill>
-                  <a:srgbClr val="FFFFFF"/>
-                </a:solidFill>
-              </a:rPr>
-              <a:t>~148</a:t>
-            </a:r>
-          </a:p>
-        </p:txBody>
-      </p:sp>
-      <p:sp>
-        <p:nvSpPr>
-          <p:cNvPr id="46" name="Rectangle 45"/>
+              <a:rPr sz="1300" b="0" i="0">
+                <a:solidFill>
+                  <a:srgbClr val="3498DB"/>
+                </a:solidFill>
+              </a:rPr>
+              <a:t>2  🔵</a:t>
+            </a:r>
+          </a:p>
+        </p:txBody>
+      </p:sp>
+      <p:sp>
+        <p:nvSpPr>
+          <p:cNvPr id="33" name="Rectangle 32"/>
           <p:cNvSpPr/>
           <p:nvPr/>
         </p:nvSpPr>
         <p:spPr>
           <a:xfrm>
-            <a:off x="7863840" y="4983480"/>
-            <a:ext cx="3154680" cy="548640"/>
+            <a:off x="2331720" y="6071616"/>
+            <a:ext cx="2468880" cy="530352"/>
           </a:xfrm>
           <a:prstGeom prst="rect">
             <a:avLst/>
@@ -8393,68 +10299,188 @@
       </p:sp>
       <p:sp>
         <p:nvSpPr>
-          <p:cNvPr id="47" name="TextBox 46"/>
-          <p:cNvSpPr txBox="1"/>
-          <p:nvPr/>
-        </p:nvSpPr>
-        <p:spPr>
-          <a:xfrm>
-            <a:off x="7909560" y="5056632"/>
-            <a:ext cx="3108960" cy="457200"/>
-          </a:xfrm>
-          <a:prstGeom prst="rect">
-            <a:avLst/>
-          </a:prstGeom>
-          <a:noFill/>
-        </p:spPr>
-        <p:txBody>
-          <a:bodyPr wrap="square">
+          <p:cNvPr id="34" name="TextBox 33"/>
+          <p:cNvSpPr txBox="1"/>
+          <p:nvPr/>
+        </p:nvSpPr>
+        <p:spPr>
+          <a:xfrm>
+            <a:off x="2404872" y="6163056"/>
+            <a:ext cx="2377440" cy="365760"/>
+          </a:xfrm>
+          <a:prstGeom prst="rect">
+            <a:avLst/>
+          </a:prstGeom>
+          <a:noFill/>
+        </p:spPr>
+        <p:txBody>
+          <a:bodyPr wrap="none">
             <a:spAutoFit/>
           </a:bodyPr>
           <a:lstStyle/>
           <a:p>
             <a:pPr algn="ctr"/>
             <a:r>
-              <a:rPr sz="1400" b="0" i="0">
-                <a:solidFill>
-                  <a:srgbClr val="FFFFFF"/>
+              <a:rPr sz="1300" b="0" i="0">
+                <a:solidFill>
+                  <a:srgbClr val="CCCCCC"/>
+                </a:solidFill>
+              </a:rPr>
+              <a:t>Mid   ~850k</a:t>
+            </a:r>
+          </a:p>
+        </p:txBody>
+      </p:sp>
+      <p:sp>
+        <p:nvSpPr>
+          <p:cNvPr id="35" name="Rectangle 34"/>
+          <p:cNvSpPr/>
+          <p:nvPr/>
+        </p:nvSpPr>
+        <p:spPr>
+          <a:xfrm>
+            <a:off x="4937760" y="6071616"/>
+            <a:ext cx="2468880" cy="530352"/>
+          </a:xfrm>
+          <a:prstGeom prst="rect">
+            <a:avLst/>
+          </a:prstGeom>
+          <a:solidFill>
+            <a:srgbClr val="16213E"/>
+          </a:solidFill>
+          <a:ln>
+            <a:noFill/>
+          </a:ln>
+        </p:spPr>
+        <p:style>
+          <a:lnRef idx="1">
+            <a:schemeClr val="accent1"/>
+          </a:lnRef>
+          <a:fillRef idx="3">
+            <a:schemeClr val="accent1"/>
+          </a:fillRef>
+          <a:effectRef idx="2">
+            <a:schemeClr val="accent1"/>
+          </a:effectRef>
+          <a:fontRef idx="minor">
+            <a:schemeClr val="lt1"/>
+          </a:fontRef>
+        </p:style>
+        <p:txBody>
+          <a:bodyPr rtlCol="0" anchor="ctr"/>
+          <a:lstStyle/>
+          <a:p>
+            <a:pPr algn="ctr"/>
+          </a:p>
+        </p:txBody>
+      </p:sp>
+      <p:sp>
+        <p:nvSpPr>
+          <p:cNvPr id="36" name="TextBox 35"/>
+          <p:cNvSpPr txBox="1"/>
+          <p:nvPr/>
+        </p:nvSpPr>
+        <p:spPr>
+          <a:xfrm>
+            <a:off x="5010912" y="6163056"/>
+            <a:ext cx="2377440" cy="365760"/>
+          </a:xfrm>
+          <a:prstGeom prst="rect">
+            <a:avLst/>
+          </a:prstGeom>
+          <a:noFill/>
+        </p:spPr>
+        <p:txBody>
+          <a:bodyPr wrap="none">
+            <a:spAutoFit/>
+          </a:bodyPr>
+          <a:lstStyle/>
+          <a:p>
+            <a:pPr algn="ctr"/>
+            <a:r>
+              <a:rPr sz="1300" b="0" i="0">
+                <a:solidFill>
+                  <a:srgbClr val="CCCCCC"/>
+                </a:solidFill>
+              </a:rPr>
+              <a:t>Mid   ~305k users</a:t>
+            </a:r>
+          </a:p>
+        </p:txBody>
+      </p:sp>
+      <p:sp>
+        <p:nvSpPr>
+          <p:cNvPr id="37" name="Rectangle 36"/>
+          <p:cNvSpPr/>
+          <p:nvPr/>
+        </p:nvSpPr>
+        <p:spPr>
+          <a:xfrm>
+            <a:off x="7543800" y="6071616"/>
+            <a:ext cx="4069080" cy="530352"/>
+          </a:xfrm>
+          <a:prstGeom prst="rect">
+            <a:avLst/>
+          </a:prstGeom>
+          <a:solidFill>
+            <a:srgbClr val="16213E"/>
+          </a:solidFill>
+          <a:ln>
+            <a:noFill/>
+          </a:ln>
+        </p:spPr>
+        <p:style>
+          <a:lnRef idx="1">
+            <a:schemeClr val="accent1"/>
+          </a:lnRef>
+          <a:fillRef idx="3">
+            <a:schemeClr val="accent1"/>
+          </a:fillRef>
+          <a:effectRef idx="2">
+            <a:schemeClr val="accent1"/>
+          </a:effectRef>
+          <a:fontRef idx="minor">
+            <a:schemeClr val="lt1"/>
+          </a:fontRef>
+        </p:style>
+        <p:txBody>
+          <a:bodyPr rtlCol="0" anchor="ctr"/>
+          <a:lstStyle/>
+          <a:p>
+            <a:pPr algn="ctr"/>
+          </a:p>
+        </p:txBody>
+      </p:sp>
+      <p:sp>
+        <p:nvSpPr>
+          <p:cNvPr id="38" name="TextBox 37"/>
+          <p:cNvSpPr txBox="1"/>
+          <p:nvPr/>
+        </p:nvSpPr>
+        <p:spPr>
+          <a:xfrm>
+            <a:off x="7616952" y="6163056"/>
+            <a:ext cx="3977639" cy="365760"/>
+          </a:xfrm>
+          <a:prstGeom prst="rect">
+            <a:avLst/>
+          </a:prstGeom>
+          <a:noFill/>
+        </p:spPr>
+        <p:txBody>
+          <a:bodyPr wrap="none">
+            <a:spAutoFit/>
+          </a:bodyPr>
+          <a:lstStyle/>
+          <a:p>
+            <a:pPr algn="ctr"/>
+            <a:r>
+              <a:rPr sz="1300" b="0" i="0">
+                <a:solidFill>
+                  <a:srgbClr val="CCCCCC"/>
                 </a:solidFill>
               </a:rPr>
               <a:t>Mid-revenue, early-stage</a:t>
-            </a:r>
-          </a:p>
-        </p:txBody>
-      </p:sp>
-      <p:sp>
-        <p:nvSpPr>
-          <p:cNvPr id="48" name="TextBox 47"/>
-          <p:cNvSpPr txBox="1"/>
-          <p:nvPr/>
-        </p:nvSpPr>
-        <p:spPr>
-          <a:xfrm>
-            <a:off x="457200" y="6263640"/>
-            <a:ext cx="11247120" cy="411480"/>
-          </a:xfrm>
-          <a:prstGeom prst="rect">
-            <a:avLst/>
-          </a:prstGeom>
-          <a:noFill/>
-        </p:spPr>
-        <p:txBody>
-          <a:bodyPr wrap="square">
-            <a:spAutoFit/>
-          </a:bodyPr>
-          <a:lstStyle/>
-          <a:p>
-            <a:pPr algn="l"/>
-            <a:r>
-              <a:rPr sz="1300" b="0" i="1">
-                <a:solidFill>
-                  <a:srgbClr val="CCCCCC"/>
-                </a:solidFill>
-              </a:rPr>
-              <a:t>Note: all clusters similar team_size &amp; experience → revenue &amp; traction are the true discriminators</a:t>
             </a:r>
           </a:p>
         </p:txBody>

--- a/scientificProject1/report/presentation.pptx
+++ b/scientificProject1/report/presentation.pptx
@@ -16,6 +16,8 @@
     <p:sldId id="264" r:id="rId15"/>
     <p:sldId id="265" r:id="rId16"/>
     <p:sldId id="266" r:id="rId17"/>
+    <p:sldId id="267" r:id="rId18"/>
+    <p:sldId id="268" r:id="rId19"/>
   </p:sldIdLst>
   <p:sldSz cx="12188952" cy="6858000" type="screen4x3"/>
   <p:notesSz cx="6858000" cy="9144000"/>
@@ -3114,49 +3116,6 @@
         </p:nvSpPr>
         <p:spPr>
           <a:xfrm>
-            <a:off x="0" y="0"/>
-            <a:ext cx="12188952" cy="6858000"/>
-          </a:xfrm>
-          <a:prstGeom prst="rect">
-            <a:avLst/>
-          </a:prstGeom>
-          <a:solidFill>
-            <a:srgbClr val="1A1A2E"/>
-          </a:solidFill>
-          <a:ln>
-            <a:noFill/>
-          </a:ln>
-        </p:spPr>
-        <p:style>
-          <a:lnRef idx="1">
-            <a:schemeClr val="accent1"/>
-          </a:lnRef>
-          <a:fillRef idx="3">
-            <a:schemeClr val="accent1"/>
-          </a:fillRef>
-          <a:effectRef idx="2">
-            <a:schemeClr val="accent1"/>
-          </a:effectRef>
-          <a:fontRef idx="minor">
-            <a:schemeClr val="lt1"/>
-          </a:fontRef>
-        </p:style>
-        <p:txBody>
-          <a:bodyPr rtlCol="0" anchor="ctr"/>
-          <a:lstStyle/>
-          <a:p>
-            <a:pPr algn="ctr"/>
-          </a:p>
-        </p:txBody>
-      </p:sp>
-      <p:sp>
-        <p:nvSpPr>
-          <p:cNvPr id="3" name="Rectangle 2"/>
-          <p:cNvSpPr/>
-          <p:nvPr/>
-        </p:nvSpPr>
-        <p:spPr>
-          <a:xfrm>
             <a:off x="0" y="2514600"/>
             <a:ext cx="12188952" cy="54864"/>
           </a:xfrm>
@@ -3194,7 +3153,7 @@
       </p:sp>
       <p:sp>
         <p:nvSpPr>
-          <p:cNvPr id="4" name="TextBox 3"/>
+          <p:cNvPr id="3" name="TextBox 2"/>
           <p:cNvSpPr txBox="1"/>
           <p:nvPr/>
         </p:nvSpPr>
@@ -3228,7 +3187,7 @@
       </p:sp>
       <p:sp>
         <p:nvSpPr>
-          <p:cNvPr id="5" name="TextBox 4"/>
+          <p:cNvPr id="4" name="TextBox 3"/>
           <p:cNvSpPr txBox="1"/>
           <p:nvPr/>
         </p:nvSpPr>
@@ -3262,47 +3221,47 @@
       </p:sp>
       <p:sp>
         <p:nvSpPr>
+          <p:cNvPr id="5" name="TextBox 4"/>
+          <p:cNvSpPr txBox="1"/>
+          <p:nvPr/>
+        </p:nvSpPr>
+        <p:spPr>
+          <a:xfrm>
+            <a:off x="731520" y="2788920"/>
+            <a:ext cx="10698480" cy="594360"/>
+          </a:xfrm>
+          <a:prstGeom prst="rect">
+            <a:avLst/>
+          </a:prstGeom>
+          <a:noFill/>
+        </p:spPr>
+        <p:txBody>
+          <a:bodyPr wrap="none">
+            <a:spAutoFit/>
+          </a:bodyPr>
+          <a:lstStyle/>
+          <a:p>
+            <a:pPr algn="ctr"/>
+            <a:r>
+              <a:rPr sz="1900" b="0" i="1">
+                <a:solidFill>
+                  <a:srgbClr val="3498DB"/>
+                </a:solidFill>
+              </a:rPr>
+              <a:t>Supervised Classification  ·  Unsupervised Clustering  ·  PCA</a:t>
+            </a:r>
+          </a:p>
+        </p:txBody>
+      </p:sp>
+      <p:sp>
+        <p:nvSpPr>
           <p:cNvPr id="6" name="TextBox 5"/>
           <p:cNvSpPr txBox="1"/>
           <p:nvPr/>
         </p:nvSpPr>
         <p:spPr>
           <a:xfrm>
-            <a:off x="731520" y="2743200"/>
-            <a:ext cx="10698480" cy="594360"/>
-          </a:xfrm>
-          <a:prstGeom prst="rect">
-            <a:avLst/>
-          </a:prstGeom>
-          <a:noFill/>
-        </p:spPr>
-        <p:txBody>
-          <a:bodyPr wrap="none">
-            <a:spAutoFit/>
-          </a:bodyPr>
-          <a:lstStyle/>
-          <a:p>
-            <a:pPr algn="ctr"/>
-            <a:r>
-              <a:rPr sz="1900" b="0" i="1">
-                <a:solidFill>
-                  <a:srgbClr val="3498DB"/>
-                </a:solidFill>
-              </a:rPr>
-              <a:t>Supervised Classification  ·  Unsupervised Clustering  ·  PCA</a:t>
-            </a:r>
-          </a:p>
-        </p:txBody>
-      </p:sp>
-      <p:sp>
-        <p:nvSpPr>
-          <p:cNvPr id="7" name="TextBox 6"/>
-          <p:cNvSpPr txBox="1"/>
-          <p:nvPr/>
-        </p:nvSpPr>
-        <p:spPr>
-          <a:xfrm>
-            <a:off x="731520" y="5943600"/>
+            <a:off x="731520" y="5989320"/>
             <a:ext cx="10698480" cy="594360"/>
           </a:xfrm>
           <a:prstGeom prst="rect">
@@ -3369,7 +3328,7 @@
             <a:avLst/>
           </a:prstGeom>
           <a:solidFill>
-            <a:srgbClr val="0F3C78"/>
+            <a:srgbClr val="2ECC71"/>
           </a:solidFill>
           <a:ln>
             <a:noFill/>
@@ -3405,8 +3364,8 @@
         </p:nvSpPr>
         <p:spPr>
           <a:xfrm>
-            <a:off x="274320" y="109728"/>
-            <a:ext cx="11612880" cy="777240"/>
+            <a:off x="274320" y="91440"/>
+            <a:ext cx="11612880" cy="804672"/>
           </a:xfrm>
           <a:prstGeom prst="rect">
             <a:avLst/>
@@ -3421,12 +3380,12 @@
           <a:p>
             <a:pPr algn="l"/>
             <a:r>
-              <a:rPr sz="2800" b="1" i="0">
+              <a:rPr sz="2700" b="1" i="0">
                 <a:solidFill>
                   <a:srgbClr val="FFFFFF"/>
                 </a:solidFill>
               </a:rPr>
-              <a:t>Validation — K-Means vs Hierarchical Clustering</a:t>
+              <a:t>Cluster Profiles — Mean Feature Values</a:t>
             </a:r>
           </a:p>
         </p:txBody>
@@ -3439,8 +3398,8 @@
         </p:nvSpPr>
         <p:spPr>
           <a:xfrm>
-            <a:off x="182880" y="1005840"/>
-            <a:ext cx="11795760" cy="4297680"/>
+            <a:off x="320040" y="1024128"/>
+            <a:ext cx="11521440" cy="4892040"/>
           </a:xfrm>
           <a:prstGeom prst="rect">
             <a:avLst/>
@@ -3482,8 +3441,8 @@
         </p:nvSpPr>
         <p:spPr>
           <a:xfrm>
-            <a:off x="365760" y="1051560"/>
-            <a:ext cx="11430000" cy="411480"/>
+            <a:off x="457200" y="1069848"/>
+            <a:ext cx="11247120" cy="384048"/>
           </a:xfrm>
           <a:prstGeom prst="rect">
             <a:avLst/>
@@ -3503,14 +3462,14 @@
                   <a:srgbClr val="FFFFFF"/>
                 </a:solidFill>
               </a:rPr>
-              <a:t>Same 3 groups found by both methods → structure is real, not an artefact</a:t>
+              <a:t>Mean feature values per K-Means cluster  (original units)</a:t>
             </a:r>
           </a:p>
         </p:txBody>
       </p:sp>
       <p:pic>
         <p:nvPicPr>
-          <p:cNvPr id="6" name="Picture 5" descr="kmeans_vs_hc.png"/>
+          <p:cNvPr id="6" name="Picture 5" descr="cluster_profiles.png"/>
           <p:cNvPicPr>
             <a:picLocks noChangeAspect="1"/>
           </p:cNvPicPr>
@@ -3524,8 +3483,8 @@
         </p:blipFill>
         <p:spPr>
           <a:xfrm>
-            <a:off x="274320" y="1463040"/>
-            <a:ext cx="11612880" cy="4949478"/>
+            <a:off x="365760" y="1481328"/>
+            <a:ext cx="11430000" cy="4265570"/>
           </a:xfrm>
           <a:prstGeom prst="rect">
             <a:avLst/>
@@ -3540,8 +3499,8 @@
         </p:nvSpPr>
         <p:spPr>
           <a:xfrm>
-            <a:off x="182880" y="5367528"/>
-            <a:ext cx="11795760" cy="1216152"/>
+            <a:off x="320040" y="5779008"/>
+            <a:ext cx="11521440" cy="868680"/>
           </a:xfrm>
           <a:prstGeom prst="rect">
             <a:avLst/>
@@ -3583,28 +3542,28 @@
         </p:nvSpPr>
         <p:spPr>
           <a:xfrm>
-            <a:off x="365760" y="5413248"/>
-            <a:ext cx="11430000" cy="457200"/>
-          </a:xfrm>
-          <a:prstGeom prst="rect">
-            <a:avLst/>
-          </a:prstGeom>
-          <a:noFill/>
-        </p:spPr>
-        <p:txBody>
-          <a:bodyPr wrap="none">
-            <a:spAutoFit/>
-          </a:bodyPr>
-          <a:lstStyle/>
-          <a:p>
-            <a:pPr algn="l"/>
-            <a:r>
-              <a:rPr sz="1700" b="0" i="0">
-                <a:solidFill>
-                  <a:srgbClr val="FFFFFF"/>
-                </a:solidFill>
-              </a:rPr>
-              <a:t>K-Means (left): run on full 100k rows — provides explicit centroids for profiling</a:t>
+            <a:off x="457200" y="5824728"/>
+            <a:ext cx="11247120" cy="384048"/>
+          </a:xfrm>
+          <a:prstGeom prst="rect">
+            <a:avLst/>
+          </a:prstGeom>
+          <a:noFill/>
+        </p:spPr>
+        <p:txBody>
+          <a:bodyPr wrap="none">
+            <a:spAutoFit/>
+          </a:bodyPr>
+          <a:lstStyle/>
+          <a:p>
+            <a:pPr algn="ctr"/>
+            <a:r>
+              <a:rPr sz="1300" b="0" i="1">
+                <a:solidFill>
+                  <a:srgbClr val="CCCCCC"/>
+                </a:solidFill>
+              </a:rPr>
+              <a:t>Left: small-scale features  (funding, experience, team, market, burn)    Right: large-scale  (product_traction, revenue)</a:t>
             </a:r>
           </a:p>
         </p:txBody>
@@ -3617,28 +3576,28 @@
         </p:nvSpPr>
         <p:spPr>
           <a:xfrm>
-            <a:off x="365760" y="5888736"/>
-            <a:ext cx="11430000" cy="457200"/>
-          </a:xfrm>
-          <a:prstGeom prst="rect">
-            <a:avLst/>
-          </a:prstGeom>
-          <a:noFill/>
-        </p:spPr>
-        <p:txBody>
-          <a:bodyPr wrap="none">
-            <a:spAutoFit/>
-          </a:bodyPr>
-          <a:lstStyle/>
-          <a:p>
-            <a:pPr algn="l"/>
-            <a:r>
-              <a:rPr sz="1500" b="0" i="1">
-                <a:solidFill>
-                  <a:srgbClr val="CCCCCC"/>
-                </a:solidFill>
-              </a:rPr>
-              <a:t>    · Hierarchical / Ward (right): run on 5k subsample — independent validation only</a:t>
+            <a:off x="457200" y="6181344"/>
+            <a:ext cx="11247120" cy="384048"/>
+          </a:xfrm>
+          <a:prstGeom prst="rect">
+            <a:avLst/>
+          </a:prstGeom>
+          <a:noFill/>
+        </p:spPr>
+        <p:txBody>
+          <a:bodyPr wrap="none">
+            <a:spAutoFit/>
+          </a:bodyPr>
+          <a:lstStyle/>
+          <a:p>
+            <a:pPr algn="ctr"/>
+            <a:r>
+              <a:rPr sz="1300" b="1" i="0">
+                <a:solidFill>
+                  <a:srgbClr val="2ECC71"/>
+                </a:solidFill>
+              </a:rPr>
+              <a:t>Clusters differ almost exclusively on revenue &amp; traction — the 2 features with real signal ★</a:t>
             </a:r>
           </a:p>
         </p:txBody>
@@ -3720,8 +3679,8 @@
         </p:nvSpPr>
         <p:spPr>
           <a:xfrm>
-            <a:off x="274320" y="109728"/>
-            <a:ext cx="11612880" cy="777240"/>
+            <a:off x="274320" y="91440"/>
+            <a:ext cx="11612880" cy="804672"/>
           </a:xfrm>
           <a:prstGeom prst="rect">
             <a:avLst/>
@@ -3736,12 +3695,1766 @@
           <a:p>
             <a:pPr algn="l"/>
             <a:r>
-              <a:rPr sz="2800" b="1" i="0">
+              <a:rPr sz="2700" b="1" i="0">
                 <a:solidFill>
                   <a:srgbClr val="FFFFFF"/>
                 </a:solidFill>
               </a:rPr>
-              <a:t>Conclusion</a:t>
+              <a:t>Cluster Archetypes</a:t>
+            </a:r>
+          </a:p>
+        </p:txBody>
+      </p:sp>
+      <p:sp>
+        <p:nvSpPr>
+          <p:cNvPr id="4" name="TextBox 3"/>
+          <p:cNvSpPr txBox="1"/>
+          <p:nvPr/>
+        </p:nvSpPr>
+        <p:spPr>
+          <a:xfrm>
+            <a:off x="365760" y="1024128"/>
+            <a:ext cx="11430000" cy="411480"/>
+          </a:xfrm>
+          <a:prstGeom prst="rect">
+            <a:avLst/>
+          </a:prstGeom>
+          <a:noFill/>
+        </p:spPr>
+        <p:txBody>
+          <a:bodyPr wrap="none">
+            <a:spAutoFit/>
+          </a:bodyPr>
+          <a:lstStyle/>
+          <a:p>
+            <a:pPr algn="ctr"/>
+            <a:r>
+              <a:rPr sz="1600" b="0" i="1">
+                <a:solidFill>
+                  <a:srgbClr val="CCCCCC"/>
+                </a:solidFill>
+              </a:rPr>
+              <a:t>Each cluster interpreted on its own terms — independent of outcome labels</a:t>
+            </a:r>
+          </a:p>
+        </p:txBody>
+      </p:sp>
+      <p:sp>
+        <p:nvSpPr>
+          <p:cNvPr id="5" name="Rectangle 4"/>
+          <p:cNvSpPr/>
+          <p:nvPr/>
+        </p:nvSpPr>
+        <p:spPr>
+          <a:xfrm>
+            <a:off x="274320" y="1554480"/>
+            <a:ext cx="1508760" cy="1005840"/>
+          </a:xfrm>
+          <a:prstGeom prst="rect">
+            <a:avLst/>
+          </a:prstGeom>
+          <a:solidFill>
+            <a:srgbClr val="0F3C78"/>
+          </a:solidFill>
+          <a:ln>
+            <a:noFill/>
+          </a:ln>
+        </p:spPr>
+        <p:style>
+          <a:lnRef idx="1">
+            <a:schemeClr val="accent1"/>
+          </a:lnRef>
+          <a:fillRef idx="3">
+            <a:schemeClr val="accent1"/>
+          </a:fillRef>
+          <a:effectRef idx="2">
+            <a:schemeClr val="accent1"/>
+          </a:effectRef>
+          <a:fontRef idx="minor">
+            <a:schemeClr val="lt1"/>
+          </a:fontRef>
+        </p:style>
+        <p:txBody>
+          <a:bodyPr rtlCol="0" anchor="ctr"/>
+          <a:lstStyle/>
+          <a:p>
+            <a:pPr algn="ctr"/>
+          </a:p>
+        </p:txBody>
+      </p:sp>
+      <p:sp>
+        <p:nvSpPr>
+          <p:cNvPr id="6" name="TextBox 5"/>
+          <p:cNvSpPr txBox="1"/>
+          <p:nvPr/>
+        </p:nvSpPr>
+        <p:spPr>
+          <a:xfrm>
+            <a:off x="347472" y="1828800"/>
+            <a:ext cx="1389888" cy="502920"/>
+          </a:xfrm>
+          <a:prstGeom prst="rect">
+            <a:avLst/>
+          </a:prstGeom>
+          <a:noFill/>
+        </p:spPr>
+        <p:txBody>
+          <a:bodyPr wrap="none">
+            <a:spAutoFit/>
+          </a:bodyPr>
+          <a:lstStyle/>
+          <a:p>
+            <a:pPr algn="ctr"/>
+            <a:r>
+              <a:rPr sz="1400" b="1" i="0">
+                <a:solidFill>
+                  <a:srgbClr val="FFFFFF"/>
+                </a:solidFill>
+              </a:rPr>
+              <a:t>Cluster</a:t>
+            </a:r>
+          </a:p>
+        </p:txBody>
+      </p:sp>
+      <p:sp>
+        <p:nvSpPr>
+          <p:cNvPr id="7" name="Rectangle 6"/>
+          <p:cNvSpPr/>
+          <p:nvPr/>
+        </p:nvSpPr>
+        <p:spPr>
+          <a:xfrm>
+            <a:off x="1920240" y="1554480"/>
+            <a:ext cx="1965960" cy="1005840"/>
+          </a:xfrm>
+          <a:prstGeom prst="rect">
+            <a:avLst/>
+          </a:prstGeom>
+          <a:solidFill>
+            <a:srgbClr val="0F3C78"/>
+          </a:solidFill>
+          <a:ln>
+            <a:noFill/>
+          </a:ln>
+        </p:spPr>
+        <p:style>
+          <a:lnRef idx="1">
+            <a:schemeClr val="accent1"/>
+          </a:lnRef>
+          <a:fillRef idx="3">
+            <a:schemeClr val="accent1"/>
+          </a:fillRef>
+          <a:effectRef idx="2">
+            <a:schemeClr val="accent1"/>
+          </a:effectRef>
+          <a:fontRef idx="minor">
+            <a:schemeClr val="lt1"/>
+          </a:fontRef>
+        </p:style>
+        <p:txBody>
+          <a:bodyPr rtlCol="0" anchor="ctr"/>
+          <a:lstStyle/>
+          <a:p>
+            <a:pPr algn="ctr"/>
+          </a:p>
+        </p:txBody>
+      </p:sp>
+      <p:sp>
+        <p:nvSpPr>
+          <p:cNvPr id="8" name="TextBox 7"/>
+          <p:cNvSpPr txBox="1"/>
+          <p:nvPr/>
+        </p:nvSpPr>
+        <p:spPr>
+          <a:xfrm>
+            <a:off x="1993392" y="1828800"/>
+            <a:ext cx="1847088" cy="502920"/>
+          </a:xfrm>
+          <a:prstGeom prst="rect">
+            <a:avLst/>
+          </a:prstGeom>
+          <a:noFill/>
+        </p:spPr>
+        <p:txBody>
+          <a:bodyPr wrap="none">
+            <a:spAutoFit/>
+          </a:bodyPr>
+          <a:lstStyle/>
+          <a:p>
+            <a:pPr algn="ctr"/>
+            <a:r>
+              <a:rPr sz="1400" b="1" i="0">
+                <a:solidFill>
+                  <a:srgbClr val="FFFFFF"/>
+                </a:solidFill>
+              </a:rPr>
+              <a:t>Revenue</a:t>
+            </a:r>
+          </a:p>
+        </p:txBody>
+      </p:sp>
+      <p:sp>
+        <p:nvSpPr>
+          <p:cNvPr id="9" name="Rectangle 8"/>
+          <p:cNvSpPr/>
+          <p:nvPr/>
+        </p:nvSpPr>
+        <p:spPr>
+          <a:xfrm>
+            <a:off x="4023360" y="1554480"/>
+            <a:ext cx="1965960" cy="1005840"/>
+          </a:xfrm>
+          <a:prstGeom prst="rect">
+            <a:avLst/>
+          </a:prstGeom>
+          <a:solidFill>
+            <a:srgbClr val="0F3C78"/>
+          </a:solidFill>
+          <a:ln>
+            <a:noFill/>
+          </a:ln>
+        </p:spPr>
+        <p:style>
+          <a:lnRef idx="1">
+            <a:schemeClr val="accent1"/>
+          </a:lnRef>
+          <a:fillRef idx="3">
+            <a:schemeClr val="accent1"/>
+          </a:fillRef>
+          <a:effectRef idx="2">
+            <a:schemeClr val="accent1"/>
+          </a:effectRef>
+          <a:fontRef idx="minor">
+            <a:schemeClr val="lt1"/>
+          </a:fontRef>
+        </p:style>
+        <p:txBody>
+          <a:bodyPr rtlCol="0" anchor="ctr"/>
+          <a:lstStyle/>
+          <a:p>
+            <a:pPr algn="ctr"/>
+          </a:p>
+        </p:txBody>
+      </p:sp>
+      <p:sp>
+        <p:nvSpPr>
+          <p:cNvPr id="10" name="TextBox 9"/>
+          <p:cNvSpPr txBox="1"/>
+          <p:nvPr/>
+        </p:nvSpPr>
+        <p:spPr>
+          <a:xfrm>
+            <a:off x="4096512" y="1828800"/>
+            <a:ext cx="1847088" cy="502920"/>
+          </a:xfrm>
+          <a:prstGeom prst="rect">
+            <a:avLst/>
+          </a:prstGeom>
+          <a:noFill/>
+        </p:spPr>
+        <p:txBody>
+          <a:bodyPr wrap="none">
+            <a:spAutoFit/>
+          </a:bodyPr>
+          <a:lstStyle/>
+          <a:p>
+            <a:pPr algn="ctr"/>
+            <a:r>
+              <a:rPr sz="1400" b="1" i="0">
+                <a:solidFill>
+                  <a:srgbClr val="FFFFFF"/>
+                </a:solidFill>
+              </a:rPr>
+              <a:t>Traction</a:t>
+            </a:r>
+          </a:p>
+        </p:txBody>
+      </p:sp>
+      <p:sp>
+        <p:nvSpPr>
+          <p:cNvPr id="11" name="Rectangle 10"/>
+          <p:cNvSpPr/>
+          <p:nvPr/>
+        </p:nvSpPr>
+        <p:spPr>
+          <a:xfrm>
+            <a:off x="6126480" y="1554480"/>
+            <a:ext cx="1234439" cy="1005840"/>
+          </a:xfrm>
+          <a:prstGeom prst="rect">
+            <a:avLst/>
+          </a:prstGeom>
+          <a:solidFill>
+            <a:srgbClr val="0F3C78"/>
+          </a:solidFill>
+          <a:ln>
+            <a:noFill/>
+          </a:ln>
+        </p:spPr>
+        <p:style>
+          <a:lnRef idx="1">
+            <a:schemeClr val="accent1"/>
+          </a:lnRef>
+          <a:fillRef idx="3">
+            <a:schemeClr val="accent1"/>
+          </a:fillRef>
+          <a:effectRef idx="2">
+            <a:schemeClr val="accent1"/>
+          </a:effectRef>
+          <a:fontRef idx="minor">
+            <a:schemeClr val="lt1"/>
+          </a:fontRef>
+        </p:style>
+        <p:txBody>
+          <a:bodyPr rtlCol="0" anchor="ctr"/>
+          <a:lstStyle/>
+          <a:p>
+            <a:pPr algn="ctr"/>
+          </a:p>
+        </p:txBody>
+      </p:sp>
+      <p:sp>
+        <p:nvSpPr>
+          <p:cNvPr id="12" name="TextBox 11"/>
+          <p:cNvSpPr txBox="1"/>
+          <p:nvPr/>
+        </p:nvSpPr>
+        <p:spPr>
+          <a:xfrm>
+            <a:off x="6199632" y="1828800"/>
+            <a:ext cx="1115568" cy="502920"/>
+          </a:xfrm>
+          <a:prstGeom prst="rect">
+            <a:avLst/>
+          </a:prstGeom>
+          <a:noFill/>
+        </p:spPr>
+        <p:txBody>
+          <a:bodyPr wrap="none">
+            <a:spAutoFit/>
+          </a:bodyPr>
+          <a:lstStyle/>
+          <a:p>
+            <a:pPr algn="ctr"/>
+            <a:r>
+              <a:rPr sz="1400" b="1" i="0">
+                <a:solidFill>
+                  <a:srgbClr val="FFFFFF"/>
+                </a:solidFill>
+              </a:rPr>
+              <a:t>team_size</a:t>
+            </a:r>
+          </a:p>
+        </p:txBody>
+      </p:sp>
+      <p:sp>
+        <p:nvSpPr>
+          <p:cNvPr id="13" name="Rectangle 12"/>
+          <p:cNvSpPr/>
+          <p:nvPr/>
+        </p:nvSpPr>
+        <p:spPr>
+          <a:xfrm>
+            <a:off x="7498079" y="1554480"/>
+            <a:ext cx="4434840" cy="1005840"/>
+          </a:xfrm>
+          <a:prstGeom prst="rect">
+            <a:avLst/>
+          </a:prstGeom>
+          <a:solidFill>
+            <a:srgbClr val="0F3C78"/>
+          </a:solidFill>
+          <a:ln>
+            <a:noFill/>
+          </a:ln>
+        </p:spPr>
+        <p:style>
+          <a:lnRef idx="1">
+            <a:schemeClr val="accent1"/>
+          </a:lnRef>
+          <a:fillRef idx="3">
+            <a:schemeClr val="accent1"/>
+          </a:fillRef>
+          <a:effectRef idx="2">
+            <a:schemeClr val="accent1"/>
+          </a:effectRef>
+          <a:fontRef idx="minor">
+            <a:schemeClr val="lt1"/>
+          </a:fontRef>
+        </p:style>
+        <p:txBody>
+          <a:bodyPr rtlCol="0" anchor="ctr"/>
+          <a:lstStyle/>
+          <a:p>
+            <a:pPr algn="ctr"/>
+          </a:p>
+        </p:txBody>
+      </p:sp>
+      <p:sp>
+        <p:nvSpPr>
+          <p:cNvPr id="14" name="TextBox 13"/>
+          <p:cNvSpPr txBox="1"/>
+          <p:nvPr/>
+        </p:nvSpPr>
+        <p:spPr>
+          <a:xfrm>
+            <a:off x="7571231" y="1828800"/>
+            <a:ext cx="4315968" cy="502920"/>
+          </a:xfrm>
+          <a:prstGeom prst="rect">
+            <a:avLst/>
+          </a:prstGeom>
+          <a:noFill/>
+        </p:spPr>
+        <p:txBody>
+          <a:bodyPr wrap="none">
+            <a:spAutoFit/>
+          </a:bodyPr>
+          <a:lstStyle/>
+          <a:p>
+            <a:pPr algn="ctr"/>
+            <a:r>
+              <a:rPr sz="1400" b="1" i="0">
+                <a:solidFill>
+                  <a:srgbClr val="FFFFFF"/>
+                </a:solidFill>
+              </a:rPr>
+              <a:t>Profile</a:t>
+            </a:r>
+          </a:p>
+        </p:txBody>
+      </p:sp>
+      <p:sp>
+        <p:nvSpPr>
+          <p:cNvPr id="15" name="Rectangle 14"/>
+          <p:cNvSpPr/>
+          <p:nvPr/>
+        </p:nvSpPr>
+        <p:spPr>
+          <a:xfrm>
+            <a:off x="274320" y="2651760"/>
+            <a:ext cx="1508760" cy="1005840"/>
+          </a:xfrm>
+          <a:prstGeom prst="rect">
+            <a:avLst/>
+          </a:prstGeom>
+          <a:solidFill>
+            <a:srgbClr val="16213E"/>
+          </a:solidFill>
+          <a:ln>
+            <a:noFill/>
+          </a:ln>
+        </p:spPr>
+        <p:style>
+          <a:lnRef idx="1">
+            <a:schemeClr val="accent1"/>
+          </a:lnRef>
+          <a:fillRef idx="3">
+            <a:schemeClr val="accent1"/>
+          </a:fillRef>
+          <a:effectRef idx="2">
+            <a:schemeClr val="accent1"/>
+          </a:effectRef>
+          <a:fontRef idx="minor">
+            <a:schemeClr val="lt1"/>
+          </a:fontRef>
+        </p:style>
+        <p:txBody>
+          <a:bodyPr rtlCol="0" anchor="ctr"/>
+          <a:lstStyle/>
+          <a:p>
+            <a:pPr algn="ctr"/>
+          </a:p>
+        </p:txBody>
+      </p:sp>
+      <p:sp>
+        <p:nvSpPr>
+          <p:cNvPr id="16" name="TextBox 15"/>
+          <p:cNvSpPr txBox="1"/>
+          <p:nvPr/>
+        </p:nvSpPr>
+        <p:spPr>
+          <a:xfrm>
+            <a:off x="347472" y="2926079"/>
+            <a:ext cx="1389888" cy="502920"/>
+          </a:xfrm>
+          <a:prstGeom prst="rect">
+            <a:avLst/>
+          </a:prstGeom>
+          <a:noFill/>
+        </p:spPr>
+        <p:txBody>
+          <a:bodyPr wrap="none">
+            <a:spAutoFit/>
+          </a:bodyPr>
+          <a:lstStyle/>
+          <a:p>
+            <a:pPr algn="ctr"/>
+            <a:r>
+              <a:rPr sz="1400" b="0" i="0">
+                <a:solidFill>
+                  <a:srgbClr val="2ECC71"/>
+                </a:solidFill>
+              </a:rPr>
+              <a:t>0  🟢</a:t>
+            </a:r>
+          </a:p>
+        </p:txBody>
+      </p:sp>
+      <p:sp>
+        <p:nvSpPr>
+          <p:cNvPr id="17" name="Rectangle 16"/>
+          <p:cNvSpPr/>
+          <p:nvPr/>
+        </p:nvSpPr>
+        <p:spPr>
+          <a:xfrm>
+            <a:off x="1920240" y="2651760"/>
+            <a:ext cx="1965960" cy="1005840"/>
+          </a:xfrm>
+          <a:prstGeom prst="rect">
+            <a:avLst/>
+          </a:prstGeom>
+          <a:solidFill>
+            <a:srgbClr val="16213E"/>
+          </a:solidFill>
+          <a:ln>
+            <a:noFill/>
+          </a:ln>
+        </p:spPr>
+        <p:style>
+          <a:lnRef idx="1">
+            <a:schemeClr val="accent1"/>
+          </a:lnRef>
+          <a:fillRef idx="3">
+            <a:schemeClr val="accent1"/>
+          </a:fillRef>
+          <a:effectRef idx="2">
+            <a:schemeClr val="accent1"/>
+          </a:effectRef>
+          <a:fontRef idx="minor">
+            <a:schemeClr val="lt1"/>
+          </a:fontRef>
+        </p:style>
+        <p:txBody>
+          <a:bodyPr rtlCol="0" anchor="ctr"/>
+          <a:lstStyle/>
+          <a:p>
+            <a:pPr algn="ctr"/>
+          </a:p>
+        </p:txBody>
+      </p:sp>
+      <p:sp>
+        <p:nvSpPr>
+          <p:cNvPr id="18" name="TextBox 17"/>
+          <p:cNvSpPr txBox="1"/>
+          <p:nvPr/>
+        </p:nvSpPr>
+        <p:spPr>
+          <a:xfrm>
+            <a:off x="1993392" y="2926079"/>
+            <a:ext cx="1847088" cy="502920"/>
+          </a:xfrm>
+          <a:prstGeom prst="rect">
+            <a:avLst/>
+          </a:prstGeom>
+          <a:noFill/>
+        </p:spPr>
+        <p:txBody>
+          <a:bodyPr wrap="none">
+            <a:spAutoFit/>
+          </a:bodyPr>
+          <a:lstStyle/>
+          <a:p>
+            <a:pPr algn="ctr"/>
+            <a:r>
+              <a:rPr sz="1400" b="0" i="0">
+                <a:solidFill>
+                  <a:srgbClr val="CCCCCC"/>
+                </a:solidFill>
+              </a:rPr>
+              <a:t>High  ~1 040k</a:t>
+            </a:r>
+          </a:p>
+        </p:txBody>
+      </p:sp>
+      <p:sp>
+        <p:nvSpPr>
+          <p:cNvPr id="19" name="Rectangle 18"/>
+          <p:cNvSpPr/>
+          <p:nvPr/>
+        </p:nvSpPr>
+        <p:spPr>
+          <a:xfrm>
+            <a:off x="4023360" y="2651760"/>
+            <a:ext cx="1965960" cy="1005840"/>
+          </a:xfrm>
+          <a:prstGeom prst="rect">
+            <a:avLst/>
+          </a:prstGeom>
+          <a:solidFill>
+            <a:srgbClr val="16213E"/>
+          </a:solidFill>
+          <a:ln>
+            <a:noFill/>
+          </a:ln>
+        </p:spPr>
+        <p:style>
+          <a:lnRef idx="1">
+            <a:schemeClr val="accent1"/>
+          </a:lnRef>
+          <a:fillRef idx="3">
+            <a:schemeClr val="accent1"/>
+          </a:fillRef>
+          <a:effectRef idx="2">
+            <a:schemeClr val="accent1"/>
+          </a:effectRef>
+          <a:fontRef idx="minor">
+            <a:schemeClr val="lt1"/>
+          </a:fontRef>
+        </p:style>
+        <p:txBody>
+          <a:bodyPr rtlCol="0" anchor="ctr"/>
+          <a:lstStyle/>
+          <a:p>
+            <a:pPr algn="ctr"/>
+          </a:p>
+        </p:txBody>
+      </p:sp>
+      <p:sp>
+        <p:nvSpPr>
+          <p:cNvPr id="20" name="TextBox 19"/>
+          <p:cNvSpPr txBox="1"/>
+          <p:nvPr/>
+        </p:nvSpPr>
+        <p:spPr>
+          <a:xfrm>
+            <a:off x="4096512" y="2926079"/>
+            <a:ext cx="1847088" cy="502920"/>
+          </a:xfrm>
+          <a:prstGeom prst="rect">
+            <a:avLst/>
+          </a:prstGeom>
+          <a:noFill/>
+        </p:spPr>
+        <p:txBody>
+          <a:bodyPr wrap="none">
+            <a:spAutoFit/>
+          </a:bodyPr>
+          <a:lstStyle/>
+          <a:p>
+            <a:pPr algn="ctr"/>
+            <a:r>
+              <a:rPr sz="1400" b="0" i="0">
+                <a:solidFill>
+                  <a:srgbClr val="CCCCCC"/>
+                </a:solidFill>
+              </a:rPr>
+              <a:t>High  ~360k</a:t>
+            </a:r>
+          </a:p>
+        </p:txBody>
+      </p:sp>
+      <p:sp>
+        <p:nvSpPr>
+          <p:cNvPr id="21" name="Rectangle 20"/>
+          <p:cNvSpPr/>
+          <p:nvPr/>
+        </p:nvSpPr>
+        <p:spPr>
+          <a:xfrm>
+            <a:off x="6126480" y="2651760"/>
+            <a:ext cx="1234439" cy="1005840"/>
+          </a:xfrm>
+          <a:prstGeom prst="rect">
+            <a:avLst/>
+          </a:prstGeom>
+          <a:solidFill>
+            <a:srgbClr val="16213E"/>
+          </a:solidFill>
+          <a:ln>
+            <a:noFill/>
+          </a:ln>
+        </p:spPr>
+        <p:style>
+          <a:lnRef idx="1">
+            <a:schemeClr val="accent1"/>
+          </a:lnRef>
+          <a:fillRef idx="3">
+            <a:schemeClr val="accent1"/>
+          </a:fillRef>
+          <a:effectRef idx="2">
+            <a:schemeClr val="accent1"/>
+          </a:effectRef>
+          <a:fontRef idx="minor">
+            <a:schemeClr val="lt1"/>
+          </a:fontRef>
+        </p:style>
+        <p:txBody>
+          <a:bodyPr rtlCol="0" anchor="ctr"/>
+          <a:lstStyle/>
+          <a:p>
+            <a:pPr algn="ctr"/>
+          </a:p>
+        </p:txBody>
+      </p:sp>
+      <p:sp>
+        <p:nvSpPr>
+          <p:cNvPr id="22" name="TextBox 21"/>
+          <p:cNvSpPr txBox="1"/>
+          <p:nvPr/>
+        </p:nvSpPr>
+        <p:spPr>
+          <a:xfrm>
+            <a:off x="6199632" y="2926079"/>
+            <a:ext cx="1115568" cy="502920"/>
+          </a:xfrm>
+          <a:prstGeom prst="rect">
+            <a:avLst/>
+          </a:prstGeom>
+          <a:noFill/>
+        </p:spPr>
+        <p:txBody>
+          <a:bodyPr wrap="none">
+            <a:spAutoFit/>
+          </a:bodyPr>
+          <a:lstStyle/>
+          <a:p>
+            <a:pPr algn="ctr"/>
+            <a:r>
+              <a:rPr sz="1400" b="0" i="0">
+                <a:solidFill>
+                  <a:srgbClr val="CCCCCC"/>
+                </a:solidFill>
+              </a:rPr>
+              <a:t>~148</a:t>
+            </a:r>
+          </a:p>
+        </p:txBody>
+      </p:sp>
+      <p:sp>
+        <p:nvSpPr>
+          <p:cNvPr id="23" name="Rectangle 22"/>
+          <p:cNvSpPr/>
+          <p:nvPr/>
+        </p:nvSpPr>
+        <p:spPr>
+          <a:xfrm>
+            <a:off x="7498079" y="2651760"/>
+            <a:ext cx="4434840" cy="1005840"/>
+          </a:xfrm>
+          <a:prstGeom prst="rect">
+            <a:avLst/>
+          </a:prstGeom>
+          <a:solidFill>
+            <a:srgbClr val="16213E"/>
+          </a:solidFill>
+          <a:ln>
+            <a:noFill/>
+          </a:ln>
+        </p:spPr>
+        <p:style>
+          <a:lnRef idx="1">
+            <a:schemeClr val="accent1"/>
+          </a:lnRef>
+          <a:fillRef idx="3">
+            <a:schemeClr val="accent1"/>
+          </a:fillRef>
+          <a:effectRef idx="2">
+            <a:schemeClr val="accent1"/>
+          </a:effectRef>
+          <a:fontRef idx="minor">
+            <a:schemeClr val="lt1"/>
+          </a:fontRef>
+        </p:style>
+        <p:txBody>
+          <a:bodyPr rtlCol="0" anchor="ctr"/>
+          <a:lstStyle/>
+          <a:p>
+            <a:pPr algn="ctr"/>
+          </a:p>
+        </p:txBody>
+      </p:sp>
+      <p:sp>
+        <p:nvSpPr>
+          <p:cNvPr id="24" name="TextBox 23"/>
+          <p:cNvSpPr txBox="1"/>
+          <p:nvPr/>
+        </p:nvSpPr>
+        <p:spPr>
+          <a:xfrm>
+            <a:off x="7571231" y="2926079"/>
+            <a:ext cx="4315968" cy="502920"/>
+          </a:xfrm>
+          <a:prstGeom prst="rect">
+            <a:avLst/>
+          </a:prstGeom>
+          <a:noFill/>
+        </p:spPr>
+        <p:txBody>
+          <a:bodyPr wrap="none">
+            <a:spAutoFit/>
+          </a:bodyPr>
+          <a:lstStyle/>
+          <a:p>
+            <a:pPr algn="ctr"/>
+            <a:r>
+              <a:rPr sz="1400" b="0" i="0">
+                <a:solidFill>
+                  <a:srgbClr val="CCCCCC"/>
+                </a:solidFill>
+              </a:rPr>
+              <a:t>High-revenue, established companies</a:t>
+            </a:r>
+          </a:p>
+        </p:txBody>
+      </p:sp>
+      <p:sp>
+        <p:nvSpPr>
+          <p:cNvPr id="25" name="Rectangle 24"/>
+          <p:cNvSpPr/>
+          <p:nvPr/>
+        </p:nvSpPr>
+        <p:spPr>
+          <a:xfrm>
+            <a:off x="274320" y="3749039"/>
+            <a:ext cx="1508760" cy="1005840"/>
+          </a:xfrm>
+          <a:prstGeom prst="rect">
+            <a:avLst/>
+          </a:prstGeom>
+          <a:solidFill>
+            <a:srgbClr val="16213E"/>
+          </a:solidFill>
+          <a:ln>
+            <a:noFill/>
+          </a:ln>
+        </p:spPr>
+        <p:style>
+          <a:lnRef idx="1">
+            <a:schemeClr val="accent1"/>
+          </a:lnRef>
+          <a:fillRef idx="3">
+            <a:schemeClr val="accent1"/>
+          </a:fillRef>
+          <a:effectRef idx="2">
+            <a:schemeClr val="accent1"/>
+          </a:effectRef>
+          <a:fontRef idx="minor">
+            <a:schemeClr val="lt1"/>
+          </a:fontRef>
+        </p:style>
+        <p:txBody>
+          <a:bodyPr rtlCol="0" anchor="ctr"/>
+          <a:lstStyle/>
+          <a:p>
+            <a:pPr algn="ctr"/>
+          </a:p>
+        </p:txBody>
+      </p:sp>
+      <p:sp>
+        <p:nvSpPr>
+          <p:cNvPr id="26" name="TextBox 25"/>
+          <p:cNvSpPr txBox="1"/>
+          <p:nvPr/>
+        </p:nvSpPr>
+        <p:spPr>
+          <a:xfrm>
+            <a:off x="347472" y="4023359"/>
+            <a:ext cx="1389888" cy="502920"/>
+          </a:xfrm>
+          <a:prstGeom prst="rect">
+            <a:avLst/>
+          </a:prstGeom>
+          <a:noFill/>
+        </p:spPr>
+        <p:txBody>
+          <a:bodyPr wrap="none">
+            <a:spAutoFit/>
+          </a:bodyPr>
+          <a:lstStyle/>
+          <a:p>
+            <a:pPr algn="ctr"/>
+            <a:r>
+              <a:rPr sz="1400" b="0" i="0">
+                <a:solidFill>
+                  <a:srgbClr val="C0392B"/>
+                </a:solidFill>
+              </a:rPr>
+              <a:t>1  🔴</a:t>
+            </a:r>
+          </a:p>
+        </p:txBody>
+      </p:sp>
+      <p:sp>
+        <p:nvSpPr>
+          <p:cNvPr id="27" name="Rectangle 26"/>
+          <p:cNvSpPr/>
+          <p:nvPr/>
+        </p:nvSpPr>
+        <p:spPr>
+          <a:xfrm>
+            <a:off x="1920240" y="3749039"/>
+            <a:ext cx="1965960" cy="1005840"/>
+          </a:xfrm>
+          <a:prstGeom prst="rect">
+            <a:avLst/>
+          </a:prstGeom>
+          <a:solidFill>
+            <a:srgbClr val="16213E"/>
+          </a:solidFill>
+          <a:ln>
+            <a:noFill/>
+          </a:ln>
+        </p:spPr>
+        <p:style>
+          <a:lnRef idx="1">
+            <a:schemeClr val="accent1"/>
+          </a:lnRef>
+          <a:fillRef idx="3">
+            <a:schemeClr val="accent1"/>
+          </a:fillRef>
+          <a:effectRef idx="2">
+            <a:schemeClr val="accent1"/>
+          </a:effectRef>
+          <a:fontRef idx="minor">
+            <a:schemeClr val="lt1"/>
+          </a:fontRef>
+        </p:style>
+        <p:txBody>
+          <a:bodyPr rtlCol="0" anchor="ctr"/>
+          <a:lstStyle/>
+          <a:p>
+            <a:pPr algn="ctr"/>
+          </a:p>
+        </p:txBody>
+      </p:sp>
+      <p:sp>
+        <p:nvSpPr>
+          <p:cNvPr id="28" name="TextBox 27"/>
+          <p:cNvSpPr txBox="1"/>
+          <p:nvPr/>
+        </p:nvSpPr>
+        <p:spPr>
+          <a:xfrm>
+            <a:off x="1993392" y="4023359"/>
+            <a:ext cx="1847088" cy="502920"/>
+          </a:xfrm>
+          <a:prstGeom prst="rect">
+            <a:avLst/>
+          </a:prstGeom>
+          <a:noFill/>
+        </p:spPr>
+        <p:txBody>
+          <a:bodyPr wrap="none">
+            <a:spAutoFit/>
+          </a:bodyPr>
+          <a:lstStyle/>
+          <a:p>
+            <a:pPr algn="ctr"/>
+            <a:r>
+              <a:rPr sz="1400" b="0" i="0">
+                <a:solidFill>
+                  <a:srgbClr val="CCCCCC"/>
+                </a:solidFill>
+              </a:rPr>
+              <a:t>Low  ~120k</a:t>
+            </a:r>
+          </a:p>
+        </p:txBody>
+      </p:sp>
+      <p:sp>
+        <p:nvSpPr>
+          <p:cNvPr id="29" name="Rectangle 28"/>
+          <p:cNvSpPr/>
+          <p:nvPr/>
+        </p:nvSpPr>
+        <p:spPr>
+          <a:xfrm>
+            <a:off x="4023360" y="3749039"/>
+            <a:ext cx="1965960" cy="1005840"/>
+          </a:xfrm>
+          <a:prstGeom prst="rect">
+            <a:avLst/>
+          </a:prstGeom>
+          <a:solidFill>
+            <a:srgbClr val="16213E"/>
+          </a:solidFill>
+          <a:ln>
+            <a:noFill/>
+          </a:ln>
+        </p:spPr>
+        <p:style>
+          <a:lnRef idx="1">
+            <a:schemeClr val="accent1"/>
+          </a:lnRef>
+          <a:fillRef idx="3">
+            <a:schemeClr val="accent1"/>
+          </a:fillRef>
+          <a:effectRef idx="2">
+            <a:schemeClr val="accent1"/>
+          </a:effectRef>
+          <a:fontRef idx="minor">
+            <a:schemeClr val="lt1"/>
+          </a:fontRef>
+        </p:style>
+        <p:txBody>
+          <a:bodyPr rtlCol="0" anchor="ctr"/>
+          <a:lstStyle/>
+          <a:p>
+            <a:pPr algn="ctr"/>
+          </a:p>
+        </p:txBody>
+      </p:sp>
+      <p:sp>
+        <p:nvSpPr>
+          <p:cNvPr id="30" name="TextBox 29"/>
+          <p:cNvSpPr txBox="1"/>
+          <p:nvPr/>
+        </p:nvSpPr>
+        <p:spPr>
+          <a:xfrm>
+            <a:off x="4096512" y="4023359"/>
+            <a:ext cx="1847088" cy="502920"/>
+          </a:xfrm>
+          <a:prstGeom prst="rect">
+            <a:avLst/>
+          </a:prstGeom>
+          <a:noFill/>
+        </p:spPr>
+        <p:txBody>
+          <a:bodyPr wrap="none">
+            <a:spAutoFit/>
+          </a:bodyPr>
+          <a:lstStyle/>
+          <a:p>
+            <a:pPr algn="ctr"/>
+            <a:r>
+              <a:rPr sz="1400" b="0" i="0">
+                <a:solidFill>
+                  <a:srgbClr val="CCCCCC"/>
+                </a:solidFill>
+              </a:rPr>
+              <a:t>Low  ~115k</a:t>
+            </a:r>
+          </a:p>
+        </p:txBody>
+      </p:sp>
+      <p:sp>
+        <p:nvSpPr>
+          <p:cNvPr id="31" name="Rectangle 30"/>
+          <p:cNvSpPr/>
+          <p:nvPr/>
+        </p:nvSpPr>
+        <p:spPr>
+          <a:xfrm>
+            <a:off x="6126480" y="3749039"/>
+            <a:ext cx="1234439" cy="1005840"/>
+          </a:xfrm>
+          <a:prstGeom prst="rect">
+            <a:avLst/>
+          </a:prstGeom>
+          <a:solidFill>
+            <a:srgbClr val="16213E"/>
+          </a:solidFill>
+          <a:ln>
+            <a:noFill/>
+          </a:ln>
+        </p:spPr>
+        <p:style>
+          <a:lnRef idx="1">
+            <a:schemeClr val="accent1"/>
+          </a:lnRef>
+          <a:fillRef idx="3">
+            <a:schemeClr val="accent1"/>
+          </a:fillRef>
+          <a:effectRef idx="2">
+            <a:schemeClr val="accent1"/>
+          </a:effectRef>
+          <a:fontRef idx="minor">
+            <a:schemeClr val="lt1"/>
+          </a:fontRef>
+        </p:style>
+        <p:txBody>
+          <a:bodyPr rtlCol="0" anchor="ctr"/>
+          <a:lstStyle/>
+          <a:p>
+            <a:pPr algn="ctr"/>
+          </a:p>
+        </p:txBody>
+      </p:sp>
+      <p:sp>
+        <p:nvSpPr>
+          <p:cNvPr id="32" name="TextBox 31"/>
+          <p:cNvSpPr txBox="1"/>
+          <p:nvPr/>
+        </p:nvSpPr>
+        <p:spPr>
+          <a:xfrm>
+            <a:off x="6199632" y="4023359"/>
+            <a:ext cx="1115568" cy="502920"/>
+          </a:xfrm>
+          <a:prstGeom prst="rect">
+            <a:avLst/>
+          </a:prstGeom>
+          <a:noFill/>
+        </p:spPr>
+        <p:txBody>
+          <a:bodyPr wrap="none">
+            <a:spAutoFit/>
+          </a:bodyPr>
+          <a:lstStyle/>
+          <a:p>
+            <a:pPr algn="ctr"/>
+            <a:r>
+              <a:rPr sz="1400" b="0" i="0">
+                <a:solidFill>
+                  <a:srgbClr val="CCCCCC"/>
+                </a:solidFill>
+              </a:rPr>
+              <a:t>~148</a:t>
+            </a:r>
+          </a:p>
+        </p:txBody>
+      </p:sp>
+      <p:sp>
+        <p:nvSpPr>
+          <p:cNvPr id="33" name="Rectangle 32"/>
+          <p:cNvSpPr/>
+          <p:nvPr/>
+        </p:nvSpPr>
+        <p:spPr>
+          <a:xfrm>
+            <a:off x="7498079" y="3749039"/>
+            <a:ext cx="4434840" cy="1005840"/>
+          </a:xfrm>
+          <a:prstGeom prst="rect">
+            <a:avLst/>
+          </a:prstGeom>
+          <a:solidFill>
+            <a:srgbClr val="16213E"/>
+          </a:solidFill>
+          <a:ln>
+            <a:noFill/>
+          </a:ln>
+        </p:spPr>
+        <p:style>
+          <a:lnRef idx="1">
+            <a:schemeClr val="accent1"/>
+          </a:lnRef>
+          <a:fillRef idx="3">
+            <a:schemeClr val="accent1"/>
+          </a:fillRef>
+          <a:effectRef idx="2">
+            <a:schemeClr val="accent1"/>
+          </a:effectRef>
+          <a:fontRef idx="minor">
+            <a:schemeClr val="lt1"/>
+          </a:fontRef>
+        </p:style>
+        <p:txBody>
+          <a:bodyPr rtlCol="0" anchor="ctr"/>
+          <a:lstStyle/>
+          <a:p>
+            <a:pPr algn="ctr"/>
+          </a:p>
+        </p:txBody>
+      </p:sp>
+      <p:sp>
+        <p:nvSpPr>
+          <p:cNvPr id="34" name="TextBox 33"/>
+          <p:cNvSpPr txBox="1"/>
+          <p:nvPr/>
+        </p:nvSpPr>
+        <p:spPr>
+          <a:xfrm>
+            <a:off x="7571231" y="4023359"/>
+            <a:ext cx="4315968" cy="502920"/>
+          </a:xfrm>
+          <a:prstGeom prst="rect">
+            <a:avLst/>
+          </a:prstGeom>
+          <a:noFill/>
+        </p:spPr>
+        <p:txBody>
+          <a:bodyPr wrap="none">
+            <a:spAutoFit/>
+          </a:bodyPr>
+          <a:lstStyle/>
+          <a:p>
+            <a:pPr algn="ctr"/>
+            <a:r>
+              <a:rPr sz="1400" b="0" i="0">
+                <a:solidFill>
+                  <a:srgbClr val="CCCCCC"/>
+                </a:solidFill>
+              </a:rPr>
+              <a:t>Low-traction, struggling startups</a:t>
+            </a:r>
+          </a:p>
+        </p:txBody>
+      </p:sp>
+      <p:sp>
+        <p:nvSpPr>
+          <p:cNvPr id="35" name="Rectangle 34"/>
+          <p:cNvSpPr/>
+          <p:nvPr/>
+        </p:nvSpPr>
+        <p:spPr>
+          <a:xfrm>
+            <a:off x="274320" y="4846320"/>
+            <a:ext cx="1508760" cy="1005840"/>
+          </a:xfrm>
+          <a:prstGeom prst="rect">
+            <a:avLst/>
+          </a:prstGeom>
+          <a:solidFill>
+            <a:srgbClr val="16213E"/>
+          </a:solidFill>
+          <a:ln>
+            <a:noFill/>
+          </a:ln>
+        </p:spPr>
+        <p:style>
+          <a:lnRef idx="1">
+            <a:schemeClr val="accent1"/>
+          </a:lnRef>
+          <a:fillRef idx="3">
+            <a:schemeClr val="accent1"/>
+          </a:fillRef>
+          <a:effectRef idx="2">
+            <a:schemeClr val="accent1"/>
+          </a:effectRef>
+          <a:fontRef idx="minor">
+            <a:schemeClr val="lt1"/>
+          </a:fontRef>
+        </p:style>
+        <p:txBody>
+          <a:bodyPr rtlCol="0" anchor="ctr"/>
+          <a:lstStyle/>
+          <a:p>
+            <a:pPr algn="ctr"/>
+          </a:p>
+        </p:txBody>
+      </p:sp>
+      <p:sp>
+        <p:nvSpPr>
+          <p:cNvPr id="36" name="TextBox 35"/>
+          <p:cNvSpPr txBox="1"/>
+          <p:nvPr/>
+        </p:nvSpPr>
+        <p:spPr>
+          <a:xfrm>
+            <a:off x="347472" y="5120640"/>
+            <a:ext cx="1389888" cy="502920"/>
+          </a:xfrm>
+          <a:prstGeom prst="rect">
+            <a:avLst/>
+          </a:prstGeom>
+          <a:noFill/>
+        </p:spPr>
+        <p:txBody>
+          <a:bodyPr wrap="none">
+            <a:spAutoFit/>
+          </a:bodyPr>
+          <a:lstStyle/>
+          <a:p>
+            <a:pPr algn="ctr"/>
+            <a:r>
+              <a:rPr sz="1400" b="0" i="0">
+                <a:solidFill>
+                  <a:srgbClr val="3498DB"/>
+                </a:solidFill>
+              </a:rPr>
+              <a:t>2  🔵</a:t>
+            </a:r>
+          </a:p>
+        </p:txBody>
+      </p:sp>
+      <p:sp>
+        <p:nvSpPr>
+          <p:cNvPr id="37" name="Rectangle 36"/>
+          <p:cNvSpPr/>
+          <p:nvPr/>
+        </p:nvSpPr>
+        <p:spPr>
+          <a:xfrm>
+            <a:off x="1920240" y="4846320"/>
+            <a:ext cx="1965960" cy="1005840"/>
+          </a:xfrm>
+          <a:prstGeom prst="rect">
+            <a:avLst/>
+          </a:prstGeom>
+          <a:solidFill>
+            <a:srgbClr val="16213E"/>
+          </a:solidFill>
+          <a:ln>
+            <a:noFill/>
+          </a:ln>
+        </p:spPr>
+        <p:style>
+          <a:lnRef idx="1">
+            <a:schemeClr val="accent1"/>
+          </a:lnRef>
+          <a:fillRef idx="3">
+            <a:schemeClr val="accent1"/>
+          </a:fillRef>
+          <a:effectRef idx="2">
+            <a:schemeClr val="accent1"/>
+          </a:effectRef>
+          <a:fontRef idx="minor">
+            <a:schemeClr val="lt1"/>
+          </a:fontRef>
+        </p:style>
+        <p:txBody>
+          <a:bodyPr rtlCol="0" anchor="ctr"/>
+          <a:lstStyle/>
+          <a:p>
+            <a:pPr algn="ctr"/>
+          </a:p>
+        </p:txBody>
+      </p:sp>
+      <p:sp>
+        <p:nvSpPr>
+          <p:cNvPr id="38" name="TextBox 37"/>
+          <p:cNvSpPr txBox="1"/>
+          <p:nvPr/>
+        </p:nvSpPr>
+        <p:spPr>
+          <a:xfrm>
+            <a:off x="1993392" y="5120640"/>
+            <a:ext cx="1847088" cy="502920"/>
+          </a:xfrm>
+          <a:prstGeom prst="rect">
+            <a:avLst/>
+          </a:prstGeom>
+          <a:noFill/>
+        </p:spPr>
+        <p:txBody>
+          <a:bodyPr wrap="none">
+            <a:spAutoFit/>
+          </a:bodyPr>
+          <a:lstStyle/>
+          <a:p>
+            <a:pPr algn="ctr"/>
+            <a:r>
+              <a:rPr sz="1400" b="0" i="0">
+                <a:solidFill>
+                  <a:srgbClr val="CCCCCC"/>
+                </a:solidFill>
+              </a:rPr>
+              <a:t>Mid  ~850k</a:t>
+            </a:r>
+          </a:p>
+        </p:txBody>
+      </p:sp>
+      <p:sp>
+        <p:nvSpPr>
+          <p:cNvPr id="39" name="Rectangle 38"/>
+          <p:cNvSpPr/>
+          <p:nvPr/>
+        </p:nvSpPr>
+        <p:spPr>
+          <a:xfrm>
+            <a:off x="4023360" y="4846320"/>
+            <a:ext cx="1965960" cy="1005840"/>
+          </a:xfrm>
+          <a:prstGeom prst="rect">
+            <a:avLst/>
+          </a:prstGeom>
+          <a:solidFill>
+            <a:srgbClr val="16213E"/>
+          </a:solidFill>
+          <a:ln>
+            <a:noFill/>
+          </a:ln>
+        </p:spPr>
+        <p:style>
+          <a:lnRef idx="1">
+            <a:schemeClr val="accent1"/>
+          </a:lnRef>
+          <a:fillRef idx="3">
+            <a:schemeClr val="accent1"/>
+          </a:fillRef>
+          <a:effectRef idx="2">
+            <a:schemeClr val="accent1"/>
+          </a:effectRef>
+          <a:fontRef idx="minor">
+            <a:schemeClr val="lt1"/>
+          </a:fontRef>
+        </p:style>
+        <p:txBody>
+          <a:bodyPr rtlCol="0" anchor="ctr"/>
+          <a:lstStyle/>
+          <a:p>
+            <a:pPr algn="ctr"/>
+          </a:p>
+        </p:txBody>
+      </p:sp>
+      <p:sp>
+        <p:nvSpPr>
+          <p:cNvPr id="40" name="TextBox 39"/>
+          <p:cNvSpPr txBox="1"/>
+          <p:nvPr/>
+        </p:nvSpPr>
+        <p:spPr>
+          <a:xfrm>
+            <a:off x="4096512" y="5120640"/>
+            <a:ext cx="1847088" cy="502920"/>
+          </a:xfrm>
+          <a:prstGeom prst="rect">
+            <a:avLst/>
+          </a:prstGeom>
+          <a:noFill/>
+        </p:spPr>
+        <p:txBody>
+          <a:bodyPr wrap="none">
+            <a:spAutoFit/>
+          </a:bodyPr>
+          <a:lstStyle/>
+          <a:p>
+            <a:pPr algn="ctr"/>
+            <a:r>
+              <a:rPr sz="1400" b="0" i="0">
+                <a:solidFill>
+                  <a:srgbClr val="CCCCCC"/>
+                </a:solidFill>
+              </a:rPr>
+              <a:t>Mid  ~305k</a:t>
+            </a:r>
+          </a:p>
+        </p:txBody>
+      </p:sp>
+      <p:sp>
+        <p:nvSpPr>
+          <p:cNvPr id="41" name="Rectangle 40"/>
+          <p:cNvSpPr/>
+          <p:nvPr/>
+        </p:nvSpPr>
+        <p:spPr>
+          <a:xfrm>
+            <a:off x="6126480" y="4846320"/>
+            <a:ext cx="1234439" cy="1005840"/>
+          </a:xfrm>
+          <a:prstGeom prst="rect">
+            <a:avLst/>
+          </a:prstGeom>
+          <a:solidFill>
+            <a:srgbClr val="16213E"/>
+          </a:solidFill>
+          <a:ln>
+            <a:noFill/>
+          </a:ln>
+        </p:spPr>
+        <p:style>
+          <a:lnRef idx="1">
+            <a:schemeClr val="accent1"/>
+          </a:lnRef>
+          <a:fillRef idx="3">
+            <a:schemeClr val="accent1"/>
+          </a:fillRef>
+          <a:effectRef idx="2">
+            <a:schemeClr val="accent1"/>
+          </a:effectRef>
+          <a:fontRef idx="minor">
+            <a:schemeClr val="lt1"/>
+          </a:fontRef>
+        </p:style>
+        <p:txBody>
+          <a:bodyPr rtlCol="0" anchor="ctr"/>
+          <a:lstStyle/>
+          <a:p>
+            <a:pPr algn="ctr"/>
+          </a:p>
+        </p:txBody>
+      </p:sp>
+      <p:sp>
+        <p:nvSpPr>
+          <p:cNvPr id="42" name="TextBox 41"/>
+          <p:cNvSpPr txBox="1"/>
+          <p:nvPr/>
+        </p:nvSpPr>
+        <p:spPr>
+          <a:xfrm>
+            <a:off x="6199632" y="5120640"/>
+            <a:ext cx="1115568" cy="502920"/>
+          </a:xfrm>
+          <a:prstGeom prst="rect">
+            <a:avLst/>
+          </a:prstGeom>
+          <a:noFill/>
+        </p:spPr>
+        <p:txBody>
+          <a:bodyPr wrap="none">
+            <a:spAutoFit/>
+          </a:bodyPr>
+          <a:lstStyle/>
+          <a:p>
+            <a:pPr algn="ctr"/>
+            <a:r>
+              <a:rPr sz="1400" b="0" i="0">
+                <a:solidFill>
+                  <a:srgbClr val="CCCCCC"/>
+                </a:solidFill>
+              </a:rPr>
+              <a:t>~148</a:t>
+            </a:r>
+          </a:p>
+        </p:txBody>
+      </p:sp>
+      <p:sp>
+        <p:nvSpPr>
+          <p:cNvPr id="43" name="Rectangle 42"/>
+          <p:cNvSpPr/>
+          <p:nvPr/>
+        </p:nvSpPr>
+        <p:spPr>
+          <a:xfrm>
+            <a:off x="7498079" y="4846320"/>
+            <a:ext cx="4434840" cy="1005840"/>
+          </a:xfrm>
+          <a:prstGeom prst="rect">
+            <a:avLst/>
+          </a:prstGeom>
+          <a:solidFill>
+            <a:srgbClr val="16213E"/>
+          </a:solidFill>
+          <a:ln>
+            <a:noFill/>
+          </a:ln>
+        </p:spPr>
+        <p:style>
+          <a:lnRef idx="1">
+            <a:schemeClr val="accent1"/>
+          </a:lnRef>
+          <a:fillRef idx="3">
+            <a:schemeClr val="accent1"/>
+          </a:fillRef>
+          <a:effectRef idx="2">
+            <a:schemeClr val="accent1"/>
+          </a:effectRef>
+          <a:fontRef idx="minor">
+            <a:schemeClr val="lt1"/>
+          </a:fontRef>
+        </p:style>
+        <p:txBody>
+          <a:bodyPr rtlCol="0" anchor="ctr"/>
+          <a:lstStyle/>
+          <a:p>
+            <a:pPr algn="ctr"/>
+          </a:p>
+        </p:txBody>
+      </p:sp>
+      <p:sp>
+        <p:nvSpPr>
+          <p:cNvPr id="44" name="TextBox 43"/>
+          <p:cNvSpPr txBox="1"/>
+          <p:nvPr/>
+        </p:nvSpPr>
+        <p:spPr>
+          <a:xfrm>
+            <a:off x="7571231" y="5120640"/>
+            <a:ext cx="4315968" cy="502920"/>
+          </a:xfrm>
+          <a:prstGeom prst="rect">
+            <a:avLst/>
+          </a:prstGeom>
+          <a:noFill/>
+        </p:spPr>
+        <p:txBody>
+          <a:bodyPr wrap="none">
+            <a:spAutoFit/>
+          </a:bodyPr>
+          <a:lstStyle/>
+          <a:p>
+            <a:pPr algn="ctr"/>
+            <a:r>
+              <a:rPr sz="1400" b="0" i="0">
+                <a:solidFill>
+                  <a:srgbClr val="CCCCCC"/>
+                </a:solidFill>
+              </a:rPr>
+              <a:t>Mid-revenue, early-stage startups</a:t>
+            </a:r>
+          </a:p>
+        </p:txBody>
+      </p:sp>
+      <p:sp>
+        <p:nvSpPr>
+          <p:cNvPr id="45" name="Rectangle 44"/>
+          <p:cNvSpPr/>
+          <p:nvPr/>
+        </p:nvSpPr>
+        <p:spPr>
+          <a:xfrm>
+            <a:off x="274320" y="5961888"/>
+            <a:ext cx="11612880" cy="685800"/>
+          </a:xfrm>
+          <a:prstGeom prst="rect">
+            <a:avLst/>
+          </a:prstGeom>
+          <a:solidFill>
+            <a:srgbClr val="16213E"/>
+          </a:solidFill>
+          <a:ln>
+            <a:noFill/>
+          </a:ln>
+        </p:spPr>
+        <p:style>
+          <a:lnRef idx="1">
+            <a:schemeClr val="accent1"/>
+          </a:lnRef>
+          <a:fillRef idx="3">
+            <a:schemeClr val="accent1"/>
+          </a:fillRef>
+          <a:effectRef idx="2">
+            <a:schemeClr val="accent1"/>
+          </a:effectRef>
+          <a:fontRef idx="minor">
+            <a:schemeClr val="lt1"/>
+          </a:fontRef>
+        </p:style>
+        <p:txBody>
+          <a:bodyPr rtlCol="0" anchor="ctr"/>
+          <a:lstStyle/>
+          <a:p>
+            <a:pPr algn="ctr"/>
+          </a:p>
+        </p:txBody>
+      </p:sp>
+      <p:sp>
+        <p:nvSpPr>
+          <p:cNvPr id="46" name="TextBox 45"/>
+          <p:cNvSpPr txBox="1"/>
+          <p:nvPr/>
+        </p:nvSpPr>
+        <p:spPr>
+          <a:xfrm>
+            <a:off x="457200" y="6007608"/>
+            <a:ext cx="11247120" cy="384048"/>
+          </a:xfrm>
+          <a:prstGeom prst="rect">
+            <a:avLst/>
+          </a:prstGeom>
+          <a:noFill/>
+        </p:spPr>
+        <p:txBody>
+          <a:bodyPr wrap="none">
+            <a:spAutoFit/>
+          </a:bodyPr>
+          <a:lstStyle/>
+          <a:p>
+            <a:pPr algn="ctr"/>
+            <a:r>
+              <a:rPr sz="1300" b="1" i="0">
+                <a:solidFill>
+                  <a:srgbClr val="F39C12"/>
+                </a:solidFill>
+              </a:rPr>
+              <a:t>All clusters have similar team_size &amp; founder_experience → revenue &amp; traction are the true discriminators</a:t>
+            </a:r>
+          </a:p>
+        </p:txBody>
+      </p:sp>
+    </p:spTree>
+  </p:cSld>
+  <p:clrMapOvr>
+    <a:masterClrMapping/>
+  </p:clrMapOvr>
+</p:sld>
+</file>
+
+<file path=ppt/slides/slide12.xml><?xml version="1.0" encoding="utf-8"?>
+<p:sld xmlns:a="http://schemas.openxmlformats.org/drawingml/2006/main" xmlns:p="http://schemas.openxmlformats.org/presentationml/2006/main" xmlns:r="http://schemas.openxmlformats.org/officeDocument/2006/relationships">
+  <p:cSld>
+    <p:bg>
+      <p:bgPr>
+        <a:solidFill>
+          <a:srgbClr val="1A1A2E"/>
+        </a:solidFill>
+        <a:effectLst/>
+      </p:bgPr>
+    </p:bg>
+    <p:spTree>
+      <p:nvGrpSpPr>
+        <p:cNvPr id="1" name=""/>
+        <p:cNvGrpSpPr/>
+        <p:nvPr/>
+      </p:nvGrpSpPr>
+      <p:grpSpPr/>
+      <p:sp>
+        <p:nvSpPr>
+          <p:cNvPr id="2" name="Rectangle 1"/>
+          <p:cNvSpPr/>
+          <p:nvPr/>
+        </p:nvSpPr>
+        <p:spPr>
+          <a:xfrm>
+            <a:off x="0" y="0"/>
+            <a:ext cx="12188952" cy="960120"/>
+          </a:xfrm>
+          <a:prstGeom prst="rect">
+            <a:avLst/>
+          </a:prstGeom>
+          <a:solidFill>
+            <a:srgbClr val="0F3C78"/>
+          </a:solidFill>
+          <a:ln>
+            <a:noFill/>
+          </a:ln>
+        </p:spPr>
+        <p:style>
+          <a:lnRef idx="1">
+            <a:schemeClr val="accent1"/>
+          </a:lnRef>
+          <a:fillRef idx="3">
+            <a:schemeClr val="accent1"/>
+          </a:fillRef>
+          <a:effectRef idx="2">
+            <a:schemeClr val="accent1"/>
+          </a:effectRef>
+          <a:fontRef idx="minor">
+            <a:schemeClr val="lt1"/>
+          </a:fontRef>
+        </p:style>
+        <p:txBody>
+          <a:bodyPr rtlCol="0" anchor="ctr"/>
+          <a:lstStyle/>
+          <a:p>
+            <a:pPr algn="ctr"/>
+          </a:p>
+        </p:txBody>
+      </p:sp>
+      <p:sp>
+        <p:nvSpPr>
+          <p:cNvPr id="3" name="TextBox 2"/>
+          <p:cNvSpPr txBox="1"/>
+          <p:nvPr/>
+        </p:nvSpPr>
+        <p:spPr>
+          <a:xfrm>
+            <a:off x="274320" y="91440"/>
+            <a:ext cx="11612880" cy="804672"/>
+          </a:xfrm>
+          <a:prstGeom prst="rect">
+            <a:avLst/>
+          </a:prstGeom>
+          <a:noFill/>
+        </p:spPr>
+        <p:txBody>
+          <a:bodyPr wrap="none">
+            <a:spAutoFit/>
+          </a:bodyPr>
+          <a:lstStyle/>
+          <a:p>
+            <a:pPr algn="l"/>
+            <a:r>
+              <a:rPr sz="2700" b="1" i="0">
+                <a:solidFill>
+                  <a:srgbClr val="FFFFFF"/>
+                </a:solidFill>
+              </a:rPr>
+              <a:t>Validation — K-Means vs Hierarchical Clustering</a:t>
             </a:r>
           </a:p>
         </p:txBody>
@@ -3754,8 +5467,212 @@
         </p:nvSpPr>
         <p:spPr>
           <a:xfrm>
-            <a:off x="274320" y="1097280"/>
-            <a:ext cx="54864" cy="5394960"/>
+            <a:off x="822960" y="1024128"/>
+            <a:ext cx="10515600" cy="5074920"/>
+          </a:xfrm>
+          <a:prstGeom prst="rect">
+            <a:avLst/>
+          </a:prstGeom>
+          <a:solidFill>
+            <a:srgbClr val="16213E"/>
+          </a:solidFill>
+          <a:ln>
+            <a:noFill/>
+          </a:ln>
+        </p:spPr>
+        <p:style>
+          <a:lnRef idx="1">
+            <a:schemeClr val="accent1"/>
+          </a:lnRef>
+          <a:fillRef idx="3">
+            <a:schemeClr val="accent1"/>
+          </a:fillRef>
+          <a:effectRef idx="2">
+            <a:schemeClr val="accent1"/>
+          </a:effectRef>
+          <a:fontRef idx="minor">
+            <a:schemeClr val="lt1"/>
+          </a:fontRef>
+        </p:style>
+        <p:txBody>
+          <a:bodyPr rtlCol="0" anchor="ctr"/>
+          <a:lstStyle/>
+          <a:p>
+            <a:pPr algn="ctr"/>
+          </a:p>
+        </p:txBody>
+      </p:sp>
+      <p:sp>
+        <p:nvSpPr>
+          <p:cNvPr id="5" name="TextBox 4"/>
+          <p:cNvSpPr txBox="1"/>
+          <p:nvPr/>
+        </p:nvSpPr>
+        <p:spPr>
+          <a:xfrm>
+            <a:off x="960120" y="1069848"/>
+            <a:ext cx="10241280" cy="384048"/>
+          </a:xfrm>
+          <a:prstGeom prst="rect">
+            <a:avLst/>
+          </a:prstGeom>
+          <a:noFill/>
+        </p:spPr>
+        <p:txBody>
+          <a:bodyPr wrap="none">
+            <a:spAutoFit/>
+          </a:bodyPr>
+          <a:lstStyle/>
+          <a:p>
+            <a:pPr algn="ctr"/>
+            <a:r>
+              <a:rPr sz="1400" b="1" i="0">
+                <a:solidFill>
+                  <a:srgbClr val="FFFFFF"/>
+                </a:solidFill>
+              </a:rPr>
+              <a:t>Same 3 groups found independently by both methods → structure is real</a:t>
+            </a:r>
+          </a:p>
+        </p:txBody>
+      </p:sp>
+      <p:pic>
+        <p:nvPicPr>
+          <p:cNvPr id="6" name="Picture 5" descr="kmeans_vs_hc.png"/>
+          <p:cNvPicPr>
+            <a:picLocks noChangeAspect="1"/>
+          </p:cNvPicPr>
+          <p:nvPr/>
+        </p:nvPicPr>
+        <p:blipFill>
+          <a:blip r:embed="rId2"/>
+          <a:stretch>
+            <a:fillRect/>
+          </a:stretch>
+        </p:blipFill>
+        <p:spPr>
+          <a:xfrm>
+            <a:off x="841248" y="1481328"/>
+            <a:ext cx="10515600" cy="4481811"/>
+          </a:xfrm>
+          <a:prstGeom prst="rect">
+            <a:avLst/>
+          </a:prstGeom>
+        </p:spPr>
+      </p:pic>
+      <p:sp>
+        <p:nvSpPr>
+          <p:cNvPr id="7" name="Rectangle 6"/>
+          <p:cNvSpPr/>
+          <p:nvPr/>
+        </p:nvSpPr>
+        <p:spPr>
+          <a:xfrm>
+            <a:off x="822960" y="5989320"/>
+            <a:ext cx="10515600" cy="658368"/>
+          </a:xfrm>
+          <a:prstGeom prst="rect">
+            <a:avLst/>
+          </a:prstGeom>
+          <a:solidFill>
+            <a:srgbClr val="16213E"/>
+          </a:solidFill>
+          <a:ln>
+            <a:noFill/>
+          </a:ln>
+        </p:spPr>
+        <p:style>
+          <a:lnRef idx="1">
+            <a:schemeClr val="accent1"/>
+          </a:lnRef>
+          <a:fillRef idx="3">
+            <a:schemeClr val="accent1"/>
+          </a:fillRef>
+          <a:effectRef idx="2">
+            <a:schemeClr val="accent1"/>
+          </a:effectRef>
+          <a:fontRef idx="minor">
+            <a:schemeClr val="lt1"/>
+          </a:fontRef>
+        </p:style>
+        <p:txBody>
+          <a:bodyPr rtlCol="0" anchor="ctr"/>
+          <a:lstStyle/>
+          <a:p>
+            <a:pPr algn="ctr"/>
+          </a:p>
+        </p:txBody>
+      </p:sp>
+      <p:sp>
+        <p:nvSpPr>
+          <p:cNvPr id="8" name="TextBox 7"/>
+          <p:cNvSpPr txBox="1"/>
+          <p:nvPr/>
+        </p:nvSpPr>
+        <p:spPr>
+          <a:xfrm>
+            <a:off x="960120" y="6035040"/>
+            <a:ext cx="10241280" cy="384048"/>
+          </a:xfrm>
+          <a:prstGeom prst="rect">
+            <a:avLst/>
+          </a:prstGeom>
+          <a:noFill/>
+        </p:spPr>
+        <p:txBody>
+          <a:bodyPr wrap="none">
+            <a:spAutoFit/>
+          </a:bodyPr>
+          <a:lstStyle/>
+          <a:p>
+            <a:pPr algn="ctr"/>
+            <a:r>
+              <a:rPr sz="1300" b="0" i="1">
+                <a:solidFill>
+                  <a:srgbClr val="CCCCCC"/>
+                </a:solidFill>
+              </a:rPr>
+              <a:t>K-Means (left): full 100k rows — provides centroids for profiling     Hierarchical/Ward (right): 5k subsample — independent cross-check</a:t>
+            </a:r>
+          </a:p>
+        </p:txBody>
+      </p:sp>
+    </p:spTree>
+  </p:cSld>
+  <p:clrMapOvr>
+    <a:masterClrMapping/>
+  </p:clrMapOvr>
+</p:sld>
+</file>
+
+<file path=ppt/slides/slide13.xml><?xml version="1.0" encoding="utf-8"?>
+<p:sld xmlns:a="http://schemas.openxmlformats.org/drawingml/2006/main" xmlns:p="http://schemas.openxmlformats.org/presentationml/2006/main" xmlns:r="http://schemas.openxmlformats.org/officeDocument/2006/relationships">
+  <p:cSld>
+    <p:bg>
+      <p:bgPr>
+        <a:solidFill>
+          <a:srgbClr val="1A1A2E"/>
+        </a:solidFill>
+        <a:effectLst/>
+      </p:bgPr>
+    </p:bg>
+    <p:spTree>
+      <p:nvGrpSpPr>
+        <p:cNvPr id="1" name=""/>
+        <p:cNvGrpSpPr/>
+        <p:nvPr/>
+      </p:nvGrpSpPr>
+      <p:grpSpPr/>
+      <p:sp>
+        <p:nvSpPr>
+          <p:cNvPr id="2" name="Rectangle 1"/>
+          <p:cNvSpPr/>
+          <p:nvPr/>
+        </p:nvSpPr>
+        <p:spPr>
+          <a:xfrm>
+            <a:off x="0" y="0"/>
+            <a:ext cx="12188952" cy="960120"/>
           </a:xfrm>
           <a:prstGeom prst="rect">
             <a:avLst/>
@@ -3791,14 +5708,91 @@
       </p:sp>
       <p:sp>
         <p:nvSpPr>
+          <p:cNvPr id="3" name="TextBox 2"/>
+          <p:cNvSpPr txBox="1"/>
+          <p:nvPr/>
+        </p:nvSpPr>
+        <p:spPr>
+          <a:xfrm>
+            <a:off x="274320" y="91440"/>
+            <a:ext cx="11612880" cy="804672"/>
+          </a:xfrm>
+          <a:prstGeom prst="rect">
+            <a:avLst/>
+          </a:prstGeom>
+          <a:noFill/>
+        </p:spPr>
+        <p:txBody>
+          <a:bodyPr wrap="none">
+            <a:spAutoFit/>
+          </a:bodyPr>
+          <a:lstStyle/>
+          <a:p>
+            <a:pPr algn="l"/>
+            <a:r>
+              <a:rPr sz="2700" b="1" i="0">
+                <a:solidFill>
+                  <a:srgbClr val="FFFFFF"/>
+                </a:solidFill>
+              </a:rPr>
+              <a:t>Conclusion</a:t>
+            </a:r>
+          </a:p>
+        </p:txBody>
+      </p:sp>
+      <p:sp>
+        <p:nvSpPr>
+          <p:cNvPr id="4" name="Rectangle 3"/>
+          <p:cNvSpPr/>
+          <p:nvPr/>
+        </p:nvSpPr>
+        <p:spPr>
+          <a:xfrm>
+            <a:off x="274320" y="1024128"/>
+            <a:ext cx="54864" cy="5394960"/>
+          </a:xfrm>
+          <a:prstGeom prst="rect">
+            <a:avLst/>
+          </a:prstGeom>
+          <a:solidFill>
+            <a:srgbClr val="2ECC71"/>
+          </a:solidFill>
+          <a:ln>
+            <a:noFill/>
+          </a:ln>
+        </p:spPr>
+        <p:style>
+          <a:lnRef idx="1">
+            <a:schemeClr val="accent1"/>
+          </a:lnRef>
+          <a:fillRef idx="3">
+            <a:schemeClr val="accent1"/>
+          </a:fillRef>
+          <a:effectRef idx="2">
+            <a:schemeClr val="accent1"/>
+          </a:effectRef>
+          <a:fontRef idx="minor">
+            <a:schemeClr val="lt1"/>
+          </a:fontRef>
+        </p:style>
+        <p:txBody>
+          <a:bodyPr rtlCol="0" anchor="ctr"/>
+          <a:lstStyle/>
+          <a:p>
+            <a:pPr algn="ctr"/>
+          </a:p>
+        </p:txBody>
+      </p:sp>
+      <p:sp>
+        <p:nvSpPr>
           <p:cNvPr id="5" name="TextBox 4"/>
           <p:cNvSpPr txBox="1"/>
           <p:nvPr/>
         </p:nvSpPr>
         <p:spPr>
           <a:xfrm>
-            <a:off x="411480" y="1097280"/>
-            <a:ext cx="5486400" cy="457200"/>
+            <a:off x="411480" y="1078992"/>
+            <a:ext cx="5394960" cy="420624"/>
           </a:xfrm>
           <a:prstGeom prst="rect">
             <a:avLst/>
@@ -3813,7 +5807,7 @@
           <a:p>
             <a:pPr algn="l"/>
             <a:r>
-              <a:rPr sz="1700" b="0" i="0">
+              <a:rPr sz="1800" b="0" i="0">
                 <a:solidFill>
                   <a:srgbClr val="FFFFFF"/>
                 </a:solidFill>
@@ -3831,8 +5825,8 @@
         </p:nvSpPr>
         <p:spPr>
           <a:xfrm>
-            <a:off x="411480" y="1572768"/>
-            <a:ext cx="5486400" cy="457200"/>
+            <a:off x="411480" y="1545336"/>
+            <a:ext cx="5394960" cy="420624"/>
           </a:xfrm>
           <a:prstGeom prst="rect">
             <a:avLst/>
@@ -3865,8 +5859,8 @@
         </p:nvSpPr>
         <p:spPr>
           <a:xfrm>
-            <a:off x="411480" y="2157984"/>
-            <a:ext cx="5486400" cy="457200"/>
+            <a:off x="411480" y="2130552"/>
+            <a:ext cx="5394960" cy="420624"/>
           </a:xfrm>
           <a:prstGeom prst="rect">
             <a:avLst/>
@@ -3881,12 +5875,12 @@
           <a:p>
             <a:pPr algn="l"/>
             <a:r>
-              <a:rPr sz="1700" b="0" i="0">
+              <a:rPr sz="1800" b="0" i="0">
                 <a:solidFill>
                   <a:srgbClr val="FFFFFF"/>
                 </a:solidFill>
               </a:rPr>
-              <a:t>✅  Unsupervised:  3 coherent archetypes</a:t>
+              <a:t>✅  Unsupervised:  3 coherent startup archetypes</a:t>
             </a:r>
           </a:p>
         </p:txBody>
@@ -3899,8 +5893,8 @@
         </p:nvSpPr>
         <p:spPr>
           <a:xfrm>
-            <a:off x="411480" y="2633472"/>
-            <a:ext cx="5486400" cy="457200"/>
+            <a:off x="411480" y="2596896"/>
+            <a:ext cx="5394960" cy="420624"/>
           </a:xfrm>
           <a:prstGeom prst="rect">
             <a:avLst/>
@@ -3920,7 +5914,7 @@
                   <a:srgbClr val="CCCCCC"/>
                 </a:solidFill>
               </a:rPr>
-              <a:t>    · Confirmed by both K-Means and Ward clustering</a:t>
+              <a:t>    · Confirmed by K-Means &amp; Ward independently</a:t>
             </a:r>
           </a:p>
         </p:txBody>
@@ -3933,8 +5927,8 @@
         </p:nvSpPr>
         <p:spPr>
           <a:xfrm>
-            <a:off x="411480" y="3218688"/>
-            <a:ext cx="5486400" cy="457200"/>
+            <a:off x="411480" y="3182112"/>
+            <a:ext cx="5394960" cy="420624"/>
           </a:xfrm>
           <a:prstGeom prst="rect">
             <a:avLst/>
@@ -3949,7 +5943,7 @@
           <a:p>
             <a:pPr algn="l"/>
             <a:r>
-              <a:rPr sz="1700" b="0" i="0">
+              <a:rPr sz="1800" b="0" i="0">
                 <a:solidFill>
                   <a:srgbClr val="FFFFFF"/>
                 </a:solidFill>
@@ -3967,8 +5961,8 @@
         </p:nvSpPr>
         <p:spPr>
           <a:xfrm>
-            <a:off x="411480" y="3694176"/>
-            <a:ext cx="5486400" cy="457200"/>
+            <a:off x="411480" y="3648456"/>
+            <a:ext cx="5394960" cy="420624"/>
           </a:xfrm>
           <a:prstGeom prst="rect">
             <a:avLst/>
@@ -4001,8 +5995,8 @@
         </p:nvSpPr>
         <p:spPr>
           <a:xfrm>
-            <a:off x="411480" y="4096512"/>
-            <a:ext cx="5486400" cy="457200"/>
+            <a:off x="411480" y="4233672"/>
+            <a:ext cx="5394960" cy="420624"/>
           </a:xfrm>
           <a:prstGeom prst="rect">
             <a:avLst/>
@@ -4017,94 +6011,60 @@
           <a:p>
             <a:pPr algn="l"/>
             <a:r>
+              <a:rPr sz="1800" b="0" i="0">
+                <a:solidFill>
+                  <a:srgbClr val="FFFFFF"/>
+                </a:solidFill>
+              </a:rPr>
+              <a:t>🔭  Extensions:</a:t>
+            </a:r>
+          </a:p>
+        </p:txBody>
+      </p:sp>
+      <p:sp>
+        <p:nvSpPr>
+          <p:cNvPr id="12" name="TextBox 11"/>
+          <p:cNvSpPr txBox="1"/>
+          <p:nvPr/>
+        </p:nvSpPr>
+        <p:spPr>
+          <a:xfrm>
+            <a:off x="411480" y="4700016"/>
+            <a:ext cx="5394960" cy="420624"/>
+          </a:xfrm>
+          <a:prstGeom prst="rect">
+            <a:avLst/>
+          </a:prstGeom>
+          <a:noFill/>
+        </p:spPr>
+        <p:txBody>
+          <a:bodyPr wrap="none">
+            <a:spAutoFit/>
+          </a:bodyPr>
+          <a:lstStyle/>
+          <a:p>
+            <a:pPr algn="l"/>
+            <a:r>
               <a:rPr sz="1500" b="0" i="1">
                 <a:solidFill>
                   <a:srgbClr val="CCCCCC"/>
                 </a:solidFill>
               </a:rPr>
-              <a:t>    · Only revenue &amp; traction drive results</a:t>
-            </a:r>
-          </a:p>
-        </p:txBody>
-      </p:sp>
-      <p:sp>
-        <p:nvSpPr>
-          <p:cNvPr id="12" name="TextBox 11"/>
-          <p:cNvSpPr txBox="1"/>
-          <p:nvPr/>
-        </p:nvSpPr>
-        <p:spPr>
-          <a:xfrm>
-            <a:off x="411480" y="4681728"/>
-            <a:ext cx="5486400" cy="457200"/>
-          </a:xfrm>
-          <a:prstGeom prst="rect">
-            <a:avLst/>
-          </a:prstGeom>
-          <a:noFill/>
-        </p:spPr>
-        <p:txBody>
-          <a:bodyPr wrap="none">
-            <a:spAutoFit/>
-          </a:bodyPr>
-          <a:lstStyle/>
-          <a:p>
-            <a:pPr algn="l"/>
-            <a:r>
-              <a:rPr sz="1700" b="0" i="0">
-                <a:solidFill>
-                  <a:srgbClr val="FFFFFF"/>
-                </a:solidFill>
-              </a:rPr>
-              <a:t>🔭  Extensions possible:</a:t>
-            </a:r>
-          </a:p>
-        </p:txBody>
-      </p:sp>
-      <p:sp>
-        <p:nvSpPr>
-          <p:cNvPr id="13" name="TextBox 12"/>
-          <p:cNvSpPr txBox="1"/>
-          <p:nvPr/>
-        </p:nvSpPr>
-        <p:spPr>
-          <a:xfrm>
-            <a:off x="411480" y="5157216"/>
-            <a:ext cx="5486400" cy="457200"/>
-          </a:xfrm>
-          <a:prstGeom prst="rect">
-            <a:avLst/>
-          </a:prstGeom>
-          <a:noFill/>
-        </p:spPr>
-        <p:txBody>
-          <a:bodyPr wrap="none">
-            <a:spAutoFit/>
-          </a:bodyPr>
-          <a:lstStyle/>
-          <a:p>
-            <a:pPr algn="l"/>
-            <a:r>
-              <a:rPr sz="1500" b="0" i="1">
-                <a:solidFill>
-                  <a:srgbClr val="CCCCCC"/>
-                </a:solidFill>
-              </a:rPr>
-              <a:t>    · Random Forest, XGBoost  ·  UMAP visualisation</a:t>
-            </a:r>
-          </a:p>
-        </p:txBody>
-      </p:sp>
-      <p:sp>
-        <p:nvSpPr>
-          <p:cNvPr id="14" name="Rectangle 13"/>
+              <a:t>    · Random Forest, XGBoost  ·  UMAP</a:t>
+            </a:r>
+          </a:p>
+        </p:txBody>
+      </p:sp>
+      <p:sp>
+        <p:nvSpPr>
+          <p:cNvPr id="13" name="Rectangle 12"/>
           <p:cNvSpPr/>
           <p:nvPr/>
         </p:nvSpPr>
         <p:spPr>
           <a:xfrm>
-            <a:off x="6400800" y="1097280"/>
-            <a:ext cx="5394960" cy="5394960"/>
+            <a:off x="6400800" y="1024128"/>
+            <a:ext cx="5440680" cy="5422392"/>
           </a:xfrm>
           <a:prstGeom prst="rect">
             <a:avLst/>
@@ -4140,7 +6100,7 @@
       </p:sp>
       <p:sp>
         <p:nvSpPr>
-          <p:cNvPr id="15" name="TextBox 14"/>
+          <p:cNvPr id="14" name="TextBox 13"/>
           <p:cNvSpPr txBox="1"/>
           <p:nvPr/>
         </p:nvSpPr>
@@ -4174,7 +6134,7 @@
       </p:sp>
       <p:sp>
         <p:nvSpPr>
-          <p:cNvPr id="16" name="TextBox 15"/>
+          <p:cNvPr id="15" name="TextBox 14"/>
           <p:cNvSpPr txBox="1"/>
           <p:nvPr/>
         </p:nvSpPr>
@@ -4196,7 +6156,7 @@
           <a:p>
             <a:pPr algn="ctr"/>
             <a:r>
-              <a:rPr sz="2800" b="1" i="0">
+              <a:rPr sz="2600" b="1" i="0">
                 <a:solidFill>
                   <a:srgbClr val="2ECC71"/>
                 </a:solidFill>
@@ -4210,35 +6170,35 @@
       </p:sp>
       <p:sp>
         <p:nvSpPr>
-          <p:cNvPr id="17" name="TextBox 16"/>
+          <p:cNvPr id="16" name="TextBox 15"/>
           <p:cNvSpPr txBox="1"/>
           <p:nvPr/>
         </p:nvSpPr>
         <p:spPr>
           <a:xfrm>
             <a:off x="6583680" y="3383280"/>
-            <a:ext cx="5029200" cy="1371600"/>
-          </a:xfrm>
-          <a:prstGeom prst="rect">
-            <a:avLst/>
-          </a:prstGeom>
-          <a:noFill/>
-        </p:spPr>
-        <p:txBody>
-          <a:bodyPr wrap="none">
-            <a:spAutoFit/>
-          </a:bodyPr>
-          <a:lstStyle/>
-          <a:p>
-            <a:pPr algn="ctr"/>
-            <a:r>
-              <a:rPr sz="1700" b="0" i="1">
+            <a:ext cx="5029200" cy="1280160"/>
+          </a:xfrm>
+          <a:prstGeom prst="rect">
+            <a:avLst/>
+          </a:prstGeom>
+          <a:noFill/>
+        </p:spPr>
+        <p:txBody>
+          <a:bodyPr wrap="none">
+            <a:spAutoFit/>
+          </a:bodyPr>
+          <a:lstStyle/>
+          <a:p>
+            <a:pPr algn="ctr"/>
+            <a:r>
+              <a:rPr sz="1600" b="0" i="1">
                 <a:solidFill>
                   <a:srgbClr val="CCCCCC"/>
                 </a:solidFill>
               </a:rPr>
-              <a:t>are the only two features
-that predict startup outcome
+              <a:t>are the only 2 features that
+predict startup outcome
 and define cluster structure</a:t>
             </a:r>
           </a:p>
@@ -4246,14 +6206,14 @@
       </p:sp>
       <p:sp>
         <p:nvSpPr>
-          <p:cNvPr id="18" name="Rectangle 17"/>
+          <p:cNvPr id="17" name="Rectangle 16"/>
           <p:cNvSpPr/>
           <p:nvPr/>
         </p:nvSpPr>
         <p:spPr>
           <a:xfrm>
-            <a:off x="6583680" y="4846320"/>
-            <a:ext cx="5029200" cy="1371600"/>
+            <a:off x="6583680" y="4800600"/>
+            <a:ext cx="5029200" cy="1508760"/>
           </a:xfrm>
           <a:prstGeom prst="rect">
             <a:avLst/>
@@ -4289,14 +6249,14 @@
       </p:sp>
       <p:sp>
         <p:nvSpPr>
-          <p:cNvPr id="19" name="TextBox 18"/>
-          <p:cNvSpPr txBox="1"/>
-          <p:nvPr/>
-        </p:nvSpPr>
-        <p:spPr>
-          <a:xfrm>
-            <a:off x="6720840" y="4919472"/>
-            <a:ext cx="4754880" cy="1234440"/>
+          <p:cNvPr id="18" name="TextBox 17"/>
+          <p:cNvSpPr txBox="1"/>
+          <p:nvPr/>
+        </p:nvSpPr>
+        <p:spPr>
+          <a:xfrm>
+            <a:off x="6720840" y="4864608"/>
+            <a:ext cx="4754880" cy="1371600"/>
           </a:xfrm>
           <a:prstGeom prst="rect">
             <a:avLst/>
@@ -4316,9 +6276,10 @@
                   <a:srgbClr val="FFFFFF"/>
                 </a:solidFill>
               </a:rPr>
-              <a:t>EDA  →  Supervised coefficients
-→  Cluster profiles
-→  All point to same conclusion ✓</a:t>
+              <a:t>EDA ★
+→ Supervised coefficients ★
+→ Cluster profiles ★
+→ All point to same conclusion ✓</a:t>
             </a:r>
           </a:p>
         </p:txBody>
@@ -4400,8 +6361,8 @@
         </p:nvSpPr>
         <p:spPr>
           <a:xfrm>
-            <a:off x="274320" y="109728"/>
-            <a:ext cx="11612880" cy="777240"/>
+            <a:off x="274320" y="91440"/>
+            <a:ext cx="11612880" cy="804672"/>
           </a:xfrm>
           <a:prstGeom prst="rect">
             <a:avLst/>
@@ -4416,7 +6377,7 @@
           <a:p>
             <a:pPr algn="l"/>
             <a:r>
-              <a:rPr sz="2800" b="1" i="0">
+              <a:rPr sz="2700" b="1" i="0">
                 <a:solidFill>
                   <a:srgbClr val="FFFFFF"/>
                 </a:solidFill>
@@ -4434,8 +6395,8 @@
         </p:nvSpPr>
         <p:spPr>
           <a:xfrm>
-            <a:off x="274320" y="1097280"/>
-            <a:ext cx="54864" cy="5303520"/>
+            <a:off x="274320" y="1024128"/>
+            <a:ext cx="54864" cy="5394960"/>
           </a:xfrm>
           <a:prstGeom prst="rect">
             <a:avLst/>
@@ -4477,8 +6438,8 @@
         </p:nvSpPr>
         <p:spPr>
           <a:xfrm>
-            <a:off x="411480" y="1143000"/>
-            <a:ext cx="5394960" cy="457200"/>
+            <a:off x="411480" y="1078992"/>
+            <a:ext cx="5394960" cy="420624"/>
           </a:xfrm>
           <a:prstGeom prst="rect">
             <a:avLst/>
@@ -4493,7 +6454,7 @@
           <a:p>
             <a:pPr algn="l"/>
             <a:r>
-              <a:rPr sz="1700" b="0" i="0">
+              <a:rPr sz="1800" b="0" i="0">
                 <a:solidFill>
                   <a:srgbClr val="FFFFFF"/>
                 </a:solidFill>
@@ -4511,8 +6472,8 @@
         </p:nvSpPr>
         <p:spPr>
           <a:xfrm>
-            <a:off x="411480" y="1618488"/>
-            <a:ext cx="5394960" cy="457200"/>
+            <a:off x="411480" y="1545336"/>
+            <a:ext cx="5394960" cy="420624"/>
           </a:xfrm>
           <a:prstGeom prst="rect">
             <a:avLst/>
@@ -4532,7 +6493,7 @@
                   <a:srgbClr val="CCCCCC"/>
                 </a:solidFill>
               </a:rPr>
-              <a:t>    · 7 numerical: funding_rounds, founder_experience, team_size,</a:t>
+              <a:t>    · 7 numerical: revenue, traction, funding, experience, team, market, burn</a:t>
             </a:r>
           </a:p>
         </p:txBody>
@@ -4545,8 +6506,8 @@
         </p:nvSpPr>
         <p:spPr>
           <a:xfrm>
-            <a:off x="411480" y="2020824"/>
-            <a:ext cx="5394960" cy="457200"/>
+            <a:off x="411480" y="1965960"/>
+            <a:ext cx="5394960" cy="420624"/>
           </a:xfrm>
           <a:prstGeom prst="rect">
             <a:avLst/>
@@ -4566,7 +6527,7 @@
                   <a:srgbClr val="CCCCCC"/>
                 </a:solidFill>
               </a:rPr>
-              <a:t>    · market_size, product_traction, burn_rate, revenue</a:t>
+              <a:t>    · 3 categorical: investor_type, sector, founder_background</a:t>
             </a:r>
           </a:p>
         </p:txBody>
@@ -4579,8 +6540,8 @@
         </p:nvSpPr>
         <p:spPr>
           <a:xfrm>
-            <a:off x="411480" y="2423160"/>
-            <a:ext cx="5394960" cy="457200"/>
+            <a:off x="411480" y="2551176"/>
+            <a:ext cx="5394960" cy="420624"/>
           </a:xfrm>
           <a:prstGeom prst="rect">
             <a:avLst/>
@@ -4595,26 +6556,60 @@
           <a:p>
             <a:pPr algn="l"/>
             <a:r>
+              <a:rPr sz="1800" b="0" i="0">
+                <a:solidFill>
+                  <a:srgbClr val="FFFFFF"/>
+                </a:solidFill>
+              </a:rPr>
+              <a:t>Target: outcome  →  3 classes</a:t>
+            </a:r>
+          </a:p>
+        </p:txBody>
+      </p:sp>
+      <p:sp>
+        <p:nvSpPr>
+          <p:cNvPr id="9" name="TextBox 8"/>
+          <p:cNvSpPr txBox="1"/>
+          <p:nvPr/>
+        </p:nvSpPr>
+        <p:spPr>
+          <a:xfrm>
+            <a:off x="411480" y="3017520"/>
+            <a:ext cx="5394960" cy="420624"/>
+          </a:xfrm>
+          <a:prstGeom prst="rect">
+            <a:avLst/>
+          </a:prstGeom>
+          <a:noFill/>
+        </p:spPr>
+        <p:txBody>
+          <a:bodyPr wrap="none">
+            <a:spAutoFit/>
+          </a:bodyPr>
+          <a:lstStyle/>
+          <a:p>
+            <a:pPr algn="l"/>
+            <a:r>
               <a:rPr sz="1500" b="0" i="1">
                 <a:solidFill>
                   <a:srgbClr val="CCCCCC"/>
                 </a:solidFill>
               </a:rPr>
-              <a:t>    · 3 categorical: investor_type, sector, founder_background</a:t>
-            </a:r>
-          </a:p>
-        </p:txBody>
-      </p:sp>
-      <p:sp>
-        <p:nvSpPr>
-          <p:cNvPr id="9" name="TextBox 8"/>
-          <p:cNvSpPr txBox="1"/>
-          <p:nvPr/>
-        </p:nvSpPr>
-        <p:spPr>
-          <a:xfrm>
-            <a:off x="411480" y="3008376"/>
-            <a:ext cx="5394960" cy="457200"/>
+              <a:t>    · Failure 55.6%   ·   Acquisition 42.3%   ·   IPO 2.1%</a:t>
+            </a:r>
+          </a:p>
+        </p:txBody>
+      </p:sp>
+      <p:sp>
+        <p:nvSpPr>
+          <p:cNvPr id="10" name="TextBox 9"/>
+          <p:cNvSpPr txBox="1"/>
+          <p:nvPr/>
+        </p:nvSpPr>
+        <p:spPr>
+          <a:xfrm>
+            <a:off x="411480" y="3602736"/>
+            <a:ext cx="5394960" cy="420624"/>
           </a:xfrm>
           <a:prstGeom prst="rect">
             <a:avLst/>
@@ -4629,26 +6624,26 @@
           <a:p>
             <a:pPr algn="l"/>
             <a:r>
-              <a:rPr sz="1700" b="0" i="0">
+              <a:rPr sz="1800" b="0" i="0">
                 <a:solidFill>
                   <a:srgbClr val="FFFFFF"/>
                 </a:solidFill>
               </a:rPr>
-              <a:t>Target: outcome  →  3 classes</a:t>
-            </a:r>
-          </a:p>
-        </p:txBody>
-      </p:sp>
-      <p:sp>
-        <p:nvSpPr>
-          <p:cNvPr id="10" name="TextBox 9"/>
-          <p:cNvSpPr txBox="1"/>
-          <p:nvPr/>
-        </p:nvSpPr>
-        <p:spPr>
-          <a:xfrm>
-            <a:off x="411480" y="3483864"/>
-            <a:ext cx="5394960" cy="457200"/>
+              <a:t>Two questions:</a:t>
+            </a:r>
+          </a:p>
+        </p:txBody>
+      </p:sp>
+      <p:sp>
+        <p:nvSpPr>
+          <p:cNvPr id="11" name="TextBox 10"/>
+          <p:cNvSpPr txBox="1"/>
+          <p:nvPr/>
+        </p:nvSpPr>
+        <p:spPr>
+          <a:xfrm>
+            <a:off x="411480" y="4069080"/>
+            <a:ext cx="5394960" cy="420624"/>
           </a:xfrm>
           <a:prstGeom prst="rect">
             <a:avLst/>
@@ -4668,21 +6663,21 @@
                   <a:srgbClr val="CCCCCC"/>
                 </a:solidFill>
               </a:rPr>
-              <a:t>    · Failure 55.6%   ·   Acquisition 42.3%   ·   IPO 2.1%</a:t>
-            </a:r>
-          </a:p>
-        </p:txBody>
-      </p:sp>
-      <p:sp>
-        <p:nvSpPr>
-          <p:cNvPr id="11" name="TextBox 10"/>
-          <p:cNvSpPr txBox="1"/>
-          <p:nvPr/>
-        </p:nvSpPr>
-        <p:spPr>
-          <a:xfrm>
-            <a:off x="411480" y="4069080"/>
-            <a:ext cx="5394960" cy="457200"/>
+              <a:t>    · Part 1: Predict outcome?  (Supervised)</a:t>
+            </a:r>
+          </a:p>
+        </p:txBody>
+      </p:sp>
+      <p:sp>
+        <p:nvSpPr>
+          <p:cNvPr id="12" name="TextBox 11"/>
+          <p:cNvSpPr txBox="1"/>
+          <p:nvPr/>
+        </p:nvSpPr>
+        <p:spPr>
+          <a:xfrm>
+            <a:off x="411480" y="4489704"/>
+            <a:ext cx="5394960" cy="420624"/>
           </a:xfrm>
           <a:prstGeom prst="rect">
             <a:avLst/>
@@ -4697,94 +6692,26 @@
           <a:p>
             <a:pPr algn="l"/>
             <a:r>
-              <a:rPr sz="1700" b="0" i="0">
-                <a:solidFill>
-                  <a:srgbClr val="FFFFFF"/>
-                </a:solidFill>
-              </a:rPr>
-              <a:t>Two questions:</a:t>
-            </a:r>
-          </a:p>
-        </p:txBody>
-      </p:sp>
-      <p:sp>
-        <p:nvSpPr>
-          <p:cNvPr id="12" name="TextBox 11"/>
-          <p:cNvSpPr txBox="1"/>
-          <p:nvPr/>
-        </p:nvSpPr>
-        <p:spPr>
-          <a:xfrm>
-            <a:off x="411480" y="4544568"/>
-            <a:ext cx="5394960" cy="457200"/>
-          </a:xfrm>
-          <a:prstGeom prst="rect">
-            <a:avLst/>
-          </a:prstGeom>
-          <a:noFill/>
-        </p:spPr>
-        <p:txBody>
-          <a:bodyPr wrap="none">
-            <a:spAutoFit/>
-          </a:bodyPr>
-          <a:lstStyle/>
-          <a:p>
-            <a:pPr algn="l"/>
-            <a:r>
               <a:rPr sz="1500" b="0" i="1">
                 <a:solidFill>
                   <a:srgbClr val="CCCCCC"/>
                 </a:solidFill>
               </a:rPr>
-              <a:t>    · Part 1: Can we predict outcome from features?  (Supervised)</a:t>
-            </a:r>
-          </a:p>
-        </p:txBody>
-      </p:sp>
-      <p:sp>
-        <p:nvSpPr>
-          <p:cNvPr id="13" name="TextBox 12"/>
-          <p:cNvSpPr txBox="1"/>
-          <p:nvPr/>
-        </p:nvSpPr>
-        <p:spPr>
-          <a:xfrm>
-            <a:off x="411480" y="4946904"/>
-            <a:ext cx="5394960" cy="457200"/>
-          </a:xfrm>
-          <a:prstGeom prst="rect">
-            <a:avLst/>
-          </a:prstGeom>
-          <a:noFill/>
-        </p:spPr>
-        <p:txBody>
-          <a:bodyPr wrap="none">
-            <a:spAutoFit/>
-          </a:bodyPr>
-          <a:lstStyle/>
-          <a:p>
-            <a:pPr algn="l"/>
-            <a:r>
-              <a:rPr sz="1500" b="0" i="1">
-                <a:solidFill>
-                  <a:srgbClr val="CCCCCC"/>
-                </a:solidFill>
-              </a:rPr>
-              <a:t>    · Part 2: What natural groups exist in data?  (Unsupervised)</a:t>
-            </a:r>
-          </a:p>
-        </p:txBody>
-      </p:sp>
-      <p:sp>
-        <p:nvSpPr>
-          <p:cNvPr id="14" name="Rectangle 13"/>
+              <a:t>    · Part 2: Natural groups in data?  (Unsupervised)</a:t>
+            </a:r>
+          </a:p>
+        </p:txBody>
+      </p:sp>
+      <p:sp>
+        <p:nvSpPr>
+          <p:cNvPr id="13" name="Rectangle 12"/>
           <p:cNvSpPr/>
           <p:nvPr/>
         </p:nvSpPr>
         <p:spPr>
           <a:xfrm>
-            <a:off x="6400800" y="1097280"/>
-            <a:ext cx="5394960" cy="5394960"/>
+            <a:off x="6400800" y="1024128"/>
+            <a:ext cx="5440680" cy="5422392"/>
           </a:xfrm>
           <a:prstGeom prst="rect">
             <a:avLst/>
@@ -4820,14 +6747,14 @@
       </p:sp>
       <p:sp>
         <p:nvSpPr>
-          <p:cNvPr id="15" name="TextBox 14"/>
-          <p:cNvSpPr txBox="1"/>
-          <p:nvPr/>
-        </p:nvSpPr>
-        <p:spPr>
-          <a:xfrm>
-            <a:off x="6583680" y="1188720"/>
-            <a:ext cx="5029200" cy="457200"/>
+          <p:cNvPr id="14" name="TextBox 13"/>
+          <p:cNvSpPr txBox="1"/>
+          <p:nvPr/>
+        </p:nvSpPr>
+        <p:spPr>
+          <a:xfrm>
+            <a:off x="6583680" y="1115568"/>
+            <a:ext cx="5029200" cy="411480"/>
           </a:xfrm>
           <a:prstGeom prst="rect">
             <a:avLst/>
@@ -4842,7 +6769,7 @@
           <a:p>
             <a:pPr algn="l"/>
             <a:r>
-              <a:rPr sz="1600" b="1" i="0">
+              <a:rPr sz="1500" b="1" i="0">
                 <a:solidFill>
                   <a:srgbClr val="FFFFFF"/>
                 </a:solidFill>
@@ -4854,14 +6781,14 @@
       </p:sp>
       <p:sp>
         <p:nvSpPr>
-          <p:cNvPr id="16" name="Rectangle 15"/>
+          <p:cNvPr id="15" name="Rectangle 14"/>
           <p:cNvSpPr/>
           <p:nvPr/>
         </p:nvSpPr>
         <p:spPr>
           <a:xfrm>
-            <a:off x="6766560" y="1920240"/>
-            <a:ext cx="2542032" cy="822960"/>
+            <a:off x="6583680" y="1828800"/>
+            <a:ext cx="2592872" cy="777240"/>
           </a:xfrm>
           <a:prstGeom prst="rect">
             <a:avLst/>
@@ -4897,14 +6824,14 @@
       </p:sp>
       <p:sp>
         <p:nvSpPr>
-          <p:cNvPr id="17" name="TextBox 16"/>
-          <p:cNvSpPr txBox="1"/>
-          <p:nvPr/>
-        </p:nvSpPr>
-        <p:spPr>
-          <a:xfrm>
-            <a:off x="9400032" y="2121408"/>
-            <a:ext cx="1645920" cy="457200"/>
+          <p:cNvPr id="16" name="TextBox 15"/>
+          <p:cNvSpPr txBox="1"/>
+          <p:nvPr/>
+        </p:nvSpPr>
+        <p:spPr>
+          <a:xfrm>
+            <a:off x="6629400" y="2029968"/>
+            <a:ext cx="3415832" cy="411480"/>
           </a:xfrm>
           <a:prstGeom prst="rect">
             <a:avLst/>
@@ -4921,7 +6848,7 @@
             <a:r>
               <a:rPr sz="1500" b="1" i="0">
                 <a:solidFill>
-                  <a:srgbClr val="C0392B"/>
+                  <a:srgbClr val="FFFFFF"/>
                 </a:solidFill>
               </a:rPr>
               <a:t>Failure  55.6%</a:t>
@@ -4931,14 +6858,14 @@
       </p:sp>
       <p:sp>
         <p:nvSpPr>
-          <p:cNvPr id="18" name="Rectangle 17"/>
+          <p:cNvPr id="17" name="Rectangle 16"/>
           <p:cNvSpPr/>
           <p:nvPr/>
         </p:nvSpPr>
         <p:spPr>
           <a:xfrm>
-            <a:off x="6766560" y="3383280"/>
-            <a:ext cx="1933955" cy="822960"/>
+            <a:off x="6583680" y="3383280"/>
+            <a:ext cx="1972635" cy="777240"/>
           </a:xfrm>
           <a:prstGeom prst="rect">
             <a:avLst/>
@@ -4974,14 +6901,14 @@
       </p:sp>
       <p:sp>
         <p:nvSpPr>
-          <p:cNvPr id="19" name="TextBox 18"/>
-          <p:cNvSpPr txBox="1"/>
-          <p:nvPr/>
-        </p:nvSpPr>
-        <p:spPr>
-          <a:xfrm>
-            <a:off x="8791956" y="3584448"/>
-            <a:ext cx="1645920" cy="457200"/>
+          <p:cNvPr id="18" name="TextBox 17"/>
+          <p:cNvSpPr txBox="1"/>
+          <p:nvPr/>
+        </p:nvSpPr>
+        <p:spPr>
+          <a:xfrm>
+            <a:off x="6629400" y="3584448"/>
+            <a:ext cx="2795595" cy="411480"/>
           </a:xfrm>
           <a:prstGeom prst="rect">
             <a:avLst/>
@@ -4998,7 +6925,7 @@
             <a:r>
               <a:rPr sz="1500" b="1" i="0">
                 <a:solidFill>
-                  <a:srgbClr val="2ECC71"/>
+                  <a:srgbClr val="FFFFFF"/>
                 </a:solidFill>
               </a:rPr>
               <a:t>Acquisition  42.3%</a:t>
@@ -5008,14 +6935,14 @@
       </p:sp>
       <p:sp>
         <p:nvSpPr>
-          <p:cNvPr id="20" name="Rectangle 19"/>
+          <p:cNvPr id="19" name="Rectangle 18"/>
           <p:cNvSpPr/>
           <p:nvPr/>
         </p:nvSpPr>
         <p:spPr>
           <a:xfrm>
-            <a:off x="6766560" y="4846320"/>
-            <a:ext cx="96012" cy="822960"/>
+            <a:off x="6583680" y="4937760"/>
+            <a:ext cx="97932" cy="777240"/>
           </a:xfrm>
           <a:prstGeom prst="rect">
             <a:avLst/>
@@ -5051,14 +6978,14 @@
       </p:sp>
       <p:sp>
         <p:nvSpPr>
-          <p:cNvPr id="21" name="TextBox 20"/>
-          <p:cNvSpPr txBox="1"/>
-          <p:nvPr/>
-        </p:nvSpPr>
-        <p:spPr>
-          <a:xfrm>
-            <a:off x="6954012" y="5047488"/>
-            <a:ext cx="1645920" cy="457200"/>
+          <p:cNvPr id="20" name="TextBox 19"/>
+          <p:cNvSpPr txBox="1"/>
+          <p:nvPr/>
+        </p:nvSpPr>
+        <p:spPr>
+          <a:xfrm>
+            <a:off x="6629400" y="5138928"/>
+            <a:ext cx="920892" cy="411480"/>
           </a:xfrm>
           <a:prstGeom prst="rect">
             <a:avLst/>
@@ -5075,7 +7002,7 @@
             <a:r>
               <a:rPr sz="1500" b="1" i="0">
                 <a:solidFill>
-                  <a:srgbClr val="3498DB"/>
+                  <a:srgbClr val="FFFFFF"/>
                 </a:solidFill>
               </a:rPr>
               <a:t>IPO  2.1%</a:t>
@@ -5160,8 +7087,8 @@
         </p:nvSpPr>
         <p:spPr>
           <a:xfrm>
-            <a:off x="274320" y="109728"/>
-            <a:ext cx="11612880" cy="777240"/>
+            <a:off x="274320" y="91440"/>
+            <a:ext cx="11612880" cy="804672"/>
           </a:xfrm>
           <a:prstGeom prst="rect">
             <a:avLst/>
@@ -5176,7 +7103,7 @@
           <a:p>
             <a:pPr algn="l"/>
             <a:r>
-              <a:rPr sz="2800" b="1" i="0">
+              <a:rPr sz="2700" b="1" i="0">
                 <a:solidFill>
                   <a:srgbClr val="FFFFFF"/>
                 </a:solidFill>
@@ -5194,8 +7121,8 @@
         </p:nvSpPr>
         <p:spPr>
           <a:xfrm>
-            <a:off x="274320" y="1097280"/>
-            <a:ext cx="54864" cy="5303520"/>
+            <a:off x="274320" y="1024128"/>
+            <a:ext cx="54864" cy="5394960"/>
           </a:xfrm>
           <a:prstGeom prst="rect">
             <a:avLst/>
@@ -5237,8 +7164,8 @@
         </p:nvSpPr>
         <p:spPr>
           <a:xfrm>
-            <a:off x="411480" y="1143000"/>
-            <a:ext cx="5394960" cy="457200"/>
+            <a:off x="411480" y="1078992"/>
+            <a:ext cx="5394960" cy="420624"/>
           </a:xfrm>
           <a:prstGeom prst="rect">
             <a:avLst/>
@@ -5253,12 +7180,12 @@
           <a:p>
             <a:pPr algn="l"/>
             <a:r>
-              <a:rPr sz="1700" b="0" i="0">
+              <a:rPr sz="1800" b="0" i="0">
                 <a:solidFill>
                   <a:srgbClr val="FFFFFF"/>
                 </a:solidFill>
               </a:rPr>
-              <a:t>Spearman ρ (feature vs outcome) near 0 for 5 / 7 features</a:t>
+              <a:t>Spearman ρ ≈ 0 for 5 / 7 features</a:t>
             </a:r>
           </a:p>
         </p:txBody>
@@ -5271,8 +7198,8 @@
         </p:nvSpPr>
         <p:spPr>
           <a:xfrm>
-            <a:off x="411480" y="1618488"/>
-            <a:ext cx="5394960" cy="457200"/>
+            <a:off x="411480" y="1545336"/>
+            <a:ext cx="5394960" cy="420624"/>
           </a:xfrm>
           <a:prstGeom prst="rect">
             <a:avLst/>
@@ -5292,7 +7219,7 @@
                   <a:srgbClr val="CCCCCC"/>
                 </a:solidFill>
               </a:rPr>
-              <a:t>    · funding_rounds, founder_exp, team_size, market_size, burn_rate → ρ ≈ 0</a:t>
+              <a:t>    · funding, founder_exp, team_size, market_size, burn_rate</a:t>
             </a:r>
           </a:p>
         </p:txBody>
@@ -5305,8 +7232,8 @@
         </p:nvSpPr>
         <p:spPr>
           <a:xfrm>
-            <a:off x="411480" y="2203704"/>
-            <a:ext cx="5394960" cy="457200"/>
+            <a:off x="411480" y="2130552"/>
+            <a:ext cx="5394960" cy="420624"/>
           </a:xfrm>
           <a:prstGeom prst="rect">
             <a:avLst/>
@@ -5321,7 +7248,7 @@
           <a:p>
             <a:pPr algn="l"/>
             <a:r>
-              <a:rPr sz="1700" b="0" i="0">
+              <a:rPr sz="1800" b="0" i="0">
                 <a:solidFill>
                   <a:srgbClr val="FFFFFF"/>
                 </a:solidFill>
@@ -5339,8 +7266,8 @@
         </p:nvSpPr>
         <p:spPr>
           <a:xfrm>
-            <a:off x="411480" y="2679192"/>
-            <a:ext cx="5394960" cy="457200"/>
+            <a:off x="411480" y="2596896"/>
+            <a:ext cx="5394960" cy="420624"/>
           </a:xfrm>
           <a:prstGeom prst="rect">
             <a:avLst/>
@@ -5373,8 +7300,8 @@
         </p:nvSpPr>
         <p:spPr>
           <a:xfrm>
-            <a:off x="411480" y="3081528"/>
-            <a:ext cx="5394960" cy="457200"/>
+            <a:off x="411480" y="3017520"/>
+            <a:ext cx="5394960" cy="420624"/>
           </a:xfrm>
           <a:prstGeom prst="rect">
             <a:avLst/>
@@ -5407,8 +7334,8 @@
         </p:nvSpPr>
         <p:spPr>
           <a:xfrm>
-            <a:off x="411480" y="3666744"/>
-            <a:ext cx="5394960" cy="457200"/>
+            <a:off x="411480" y="3602736"/>
+            <a:ext cx="5394960" cy="420624"/>
           </a:xfrm>
           <a:prstGeom prst="rect">
             <a:avLst/>
@@ -5423,7 +7350,7 @@
           <a:p>
             <a:pPr algn="l"/>
             <a:r>
-              <a:rPr sz="1700" b="0" i="0">
+              <a:rPr sz="1800" b="0" i="0">
                 <a:solidFill>
                   <a:srgbClr val="FFFFFF"/>
                 </a:solidFill>
@@ -5441,8 +7368,8 @@
         </p:nvSpPr>
         <p:spPr>
           <a:xfrm>
-            <a:off x="411480" y="4142231"/>
-            <a:ext cx="5394960" cy="457200"/>
+            <a:off x="411480" y="4069080"/>
+            <a:ext cx="5394960" cy="420624"/>
           </a:xfrm>
           <a:prstGeom prst="rect">
             <a:avLst/>
@@ -5475,8 +7402,8 @@
         </p:nvSpPr>
         <p:spPr>
           <a:xfrm>
-            <a:off x="411480" y="4544568"/>
-            <a:ext cx="5394960" cy="457200"/>
+            <a:off x="411480" y="4489704"/>
+            <a:ext cx="5394960" cy="420624"/>
           </a:xfrm>
           <a:prstGeom prst="rect">
             <a:avLst/>
@@ -5509,8 +7436,8 @@
         </p:nvSpPr>
         <p:spPr>
           <a:xfrm>
-            <a:off x="411480" y="4946904"/>
-            <a:ext cx="5394960" cy="457200"/>
+            <a:off x="411480" y="4910328"/>
+            <a:ext cx="5394960" cy="420624"/>
           </a:xfrm>
           <a:prstGeom prst="rect">
             <a:avLst/>
@@ -5543,8 +7470,8 @@
         </p:nvSpPr>
         <p:spPr>
           <a:xfrm>
-            <a:off x="6400800" y="1097280"/>
-            <a:ext cx="5394960" cy="5394960"/>
+            <a:off x="6400800" y="1024128"/>
+            <a:ext cx="5440680" cy="5422392"/>
           </a:xfrm>
           <a:prstGeom prst="rect">
             <a:avLst/>
@@ -5586,8 +7513,8 @@
         </p:nvSpPr>
         <p:spPr>
           <a:xfrm>
-            <a:off x="6537960" y="1143000"/>
-            <a:ext cx="5120640" cy="457200"/>
+            <a:off x="6537960" y="1115568"/>
+            <a:ext cx="5120640" cy="411480"/>
           </a:xfrm>
           <a:prstGeom prst="rect">
             <a:avLst/>
@@ -5607,7 +7534,7 @@
                   <a:srgbClr val="FFFFFF"/>
                 </a:solidFill>
               </a:rPr>
-              <a:t>Spearman ρ  with  outcome</a:t>
+              <a:t>Spearman ρ with outcome</a:t>
             </a:r>
           </a:p>
         </p:txBody>
@@ -5620,8 +7547,8 @@
         </p:nvSpPr>
         <p:spPr>
           <a:xfrm>
-            <a:off x="6537960" y="1691640"/>
-            <a:ext cx="4114800" cy="365760"/>
+            <a:off x="6583680" y="1664208"/>
+            <a:ext cx="4114800" cy="384048"/>
           </a:xfrm>
           <a:prstGeom prst="rect">
             <a:avLst/>
@@ -5663,7 +7590,7 @@
         </p:nvSpPr>
         <p:spPr>
           <a:xfrm>
-            <a:off x="6583680" y="1764792"/>
+            <a:off x="6629400" y="1737360"/>
             <a:ext cx="2926080" cy="320040"/>
           </a:xfrm>
           <a:prstGeom prst="rect">
@@ -5697,7 +7624,7 @@
         </p:nvSpPr>
         <p:spPr>
           <a:xfrm>
-            <a:off x="11064240" y="1764792"/>
+            <a:off x="11064240" y="1737360"/>
             <a:ext cx="685800" cy="320040"/>
           </a:xfrm>
           <a:prstGeom prst="rect">
@@ -5731,8 +7658,8 @@
         </p:nvSpPr>
         <p:spPr>
           <a:xfrm>
-            <a:off x="6537960" y="2350008"/>
-            <a:ext cx="3474720" cy="365760"/>
+            <a:off x="6583680" y="2322576"/>
+            <a:ext cx="3474720" cy="384048"/>
           </a:xfrm>
           <a:prstGeom prst="rect">
             <a:avLst/>
@@ -5774,7 +7701,7 @@
         </p:nvSpPr>
         <p:spPr>
           <a:xfrm>
-            <a:off x="6583680" y="2423160"/>
+            <a:off x="6629400" y="2395728"/>
             <a:ext cx="2926080" cy="320040"/>
           </a:xfrm>
           <a:prstGeom prst="rect">
@@ -5795,7 +7722,7 @@
                   <a:srgbClr val="FFFFFF"/>
                 </a:solidFill>
               </a:rPr>
-              <a:t>product_traction_users</a:t>
+              <a:t>product_traction</a:t>
             </a:r>
           </a:p>
         </p:txBody>
@@ -5808,7 +7735,7 @@
         </p:nvSpPr>
         <p:spPr>
           <a:xfrm>
-            <a:off x="11064240" y="2423160"/>
+            <a:off x="11064240" y="2395728"/>
             <a:ext cx="685800" cy="320040"/>
           </a:xfrm>
           <a:prstGeom prst="rect">
@@ -5842,8 +7769,8 @@
         </p:nvSpPr>
         <p:spPr>
           <a:xfrm>
-            <a:off x="6537960" y="3008376"/>
-            <a:ext cx="274320" cy="365760"/>
+            <a:off x="6583680" y="2980944"/>
+            <a:ext cx="274320" cy="384048"/>
           </a:xfrm>
           <a:prstGeom prst="rect">
             <a:avLst/>
@@ -5885,7 +7812,7 @@
         </p:nvSpPr>
         <p:spPr>
           <a:xfrm>
-            <a:off x="6583680" y="3081528"/>
+            <a:off x="6629400" y="3054096"/>
             <a:ext cx="2926080" cy="320040"/>
           </a:xfrm>
           <a:prstGeom prst="rect">
@@ -5906,7 +7833,7 @@
                   <a:srgbClr val="FFFFFF"/>
                 </a:solidFill>
               </a:rPr>
-              <a:t>burn_rate_million</a:t>
+              <a:t>burn_rate</a:t>
             </a:r>
           </a:p>
         </p:txBody>
@@ -5919,7 +7846,7 @@
         </p:nvSpPr>
         <p:spPr>
           <a:xfrm>
-            <a:off x="11064240" y="3081528"/>
+            <a:off x="11064240" y="3054096"/>
             <a:ext cx="685800" cy="320040"/>
           </a:xfrm>
           <a:prstGeom prst="rect">
@@ -5953,8 +7880,8 @@
         </p:nvSpPr>
         <p:spPr>
           <a:xfrm>
-            <a:off x="6537960" y="3666744"/>
-            <a:ext cx="182880" cy="365760"/>
+            <a:off x="6583680" y="3639312"/>
+            <a:ext cx="182880" cy="384048"/>
           </a:xfrm>
           <a:prstGeom prst="rect">
             <a:avLst/>
@@ -5996,7 +7923,7 @@
         </p:nvSpPr>
         <p:spPr>
           <a:xfrm>
-            <a:off x="6583680" y="3739896"/>
+            <a:off x="6629400" y="3712464"/>
             <a:ext cx="2926080" cy="320040"/>
           </a:xfrm>
           <a:prstGeom prst="rect">
@@ -6017,7 +7944,7 @@
                   <a:srgbClr val="FFFFFF"/>
                 </a:solidFill>
               </a:rPr>
-              <a:t>market_size_billion</a:t>
+              <a:t>market_size</a:t>
             </a:r>
           </a:p>
         </p:txBody>
@@ -6030,7 +7957,7 @@
         </p:nvSpPr>
         <p:spPr>
           <a:xfrm>
-            <a:off x="11064240" y="3739896"/>
+            <a:off x="11064240" y="3712464"/>
             <a:ext cx="685800" cy="320040"/>
           </a:xfrm>
           <a:prstGeom prst="rect">
@@ -6064,8 +7991,8 @@
         </p:nvSpPr>
         <p:spPr>
           <a:xfrm>
-            <a:off x="6537960" y="4325112"/>
-            <a:ext cx="91440" cy="365760"/>
+            <a:off x="6583680" y="4297680"/>
+            <a:ext cx="91440" cy="384048"/>
           </a:xfrm>
           <a:prstGeom prst="rect">
             <a:avLst/>
@@ -6107,7 +8034,7 @@
         </p:nvSpPr>
         <p:spPr>
           <a:xfrm>
-            <a:off x="6583680" y="4398264"/>
+            <a:off x="6629400" y="4370832"/>
             <a:ext cx="2926080" cy="320040"/>
           </a:xfrm>
           <a:prstGeom prst="rect">
@@ -6141,7 +8068,7 @@
         </p:nvSpPr>
         <p:spPr>
           <a:xfrm>
-            <a:off x="11064240" y="4398264"/>
+            <a:off x="11064240" y="4370832"/>
             <a:ext cx="685800" cy="320040"/>
           </a:xfrm>
           <a:prstGeom prst="rect">
@@ -6175,8 +8102,8 @@
         </p:nvSpPr>
         <p:spPr>
           <a:xfrm>
-            <a:off x="6537960" y="4983479"/>
-            <a:ext cx="0" cy="365760"/>
+            <a:off x="6583680" y="4956048"/>
+            <a:ext cx="45720" cy="384048"/>
           </a:xfrm>
           <a:prstGeom prst="rect">
             <a:avLst/>
@@ -6218,7 +8145,7 @@
         </p:nvSpPr>
         <p:spPr>
           <a:xfrm>
-            <a:off x="6583680" y="5056631"/>
+            <a:off x="6629400" y="5029200"/>
             <a:ext cx="2926080" cy="320040"/>
           </a:xfrm>
           <a:prstGeom prst="rect">
@@ -6239,7 +8166,7 @@
                   <a:srgbClr val="FFFFFF"/>
                 </a:solidFill>
               </a:rPr>
-              <a:t>founder_experience</a:t>
+              <a:t>founder_exp</a:t>
             </a:r>
           </a:p>
         </p:txBody>
@@ -6252,7 +8179,7 @@
         </p:nvSpPr>
         <p:spPr>
           <a:xfrm>
-            <a:off x="11064240" y="5056631"/>
+            <a:off x="11064240" y="5029200"/>
             <a:ext cx="685800" cy="320040"/>
           </a:xfrm>
           <a:prstGeom prst="rect">
@@ -6286,8 +8213,8 @@
         </p:nvSpPr>
         <p:spPr>
           <a:xfrm>
-            <a:off x="6537960" y="5641848"/>
-            <a:ext cx="0" cy="365760"/>
+            <a:off x="6583680" y="5614416"/>
+            <a:ext cx="45720" cy="384048"/>
           </a:xfrm>
           <a:prstGeom prst="rect">
             <a:avLst/>
@@ -6329,7 +8256,7 @@
         </p:nvSpPr>
         <p:spPr>
           <a:xfrm>
-            <a:off x="6583680" y="5715000"/>
+            <a:off x="6629400" y="5687568"/>
             <a:ext cx="2926080" cy="320040"/>
           </a:xfrm>
           <a:prstGeom prst="rect">
@@ -6363,7 +8290,7 @@
         </p:nvSpPr>
         <p:spPr>
           <a:xfrm>
-            <a:off x="11064240" y="5715000"/>
+            <a:off x="11064240" y="5687568"/>
             <a:ext cx="685800" cy="320040"/>
           </a:xfrm>
           <a:prstGeom prst="rect">
@@ -6500,8 +8427,8 @@
         </p:nvSpPr>
         <p:spPr>
           <a:xfrm>
-            <a:off x="274320" y="109728"/>
-            <a:ext cx="11612880" cy="777240"/>
+            <a:off x="274320" y="91440"/>
+            <a:ext cx="11612880" cy="804672"/>
           </a:xfrm>
           <a:prstGeom prst="rect">
             <a:avLst/>
@@ -6516,7 +8443,7 @@
           <a:p>
             <a:pPr algn="l"/>
             <a:r>
-              <a:rPr sz="2800" b="1" i="0">
+              <a:rPr sz="2700" b="1" i="0">
                 <a:solidFill>
                   <a:srgbClr val="FFFFFF"/>
                 </a:solidFill>
@@ -6534,7 +8461,7 @@
         </p:nvSpPr>
         <p:spPr>
           <a:xfrm>
-            <a:off x="274320" y="1097280"/>
+            <a:off x="274320" y="1024128"/>
             <a:ext cx="54864" cy="5394960"/>
           </a:xfrm>
           <a:prstGeom prst="rect">
@@ -6577,8 +8504,8 @@
         </p:nvSpPr>
         <p:spPr>
           <a:xfrm>
-            <a:off x="411480" y="1097280"/>
-            <a:ext cx="5394960" cy="457200"/>
+            <a:off x="411480" y="1078992"/>
+            <a:ext cx="5394960" cy="420624"/>
           </a:xfrm>
           <a:prstGeom prst="rect">
             <a:avLst/>
@@ -6593,12 +8520,12 @@
           <a:p>
             <a:pPr algn="l"/>
             <a:r>
-              <a:rPr sz="1700" b="0" i="0">
+              <a:rPr sz="1800" b="0" i="0">
                 <a:solidFill>
                   <a:srgbClr val="FFFFFF"/>
                 </a:solidFill>
               </a:rPr>
-              <a:t>4 classifiers:  k-NN  ·  Decision Tree  ·  Logistic Regression  ·  LDA</a:t>
+              <a:t>4 classifiers:  k-NN  ·  Decision Tree  ·  LR  ·  LDA</a:t>
             </a:r>
           </a:p>
         </p:txBody>
@@ -6611,8 +8538,8 @@
         </p:nvSpPr>
         <p:spPr>
           <a:xfrm>
-            <a:off x="411480" y="1755648"/>
-            <a:ext cx="5394960" cy="457200"/>
+            <a:off x="411480" y="1709928"/>
+            <a:ext cx="5394960" cy="420624"/>
           </a:xfrm>
           <a:prstGeom prst="rect">
             <a:avLst/>
@@ -6627,12 +8554,12 @@
           <a:p>
             <a:pPr algn="l"/>
             <a:r>
-              <a:rPr sz="1700" b="0" i="0">
+              <a:rPr sz="1800" b="0" i="0">
                 <a:solidFill>
                   <a:srgbClr val="FFFFFF"/>
                 </a:solidFill>
               </a:rPr>
-              <a:t>Each wrapped in Pipeline:</a:t>
+              <a:t>Each wrapped in Pipeline (leakage-free):</a:t>
             </a:r>
           </a:p>
         </p:txBody>
@@ -6645,8 +8572,8 @@
         </p:nvSpPr>
         <p:spPr>
           <a:xfrm>
-            <a:off x="411480" y="2231136"/>
-            <a:ext cx="5394960" cy="457200"/>
+            <a:off x="411480" y="2176272"/>
+            <a:ext cx="5394960" cy="420624"/>
           </a:xfrm>
           <a:prstGeom prst="rect">
             <a:avLst/>
@@ -6666,7 +8593,7 @@
                   <a:srgbClr val="CCCCCC"/>
                 </a:solidFill>
               </a:rPr>
-              <a:t>    · Preprocessor  →  Classifier  (leakage-free)</a:t>
+              <a:t>    · Preprocessor  →  Classifier</a:t>
             </a:r>
           </a:p>
         </p:txBody>
@@ -6679,8 +8606,8 @@
         </p:nvSpPr>
         <p:spPr>
           <a:xfrm>
-            <a:off x="411480" y="2816352"/>
-            <a:ext cx="5394960" cy="457200"/>
+            <a:off x="411480" y="2761488"/>
+            <a:ext cx="5394960" cy="420624"/>
           </a:xfrm>
           <a:prstGeom prst="rect">
             <a:avLst/>
@@ -6695,7 +8622,7 @@
           <a:p>
             <a:pPr algn="l"/>
             <a:r>
-              <a:rPr sz="1700" b="0" i="0">
+              <a:rPr sz="1800" b="0" i="0">
                 <a:solidFill>
                   <a:srgbClr val="FFFFFF"/>
                 </a:solidFill>
@@ -6713,8 +8640,8 @@
         </p:nvSpPr>
         <p:spPr>
           <a:xfrm>
-            <a:off x="411480" y="3291840"/>
-            <a:ext cx="5394960" cy="457200"/>
+            <a:off x="411480" y="3227832"/>
+            <a:ext cx="5394960" cy="420624"/>
           </a:xfrm>
           <a:prstGeom prst="rect">
             <a:avLst/>
@@ -6734,7 +8661,7 @@
                   <a:srgbClr val="CCCCCC"/>
                 </a:solidFill>
               </a:rPr>
-              <a:t>    · k-NN: n_neighbors (subsample 5 000 rows for speed)</a:t>
+              <a:t>    · k-NN: n_neighbors  (subsample 5 000 rows)</a:t>
             </a:r>
           </a:p>
         </p:txBody>
@@ -6747,8 +8674,8 @@
         </p:nvSpPr>
         <p:spPr>
           <a:xfrm>
-            <a:off x="411480" y="3694176"/>
-            <a:ext cx="5394960" cy="457200"/>
+            <a:off x="411480" y="3648456"/>
+            <a:ext cx="5394960" cy="420624"/>
           </a:xfrm>
           <a:prstGeom prst="rect">
             <a:avLst/>
@@ -6781,8 +8708,8 @@
         </p:nvSpPr>
         <p:spPr>
           <a:xfrm>
-            <a:off x="411480" y="4096512"/>
-            <a:ext cx="5394960" cy="457200"/>
+            <a:off x="411480" y="4069080"/>
+            <a:ext cx="5394960" cy="420624"/>
           </a:xfrm>
           <a:prstGeom prst="rect">
             <a:avLst/>
@@ -6815,8 +8742,8 @@
         </p:nvSpPr>
         <p:spPr>
           <a:xfrm>
-            <a:off x="411480" y="4498848"/>
-            <a:ext cx="5394960" cy="457200"/>
+            <a:off x="411480" y="4489704"/>
+            <a:ext cx="5394960" cy="420624"/>
           </a:xfrm>
           <a:prstGeom prst="rect">
             <a:avLst/>
@@ -6849,8 +8776,8 @@
         </p:nvSpPr>
         <p:spPr>
           <a:xfrm>
-            <a:off x="411480" y="5084064"/>
-            <a:ext cx="5394960" cy="457200"/>
+            <a:off x="411480" y="5074920"/>
+            <a:ext cx="5394960" cy="420624"/>
           </a:xfrm>
           <a:prstGeom prst="rect">
             <a:avLst/>
@@ -6865,12 +8792,12 @@
           <a:p>
             <a:pPr algn="l"/>
             <a:r>
-              <a:rPr sz="1700" b="0" i="0">
+              <a:rPr sz="1800" b="0" i="0">
                 <a:solidFill>
                   <a:srgbClr val="FFFFFF"/>
                 </a:solidFill>
               </a:rPr>
-              <a:t>Final evaluation on 20 000-row held-out test set</a:t>
+              <a:t>Final eval on 20 000-row held-out test set</a:t>
             </a:r>
           </a:p>
         </p:txBody>
@@ -6883,8 +8810,8 @@
         </p:nvSpPr>
         <p:spPr>
           <a:xfrm>
-            <a:off x="6400800" y="1097280"/>
-            <a:ext cx="5394960" cy="5394960"/>
+            <a:off x="6400800" y="1024128"/>
+            <a:ext cx="5486400" cy="5422392"/>
           </a:xfrm>
           <a:prstGeom prst="rect">
             <a:avLst/>
@@ -6926,8 +8853,8 @@
         </p:nvSpPr>
         <p:spPr>
           <a:xfrm>
-            <a:off x="6537960" y="1143000"/>
-            <a:ext cx="5120640" cy="457200"/>
+            <a:off x="6537960" y="1115568"/>
+            <a:ext cx="5212080" cy="411480"/>
           </a:xfrm>
           <a:prstGeom prst="rect">
             <a:avLst/>
@@ -6968,8 +8895,8 @@
         </p:blipFill>
         <p:spPr>
           <a:xfrm>
-            <a:off x="6446520" y="1600200"/>
-            <a:ext cx="5486400" cy="2284077"/>
+            <a:off x="6492240" y="1572768"/>
+            <a:ext cx="5303520" cy="2207941"/>
           </a:xfrm>
           <a:prstGeom prst="rect">
             <a:avLst/>
@@ -7053,8 +8980,8 @@
         </p:nvSpPr>
         <p:spPr>
           <a:xfrm>
-            <a:off x="274320" y="109728"/>
-            <a:ext cx="11612880" cy="777240"/>
+            <a:off x="274320" y="91440"/>
+            <a:ext cx="11612880" cy="804672"/>
           </a:xfrm>
           <a:prstGeom prst="rect">
             <a:avLst/>
@@ -7069,7 +8996,7 @@
           <a:p>
             <a:pPr algn="l"/>
             <a:r>
-              <a:rPr sz="2800" b="1" i="0">
+              <a:rPr sz="2700" b="1" i="0">
                 <a:solidFill>
                   <a:srgbClr val="FFFFFF"/>
                 </a:solidFill>
@@ -7087,8 +9014,8 @@
         </p:nvSpPr>
         <p:spPr>
           <a:xfrm>
-            <a:off x="182880" y="1051560"/>
-            <a:ext cx="5760720" cy="4114800"/>
+            <a:off x="182880" y="1024128"/>
+            <a:ext cx="5669280" cy="3611880"/>
           </a:xfrm>
           <a:prstGeom prst="rect">
             <a:avLst/>
@@ -7130,8 +9057,8 @@
         </p:nvSpPr>
         <p:spPr>
           <a:xfrm>
-            <a:off x="320040" y="1097280"/>
-            <a:ext cx="5486400" cy="411480"/>
+            <a:off x="320040" y="1069848"/>
+            <a:ext cx="5394960" cy="384048"/>
           </a:xfrm>
           <a:prstGeom prst="rect">
             <a:avLst/>
@@ -7172,8 +9099,8 @@
         </p:blipFill>
         <p:spPr>
           <a:xfrm>
-            <a:off x="228600" y="1508760"/>
-            <a:ext cx="5669280" cy="3376346"/>
+            <a:off x="228600" y="1463040"/>
+            <a:ext cx="5577840" cy="3321889"/>
           </a:xfrm>
           <a:prstGeom prst="rect">
             <a:avLst/>
@@ -7188,8 +9115,8 @@
         </p:nvSpPr>
         <p:spPr>
           <a:xfrm>
-            <a:off x="6217920" y="1051560"/>
-            <a:ext cx="5760720" cy="4114800"/>
+            <a:off x="6217920" y="1024128"/>
+            <a:ext cx="5760720" cy="3611880"/>
           </a:xfrm>
           <a:prstGeom prst="rect">
             <a:avLst/>
@@ -7231,8 +9158,8 @@
         </p:nvSpPr>
         <p:spPr>
           <a:xfrm>
-            <a:off x="6355080" y="1097280"/>
-            <a:ext cx="5486400" cy="411480"/>
+            <a:off x="6355080" y="1069848"/>
+            <a:ext cx="5486400" cy="384048"/>
           </a:xfrm>
           <a:prstGeom prst="rect">
             <a:avLst/>
@@ -7273,8 +9200,8 @@
         </p:blipFill>
         <p:spPr>
           <a:xfrm>
-            <a:off x="6263640" y="1508760"/>
-            <a:ext cx="5669280" cy="3955312"/>
+            <a:off x="6263640" y="1463040"/>
+            <a:ext cx="5623560" cy="3923414"/>
           </a:xfrm>
           <a:prstGeom prst="rect">
             <a:avLst/>
@@ -7289,8 +9216,8 @@
         </p:nvSpPr>
         <p:spPr>
           <a:xfrm>
-            <a:off x="182880" y="5257800"/>
-            <a:ext cx="11795760" cy="1325880"/>
+            <a:off x="182880" y="4727448"/>
+            <a:ext cx="11795760" cy="1920240"/>
           </a:xfrm>
           <a:prstGeom prst="rect">
             <a:avLst/>
@@ -7332,8 +9259,8 @@
         </p:nvSpPr>
         <p:spPr>
           <a:xfrm>
-            <a:off x="365760" y="5321808"/>
-            <a:ext cx="11430000" cy="411480"/>
+            <a:off x="365760" y="4791456"/>
+            <a:ext cx="11430000" cy="420624"/>
           </a:xfrm>
           <a:prstGeom prst="rect">
             <a:avLst/>
@@ -7353,7 +9280,7 @@
                   <a:srgbClr val="2ECC71"/>
                 </a:solidFill>
               </a:rPr>
-              <a:t>Best model: Logistic Regression  |  CV accuracy 0.730  |  Test accuracy 0.720</a:t>
+              <a:t>Best model: Logistic Regression  |  CV 0.730  |  Test 0.720</a:t>
             </a:r>
           </a:p>
         </p:txBody>
@@ -7366,8 +9293,8 @@
         </p:nvSpPr>
         <p:spPr>
           <a:xfrm>
-            <a:off x="365760" y="5760720"/>
-            <a:ext cx="11430000" cy="411480"/>
+            <a:off x="365760" y="5248656"/>
+            <a:ext cx="11430000" cy="384048"/>
           </a:xfrm>
           <a:prstGeom prst="rect">
             <a:avLst/>
@@ -7387,7 +9314,75 @@
                   <a:srgbClr val="CCCCCC"/>
                 </a:solidFill>
               </a:rPr>
-              <a:t>Failure F1=0.775  ·  Acquisition F1=0.682  ·  IPO F1≈0.22 (imbalance)   →   IPO motivates binary classification</a:t>
+              <a:t>Failure F1=0.775  ·  Acquisition F1=0.682  ·  IPO F1≈0.22  →  IPO nearly unlearnable</a:t>
+            </a:r>
+          </a:p>
+        </p:txBody>
+      </p:sp>
+      <p:sp>
+        <p:nvSpPr>
+          <p:cNvPr id="13" name="TextBox 12"/>
+          <p:cNvSpPr txBox="1"/>
+          <p:nvPr/>
+        </p:nvSpPr>
+        <p:spPr>
+          <a:xfrm>
+            <a:off x="365760" y="5687568"/>
+            <a:ext cx="11430000" cy="384048"/>
+          </a:xfrm>
+          <a:prstGeom prst="rect">
+            <a:avLst/>
+          </a:prstGeom>
+          <a:noFill/>
+        </p:spPr>
+        <p:txBody>
+          <a:bodyPr wrap="none">
+            <a:spAutoFit/>
+          </a:bodyPr>
+          <a:lstStyle/>
+          <a:p>
+            <a:pPr algn="ctr"/>
+            <a:r>
+              <a:rPr sz="1300" b="0" i="1">
+                <a:solidFill>
+                  <a:srgbClr val="3498DB"/>
+                </a:solidFill>
+              </a:rPr>
+              <a:t>Top LR coefficients: revenue_million &amp; product_traction  (consistent with EDA ★)</a:t>
+            </a:r>
+          </a:p>
+        </p:txBody>
+      </p:sp>
+      <p:sp>
+        <p:nvSpPr>
+          <p:cNvPr id="14" name="TextBox 13"/>
+          <p:cNvSpPr txBox="1"/>
+          <p:nvPr/>
+        </p:nvSpPr>
+        <p:spPr>
+          <a:xfrm>
+            <a:off x="365760" y="6108192"/>
+            <a:ext cx="11430000" cy="384048"/>
+          </a:xfrm>
+          <a:prstGeom prst="rect">
+            <a:avLst/>
+          </a:prstGeom>
+          <a:noFill/>
+        </p:spPr>
+        <p:txBody>
+          <a:bodyPr wrap="none">
+            <a:spAutoFit/>
+          </a:bodyPr>
+          <a:lstStyle/>
+          <a:p>
+            <a:pPr algn="ctr"/>
+            <a:r>
+              <a:rPr sz="1300" b="0" i="1">
+                <a:solidFill>
+                  <a:srgbClr val="F39C12"/>
+                </a:solidFill>
+              </a:rPr>
+              <a:t>IPO motivates binary classification →</a:t>
             </a:r>
           </a:p>
         </p:txBody>
@@ -7469,8 +9464,8 @@
         </p:nvSpPr>
         <p:spPr>
           <a:xfrm>
-            <a:off x="274320" y="109728"/>
-            <a:ext cx="11612880" cy="777240"/>
+            <a:off x="274320" y="91440"/>
+            <a:ext cx="11612880" cy="804672"/>
           </a:xfrm>
           <a:prstGeom prst="rect">
             <a:avLst/>
@@ -7485,7 +9480,7 @@
           <a:p>
             <a:pPr algn="l"/>
             <a:r>
-              <a:rPr sz="2800" b="1" i="0">
+              <a:rPr sz="2700" b="1" i="0">
                 <a:solidFill>
                   <a:srgbClr val="FFFFFF"/>
                 </a:solidFill>
@@ -7503,8 +9498,8 @@
         </p:nvSpPr>
         <p:spPr>
           <a:xfrm>
-            <a:off x="182880" y="1051560"/>
-            <a:ext cx="5760720" cy="4114800"/>
+            <a:off x="182880" y="1024128"/>
+            <a:ext cx="5669280" cy="3611880"/>
           </a:xfrm>
           <a:prstGeom prst="rect">
             <a:avLst/>
@@ -7546,8 +9541,8 @@
         </p:nvSpPr>
         <p:spPr>
           <a:xfrm>
-            <a:off x="320040" y="1097280"/>
-            <a:ext cx="5486400" cy="411480"/>
+            <a:off x="320040" y="1069848"/>
+            <a:ext cx="5394960" cy="384048"/>
           </a:xfrm>
           <a:prstGeom prst="rect">
             <a:avLst/>
@@ -7588,8 +9583,8 @@
         </p:blipFill>
         <p:spPr>
           <a:xfrm>
-            <a:off x="228600" y="1508760"/>
-            <a:ext cx="5669280" cy="3124800"/>
+            <a:off x="228600" y="1463040"/>
+            <a:ext cx="5577840" cy="3074400"/>
           </a:xfrm>
           <a:prstGeom prst="rect">
             <a:avLst/>
@@ -7604,8 +9599,8 @@
         </p:nvSpPr>
         <p:spPr>
           <a:xfrm>
-            <a:off x="6217920" y="1051560"/>
-            <a:ext cx="5760720" cy="4114800"/>
+            <a:off x="6217920" y="1024128"/>
+            <a:ext cx="5760720" cy="3611880"/>
           </a:xfrm>
           <a:prstGeom prst="rect">
             <a:avLst/>
@@ -7647,8 +9642,8 @@
         </p:nvSpPr>
         <p:spPr>
           <a:xfrm>
-            <a:off x="6355080" y="1097280"/>
-            <a:ext cx="5486400" cy="411480"/>
+            <a:off x="6355080" y="1069848"/>
+            <a:ext cx="5486400" cy="384048"/>
           </a:xfrm>
           <a:prstGeom prst="rect">
             <a:avLst/>
@@ -7689,8 +9684,8 @@
         </p:blipFill>
         <p:spPr>
           <a:xfrm>
-            <a:off x="6263640" y="1508760"/>
-            <a:ext cx="5669280" cy="4234019"/>
+            <a:off x="6263640" y="1463040"/>
+            <a:ext cx="5623560" cy="4199874"/>
           </a:xfrm>
           <a:prstGeom prst="rect">
             <a:avLst/>
@@ -7705,8 +9700,8 @@
         </p:nvSpPr>
         <p:spPr>
           <a:xfrm>
-            <a:off x="182880" y="5257800"/>
-            <a:ext cx="11795760" cy="1325880"/>
+            <a:off x="182880" y="4727448"/>
+            <a:ext cx="11795760" cy="1920240"/>
           </a:xfrm>
           <a:prstGeom prst="rect">
             <a:avLst/>
@@ -7748,8 +9743,8 @@
         </p:nvSpPr>
         <p:spPr>
           <a:xfrm>
-            <a:off x="365760" y="5321808"/>
-            <a:ext cx="11430000" cy="411480"/>
+            <a:off x="365760" y="4791456"/>
+            <a:ext cx="11430000" cy="420624"/>
           </a:xfrm>
           <a:prstGeom prst="rect">
             <a:avLst/>
@@ -7769,7 +9764,7 @@
                   <a:srgbClr val="2ECC71"/>
                 </a:solidFill>
               </a:rPr>
-              <a:t>Macro F1: 0.584 → 0.737  (+26%)   ·   AUC = 0.816   ·   Best model: Logistic Regression</a:t>
+              <a:t>Macro F1: 0.584 → 0.737  (+26%)   ·   AUC = 0.816   ·   Best: Logistic Regression</a:t>
             </a:r>
           </a:p>
         </p:txBody>
@@ -7782,8 +9777,8 @@
         </p:nvSpPr>
         <p:spPr>
           <a:xfrm>
-            <a:off x="365760" y="5760720"/>
-            <a:ext cx="11430000" cy="411480"/>
+            <a:off x="365760" y="5248656"/>
+            <a:ext cx="11430000" cy="384048"/>
           </a:xfrm>
           <a:prstGeom prst="rect">
             <a:avLst/>
@@ -7803,7 +9798,41 @@
                   <a:srgbClr val="CCCCCC"/>
                 </a:solidFill>
               </a:rPr>
-              <a:t>Removing the rare IPO class (2.1%) recovers a strong binary classifier — class imbalance was the bottleneck</a:t>
+              <a:t>Removing IPO (2.1%) recovers a strong binary classifier — class imbalance was the bottleneck</a:t>
+            </a:r>
+          </a:p>
+        </p:txBody>
+      </p:sp>
+      <p:sp>
+        <p:nvSpPr>
+          <p:cNvPr id="13" name="TextBox 12"/>
+          <p:cNvSpPr txBox="1"/>
+          <p:nvPr/>
+        </p:nvSpPr>
+        <p:spPr>
+          <a:xfrm>
+            <a:off x="365760" y="5687568"/>
+            <a:ext cx="11430000" cy="384048"/>
+          </a:xfrm>
+          <a:prstGeom prst="rect">
+            <a:avLst/>
+          </a:prstGeom>
+          <a:noFill/>
+        </p:spPr>
+        <p:txBody>
+          <a:bodyPr wrap="none">
+            <a:spAutoFit/>
+          </a:bodyPr>
+          <a:lstStyle/>
+          <a:p>
+            <a:pPr algn="ctr"/>
+            <a:r>
+              <a:rPr sz="1300" b="0" i="1">
+                <a:solidFill>
+                  <a:srgbClr val="3498DB"/>
+                </a:solidFill>
+              </a:rPr>
+              <a:t>AUC=0.816: ranks Acquisition above Failure correctly in 81.6% of random pairs</a:t>
             </a:r>
           </a:p>
         </p:txBody>
@@ -7885,8 +9914,8 @@
         </p:nvSpPr>
         <p:spPr>
           <a:xfrm>
-            <a:off x="274320" y="109728"/>
-            <a:ext cx="11612880" cy="777240"/>
+            <a:off x="274320" y="91440"/>
+            <a:ext cx="11612880" cy="804672"/>
           </a:xfrm>
           <a:prstGeom prst="rect">
             <a:avLst/>
@@ -7901,7 +9930,7 @@
           <a:p>
             <a:pPr algn="l"/>
             <a:r>
-              <a:rPr sz="2800" b="1" i="0">
+              <a:rPr sz="2700" b="1" i="0">
                 <a:solidFill>
                   <a:srgbClr val="FFFFFF"/>
                 </a:solidFill>
@@ -7919,7 +9948,7 @@
         </p:nvSpPr>
         <p:spPr>
           <a:xfrm>
-            <a:off x="274320" y="1097280"/>
+            <a:off x="274320" y="1024128"/>
             <a:ext cx="54864" cy="5394960"/>
           </a:xfrm>
           <a:prstGeom prst="rect">
@@ -7962,8 +9991,8 @@
         </p:nvSpPr>
         <p:spPr>
           <a:xfrm>
-            <a:off x="411480" y="1097280"/>
-            <a:ext cx="5394960" cy="457200"/>
+            <a:off x="411480" y="1078992"/>
+            <a:ext cx="5394960" cy="420624"/>
           </a:xfrm>
           <a:prstGeom prst="rect">
             <a:avLst/>
@@ -7978,12 +10007,12 @@
           <a:p>
             <a:pPr algn="l"/>
             <a:r>
-              <a:rPr sz="1700" b="0" i="0">
+              <a:rPr sz="1800" b="0" i="0">
                 <a:solidFill>
                   <a:srgbClr val="FFFFFF"/>
                 </a:solidFill>
               </a:rPr>
-              <a:t>Outcome label set aside → cluster on features only</a:t>
+              <a:t>Outcome label set aside → cluster on X only</a:t>
             </a:r>
           </a:p>
         </p:txBody>
@@ -7996,8 +10025,8 @@
         </p:nvSpPr>
         <p:spPr>
           <a:xfrm>
-            <a:off x="411480" y="1572768"/>
-            <a:ext cx="5394960" cy="457200"/>
+            <a:off x="411480" y="1545336"/>
+            <a:ext cx="5394960" cy="420624"/>
           </a:xfrm>
           <a:prstGeom prst="rect">
             <a:avLst/>
@@ -8017,7 +10046,7 @@
                   <a:srgbClr val="CCCCCC"/>
                 </a:solidFill>
               </a:rPr>
-              <a:t>    · Only numerical features (7)  — categorical excluded</a:t>
+              <a:t>    · 7 numerical features only  (categorical excluded)</a:t>
             </a:r>
           </a:p>
         </p:txBody>
@@ -8030,8 +10059,8 @@
         </p:nvSpPr>
         <p:spPr>
           <a:xfrm>
-            <a:off x="411480" y="1975104"/>
-            <a:ext cx="5394960" cy="457200"/>
+            <a:off x="411480" y="1965960"/>
+            <a:ext cx="5394960" cy="420624"/>
           </a:xfrm>
           <a:prstGeom prst="rect">
             <a:avLst/>
@@ -8051,7 +10080,7 @@
                   <a:srgbClr val="CCCCCC"/>
                 </a:solidFill>
               </a:rPr>
-              <a:t>    · Same preprocessing: log1p + StandardScaler</a:t>
+              <a:t>    · log1p + StandardScaler</a:t>
             </a:r>
           </a:p>
         </p:txBody>
@@ -8064,8 +10093,8 @@
         </p:nvSpPr>
         <p:spPr>
           <a:xfrm>
-            <a:off x="411480" y="2560320"/>
-            <a:ext cx="5394960" cy="457200"/>
+            <a:off x="411480" y="2551176"/>
+            <a:ext cx="5394960" cy="420624"/>
           </a:xfrm>
           <a:prstGeom prst="rect">
             <a:avLst/>
@@ -8080,12 +10109,12 @@
           <a:p>
             <a:pPr algn="l"/>
             <a:r>
-              <a:rPr sz="1700" b="0" i="0">
+              <a:rPr sz="1800" b="0" i="0">
                 <a:solidFill>
                   <a:srgbClr val="FFFFFF"/>
                 </a:solidFill>
               </a:rPr>
-              <a:t>PCA → 2D for visualisation</a:t>
+              <a:t>PCA → 2D  (PC1+PC2 = 39.65% variance)</a:t>
             </a:r>
           </a:p>
         </p:txBody>
@@ -8098,8 +10127,8 @@
         </p:nvSpPr>
         <p:spPr>
           <a:xfrm>
-            <a:off x="411480" y="3035808"/>
-            <a:ext cx="5394960" cy="457200"/>
+            <a:off x="411480" y="3182112"/>
+            <a:ext cx="5394960" cy="420624"/>
           </a:xfrm>
           <a:prstGeom prst="rect">
             <a:avLst/>
@@ -8114,26 +10143,60 @@
           <a:p>
             <a:pPr algn="l"/>
             <a:r>
+              <a:rPr sz="1800" b="0" i="0">
+                <a:solidFill>
+                  <a:srgbClr val="FFFFFF"/>
+                </a:solidFill>
+              </a:rPr>
+              <a:t>Two methods cross-validate each other:</a:t>
+            </a:r>
+          </a:p>
+        </p:txBody>
+      </p:sp>
+      <p:sp>
+        <p:nvSpPr>
+          <p:cNvPr id="10" name="TextBox 9"/>
+          <p:cNvSpPr txBox="1"/>
+          <p:nvPr/>
+        </p:nvSpPr>
+        <p:spPr>
+          <a:xfrm>
+            <a:off x="411480" y="3648456"/>
+            <a:ext cx="5394960" cy="420624"/>
+          </a:xfrm>
+          <a:prstGeom prst="rect">
+            <a:avLst/>
+          </a:prstGeom>
+          <a:noFill/>
+        </p:spPr>
+        <p:txBody>
+          <a:bodyPr wrap="none">
+            <a:spAutoFit/>
+          </a:bodyPr>
+          <a:lstStyle/>
+          <a:p>
+            <a:pPr algn="l"/>
+            <a:r>
               <a:rPr sz="1500" b="0" i="1">
                 <a:solidFill>
                   <a:srgbClr val="CCCCCC"/>
                 </a:solidFill>
               </a:rPr>
-              <a:t>    · PC1 + PC2 explain 39.65% of variance</a:t>
-            </a:r>
-          </a:p>
-        </p:txBody>
-      </p:sp>
-      <p:sp>
-        <p:nvSpPr>
-          <p:cNvPr id="10" name="TextBox 9"/>
-          <p:cNvSpPr txBox="1"/>
-          <p:nvPr/>
-        </p:nvSpPr>
-        <p:spPr>
-          <a:xfrm>
-            <a:off x="411480" y="3621024"/>
-            <a:ext cx="5394960" cy="457200"/>
+              <a:t>    · K-Means (k=3)  →  full 100 000 rows</a:t>
+            </a:r>
+          </a:p>
+        </p:txBody>
+      </p:sp>
+      <p:sp>
+        <p:nvSpPr>
+          <p:cNvPr id="11" name="TextBox 10"/>
+          <p:cNvSpPr txBox="1"/>
+          <p:nvPr/>
+        </p:nvSpPr>
+        <p:spPr>
+          <a:xfrm>
+            <a:off x="411480" y="4069080"/>
+            <a:ext cx="5394960" cy="420624"/>
           </a:xfrm>
           <a:prstGeom prst="rect">
             <a:avLst/>
@@ -8148,26 +10211,94 @@
           <a:p>
             <a:pPr algn="l"/>
             <a:r>
-              <a:rPr sz="1700" b="0" i="0">
+              <a:rPr sz="1500" b="0" i="1">
+                <a:solidFill>
+                  <a:srgbClr val="CCCCCC"/>
+                </a:solidFill>
+              </a:rPr>
+              <a:t>    · Agglomerative/Ward  →  5 000-row subsample</a:t>
+            </a:r>
+          </a:p>
+        </p:txBody>
+      </p:sp>
+      <p:sp>
+        <p:nvSpPr>
+          <p:cNvPr id="12" name="TextBox 11"/>
+          <p:cNvSpPr txBox="1"/>
+          <p:nvPr/>
+        </p:nvSpPr>
+        <p:spPr>
+          <a:xfrm>
+            <a:off x="411480" y="4489704"/>
+            <a:ext cx="5394960" cy="420624"/>
+          </a:xfrm>
+          <a:prstGeom prst="rect">
+            <a:avLst/>
+          </a:prstGeom>
+          <a:noFill/>
+        </p:spPr>
+        <p:txBody>
+          <a:bodyPr wrap="none">
+            <a:spAutoFit/>
+          </a:bodyPr>
+          <a:lstStyle/>
+          <a:p>
+            <a:pPr algn="l"/>
+            <a:r>
+              <a:rPr sz="1500" b="0" i="1">
+                <a:solidFill>
+                  <a:srgbClr val="CCCCCC"/>
+                </a:solidFill>
+              </a:rPr>
+              <a:t>    · (O(n²) memory — not scalable to 100k)</a:t>
+            </a:r>
+          </a:p>
+        </p:txBody>
+      </p:sp>
+      <p:sp>
+        <p:nvSpPr>
+          <p:cNvPr id="13" name="TextBox 12"/>
+          <p:cNvSpPr txBox="1"/>
+          <p:nvPr/>
+        </p:nvSpPr>
+        <p:spPr>
+          <a:xfrm>
+            <a:off x="411480" y="5074920"/>
+            <a:ext cx="5394960" cy="420624"/>
+          </a:xfrm>
+          <a:prstGeom prst="rect">
+            <a:avLst/>
+          </a:prstGeom>
+          <a:noFill/>
+        </p:spPr>
+        <p:txBody>
+          <a:bodyPr wrap="none">
+            <a:spAutoFit/>
+          </a:bodyPr>
+          <a:lstStyle/>
+          <a:p>
+            <a:pPr algn="l"/>
+            <a:r>
+              <a:rPr sz="1800" b="0" i="0">
                 <a:solidFill>
                   <a:srgbClr val="FFFFFF"/>
                 </a:solidFill>
               </a:rPr>
-              <a:t>Two methods — cross-validate each other:</a:t>
-            </a:r>
-          </a:p>
-        </p:txBody>
-      </p:sp>
-      <p:sp>
-        <p:nvSpPr>
-          <p:cNvPr id="11" name="TextBox 10"/>
-          <p:cNvSpPr txBox="1"/>
-          <p:nvPr/>
-        </p:nvSpPr>
-        <p:spPr>
-          <a:xfrm>
-            <a:off x="411480" y="4096512"/>
-            <a:ext cx="5394960" cy="457200"/>
+              <a:t>Dendrogram (right) confirms k=3:</a:t>
+            </a:r>
+          </a:p>
+        </p:txBody>
+      </p:sp>
+      <p:sp>
+        <p:nvSpPr>
+          <p:cNvPr id="14" name="TextBox 13"/>
+          <p:cNvSpPr txBox="1"/>
+          <p:nvPr/>
+        </p:nvSpPr>
+        <p:spPr>
+          <a:xfrm>
+            <a:off x="411480" y="5541264"/>
+            <a:ext cx="5394960" cy="420624"/>
           </a:xfrm>
           <a:prstGeom prst="rect">
             <a:avLst/>
@@ -8187,55 +10318,21 @@
                   <a:srgbClr val="CCCCCC"/>
                 </a:solidFill>
               </a:rPr>
-              <a:t>    · K-Means (k=3)  on full 100 000 rows</a:t>
-            </a:r>
-          </a:p>
-        </p:txBody>
-      </p:sp>
-      <p:sp>
-        <p:nvSpPr>
-          <p:cNvPr id="12" name="TextBox 11"/>
-          <p:cNvSpPr txBox="1"/>
-          <p:nvPr/>
-        </p:nvSpPr>
-        <p:spPr>
-          <a:xfrm>
-            <a:off x="411480" y="4498848"/>
-            <a:ext cx="5394960" cy="457200"/>
-          </a:xfrm>
-          <a:prstGeom prst="rect">
-            <a:avLst/>
-          </a:prstGeom>
-          <a:noFill/>
-        </p:spPr>
-        <p:txBody>
-          <a:bodyPr wrap="none">
-            <a:spAutoFit/>
-          </a:bodyPr>
-          <a:lstStyle/>
-          <a:p>
-            <a:pPr algn="l"/>
-            <a:r>
-              <a:rPr sz="1500" b="0" i="1">
-                <a:solidFill>
-                  <a:srgbClr val="CCCCCC"/>
-                </a:solidFill>
-              </a:rPr>
-              <a:t>    · Agglomerative/Ward  on 5 000-row subsample  (O(n²) memory)</a:t>
-            </a:r>
-          </a:p>
-        </p:txBody>
-      </p:sp>
-      <p:sp>
-        <p:nvSpPr>
-          <p:cNvPr id="13" name="Rectangle 12"/>
+              <a:t>    · Large gap before 3rd merge</a:t>
+            </a:r>
+          </a:p>
+        </p:txBody>
+      </p:sp>
+      <p:sp>
+        <p:nvSpPr>
+          <p:cNvPr id="15" name="Rectangle 14"/>
           <p:cNvSpPr/>
           <p:nvPr/>
         </p:nvSpPr>
         <p:spPr>
           <a:xfrm>
-            <a:off x="6400800" y="1097280"/>
-            <a:ext cx="5394960" cy="5394960"/>
+            <a:off x="6400800" y="1024128"/>
+            <a:ext cx="5577840" cy="5422392"/>
           </a:xfrm>
           <a:prstGeom prst="rect">
             <a:avLst/>
@@ -8271,41 +10368,41 @@
       </p:sp>
       <p:sp>
         <p:nvSpPr>
-          <p:cNvPr id="14" name="TextBox 13"/>
-          <p:cNvSpPr txBox="1"/>
-          <p:nvPr/>
-        </p:nvSpPr>
-        <p:spPr>
-          <a:xfrm>
-            <a:off x="6537960" y="1143000"/>
-            <a:ext cx="5120640" cy="457200"/>
-          </a:xfrm>
-          <a:prstGeom prst="rect">
-            <a:avLst/>
-          </a:prstGeom>
-          <a:noFill/>
-        </p:spPr>
-        <p:txBody>
-          <a:bodyPr wrap="none">
-            <a:spAutoFit/>
-          </a:bodyPr>
-          <a:lstStyle/>
-          <a:p>
-            <a:pPr algn="ctr"/>
-            <a:r>
-              <a:rPr sz="1400" b="1" i="0">
+          <p:cNvPr id="16" name="TextBox 15"/>
+          <p:cNvSpPr txBox="1"/>
+          <p:nvPr/>
+        </p:nvSpPr>
+        <p:spPr>
+          <a:xfrm>
+            <a:off x="6537960" y="1115568"/>
+            <a:ext cx="5212080" cy="411480"/>
+          </a:xfrm>
+          <a:prstGeom prst="rect">
+            <a:avLst/>
+          </a:prstGeom>
+          <a:noFill/>
+        </p:spPr>
+        <p:txBody>
+          <a:bodyPr wrap="none">
+            <a:spAutoFit/>
+          </a:bodyPr>
+          <a:lstStyle/>
+          <a:p>
+            <a:pPr algn="ctr"/>
+            <a:r>
+              <a:rPr sz="1500" b="1" i="0">
                 <a:solidFill>
                   <a:srgbClr val="FFFFFF"/>
                 </a:solidFill>
               </a:rPr>
-              <a:t>Dendrogram (Ward linkage) → confirms k=3</a:t>
+              <a:t>Dendrogram — Ward linkage</a:t>
             </a:r>
           </a:p>
         </p:txBody>
       </p:sp>
       <p:pic>
         <p:nvPicPr>
-          <p:cNvPr id="15" name="Picture 14" descr="hc_dendrogram.png"/>
+          <p:cNvPr id="17" name="Picture 16" descr="hc_dendrogram.png"/>
           <p:cNvPicPr>
             <a:picLocks noChangeAspect="1"/>
           </p:cNvPicPr>
@@ -8319,8 +10416,8 @@
         </p:blipFill>
         <p:spPr>
           <a:xfrm>
-            <a:off x="6446520" y="1600200"/>
-            <a:ext cx="5303520" cy="3700130"/>
+            <a:off x="6446520" y="1572768"/>
+            <a:ext cx="5394960" cy="3763926"/>
           </a:xfrm>
           <a:prstGeom prst="rect">
             <a:avLst/>
@@ -8404,8 +10501,8 @@
         </p:nvSpPr>
         <p:spPr>
           <a:xfrm>
-            <a:off x="274320" y="109728"/>
-            <a:ext cx="11612880" cy="777240"/>
+            <a:off x="274320" y="91440"/>
+            <a:ext cx="11612880" cy="804672"/>
           </a:xfrm>
           <a:prstGeom prst="rect">
             <a:avLst/>
@@ -8420,12 +10517,12 @@
           <a:p>
             <a:pPr algn="l"/>
             <a:r>
-              <a:rPr sz="2800" b="1" i="0">
+              <a:rPr sz="2700" b="1" i="0">
                 <a:solidFill>
                   <a:srgbClr val="FFFFFF"/>
                 </a:solidFill>
               </a:rPr>
-              <a:t>Choosing k = 3  —  Silhouette + Visual Comparison</a:t>
+              <a:t>Choosing k = 3  —  Visual Comparison</a:t>
             </a:r>
           </a:p>
         </p:txBody>
@@ -8438,8 +10535,8 @@
         </p:nvSpPr>
         <p:spPr>
           <a:xfrm>
-            <a:off x="182880" y="1051560"/>
-            <a:ext cx="7772400" cy="4206240"/>
+            <a:off x="182880" y="1024128"/>
+            <a:ext cx="7406640" cy="3657600"/>
           </a:xfrm>
           <a:prstGeom prst="rect">
             <a:avLst/>
@@ -8481,8 +10578,8 @@
         </p:nvSpPr>
         <p:spPr>
           <a:xfrm>
-            <a:off x="320040" y="1097280"/>
-            <a:ext cx="7498079" cy="411480"/>
+            <a:off x="320040" y="1069848"/>
+            <a:ext cx="7132320" cy="384048"/>
           </a:xfrm>
           <a:prstGeom prst="rect">
             <a:avLst/>
@@ -8502,7 +10599,7 @@
                   <a:srgbClr val="FFFFFF"/>
                 </a:solidFill>
               </a:rPr>
-              <a:t>K-Means: k=2 vs k=3 (PCA 2D)</a:t>
+              <a:t>K-Means  k=2  vs  k=3  (PCA 2D)</a:t>
             </a:r>
           </a:p>
         </p:txBody>
@@ -8523,8 +10620,8 @@
         </p:blipFill>
         <p:spPr>
           <a:xfrm>
-            <a:off x="228600" y="1536192"/>
-            <a:ext cx="7589520" cy="3234698"/>
+            <a:off x="228600" y="1481328"/>
+            <a:ext cx="7315200" cy="3117781"/>
           </a:xfrm>
           <a:prstGeom prst="rect">
             <a:avLst/>
@@ -8539,8 +10636,8 @@
         </p:nvSpPr>
         <p:spPr>
           <a:xfrm>
-            <a:off x="8138160" y="1051560"/>
-            <a:ext cx="3840480" cy="4206240"/>
+            <a:off x="7772400" y="1024128"/>
+            <a:ext cx="4206240" cy="3657600"/>
           </a:xfrm>
           <a:prstGeom prst="rect">
             <a:avLst/>
@@ -8582,8 +10679,8 @@
         </p:nvSpPr>
         <p:spPr>
           <a:xfrm>
-            <a:off x="8275320" y="1143000"/>
-            <a:ext cx="3566160" cy="457200"/>
+            <a:off x="7909560" y="1115568"/>
+            <a:ext cx="3840480" cy="411480"/>
           </a:xfrm>
           <a:prstGeom prst="rect">
             <a:avLst/>
@@ -8603,7 +10700,7 @@
                   <a:srgbClr val="F39C12"/>
                 </a:solidFill>
               </a:rPr>
-              <a:t>Why k=3?</a:t>
+              <a:t>Why k = 3 ?</a:t>
             </a:r>
           </a:p>
         </p:txBody>
@@ -8616,8 +10713,8 @@
         </p:nvSpPr>
         <p:spPr>
           <a:xfrm>
-            <a:off x="8275320" y="1645920"/>
-            <a:ext cx="3566160" cy="457200"/>
+            <a:off x="7909560" y="1572768"/>
+            <a:ext cx="3840480" cy="420624"/>
           </a:xfrm>
           <a:prstGeom prst="rect">
             <a:avLst/>
@@ -8632,7 +10729,7 @@
           <a:p>
             <a:pPr algn="l"/>
             <a:r>
-              <a:rPr sz="1700" b="0" i="0">
+              <a:rPr sz="1800" b="0" i="0">
                 <a:solidFill>
                   <a:srgbClr val="FFFFFF"/>
                 </a:solidFill>
@@ -8650,8 +10747,8 @@
         </p:nvSpPr>
         <p:spPr>
           <a:xfrm>
-            <a:off x="8275320" y="2075688"/>
-            <a:ext cx="3566160" cy="457200"/>
+            <a:off x="7909560" y="1975104"/>
+            <a:ext cx="3840480" cy="420624"/>
           </a:xfrm>
           <a:prstGeom prst="rect">
             <a:avLst/>
@@ -8671,7 +10768,7 @@
                   <a:srgbClr val="CCCCCC"/>
                 </a:solidFill>
               </a:rPr>
-              <a:t>    · k=2 → 0.1612</a:t>
+              <a:t>    · k=2  →  0.1612</a:t>
             </a:r>
           </a:p>
         </p:txBody>
@@ -8684,8 +10781,8 @@
         </p:nvSpPr>
         <p:spPr>
           <a:xfrm>
-            <a:off x="8275320" y="2432304"/>
-            <a:ext cx="3566160" cy="457200"/>
+            <a:off x="7909560" y="2331720"/>
+            <a:ext cx="3840480" cy="420624"/>
           </a:xfrm>
           <a:prstGeom prst="rect">
             <a:avLst/>
@@ -8705,7 +10802,7 @@
                   <a:srgbClr val="CCCCCC"/>
                 </a:solidFill>
               </a:rPr>
-              <a:t>    · k=3 → 0.1553  (similar)</a:t>
+              <a:t>    · k=3  →  0.1553  (similar)</a:t>
             </a:r>
           </a:p>
         </p:txBody>
@@ -8718,8 +10815,8 @@
         </p:nvSpPr>
         <p:spPr>
           <a:xfrm>
-            <a:off x="8275320" y="2971800"/>
-            <a:ext cx="3566160" cy="457200"/>
+            <a:off x="7909560" y="2852928"/>
+            <a:ext cx="3840480" cy="420624"/>
           </a:xfrm>
           <a:prstGeom prst="rect">
             <a:avLst/>
@@ -8734,12 +10831,12 @@
           <a:p>
             <a:pPr algn="l"/>
             <a:r>
-              <a:rPr sz="1700" b="0" i="0">
+              <a:rPr sz="1800" b="0" i="0">
                 <a:solidFill>
                   <a:srgbClr val="FFFFFF"/>
                 </a:solidFill>
               </a:rPr>
-              <a:t>Dendrogram gap</a:t>
+              <a:t>Dendrogram gap at k=3</a:t>
             </a:r>
           </a:p>
         </p:txBody>
@@ -8752,8 +10849,8 @@
         </p:nvSpPr>
         <p:spPr>
           <a:xfrm>
-            <a:off x="8275320" y="3401568"/>
-            <a:ext cx="3566160" cy="457200"/>
+            <a:off x="7909560" y="3419856"/>
+            <a:ext cx="3840480" cy="420624"/>
           </a:xfrm>
           <a:prstGeom prst="rect">
             <a:avLst/>
@@ -8768,26 +10865,60 @@
           <a:p>
             <a:pPr algn="l"/>
             <a:r>
+              <a:rPr sz="1800" b="0" i="0">
+                <a:solidFill>
+                  <a:srgbClr val="FFFFFF"/>
+                </a:solidFill>
+              </a:rPr>
+              <a:t>k=3: richer interpretation</a:t>
+            </a:r>
+          </a:p>
+        </p:txBody>
+      </p:sp>
+      <p:sp>
+        <p:nvSpPr>
+          <p:cNvPr id="14" name="TextBox 13"/>
+          <p:cNvSpPr txBox="1"/>
+          <p:nvPr/>
+        </p:nvSpPr>
+        <p:spPr>
+          <a:xfrm>
+            <a:off x="7909560" y="3822192"/>
+            <a:ext cx="3840480" cy="420624"/>
+          </a:xfrm>
+          <a:prstGeom prst="rect">
+            <a:avLst/>
+          </a:prstGeom>
+          <a:noFill/>
+        </p:spPr>
+        <p:txBody>
+          <a:bodyPr wrap="none">
+            <a:spAutoFit/>
+          </a:bodyPr>
+          <a:lstStyle/>
+          <a:p>
+            <a:pPr algn="l"/>
+            <a:r>
               <a:rPr sz="1500" b="0" i="1">
                 <a:solidFill>
                   <a:srgbClr val="CCCCCC"/>
                 </a:solidFill>
               </a:rPr>
-              <a:t>    · Large gap before 3rd merge</a:t>
-            </a:r>
-          </a:p>
-        </p:txBody>
-      </p:sp>
-      <p:sp>
-        <p:nvSpPr>
-          <p:cNvPr id="14" name="TextBox 13"/>
-          <p:cNvSpPr txBox="1"/>
-          <p:nvPr/>
-        </p:nvSpPr>
-        <p:spPr>
-          <a:xfrm>
-            <a:off x="8275320" y="3941064"/>
-            <a:ext cx="3566160" cy="457200"/>
+              <a:t>    · Not just high vs low revenue</a:t>
+            </a:r>
+          </a:p>
+        </p:txBody>
+      </p:sp>
+      <p:sp>
+        <p:nvSpPr>
+          <p:cNvPr id="15" name="TextBox 14"/>
+          <p:cNvSpPr txBox="1"/>
+          <p:nvPr/>
+        </p:nvSpPr>
+        <p:spPr>
+          <a:xfrm>
+            <a:off x="7909560" y="4178808"/>
+            <a:ext cx="3840480" cy="420624"/>
           </a:xfrm>
           <a:prstGeom prst="rect">
             <a:avLst/>
@@ -8802,162 +10933,60 @@
           <a:p>
             <a:pPr algn="l"/>
             <a:r>
-              <a:rPr sz="1700" b="0" i="0">
+              <a:rPr sz="1500" b="0" i="1">
+                <a:solidFill>
+                  <a:srgbClr val="CCCCCC"/>
+                </a:solidFill>
+              </a:rPr>
+              <a:t>    · 3 distinct startup profiles</a:t>
+            </a:r>
+          </a:p>
+        </p:txBody>
+      </p:sp>
+      <p:sp>
+        <p:nvSpPr>
+          <p:cNvPr id="16" name="TextBox 15"/>
+          <p:cNvSpPr txBox="1"/>
+          <p:nvPr/>
+        </p:nvSpPr>
+        <p:spPr>
+          <a:xfrm>
+            <a:off x="7909560" y="4700016"/>
+            <a:ext cx="3840480" cy="420624"/>
+          </a:xfrm>
+          <a:prstGeom prst="rect">
+            <a:avLst/>
+          </a:prstGeom>
+          <a:noFill/>
+        </p:spPr>
+        <p:txBody>
+          <a:bodyPr wrap="none">
+            <a:spAutoFit/>
+          </a:bodyPr>
+          <a:lstStyle/>
+          <a:p>
+            <a:pPr algn="l"/>
+            <a:r>
+              <a:rPr sz="1800" b="0" i="0">
                 <a:solidFill>
                   <a:srgbClr val="FFFFFF"/>
                 </a:solidFill>
               </a:rPr>
-              <a:t>k=2 sanity check:</a:t>
-            </a:r>
-          </a:p>
-        </p:txBody>
-      </p:sp>
-      <p:sp>
-        <p:nvSpPr>
-          <p:cNvPr id="15" name="TextBox 14"/>
-          <p:cNvSpPr txBox="1"/>
-          <p:nvPr/>
-        </p:nvSpPr>
-        <p:spPr>
-          <a:xfrm>
-            <a:off x="8275320" y="4370832"/>
-            <a:ext cx="3566160" cy="457200"/>
-          </a:xfrm>
-          <a:prstGeom prst="rect">
-            <a:avLst/>
-          </a:prstGeom>
-          <a:noFill/>
-        </p:spPr>
-        <p:txBody>
-          <a:bodyPr wrap="none">
-            <a:spAutoFit/>
-          </a:bodyPr>
-          <a:lstStyle/>
-          <a:p>
-            <a:pPr algn="l"/>
-            <a:r>
-              <a:rPr sz="1500" b="0" i="1">
-                <a:solidFill>
-                  <a:srgbClr val="CCCCCC"/>
-                </a:solidFill>
-              </a:rPr>
-              <a:t>    · Cluster 1 → 79.7% Failure</a:t>
-            </a:r>
-          </a:p>
-        </p:txBody>
-      </p:sp>
-      <p:sp>
-        <p:nvSpPr>
-          <p:cNvPr id="16" name="TextBox 15"/>
-          <p:cNvSpPr txBox="1"/>
-          <p:nvPr/>
-        </p:nvSpPr>
-        <p:spPr>
-          <a:xfrm>
-            <a:off x="8275320" y="4727448"/>
-            <a:ext cx="3566160" cy="457200"/>
-          </a:xfrm>
-          <a:prstGeom prst="rect">
-            <a:avLst/>
-          </a:prstGeom>
-          <a:noFill/>
-        </p:spPr>
-        <p:txBody>
-          <a:bodyPr wrap="none">
-            <a:spAutoFit/>
-          </a:bodyPr>
-          <a:lstStyle/>
-          <a:p>
-            <a:pPr algn="l"/>
-            <a:r>
-              <a:rPr sz="1500" b="0" i="1">
-                <a:solidFill>
-                  <a:srgbClr val="CCCCCC"/>
-                </a:solidFill>
-              </a:rPr>
-              <a:t>    · But Non-Failure not split</a:t>
-            </a:r>
-          </a:p>
-        </p:txBody>
-      </p:sp>
-      <p:sp>
-        <p:nvSpPr>
-          <p:cNvPr id="17" name="TextBox 16"/>
-          <p:cNvSpPr txBox="1"/>
-          <p:nvPr/>
-        </p:nvSpPr>
-        <p:spPr>
-          <a:xfrm>
-            <a:off x="8275320" y="5266944"/>
-            <a:ext cx="3566160" cy="457200"/>
-          </a:xfrm>
-          <a:prstGeom prst="rect">
-            <a:avLst/>
-          </a:prstGeom>
-          <a:noFill/>
-        </p:spPr>
-        <p:txBody>
-          <a:bodyPr wrap="none">
-            <a:spAutoFit/>
-          </a:bodyPr>
-          <a:lstStyle/>
-          <a:p>
-            <a:pPr algn="l"/>
-            <a:r>
-              <a:rPr sz="1700" b="0" i="0">
-                <a:solidFill>
-                  <a:srgbClr val="FFFFFF"/>
-                </a:solidFill>
-              </a:rPr>
-              <a:t>k=3 adds richer</a:t>
-            </a:r>
-          </a:p>
-        </p:txBody>
-      </p:sp>
-      <p:sp>
-        <p:nvSpPr>
-          <p:cNvPr id="18" name="TextBox 17"/>
-          <p:cNvSpPr txBox="1"/>
-          <p:nvPr/>
-        </p:nvSpPr>
-        <p:spPr>
-          <a:xfrm>
-            <a:off x="8275320" y="5696712"/>
-            <a:ext cx="3566160" cy="457200"/>
-          </a:xfrm>
-          <a:prstGeom prst="rect">
-            <a:avLst/>
-          </a:prstGeom>
-          <a:noFill/>
-        </p:spPr>
-        <p:txBody>
-          <a:bodyPr wrap="none">
-            <a:spAutoFit/>
-          </a:bodyPr>
-          <a:lstStyle/>
-          <a:p>
-            <a:pPr algn="l"/>
-            <a:r>
-              <a:rPr sz="1700" b="0" i="0">
-                <a:solidFill>
-                  <a:srgbClr val="FFFFFF"/>
-                </a:solidFill>
-              </a:rPr>
-              <a:t>interpretation</a:t>
-            </a:r>
-          </a:p>
-        </p:txBody>
-      </p:sp>
-      <p:sp>
-        <p:nvSpPr>
-          <p:cNvPr id="19" name="Rectangle 18"/>
+              <a:t>k≥4 no improvement</a:t>
+            </a:r>
+          </a:p>
+        </p:txBody>
+      </p:sp>
+      <p:sp>
+        <p:nvSpPr>
+          <p:cNvPr id="17" name="Rectangle 16"/>
           <p:cNvSpPr/>
           <p:nvPr/>
         </p:nvSpPr>
         <p:spPr>
           <a:xfrm>
-            <a:off x="182880" y="5321808"/>
-            <a:ext cx="11795760" cy="1261872"/>
+            <a:off x="182880" y="4773168"/>
+            <a:ext cx="11795760" cy="530352"/>
           </a:xfrm>
           <a:prstGeom prst="rect">
             <a:avLst/>
@@ -8993,41 +11022,118 @@
       </p:sp>
       <p:sp>
         <p:nvSpPr>
+          <p:cNvPr id="18" name="TextBox 17"/>
+          <p:cNvSpPr txBox="1"/>
+          <p:nvPr/>
+        </p:nvSpPr>
+        <p:spPr>
+          <a:xfrm>
+            <a:off x="365760" y="4828032"/>
+            <a:ext cx="11430000" cy="420624"/>
+          </a:xfrm>
+          <a:prstGeom prst="rect">
+            <a:avLst/>
+          </a:prstGeom>
+          <a:noFill/>
+        </p:spPr>
+        <p:txBody>
+          <a:bodyPr wrap="none">
+            <a:spAutoFit/>
+          </a:bodyPr>
+          <a:lstStyle/>
+          <a:p>
+            <a:pPr algn="ctr"/>
+            <a:r>
+              <a:rPr sz="1300" b="0" i="1">
+                <a:solidFill>
+                  <a:srgbClr val="CCCCCC"/>
+                </a:solidFill>
+              </a:rPr>
+              <a:t>Low silhouette scores expected — synthetic dataset with 5 near-random features  ·  k=3 chosen for interpretability</a:t>
+            </a:r>
+          </a:p>
+        </p:txBody>
+      </p:sp>
+      <p:sp>
+        <p:nvSpPr>
+          <p:cNvPr id="19" name="Rectangle 18"/>
+          <p:cNvSpPr/>
+          <p:nvPr/>
+        </p:nvSpPr>
+        <p:spPr>
+          <a:xfrm>
+            <a:off x="2926080" y="5394960"/>
+            <a:ext cx="6309360" cy="1325880"/>
+          </a:xfrm>
+          <a:prstGeom prst="rect">
+            <a:avLst/>
+          </a:prstGeom>
+          <a:solidFill>
+            <a:srgbClr val="16213E"/>
+          </a:solidFill>
+          <a:ln>
+            <a:noFill/>
+          </a:ln>
+        </p:spPr>
+        <p:style>
+          <a:lnRef idx="1">
+            <a:schemeClr val="accent1"/>
+          </a:lnRef>
+          <a:fillRef idx="3">
+            <a:schemeClr val="accent1"/>
+          </a:fillRef>
+          <a:effectRef idx="2">
+            <a:schemeClr val="accent1"/>
+          </a:effectRef>
+          <a:fontRef idx="minor">
+            <a:schemeClr val="lt1"/>
+          </a:fontRef>
+        </p:style>
+        <p:txBody>
+          <a:bodyPr rtlCol="0" anchor="ctr"/>
+          <a:lstStyle/>
+          <a:p>
+            <a:pPr algn="ctr"/>
+          </a:p>
+        </p:txBody>
+      </p:sp>
+      <p:sp>
+        <p:nvSpPr>
           <p:cNvPr id="20" name="TextBox 19"/>
           <p:cNvSpPr txBox="1"/>
           <p:nvPr/>
         </p:nvSpPr>
         <p:spPr>
           <a:xfrm>
-            <a:off x="365760" y="5367528"/>
-            <a:ext cx="11430000" cy="411480"/>
-          </a:xfrm>
-          <a:prstGeom prst="rect">
-            <a:avLst/>
-          </a:prstGeom>
-          <a:noFill/>
-        </p:spPr>
-        <p:txBody>
-          <a:bodyPr wrap="none">
-            <a:spAutoFit/>
-          </a:bodyPr>
-          <a:lstStyle/>
-          <a:p>
-            <a:pPr algn="ctr"/>
-            <a:r>
-              <a:rPr sz="1400" b="1" i="0">
+            <a:off x="3063240" y="5440680"/>
+            <a:ext cx="6035040" cy="384048"/>
+          </a:xfrm>
+          <a:prstGeom prst="rect">
+            <a:avLst/>
+          </a:prstGeom>
+          <a:noFill/>
+        </p:spPr>
+        <p:txBody>
+          <a:bodyPr wrap="none">
+            <a:spAutoFit/>
+          </a:bodyPr>
+          <a:lstStyle/>
+          <a:p>
+            <a:pPr algn="ctr"/>
+            <a:r>
+              <a:rPr sz="1300" b="1" i="0">
                 <a:solidFill>
                   <a:srgbClr val="FFFFFF"/>
                 </a:solidFill>
               </a:rPr>
-              <a:t>k=2 clusters vs true binary outcome (Failure / Non-Failure)</a:t>
+              <a:t>K-Means k=3 — full dataset</a:t>
             </a:r>
           </a:p>
         </p:txBody>
       </p:sp>
       <p:pic>
         <p:nvPicPr>
-          <p:cNvPr id="21" name="Picture 20" descr="k2_vs_outcome.png"/>
+          <p:cNvPr id="21" name="Picture 20" descr="kmeans_k3_pca.png"/>
           <p:cNvPicPr>
             <a:picLocks noChangeAspect="1"/>
           </p:cNvPicPr>
@@ -9041,8 +11147,8 @@
         </p:blipFill>
         <p:spPr>
           <a:xfrm>
-            <a:off x="1371600" y="5440680"/>
-            <a:ext cx="9144000" cy="3897227"/>
+            <a:off x="2971800" y="5532120"/>
+            <a:ext cx="6217920" cy="4338084"/>
           </a:xfrm>
           <a:prstGeom prst="rect">
             <a:avLst/>
@@ -9090,7 +11196,7 @@
             <a:avLst/>
           </a:prstGeom>
           <a:solidFill>
-            <a:srgbClr val="2ECC71"/>
+            <a:srgbClr val="0F3C78"/>
           </a:solidFill>
           <a:ln>
             <a:noFill/>
@@ -9126,8 +11232,8 @@
         </p:nvSpPr>
         <p:spPr>
           <a:xfrm>
-            <a:off x="274320" y="109728"/>
-            <a:ext cx="11612880" cy="777240"/>
+            <a:off x="274320" y="91440"/>
+            <a:ext cx="11612880" cy="804672"/>
           </a:xfrm>
           <a:prstGeom prst="rect">
             <a:avLst/>
@@ -9142,12 +11248,12 @@
           <a:p>
             <a:pPr algn="l"/>
             <a:r>
-              <a:rPr sz="2800" b="1" i="0">
+              <a:rPr sz="2700" b="1" i="0">
                 <a:solidFill>
                   <a:srgbClr val="FFFFFF"/>
                 </a:solidFill>
               </a:rPr>
-              <a:t>Cluster Profiles — 3 Startup Archetypes</a:t>
+              <a:t>k=2 Sanity Check  —  Clusters vs True Labels</a:t>
             </a:r>
           </a:p>
         </p:txBody>
@@ -9160,8 +11266,8 @@
         </p:nvSpPr>
         <p:spPr>
           <a:xfrm>
-            <a:off x="182880" y="1005840"/>
-            <a:ext cx="11795760" cy="3291840"/>
+            <a:off x="822960" y="1024128"/>
+            <a:ext cx="10515600" cy="5074920"/>
           </a:xfrm>
           <a:prstGeom prst="rect">
             <a:avLst/>
@@ -9203,8 +11309,8 @@
         </p:nvSpPr>
         <p:spPr>
           <a:xfrm>
-            <a:off x="365760" y="1051560"/>
-            <a:ext cx="11430000" cy="411480"/>
+            <a:off x="960120" y="1069848"/>
+            <a:ext cx="10241280" cy="384048"/>
           </a:xfrm>
           <a:prstGeom prst="rect">
             <a:avLst/>
@@ -9224,14 +11330,14 @@
                   <a:srgbClr val="FFFFFF"/>
                 </a:solidFill>
               </a:rPr>
-              <a:t>Mean feature values per K-Means cluster</a:t>
+              <a:t>K-Means k=2  vs  True Binary Outcome (Failure / Non-Failure)</a:t>
             </a:r>
           </a:p>
         </p:txBody>
       </p:sp>
       <p:pic>
         <p:nvPicPr>
-          <p:cNvPr id="6" name="Picture 5" descr="cluster_profiles.png"/>
+          <p:cNvPr id="6" name="Picture 5" descr="k2_vs_outcome.png"/>
           <p:cNvPicPr>
             <a:picLocks noChangeAspect="1"/>
           </p:cNvPicPr>
@@ -9245,8 +11351,8 @@
         </p:blipFill>
         <p:spPr>
           <a:xfrm>
-            <a:off x="228600" y="1463040"/>
-            <a:ext cx="11704320" cy="4367943"/>
+            <a:off x="841248" y="1481328"/>
+            <a:ext cx="10515600" cy="4481811"/>
           </a:xfrm>
           <a:prstGeom prst="rect">
             <a:avLst/>
@@ -9261,316 +11367,8 @@
         </p:nvSpPr>
         <p:spPr>
           <a:xfrm>
-            <a:off x="228600" y="4370832"/>
-            <a:ext cx="1965960" cy="530352"/>
-          </a:xfrm>
-          <a:prstGeom prst="rect">
-            <a:avLst/>
-          </a:prstGeom>
-          <a:solidFill>
-            <a:srgbClr val="0F3C78"/>
-          </a:solidFill>
-          <a:ln>
-            <a:noFill/>
-          </a:ln>
-        </p:spPr>
-        <p:style>
-          <a:lnRef idx="1">
-            <a:schemeClr val="accent1"/>
-          </a:lnRef>
-          <a:fillRef idx="3">
-            <a:schemeClr val="accent1"/>
-          </a:fillRef>
-          <a:effectRef idx="2">
-            <a:schemeClr val="accent1"/>
-          </a:effectRef>
-          <a:fontRef idx="minor">
-            <a:schemeClr val="lt1"/>
-          </a:fontRef>
-        </p:style>
-        <p:txBody>
-          <a:bodyPr rtlCol="0" anchor="ctr"/>
-          <a:lstStyle/>
-          <a:p>
-            <a:pPr algn="ctr"/>
-          </a:p>
-        </p:txBody>
-      </p:sp>
-      <p:sp>
-        <p:nvSpPr>
-          <p:cNvPr id="8" name="TextBox 7"/>
-          <p:cNvSpPr txBox="1"/>
-          <p:nvPr/>
-        </p:nvSpPr>
-        <p:spPr>
-          <a:xfrm>
-            <a:off x="301752" y="4462272"/>
-            <a:ext cx="1874520" cy="365760"/>
-          </a:xfrm>
-          <a:prstGeom prst="rect">
-            <a:avLst/>
-          </a:prstGeom>
-          <a:noFill/>
-        </p:spPr>
-        <p:txBody>
-          <a:bodyPr wrap="none">
-            <a:spAutoFit/>
-          </a:bodyPr>
-          <a:lstStyle/>
-          <a:p>
-            <a:pPr algn="ctr"/>
-            <a:r>
-              <a:rPr sz="1300" b="1" i="0">
-                <a:solidFill>
-                  <a:srgbClr val="FFFFFF"/>
-                </a:solidFill>
-              </a:rPr>
-              <a:t>Cluster</a:t>
-            </a:r>
-          </a:p>
-        </p:txBody>
-      </p:sp>
-      <p:sp>
-        <p:nvSpPr>
-          <p:cNvPr id="9" name="Rectangle 8"/>
-          <p:cNvSpPr/>
-          <p:nvPr/>
-        </p:nvSpPr>
-        <p:spPr>
-          <a:xfrm>
-            <a:off x="2331720" y="4370832"/>
-            <a:ext cx="2468880" cy="530352"/>
-          </a:xfrm>
-          <a:prstGeom prst="rect">
-            <a:avLst/>
-          </a:prstGeom>
-          <a:solidFill>
-            <a:srgbClr val="0F3C78"/>
-          </a:solidFill>
-          <a:ln>
-            <a:noFill/>
-          </a:ln>
-        </p:spPr>
-        <p:style>
-          <a:lnRef idx="1">
-            <a:schemeClr val="accent1"/>
-          </a:lnRef>
-          <a:fillRef idx="3">
-            <a:schemeClr val="accent1"/>
-          </a:fillRef>
-          <a:effectRef idx="2">
-            <a:schemeClr val="accent1"/>
-          </a:effectRef>
-          <a:fontRef idx="minor">
-            <a:schemeClr val="lt1"/>
-          </a:fontRef>
-        </p:style>
-        <p:txBody>
-          <a:bodyPr rtlCol="0" anchor="ctr"/>
-          <a:lstStyle/>
-          <a:p>
-            <a:pPr algn="ctr"/>
-          </a:p>
-        </p:txBody>
-      </p:sp>
-      <p:sp>
-        <p:nvSpPr>
-          <p:cNvPr id="10" name="TextBox 9"/>
-          <p:cNvSpPr txBox="1"/>
-          <p:nvPr/>
-        </p:nvSpPr>
-        <p:spPr>
-          <a:xfrm>
-            <a:off x="2404872" y="4462272"/>
-            <a:ext cx="2377440" cy="365760"/>
-          </a:xfrm>
-          <a:prstGeom prst="rect">
-            <a:avLst/>
-          </a:prstGeom>
-          <a:noFill/>
-        </p:spPr>
-        <p:txBody>
-          <a:bodyPr wrap="none">
-            <a:spAutoFit/>
-          </a:bodyPr>
-          <a:lstStyle/>
-          <a:p>
-            <a:pPr algn="ctr"/>
-            <a:r>
-              <a:rPr sz="1300" b="1" i="0">
-                <a:solidFill>
-                  <a:srgbClr val="FFFFFF"/>
-                </a:solidFill>
-              </a:rPr>
-              <a:t>Revenue</a:t>
-            </a:r>
-          </a:p>
-        </p:txBody>
-      </p:sp>
-      <p:sp>
-        <p:nvSpPr>
-          <p:cNvPr id="11" name="Rectangle 10"/>
-          <p:cNvSpPr/>
-          <p:nvPr/>
-        </p:nvSpPr>
-        <p:spPr>
-          <a:xfrm>
-            <a:off x="4937760" y="4370832"/>
-            <a:ext cx="2468880" cy="530352"/>
-          </a:xfrm>
-          <a:prstGeom prst="rect">
-            <a:avLst/>
-          </a:prstGeom>
-          <a:solidFill>
-            <a:srgbClr val="0F3C78"/>
-          </a:solidFill>
-          <a:ln>
-            <a:noFill/>
-          </a:ln>
-        </p:spPr>
-        <p:style>
-          <a:lnRef idx="1">
-            <a:schemeClr val="accent1"/>
-          </a:lnRef>
-          <a:fillRef idx="3">
-            <a:schemeClr val="accent1"/>
-          </a:fillRef>
-          <a:effectRef idx="2">
-            <a:schemeClr val="accent1"/>
-          </a:effectRef>
-          <a:fontRef idx="minor">
-            <a:schemeClr val="lt1"/>
-          </a:fontRef>
-        </p:style>
-        <p:txBody>
-          <a:bodyPr rtlCol="0" anchor="ctr"/>
-          <a:lstStyle/>
-          <a:p>
-            <a:pPr algn="ctr"/>
-          </a:p>
-        </p:txBody>
-      </p:sp>
-      <p:sp>
-        <p:nvSpPr>
-          <p:cNvPr id="12" name="TextBox 11"/>
-          <p:cNvSpPr txBox="1"/>
-          <p:nvPr/>
-        </p:nvSpPr>
-        <p:spPr>
-          <a:xfrm>
-            <a:off x="5010912" y="4462272"/>
-            <a:ext cx="2377440" cy="365760"/>
-          </a:xfrm>
-          <a:prstGeom prst="rect">
-            <a:avLst/>
-          </a:prstGeom>
-          <a:noFill/>
-        </p:spPr>
-        <p:txBody>
-          <a:bodyPr wrap="none">
-            <a:spAutoFit/>
-          </a:bodyPr>
-          <a:lstStyle/>
-          <a:p>
-            <a:pPr algn="ctr"/>
-            <a:r>
-              <a:rPr sz="1300" b="1" i="0">
-                <a:solidFill>
-                  <a:srgbClr val="FFFFFF"/>
-                </a:solidFill>
-              </a:rPr>
-              <a:t>Traction</a:t>
-            </a:r>
-          </a:p>
-        </p:txBody>
-      </p:sp>
-      <p:sp>
-        <p:nvSpPr>
-          <p:cNvPr id="13" name="Rectangle 12"/>
-          <p:cNvSpPr/>
-          <p:nvPr/>
-        </p:nvSpPr>
-        <p:spPr>
-          <a:xfrm>
-            <a:off x="7543800" y="4370832"/>
-            <a:ext cx="4069080" cy="530352"/>
-          </a:xfrm>
-          <a:prstGeom prst="rect">
-            <a:avLst/>
-          </a:prstGeom>
-          <a:solidFill>
-            <a:srgbClr val="0F3C78"/>
-          </a:solidFill>
-          <a:ln>
-            <a:noFill/>
-          </a:ln>
-        </p:spPr>
-        <p:style>
-          <a:lnRef idx="1">
-            <a:schemeClr val="accent1"/>
-          </a:lnRef>
-          <a:fillRef idx="3">
-            <a:schemeClr val="accent1"/>
-          </a:fillRef>
-          <a:effectRef idx="2">
-            <a:schemeClr val="accent1"/>
-          </a:effectRef>
-          <a:fontRef idx="minor">
-            <a:schemeClr val="lt1"/>
-          </a:fontRef>
-        </p:style>
-        <p:txBody>
-          <a:bodyPr rtlCol="0" anchor="ctr"/>
-          <a:lstStyle/>
-          <a:p>
-            <a:pPr algn="ctr"/>
-          </a:p>
-        </p:txBody>
-      </p:sp>
-      <p:sp>
-        <p:nvSpPr>
-          <p:cNvPr id="14" name="TextBox 13"/>
-          <p:cNvSpPr txBox="1"/>
-          <p:nvPr/>
-        </p:nvSpPr>
-        <p:spPr>
-          <a:xfrm>
-            <a:off x="7616952" y="4462272"/>
-            <a:ext cx="3977639" cy="365760"/>
-          </a:xfrm>
-          <a:prstGeom prst="rect">
-            <a:avLst/>
-          </a:prstGeom>
-          <a:noFill/>
-        </p:spPr>
-        <p:txBody>
-          <a:bodyPr wrap="none">
-            <a:spAutoFit/>
-          </a:bodyPr>
-          <a:lstStyle/>
-          <a:p>
-            <a:pPr algn="ctr"/>
-            <a:r>
-              <a:rPr sz="1300" b="1" i="0">
-                <a:solidFill>
-                  <a:srgbClr val="FFFFFF"/>
-                </a:solidFill>
-              </a:rPr>
-              <a:t>Profile</a:t>
-            </a:r>
-          </a:p>
-        </p:txBody>
-      </p:sp>
-      <p:sp>
-        <p:nvSpPr>
-          <p:cNvPr id="15" name="Rectangle 14"/>
-          <p:cNvSpPr/>
-          <p:nvPr/>
-        </p:nvSpPr>
-        <p:spPr>
-          <a:xfrm>
-            <a:off x="228600" y="4937760"/>
-            <a:ext cx="1965960" cy="530352"/>
+            <a:off x="822960" y="5989320"/>
+            <a:ext cx="10515600" cy="658368"/>
           </a:xfrm>
           <a:prstGeom prst="rect">
             <a:avLst/>
@@ -9606,881 +11404,68 @@
       </p:sp>
       <p:sp>
         <p:nvSpPr>
-          <p:cNvPr id="16" name="TextBox 15"/>
-          <p:cNvSpPr txBox="1"/>
-          <p:nvPr/>
-        </p:nvSpPr>
-        <p:spPr>
-          <a:xfrm>
-            <a:off x="301752" y="5029200"/>
-            <a:ext cx="1874520" cy="365760"/>
-          </a:xfrm>
-          <a:prstGeom prst="rect">
-            <a:avLst/>
-          </a:prstGeom>
-          <a:noFill/>
-        </p:spPr>
-        <p:txBody>
-          <a:bodyPr wrap="none">
-            <a:spAutoFit/>
-          </a:bodyPr>
-          <a:lstStyle/>
-          <a:p>
-            <a:pPr algn="ctr"/>
-            <a:r>
-              <a:rPr sz="1300" b="0" i="0">
+          <p:cNvPr id="8" name="TextBox 7"/>
+          <p:cNvSpPr txBox="1"/>
+          <p:nvPr/>
+        </p:nvSpPr>
+        <p:spPr>
+          <a:xfrm>
+            <a:off x="960120" y="6016752"/>
+            <a:ext cx="10241280" cy="384048"/>
+          </a:xfrm>
+          <a:prstGeom prst="rect">
+            <a:avLst/>
+          </a:prstGeom>
+          <a:noFill/>
+        </p:spPr>
+        <p:txBody>
+          <a:bodyPr wrap="none">
+            <a:spAutoFit/>
+          </a:bodyPr>
+          <a:lstStyle/>
+          <a:p>
+            <a:pPr algn="ctr"/>
+            <a:r>
+              <a:rPr sz="1400" b="1" i="0">
                 <a:solidFill>
                   <a:srgbClr val="2ECC71"/>
                 </a:solidFill>
               </a:rPr>
-              <a:t>0  🟢</a:t>
-            </a:r>
-          </a:p>
-        </p:txBody>
-      </p:sp>
-      <p:sp>
-        <p:nvSpPr>
-          <p:cNvPr id="17" name="Rectangle 16"/>
-          <p:cNvSpPr/>
-          <p:nvPr/>
-        </p:nvSpPr>
-        <p:spPr>
-          <a:xfrm>
-            <a:off x="2331720" y="4937760"/>
-            <a:ext cx="2468880" cy="530352"/>
-          </a:xfrm>
-          <a:prstGeom prst="rect">
-            <a:avLst/>
-          </a:prstGeom>
-          <a:solidFill>
-            <a:srgbClr val="16213E"/>
-          </a:solidFill>
-          <a:ln>
-            <a:noFill/>
-          </a:ln>
-        </p:spPr>
-        <p:style>
-          <a:lnRef idx="1">
-            <a:schemeClr val="accent1"/>
-          </a:lnRef>
-          <a:fillRef idx="3">
-            <a:schemeClr val="accent1"/>
-          </a:fillRef>
-          <a:effectRef idx="2">
-            <a:schemeClr val="accent1"/>
-          </a:effectRef>
-          <a:fontRef idx="minor">
-            <a:schemeClr val="lt1"/>
-          </a:fontRef>
-        </p:style>
-        <p:txBody>
-          <a:bodyPr rtlCol="0" anchor="ctr"/>
-          <a:lstStyle/>
-          <a:p>
-            <a:pPr algn="ctr"/>
-          </a:p>
-        </p:txBody>
-      </p:sp>
-      <p:sp>
-        <p:nvSpPr>
-          <p:cNvPr id="18" name="TextBox 17"/>
-          <p:cNvSpPr txBox="1"/>
-          <p:nvPr/>
-        </p:nvSpPr>
-        <p:spPr>
-          <a:xfrm>
-            <a:off x="2404872" y="5029200"/>
-            <a:ext cx="2377440" cy="365760"/>
-          </a:xfrm>
-          <a:prstGeom prst="rect">
-            <a:avLst/>
-          </a:prstGeom>
-          <a:noFill/>
-        </p:spPr>
-        <p:txBody>
-          <a:bodyPr wrap="none">
-            <a:spAutoFit/>
-          </a:bodyPr>
-          <a:lstStyle/>
-          <a:p>
-            <a:pPr algn="ctr"/>
-            <a:r>
-              <a:rPr sz="1300" b="0" i="0">
+              <a:t>Cluster 1 → 79.7% Failure   ·   Cluster 0 → 75.4% Non-Failure</a:t>
+            </a:r>
+          </a:p>
+        </p:txBody>
+      </p:sp>
+      <p:sp>
+        <p:nvSpPr>
+          <p:cNvPr id="9" name="TextBox 8"/>
+          <p:cNvSpPr txBox="1"/>
+          <p:nvPr/>
+        </p:nvSpPr>
+        <p:spPr>
+          <a:xfrm>
+            <a:off x="960120" y="6373368"/>
+            <a:ext cx="10241280" cy="347472"/>
+          </a:xfrm>
+          <a:prstGeom prst="rect">
+            <a:avLst/>
+          </a:prstGeom>
+          <a:noFill/>
+        </p:spPr>
+        <p:txBody>
+          <a:bodyPr wrap="none">
+            <a:spAutoFit/>
+          </a:bodyPr>
+          <a:lstStyle/>
+          <a:p>
+            <a:pPr algn="ctr"/>
+            <a:r>
+              <a:rPr sz="1300" b="0" i="1">
                 <a:solidFill>
                   <a:srgbClr val="CCCCCC"/>
                 </a:solidFill>
               </a:rPr>
-              <a:t>High  ~1 040k</a:t>
-            </a:r>
-          </a:p>
-        </p:txBody>
-      </p:sp>
-      <p:sp>
-        <p:nvSpPr>
-          <p:cNvPr id="19" name="Rectangle 18"/>
-          <p:cNvSpPr/>
-          <p:nvPr/>
-        </p:nvSpPr>
-        <p:spPr>
-          <a:xfrm>
-            <a:off x="4937760" y="4937760"/>
-            <a:ext cx="2468880" cy="530352"/>
-          </a:xfrm>
-          <a:prstGeom prst="rect">
-            <a:avLst/>
-          </a:prstGeom>
-          <a:solidFill>
-            <a:srgbClr val="16213E"/>
-          </a:solidFill>
-          <a:ln>
-            <a:noFill/>
-          </a:ln>
-        </p:spPr>
-        <p:style>
-          <a:lnRef idx="1">
-            <a:schemeClr val="accent1"/>
-          </a:lnRef>
-          <a:fillRef idx="3">
-            <a:schemeClr val="accent1"/>
-          </a:fillRef>
-          <a:effectRef idx="2">
-            <a:schemeClr val="accent1"/>
-          </a:effectRef>
-          <a:fontRef idx="minor">
-            <a:schemeClr val="lt1"/>
-          </a:fontRef>
-        </p:style>
-        <p:txBody>
-          <a:bodyPr rtlCol="0" anchor="ctr"/>
-          <a:lstStyle/>
-          <a:p>
-            <a:pPr algn="ctr"/>
-          </a:p>
-        </p:txBody>
-      </p:sp>
-      <p:sp>
-        <p:nvSpPr>
-          <p:cNvPr id="20" name="TextBox 19"/>
-          <p:cNvSpPr txBox="1"/>
-          <p:nvPr/>
-        </p:nvSpPr>
-        <p:spPr>
-          <a:xfrm>
-            <a:off x="5010912" y="5029200"/>
-            <a:ext cx="2377440" cy="365760"/>
-          </a:xfrm>
-          <a:prstGeom prst="rect">
-            <a:avLst/>
-          </a:prstGeom>
-          <a:noFill/>
-        </p:spPr>
-        <p:txBody>
-          <a:bodyPr wrap="none">
-            <a:spAutoFit/>
-          </a:bodyPr>
-          <a:lstStyle/>
-          <a:p>
-            <a:pPr algn="ctr"/>
-            <a:r>
-              <a:rPr sz="1300" b="0" i="0">
-                <a:solidFill>
-                  <a:srgbClr val="CCCCCC"/>
-                </a:solidFill>
-              </a:rPr>
-              <a:t>High  ~360k users</a:t>
-            </a:r>
-          </a:p>
-        </p:txBody>
-      </p:sp>
-      <p:sp>
-        <p:nvSpPr>
-          <p:cNvPr id="21" name="Rectangle 20"/>
-          <p:cNvSpPr/>
-          <p:nvPr/>
-        </p:nvSpPr>
-        <p:spPr>
-          <a:xfrm>
-            <a:off x="7543800" y="4937760"/>
-            <a:ext cx="4069080" cy="530352"/>
-          </a:xfrm>
-          <a:prstGeom prst="rect">
-            <a:avLst/>
-          </a:prstGeom>
-          <a:solidFill>
-            <a:srgbClr val="16213E"/>
-          </a:solidFill>
-          <a:ln>
-            <a:noFill/>
-          </a:ln>
-        </p:spPr>
-        <p:style>
-          <a:lnRef idx="1">
-            <a:schemeClr val="accent1"/>
-          </a:lnRef>
-          <a:fillRef idx="3">
-            <a:schemeClr val="accent1"/>
-          </a:fillRef>
-          <a:effectRef idx="2">
-            <a:schemeClr val="accent1"/>
-          </a:effectRef>
-          <a:fontRef idx="minor">
-            <a:schemeClr val="lt1"/>
-          </a:fontRef>
-        </p:style>
-        <p:txBody>
-          <a:bodyPr rtlCol="0" anchor="ctr"/>
-          <a:lstStyle/>
-          <a:p>
-            <a:pPr algn="ctr"/>
-          </a:p>
-        </p:txBody>
-      </p:sp>
-      <p:sp>
-        <p:nvSpPr>
-          <p:cNvPr id="22" name="TextBox 21"/>
-          <p:cNvSpPr txBox="1"/>
-          <p:nvPr/>
-        </p:nvSpPr>
-        <p:spPr>
-          <a:xfrm>
-            <a:off x="7616952" y="5029200"/>
-            <a:ext cx="3977639" cy="365760"/>
-          </a:xfrm>
-          <a:prstGeom prst="rect">
-            <a:avLst/>
-          </a:prstGeom>
-          <a:noFill/>
-        </p:spPr>
-        <p:txBody>
-          <a:bodyPr wrap="none">
-            <a:spAutoFit/>
-          </a:bodyPr>
-          <a:lstStyle/>
-          <a:p>
-            <a:pPr algn="ctr"/>
-            <a:r>
-              <a:rPr sz="1300" b="0" i="0">
-                <a:solidFill>
-                  <a:srgbClr val="CCCCCC"/>
-                </a:solidFill>
-              </a:rPr>
-              <a:t>High-revenue, established</a:t>
-            </a:r>
-          </a:p>
-        </p:txBody>
-      </p:sp>
-      <p:sp>
-        <p:nvSpPr>
-          <p:cNvPr id="23" name="Rectangle 22"/>
-          <p:cNvSpPr/>
-          <p:nvPr/>
-        </p:nvSpPr>
-        <p:spPr>
-          <a:xfrm>
-            <a:off x="228600" y="5504688"/>
-            <a:ext cx="1965960" cy="530352"/>
-          </a:xfrm>
-          <a:prstGeom prst="rect">
-            <a:avLst/>
-          </a:prstGeom>
-          <a:solidFill>
-            <a:srgbClr val="16213E"/>
-          </a:solidFill>
-          <a:ln>
-            <a:noFill/>
-          </a:ln>
-        </p:spPr>
-        <p:style>
-          <a:lnRef idx="1">
-            <a:schemeClr val="accent1"/>
-          </a:lnRef>
-          <a:fillRef idx="3">
-            <a:schemeClr val="accent1"/>
-          </a:fillRef>
-          <a:effectRef idx="2">
-            <a:schemeClr val="accent1"/>
-          </a:effectRef>
-          <a:fontRef idx="minor">
-            <a:schemeClr val="lt1"/>
-          </a:fontRef>
-        </p:style>
-        <p:txBody>
-          <a:bodyPr rtlCol="0" anchor="ctr"/>
-          <a:lstStyle/>
-          <a:p>
-            <a:pPr algn="ctr"/>
-          </a:p>
-        </p:txBody>
-      </p:sp>
-      <p:sp>
-        <p:nvSpPr>
-          <p:cNvPr id="24" name="TextBox 23"/>
-          <p:cNvSpPr txBox="1"/>
-          <p:nvPr/>
-        </p:nvSpPr>
-        <p:spPr>
-          <a:xfrm>
-            <a:off x="301752" y="5596128"/>
-            <a:ext cx="1874520" cy="365760"/>
-          </a:xfrm>
-          <a:prstGeom prst="rect">
-            <a:avLst/>
-          </a:prstGeom>
-          <a:noFill/>
-        </p:spPr>
-        <p:txBody>
-          <a:bodyPr wrap="none">
-            <a:spAutoFit/>
-          </a:bodyPr>
-          <a:lstStyle/>
-          <a:p>
-            <a:pPr algn="ctr"/>
-            <a:r>
-              <a:rPr sz="1300" b="0" i="0">
-                <a:solidFill>
-                  <a:srgbClr val="C0392B"/>
-                </a:solidFill>
-              </a:rPr>
-              <a:t>1  🔴</a:t>
-            </a:r>
-          </a:p>
-        </p:txBody>
-      </p:sp>
-      <p:sp>
-        <p:nvSpPr>
-          <p:cNvPr id="25" name="Rectangle 24"/>
-          <p:cNvSpPr/>
-          <p:nvPr/>
-        </p:nvSpPr>
-        <p:spPr>
-          <a:xfrm>
-            <a:off x="2331720" y="5504688"/>
-            <a:ext cx="2468880" cy="530352"/>
-          </a:xfrm>
-          <a:prstGeom prst="rect">
-            <a:avLst/>
-          </a:prstGeom>
-          <a:solidFill>
-            <a:srgbClr val="16213E"/>
-          </a:solidFill>
-          <a:ln>
-            <a:noFill/>
-          </a:ln>
-        </p:spPr>
-        <p:style>
-          <a:lnRef idx="1">
-            <a:schemeClr val="accent1"/>
-          </a:lnRef>
-          <a:fillRef idx="3">
-            <a:schemeClr val="accent1"/>
-          </a:fillRef>
-          <a:effectRef idx="2">
-            <a:schemeClr val="accent1"/>
-          </a:effectRef>
-          <a:fontRef idx="minor">
-            <a:schemeClr val="lt1"/>
-          </a:fontRef>
-        </p:style>
-        <p:txBody>
-          <a:bodyPr rtlCol="0" anchor="ctr"/>
-          <a:lstStyle/>
-          <a:p>
-            <a:pPr algn="ctr"/>
-          </a:p>
-        </p:txBody>
-      </p:sp>
-      <p:sp>
-        <p:nvSpPr>
-          <p:cNvPr id="26" name="TextBox 25"/>
-          <p:cNvSpPr txBox="1"/>
-          <p:nvPr/>
-        </p:nvSpPr>
-        <p:spPr>
-          <a:xfrm>
-            <a:off x="2404872" y="5596128"/>
-            <a:ext cx="2377440" cy="365760"/>
-          </a:xfrm>
-          <a:prstGeom prst="rect">
-            <a:avLst/>
-          </a:prstGeom>
-          <a:noFill/>
-        </p:spPr>
-        <p:txBody>
-          <a:bodyPr wrap="none">
-            <a:spAutoFit/>
-          </a:bodyPr>
-          <a:lstStyle/>
-          <a:p>
-            <a:pPr algn="ctr"/>
-            <a:r>
-              <a:rPr sz="1300" b="0" i="0">
-                <a:solidFill>
-                  <a:srgbClr val="CCCCCC"/>
-                </a:solidFill>
-              </a:rPr>
-              <a:t>Low    ~120k</a:t>
-            </a:r>
-          </a:p>
-        </p:txBody>
-      </p:sp>
-      <p:sp>
-        <p:nvSpPr>
-          <p:cNvPr id="27" name="Rectangle 26"/>
-          <p:cNvSpPr/>
-          <p:nvPr/>
-        </p:nvSpPr>
-        <p:spPr>
-          <a:xfrm>
-            <a:off x="4937760" y="5504688"/>
-            <a:ext cx="2468880" cy="530352"/>
-          </a:xfrm>
-          <a:prstGeom prst="rect">
-            <a:avLst/>
-          </a:prstGeom>
-          <a:solidFill>
-            <a:srgbClr val="16213E"/>
-          </a:solidFill>
-          <a:ln>
-            <a:noFill/>
-          </a:ln>
-        </p:spPr>
-        <p:style>
-          <a:lnRef idx="1">
-            <a:schemeClr val="accent1"/>
-          </a:lnRef>
-          <a:fillRef idx="3">
-            <a:schemeClr val="accent1"/>
-          </a:fillRef>
-          <a:effectRef idx="2">
-            <a:schemeClr val="accent1"/>
-          </a:effectRef>
-          <a:fontRef idx="minor">
-            <a:schemeClr val="lt1"/>
-          </a:fontRef>
-        </p:style>
-        <p:txBody>
-          <a:bodyPr rtlCol="0" anchor="ctr"/>
-          <a:lstStyle/>
-          <a:p>
-            <a:pPr algn="ctr"/>
-          </a:p>
-        </p:txBody>
-      </p:sp>
-      <p:sp>
-        <p:nvSpPr>
-          <p:cNvPr id="28" name="TextBox 27"/>
-          <p:cNvSpPr txBox="1"/>
-          <p:nvPr/>
-        </p:nvSpPr>
-        <p:spPr>
-          <a:xfrm>
-            <a:off x="5010912" y="5596128"/>
-            <a:ext cx="2377440" cy="365760"/>
-          </a:xfrm>
-          <a:prstGeom prst="rect">
-            <a:avLst/>
-          </a:prstGeom>
-          <a:noFill/>
-        </p:spPr>
-        <p:txBody>
-          <a:bodyPr wrap="none">
-            <a:spAutoFit/>
-          </a:bodyPr>
-          <a:lstStyle/>
-          <a:p>
-            <a:pPr algn="ctr"/>
-            <a:r>
-              <a:rPr sz="1300" b="0" i="0">
-                <a:solidFill>
-                  <a:srgbClr val="CCCCCC"/>
-                </a:solidFill>
-              </a:rPr>
-              <a:t>Low   ~115k users</a:t>
-            </a:r>
-          </a:p>
-        </p:txBody>
-      </p:sp>
-      <p:sp>
-        <p:nvSpPr>
-          <p:cNvPr id="29" name="Rectangle 28"/>
-          <p:cNvSpPr/>
-          <p:nvPr/>
-        </p:nvSpPr>
-        <p:spPr>
-          <a:xfrm>
-            <a:off x="7543800" y="5504688"/>
-            <a:ext cx="4069080" cy="530352"/>
-          </a:xfrm>
-          <a:prstGeom prst="rect">
-            <a:avLst/>
-          </a:prstGeom>
-          <a:solidFill>
-            <a:srgbClr val="16213E"/>
-          </a:solidFill>
-          <a:ln>
-            <a:noFill/>
-          </a:ln>
-        </p:spPr>
-        <p:style>
-          <a:lnRef idx="1">
-            <a:schemeClr val="accent1"/>
-          </a:lnRef>
-          <a:fillRef idx="3">
-            <a:schemeClr val="accent1"/>
-          </a:fillRef>
-          <a:effectRef idx="2">
-            <a:schemeClr val="accent1"/>
-          </a:effectRef>
-          <a:fontRef idx="minor">
-            <a:schemeClr val="lt1"/>
-          </a:fontRef>
-        </p:style>
-        <p:txBody>
-          <a:bodyPr rtlCol="0" anchor="ctr"/>
-          <a:lstStyle/>
-          <a:p>
-            <a:pPr algn="ctr"/>
-          </a:p>
-        </p:txBody>
-      </p:sp>
-      <p:sp>
-        <p:nvSpPr>
-          <p:cNvPr id="30" name="TextBox 29"/>
-          <p:cNvSpPr txBox="1"/>
-          <p:nvPr/>
-        </p:nvSpPr>
-        <p:spPr>
-          <a:xfrm>
-            <a:off x="7616952" y="5596128"/>
-            <a:ext cx="3977639" cy="365760"/>
-          </a:xfrm>
-          <a:prstGeom prst="rect">
-            <a:avLst/>
-          </a:prstGeom>
-          <a:noFill/>
-        </p:spPr>
-        <p:txBody>
-          <a:bodyPr wrap="none">
-            <a:spAutoFit/>
-          </a:bodyPr>
-          <a:lstStyle/>
-          <a:p>
-            <a:pPr algn="ctr"/>
-            <a:r>
-              <a:rPr sz="1300" b="0" i="0">
-                <a:solidFill>
-                  <a:srgbClr val="CCCCCC"/>
-                </a:solidFill>
-              </a:rPr>
-              <a:t>Low-traction, struggling</a:t>
-            </a:r>
-          </a:p>
-        </p:txBody>
-      </p:sp>
-      <p:sp>
-        <p:nvSpPr>
-          <p:cNvPr id="31" name="Rectangle 30"/>
-          <p:cNvSpPr/>
-          <p:nvPr/>
-        </p:nvSpPr>
-        <p:spPr>
-          <a:xfrm>
-            <a:off x="228600" y="6071616"/>
-            <a:ext cx="1965960" cy="530352"/>
-          </a:xfrm>
-          <a:prstGeom prst="rect">
-            <a:avLst/>
-          </a:prstGeom>
-          <a:solidFill>
-            <a:srgbClr val="16213E"/>
-          </a:solidFill>
-          <a:ln>
-            <a:noFill/>
-          </a:ln>
-        </p:spPr>
-        <p:style>
-          <a:lnRef idx="1">
-            <a:schemeClr val="accent1"/>
-          </a:lnRef>
-          <a:fillRef idx="3">
-            <a:schemeClr val="accent1"/>
-          </a:fillRef>
-          <a:effectRef idx="2">
-            <a:schemeClr val="accent1"/>
-          </a:effectRef>
-          <a:fontRef idx="minor">
-            <a:schemeClr val="lt1"/>
-          </a:fontRef>
-        </p:style>
-        <p:txBody>
-          <a:bodyPr rtlCol="0" anchor="ctr"/>
-          <a:lstStyle/>
-          <a:p>
-            <a:pPr algn="ctr"/>
-          </a:p>
-        </p:txBody>
-      </p:sp>
-      <p:sp>
-        <p:nvSpPr>
-          <p:cNvPr id="32" name="TextBox 31"/>
-          <p:cNvSpPr txBox="1"/>
-          <p:nvPr/>
-        </p:nvSpPr>
-        <p:spPr>
-          <a:xfrm>
-            <a:off x="301752" y="6163056"/>
-            <a:ext cx="1874520" cy="365760"/>
-          </a:xfrm>
-          <a:prstGeom prst="rect">
-            <a:avLst/>
-          </a:prstGeom>
-          <a:noFill/>
-        </p:spPr>
-        <p:txBody>
-          <a:bodyPr wrap="none">
-            <a:spAutoFit/>
-          </a:bodyPr>
-          <a:lstStyle/>
-          <a:p>
-            <a:pPr algn="ctr"/>
-            <a:r>
-              <a:rPr sz="1300" b="0" i="0">
-                <a:solidFill>
-                  <a:srgbClr val="3498DB"/>
-                </a:solidFill>
-              </a:rPr>
-              <a:t>2  🔵</a:t>
-            </a:r>
-          </a:p>
-        </p:txBody>
-      </p:sp>
-      <p:sp>
-        <p:nvSpPr>
-          <p:cNvPr id="33" name="Rectangle 32"/>
-          <p:cNvSpPr/>
-          <p:nvPr/>
-        </p:nvSpPr>
-        <p:spPr>
-          <a:xfrm>
-            <a:off x="2331720" y="6071616"/>
-            <a:ext cx="2468880" cy="530352"/>
-          </a:xfrm>
-          <a:prstGeom prst="rect">
-            <a:avLst/>
-          </a:prstGeom>
-          <a:solidFill>
-            <a:srgbClr val="16213E"/>
-          </a:solidFill>
-          <a:ln>
-            <a:noFill/>
-          </a:ln>
-        </p:spPr>
-        <p:style>
-          <a:lnRef idx="1">
-            <a:schemeClr val="accent1"/>
-          </a:lnRef>
-          <a:fillRef idx="3">
-            <a:schemeClr val="accent1"/>
-          </a:fillRef>
-          <a:effectRef idx="2">
-            <a:schemeClr val="accent1"/>
-          </a:effectRef>
-          <a:fontRef idx="minor">
-            <a:schemeClr val="lt1"/>
-          </a:fontRef>
-        </p:style>
-        <p:txBody>
-          <a:bodyPr rtlCol="0" anchor="ctr"/>
-          <a:lstStyle/>
-          <a:p>
-            <a:pPr algn="ctr"/>
-          </a:p>
-        </p:txBody>
-      </p:sp>
-      <p:sp>
-        <p:nvSpPr>
-          <p:cNvPr id="34" name="TextBox 33"/>
-          <p:cNvSpPr txBox="1"/>
-          <p:nvPr/>
-        </p:nvSpPr>
-        <p:spPr>
-          <a:xfrm>
-            <a:off x="2404872" y="6163056"/>
-            <a:ext cx="2377440" cy="365760"/>
-          </a:xfrm>
-          <a:prstGeom prst="rect">
-            <a:avLst/>
-          </a:prstGeom>
-          <a:noFill/>
-        </p:spPr>
-        <p:txBody>
-          <a:bodyPr wrap="none">
-            <a:spAutoFit/>
-          </a:bodyPr>
-          <a:lstStyle/>
-          <a:p>
-            <a:pPr algn="ctr"/>
-            <a:r>
-              <a:rPr sz="1300" b="0" i="0">
-                <a:solidFill>
-                  <a:srgbClr val="CCCCCC"/>
-                </a:solidFill>
-              </a:rPr>
-              <a:t>Mid   ~850k</a:t>
-            </a:r>
-          </a:p>
-        </p:txBody>
-      </p:sp>
-      <p:sp>
-        <p:nvSpPr>
-          <p:cNvPr id="35" name="Rectangle 34"/>
-          <p:cNvSpPr/>
-          <p:nvPr/>
-        </p:nvSpPr>
-        <p:spPr>
-          <a:xfrm>
-            <a:off x="4937760" y="6071616"/>
-            <a:ext cx="2468880" cy="530352"/>
-          </a:xfrm>
-          <a:prstGeom prst="rect">
-            <a:avLst/>
-          </a:prstGeom>
-          <a:solidFill>
-            <a:srgbClr val="16213E"/>
-          </a:solidFill>
-          <a:ln>
-            <a:noFill/>
-          </a:ln>
-        </p:spPr>
-        <p:style>
-          <a:lnRef idx="1">
-            <a:schemeClr val="accent1"/>
-          </a:lnRef>
-          <a:fillRef idx="3">
-            <a:schemeClr val="accent1"/>
-          </a:fillRef>
-          <a:effectRef idx="2">
-            <a:schemeClr val="accent1"/>
-          </a:effectRef>
-          <a:fontRef idx="minor">
-            <a:schemeClr val="lt1"/>
-          </a:fontRef>
-        </p:style>
-        <p:txBody>
-          <a:bodyPr rtlCol="0" anchor="ctr"/>
-          <a:lstStyle/>
-          <a:p>
-            <a:pPr algn="ctr"/>
-          </a:p>
-        </p:txBody>
-      </p:sp>
-      <p:sp>
-        <p:nvSpPr>
-          <p:cNvPr id="36" name="TextBox 35"/>
-          <p:cNvSpPr txBox="1"/>
-          <p:nvPr/>
-        </p:nvSpPr>
-        <p:spPr>
-          <a:xfrm>
-            <a:off x="5010912" y="6163056"/>
-            <a:ext cx="2377440" cy="365760"/>
-          </a:xfrm>
-          <a:prstGeom prst="rect">
-            <a:avLst/>
-          </a:prstGeom>
-          <a:noFill/>
-        </p:spPr>
-        <p:txBody>
-          <a:bodyPr wrap="none">
-            <a:spAutoFit/>
-          </a:bodyPr>
-          <a:lstStyle/>
-          <a:p>
-            <a:pPr algn="ctr"/>
-            <a:r>
-              <a:rPr sz="1300" b="0" i="0">
-                <a:solidFill>
-                  <a:srgbClr val="CCCCCC"/>
-                </a:solidFill>
-              </a:rPr>
-              <a:t>Mid   ~305k users</a:t>
-            </a:r>
-          </a:p>
-        </p:txBody>
-      </p:sp>
-      <p:sp>
-        <p:nvSpPr>
-          <p:cNvPr id="37" name="Rectangle 36"/>
-          <p:cNvSpPr/>
-          <p:nvPr/>
-        </p:nvSpPr>
-        <p:spPr>
-          <a:xfrm>
-            <a:off x="7543800" y="6071616"/>
-            <a:ext cx="4069080" cy="530352"/>
-          </a:xfrm>
-          <a:prstGeom prst="rect">
-            <a:avLst/>
-          </a:prstGeom>
-          <a:solidFill>
-            <a:srgbClr val="16213E"/>
-          </a:solidFill>
-          <a:ln>
-            <a:noFill/>
-          </a:ln>
-        </p:spPr>
-        <p:style>
-          <a:lnRef idx="1">
-            <a:schemeClr val="accent1"/>
-          </a:lnRef>
-          <a:fillRef idx="3">
-            <a:schemeClr val="accent1"/>
-          </a:fillRef>
-          <a:effectRef idx="2">
-            <a:schemeClr val="accent1"/>
-          </a:effectRef>
-          <a:fontRef idx="minor">
-            <a:schemeClr val="lt1"/>
-          </a:fontRef>
-        </p:style>
-        <p:txBody>
-          <a:bodyPr rtlCol="0" anchor="ctr"/>
-          <a:lstStyle/>
-          <a:p>
-            <a:pPr algn="ctr"/>
-          </a:p>
-        </p:txBody>
-      </p:sp>
-      <p:sp>
-        <p:nvSpPr>
-          <p:cNvPr id="38" name="TextBox 37"/>
-          <p:cNvSpPr txBox="1"/>
-          <p:nvPr/>
-        </p:nvSpPr>
-        <p:spPr>
-          <a:xfrm>
-            <a:off x="7616952" y="6163056"/>
-            <a:ext cx="3977639" cy="365760"/>
-          </a:xfrm>
-          <a:prstGeom prst="rect">
-            <a:avLst/>
-          </a:prstGeom>
-          <a:noFill/>
-        </p:spPr>
-        <p:txBody>
-          <a:bodyPr wrap="none">
-            <a:spAutoFit/>
-          </a:bodyPr>
-          <a:lstStyle/>
-          <a:p>
-            <a:pPr algn="ctr"/>
-            <a:r>
-              <a:rPr sz="1300" b="0" i="0">
-                <a:solidFill>
-                  <a:srgbClr val="CCCCCC"/>
-                </a:solidFill>
-              </a:rPr>
-              <a:t>Mid-revenue, early-stage</a:t>
+              <a:t>Partial alignment — 2nd dimension of variation inside Non-Failure → justifies k=3</a:t>
             </a:r>
           </a:p>
         </p:txBody>
